--- a/docs/Презентация_защита_EventMind.pptx
+++ b/docs/Презентация_защита_EventMind.pptx
@@ -14678,8 +14678,8 @@
         </p:nvSpPr>
         <p:spPr>
           <a:xfrm>
-            <a:off x="502920" y="164592"/>
-            <a:ext cx="3291840" cy="502920"/>
+            <a:off x="987552" y="246888"/>
+            <a:ext cx="2743200" cy="502920"/>
           </a:xfrm>
           <a:prstGeom prst="rect">
             <a:avLst/>
@@ -14687,7 +14687,7 @@
           <a:noFill/>
         </p:spPr>
         <p:txBody>
-          <a:bodyPr wrap="square">
+          <a:bodyPr wrap="square" anchor="ctr">
             <a:spAutoFit/>
           </a:bodyPr>
           <a:lstStyle/>
@@ -14712,8 +14712,8 @@
         </p:nvSpPr>
         <p:spPr>
           <a:xfrm>
-            <a:off x="4297680" y="164592"/>
-            <a:ext cx="1371600" cy="502920"/>
+            <a:off x="3840480" y="246888"/>
+            <a:ext cx="2011680" cy="502920"/>
           </a:xfrm>
           <a:prstGeom prst="rect">
             <a:avLst/>
@@ -14721,7 +14721,7 @@
           <a:noFill/>
         </p:spPr>
         <p:txBody>
-          <a:bodyPr wrap="square">
+          <a:bodyPr wrap="square" anchor="ctr">
             <a:spAutoFit/>
           </a:bodyPr>
           <a:lstStyle/>
@@ -14746,8 +14746,53 @@
         </p:nvSpPr>
         <p:spPr>
           <a:xfrm>
-            <a:off x="9692640" y="164592"/>
-            <a:ext cx="2194560" cy="548640"/>
+            <a:off x="6821424" y="246888"/>
+            <a:ext cx="1828800" cy="548640"/>
+          </a:xfrm>
+          <a:prstGeom prst="rect">
+            <a:avLst/>
+          </a:prstGeom>
+          <a:noFill/>
+        </p:spPr>
+        <p:txBody>
+          <a:bodyPr wrap="square" anchor="ctr">
+            <a:spAutoFit/>
+          </a:bodyPr>
+          <a:lstStyle/>
+          <a:p>
+            <a:r>
+              <a:rPr sz="1050" b="1">
+                <a:solidFill>
+                  <a:srgbClr val="0F2C68"/>
+                </a:solidFill>
+                <a:latin typeface="HSE Sans"/>
+              </a:rPr>
+              <a:t>Защита курсовой</a:t>
+            </a:r>
+          </a:p>
+          <a:p>
+            <a:r>
+              <a:rPr sz="1050">
+                <a:solidFill>
+                  <a:srgbClr val="595959"/>
+                </a:solidFill>
+                <a:latin typeface="HSE Sans"/>
+              </a:rPr>
+              <a:t>Пермь, 2026</a:t>
+            </a:r>
+          </a:p>
+        </p:txBody>
+      </p:sp>
+      <p:sp>
+        <p:nvSpPr>
+          <p:cNvPr id="5" name="TextBox 4"/>
+          <p:cNvSpPr txBox="1"/>
+          <p:nvPr/>
+        </p:nvSpPr>
+        <p:spPr>
+          <a:xfrm>
+            <a:off x="457200" y="932688"/>
+            <a:ext cx="11247120" cy="731520"/>
           </a:xfrm>
           <a:prstGeom prst="rect">
             <a:avLst/>
@@ -14760,88 +14805,6 @@
           </a:bodyPr>
           <a:lstStyle/>
           <a:p>
-            <a:pPr algn="r"/>
-            <a:r>
-              <a:rPr sz="1050" b="1">
-                <a:solidFill>
-                  <a:srgbClr val="0F2C68"/>
-                </a:solidFill>
-                <a:latin typeface="HSE Sans"/>
-              </a:rPr>
-              <a:t>Защита курсовой</a:t>
-            </a:r>
-          </a:p>
-          <a:p>
-            <a:pPr algn="r"/>
-            <a:r>
-              <a:rPr sz="1050">
-                <a:solidFill>
-                  <a:srgbClr val="595959"/>
-                </a:solidFill>
-                <a:latin typeface="HSE Sans"/>
-              </a:rPr>
-              <a:t>Пермь, 2026</a:t>
-            </a:r>
-          </a:p>
-        </p:txBody>
-      </p:sp>
-      <p:cxnSp>
-        <p:nvCxnSpPr>
-          <p:cNvPr id="5" name="Connector 4"/>
-          <p:cNvCxnSpPr/>
-          <p:nvPr/>
-        </p:nvCxnSpPr>
-        <p:spPr>
-          <a:xfrm>
-            <a:off x="502920" y="749808"/>
-            <a:ext cx="11183112" cy="0"/>
-          </a:xfrm>
-          <a:prstGeom prst="bentConnector3">
-            <a:avLst/>
-          </a:prstGeom>
-          <a:ln w="12700">
-            <a:solidFill>
-              <a:srgbClr val="0F2C68"/>
-            </a:solidFill>
-          </a:ln>
-        </p:spPr>
-        <p:style>
-          <a:lnRef idx="2">
-            <a:schemeClr val="accent1"/>
-          </a:lnRef>
-          <a:fillRef idx="0">
-            <a:schemeClr val="accent1"/>
-          </a:fillRef>
-          <a:effectRef idx="1">
-            <a:schemeClr val="accent1"/>
-          </a:effectRef>
-          <a:fontRef idx="minor">
-            <a:schemeClr val="tx1"/>
-          </a:fontRef>
-        </p:style>
-      </p:cxnSp>
-      <p:sp>
-        <p:nvSpPr>
-          <p:cNvPr id="6" name="TextBox 5"/>
-          <p:cNvSpPr txBox="1"/>
-          <p:nvPr/>
-        </p:nvSpPr>
-        <p:spPr>
-          <a:xfrm>
-            <a:off x="502920" y="868680"/>
-            <a:ext cx="11155680" cy="731520"/>
-          </a:xfrm>
-          <a:prstGeom prst="rect">
-            <a:avLst/>
-          </a:prstGeom>
-          <a:noFill/>
-        </p:spPr>
-        <p:txBody>
-          <a:bodyPr wrap="square">
-            <a:spAutoFit/>
-          </a:bodyPr>
-          <a:lstStyle/>
-          <a:p>
             <a:r>
               <a:rPr sz="3200" b="1">
                 <a:solidFill>
@@ -14856,7 +14819,7 @@
       </p:sp>
       <p:pic>
         <p:nvPicPr>
-          <p:cNvPr id="7" name="Picture 6" descr="04_er_diagram.png"/>
+          <p:cNvPr id="6" name="Picture 5" descr="04_er_diagram.png"/>
           <p:cNvPicPr>
             <a:picLocks noChangeAspect="1"/>
           </p:cNvPicPr>
@@ -14880,7 +14843,7 @@
       </p:pic>
       <p:sp>
         <p:nvSpPr>
-          <p:cNvPr id="8" name="TextBox 7"/>
+          <p:cNvPr id="7" name="TextBox 6"/>
           <p:cNvSpPr txBox="1"/>
           <p:nvPr/>
         </p:nvSpPr>
@@ -14939,8 +14902,8 @@
         </p:nvSpPr>
         <p:spPr>
           <a:xfrm>
-            <a:off x="502920" y="164592"/>
-            <a:ext cx="3291840" cy="502920"/>
+            <a:off x="987552" y="246888"/>
+            <a:ext cx="2743200" cy="502920"/>
           </a:xfrm>
           <a:prstGeom prst="rect">
             <a:avLst/>
@@ -14948,7 +14911,7 @@
           <a:noFill/>
         </p:spPr>
         <p:txBody>
-          <a:bodyPr wrap="square">
+          <a:bodyPr wrap="square" anchor="ctr">
             <a:spAutoFit/>
           </a:bodyPr>
           <a:lstStyle/>
@@ -14973,8 +14936,8 @@
         </p:nvSpPr>
         <p:spPr>
           <a:xfrm>
-            <a:off x="4297680" y="164592"/>
-            <a:ext cx="1371600" cy="502920"/>
+            <a:off x="3840480" y="246888"/>
+            <a:ext cx="2011680" cy="502920"/>
           </a:xfrm>
           <a:prstGeom prst="rect">
             <a:avLst/>
@@ -14982,7 +14945,7 @@
           <a:noFill/>
         </p:spPr>
         <p:txBody>
-          <a:bodyPr wrap="square">
+          <a:bodyPr wrap="square" anchor="ctr">
             <a:spAutoFit/>
           </a:bodyPr>
           <a:lstStyle/>
@@ -15007,8 +14970,53 @@
         </p:nvSpPr>
         <p:spPr>
           <a:xfrm>
-            <a:off x="9692640" y="164592"/>
-            <a:ext cx="2194560" cy="548640"/>
+            <a:off x="6821424" y="246888"/>
+            <a:ext cx="1828800" cy="548640"/>
+          </a:xfrm>
+          <a:prstGeom prst="rect">
+            <a:avLst/>
+          </a:prstGeom>
+          <a:noFill/>
+        </p:spPr>
+        <p:txBody>
+          <a:bodyPr wrap="square" anchor="ctr">
+            <a:spAutoFit/>
+          </a:bodyPr>
+          <a:lstStyle/>
+          <a:p>
+            <a:r>
+              <a:rPr sz="1050" b="1">
+                <a:solidFill>
+                  <a:srgbClr val="0F2C68"/>
+                </a:solidFill>
+                <a:latin typeface="HSE Sans"/>
+              </a:rPr>
+              <a:t>Защита курсовой</a:t>
+            </a:r>
+          </a:p>
+          <a:p>
+            <a:r>
+              <a:rPr sz="1050">
+                <a:solidFill>
+                  <a:srgbClr val="595959"/>
+                </a:solidFill>
+                <a:latin typeface="HSE Sans"/>
+              </a:rPr>
+              <a:t>Пермь, 2026</a:t>
+            </a:r>
+          </a:p>
+        </p:txBody>
+      </p:sp>
+      <p:sp>
+        <p:nvSpPr>
+          <p:cNvPr id="5" name="TextBox 4"/>
+          <p:cNvSpPr txBox="1"/>
+          <p:nvPr/>
+        </p:nvSpPr>
+        <p:spPr>
+          <a:xfrm>
+            <a:off x="457200" y="932688"/>
+            <a:ext cx="11247120" cy="731520"/>
           </a:xfrm>
           <a:prstGeom prst="rect">
             <a:avLst/>
@@ -15021,88 +15029,6 @@
           </a:bodyPr>
           <a:lstStyle/>
           <a:p>
-            <a:pPr algn="r"/>
-            <a:r>
-              <a:rPr sz="1050" b="1">
-                <a:solidFill>
-                  <a:srgbClr val="0F2C68"/>
-                </a:solidFill>
-                <a:latin typeface="HSE Sans"/>
-              </a:rPr>
-              <a:t>Защита курсовой</a:t>
-            </a:r>
-          </a:p>
-          <a:p>
-            <a:pPr algn="r"/>
-            <a:r>
-              <a:rPr sz="1050">
-                <a:solidFill>
-                  <a:srgbClr val="595959"/>
-                </a:solidFill>
-                <a:latin typeface="HSE Sans"/>
-              </a:rPr>
-              <a:t>Пермь, 2026</a:t>
-            </a:r>
-          </a:p>
-        </p:txBody>
-      </p:sp>
-      <p:cxnSp>
-        <p:nvCxnSpPr>
-          <p:cNvPr id="5" name="Connector 4"/>
-          <p:cNvCxnSpPr/>
-          <p:nvPr/>
-        </p:nvCxnSpPr>
-        <p:spPr>
-          <a:xfrm>
-            <a:off x="502920" y="749808"/>
-            <a:ext cx="11183112" cy="0"/>
-          </a:xfrm>
-          <a:prstGeom prst="bentConnector3">
-            <a:avLst/>
-          </a:prstGeom>
-          <a:ln w="12700">
-            <a:solidFill>
-              <a:srgbClr val="0F2C68"/>
-            </a:solidFill>
-          </a:ln>
-        </p:spPr>
-        <p:style>
-          <a:lnRef idx="2">
-            <a:schemeClr val="accent1"/>
-          </a:lnRef>
-          <a:fillRef idx="0">
-            <a:schemeClr val="accent1"/>
-          </a:fillRef>
-          <a:effectRef idx="1">
-            <a:schemeClr val="accent1"/>
-          </a:effectRef>
-          <a:fontRef idx="minor">
-            <a:schemeClr val="tx1"/>
-          </a:fontRef>
-        </p:style>
-      </p:cxnSp>
-      <p:sp>
-        <p:nvSpPr>
-          <p:cNvPr id="6" name="TextBox 5"/>
-          <p:cNvSpPr txBox="1"/>
-          <p:nvPr/>
-        </p:nvSpPr>
-        <p:spPr>
-          <a:xfrm>
-            <a:off x="502920" y="868680"/>
-            <a:ext cx="11155680" cy="731520"/>
-          </a:xfrm>
-          <a:prstGeom prst="rect">
-            <a:avLst/>
-          </a:prstGeom>
-          <a:noFill/>
-        </p:spPr>
-        <p:txBody>
-          <a:bodyPr wrap="square">
-            <a:spAutoFit/>
-          </a:bodyPr>
-          <a:lstStyle/>
-          <a:p>
             <a:r>
               <a:rPr sz="3200" b="1">
                 <a:solidFill>
@@ -15117,7 +15043,7 @@
       </p:sp>
       <p:graphicFrame>
         <p:nvGraphicFramePr>
-          <p:cNvPr id="7" name="Table 6"/>
+          <p:cNvPr id="6" name="Table 5"/>
           <p:cNvGraphicFramePr>
             <a:graphicFrameLocks noGrp="1"/>
           </p:cNvGraphicFramePr>
@@ -15848,8 +15774,8 @@
         </p:nvSpPr>
         <p:spPr>
           <a:xfrm>
-            <a:off x="502920" y="164592"/>
-            <a:ext cx="3291840" cy="502920"/>
+            <a:off x="987552" y="246888"/>
+            <a:ext cx="2743200" cy="502920"/>
           </a:xfrm>
           <a:prstGeom prst="rect">
             <a:avLst/>
@@ -15857,7 +15783,7 @@
           <a:noFill/>
         </p:spPr>
         <p:txBody>
-          <a:bodyPr wrap="square">
+          <a:bodyPr wrap="square" anchor="ctr">
             <a:spAutoFit/>
           </a:bodyPr>
           <a:lstStyle/>
@@ -15882,8 +15808,8 @@
         </p:nvSpPr>
         <p:spPr>
           <a:xfrm>
-            <a:off x="4297680" y="164592"/>
-            <a:ext cx="1371600" cy="502920"/>
+            <a:off x="3840480" y="246888"/>
+            <a:ext cx="2011680" cy="502920"/>
           </a:xfrm>
           <a:prstGeom prst="rect">
             <a:avLst/>
@@ -15891,7 +15817,7 @@
           <a:noFill/>
         </p:spPr>
         <p:txBody>
-          <a:bodyPr wrap="square">
+          <a:bodyPr wrap="square" anchor="ctr">
             <a:spAutoFit/>
           </a:bodyPr>
           <a:lstStyle/>
@@ -15916,8 +15842,53 @@
         </p:nvSpPr>
         <p:spPr>
           <a:xfrm>
-            <a:off x="9692640" y="164592"/>
-            <a:ext cx="2194560" cy="548640"/>
+            <a:off x="6821424" y="246888"/>
+            <a:ext cx="1828800" cy="548640"/>
+          </a:xfrm>
+          <a:prstGeom prst="rect">
+            <a:avLst/>
+          </a:prstGeom>
+          <a:noFill/>
+        </p:spPr>
+        <p:txBody>
+          <a:bodyPr wrap="square" anchor="ctr">
+            <a:spAutoFit/>
+          </a:bodyPr>
+          <a:lstStyle/>
+          <a:p>
+            <a:r>
+              <a:rPr sz="1050" b="1">
+                <a:solidFill>
+                  <a:srgbClr val="0F2C68"/>
+                </a:solidFill>
+                <a:latin typeface="HSE Sans"/>
+              </a:rPr>
+              <a:t>Защита курсовой</a:t>
+            </a:r>
+          </a:p>
+          <a:p>
+            <a:r>
+              <a:rPr sz="1050">
+                <a:solidFill>
+                  <a:srgbClr val="595959"/>
+                </a:solidFill>
+                <a:latin typeface="HSE Sans"/>
+              </a:rPr>
+              <a:t>Пермь, 2026</a:t>
+            </a:r>
+          </a:p>
+        </p:txBody>
+      </p:sp>
+      <p:sp>
+        <p:nvSpPr>
+          <p:cNvPr id="5" name="TextBox 4"/>
+          <p:cNvSpPr txBox="1"/>
+          <p:nvPr/>
+        </p:nvSpPr>
+        <p:spPr>
+          <a:xfrm>
+            <a:off x="457200" y="932688"/>
+            <a:ext cx="11247120" cy="731520"/>
           </a:xfrm>
           <a:prstGeom prst="rect">
             <a:avLst/>
@@ -15930,88 +15901,6 @@
           </a:bodyPr>
           <a:lstStyle/>
           <a:p>
-            <a:pPr algn="r"/>
-            <a:r>
-              <a:rPr sz="1050" b="1">
-                <a:solidFill>
-                  <a:srgbClr val="0F2C68"/>
-                </a:solidFill>
-                <a:latin typeface="HSE Sans"/>
-              </a:rPr>
-              <a:t>Защита курсовой</a:t>
-            </a:r>
-          </a:p>
-          <a:p>
-            <a:pPr algn="r"/>
-            <a:r>
-              <a:rPr sz="1050">
-                <a:solidFill>
-                  <a:srgbClr val="595959"/>
-                </a:solidFill>
-                <a:latin typeface="HSE Sans"/>
-              </a:rPr>
-              <a:t>Пермь, 2026</a:t>
-            </a:r>
-          </a:p>
-        </p:txBody>
-      </p:sp>
-      <p:cxnSp>
-        <p:nvCxnSpPr>
-          <p:cNvPr id="5" name="Connector 4"/>
-          <p:cNvCxnSpPr/>
-          <p:nvPr/>
-        </p:nvCxnSpPr>
-        <p:spPr>
-          <a:xfrm>
-            <a:off x="502920" y="749808"/>
-            <a:ext cx="11183112" cy="0"/>
-          </a:xfrm>
-          <a:prstGeom prst="bentConnector3">
-            <a:avLst/>
-          </a:prstGeom>
-          <a:ln w="12700">
-            <a:solidFill>
-              <a:srgbClr val="0F2C68"/>
-            </a:solidFill>
-          </a:ln>
-        </p:spPr>
-        <p:style>
-          <a:lnRef idx="2">
-            <a:schemeClr val="accent1"/>
-          </a:lnRef>
-          <a:fillRef idx="0">
-            <a:schemeClr val="accent1"/>
-          </a:fillRef>
-          <a:effectRef idx="1">
-            <a:schemeClr val="accent1"/>
-          </a:effectRef>
-          <a:fontRef idx="minor">
-            <a:schemeClr val="tx1"/>
-          </a:fontRef>
-        </p:style>
-      </p:cxnSp>
-      <p:sp>
-        <p:nvSpPr>
-          <p:cNvPr id="6" name="TextBox 5"/>
-          <p:cNvSpPr txBox="1"/>
-          <p:nvPr/>
-        </p:nvSpPr>
-        <p:spPr>
-          <a:xfrm>
-            <a:off x="502920" y="868680"/>
-            <a:ext cx="11155680" cy="731520"/>
-          </a:xfrm>
-          <a:prstGeom prst="rect">
-            <a:avLst/>
-          </a:prstGeom>
-          <a:noFill/>
-        </p:spPr>
-        <p:txBody>
-          <a:bodyPr wrap="square">
-            <a:spAutoFit/>
-          </a:bodyPr>
-          <a:lstStyle/>
-          <a:p>
             <a:r>
               <a:rPr sz="3200" b="1">
                 <a:solidFill>
@@ -16026,7 +15915,7 @@
       </p:sp>
       <p:graphicFrame>
         <p:nvGraphicFramePr>
-          <p:cNvPr id="7" name="Table 6"/>
+          <p:cNvPr id="6" name="Table 5"/>
           <p:cNvGraphicFramePr>
             <a:graphicFrameLocks noGrp="1"/>
           </p:cNvGraphicFramePr>
@@ -16733,7 +16622,7 @@
       </p:graphicFrame>
       <p:sp>
         <p:nvSpPr>
-          <p:cNvPr id="8" name="TextBox 7"/>
+          <p:cNvPr id="7" name="TextBox 6"/>
           <p:cNvSpPr txBox="1"/>
           <p:nvPr/>
         </p:nvSpPr>
@@ -16860,8 +16749,8 @@
         </p:nvSpPr>
         <p:spPr>
           <a:xfrm>
-            <a:off x="502920" y="164592"/>
-            <a:ext cx="3291840" cy="502920"/>
+            <a:off x="987552" y="246888"/>
+            <a:ext cx="2743200" cy="502920"/>
           </a:xfrm>
           <a:prstGeom prst="rect">
             <a:avLst/>
@@ -16869,7 +16758,7 @@
           <a:noFill/>
         </p:spPr>
         <p:txBody>
-          <a:bodyPr wrap="square">
+          <a:bodyPr wrap="square" anchor="ctr">
             <a:spAutoFit/>
           </a:bodyPr>
           <a:lstStyle/>
@@ -16894,8 +16783,8 @@
         </p:nvSpPr>
         <p:spPr>
           <a:xfrm>
-            <a:off x="4297680" y="164592"/>
-            <a:ext cx="1371600" cy="502920"/>
+            <a:off x="3840480" y="246888"/>
+            <a:ext cx="2011680" cy="502920"/>
           </a:xfrm>
           <a:prstGeom prst="rect">
             <a:avLst/>
@@ -16903,7 +16792,7 @@
           <a:noFill/>
         </p:spPr>
         <p:txBody>
-          <a:bodyPr wrap="square">
+          <a:bodyPr wrap="square" anchor="ctr">
             <a:spAutoFit/>
           </a:bodyPr>
           <a:lstStyle/>
@@ -16928,8 +16817,53 @@
         </p:nvSpPr>
         <p:spPr>
           <a:xfrm>
-            <a:off x="9692640" y="164592"/>
-            <a:ext cx="2194560" cy="548640"/>
+            <a:off x="6821424" y="246888"/>
+            <a:ext cx="1828800" cy="548640"/>
+          </a:xfrm>
+          <a:prstGeom prst="rect">
+            <a:avLst/>
+          </a:prstGeom>
+          <a:noFill/>
+        </p:spPr>
+        <p:txBody>
+          <a:bodyPr wrap="square" anchor="ctr">
+            <a:spAutoFit/>
+          </a:bodyPr>
+          <a:lstStyle/>
+          <a:p>
+            <a:r>
+              <a:rPr sz="1050" b="1">
+                <a:solidFill>
+                  <a:srgbClr val="0F2C68"/>
+                </a:solidFill>
+                <a:latin typeface="HSE Sans"/>
+              </a:rPr>
+              <a:t>Защита курсовой</a:t>
+            </a:r>
+          </a:p>
+          <a:p>
+            <a:r>
+              <a:rPr sz="1050">
+                <a:solidFill>
+                  <a:srgbClr val="595959"/>
+                </a:solidFill>
+                <a:latin typeface="HSE Sans"/>
+              </a:rPr>
+              <a:t>Пермь, 2026</a:t>
+            </a:r>
+          </a:p>
+        </p:txBody>
+      </p:sp>
+      <p:sp>
+        <p:nvSpPr>
+          <p:cNvPr id="5" name="TextBox 4"/>
+          <p:cNvSpPr txBox="1"/>
+          <p:nvPr/>
+        </p:nvSpPr>
+        <p:spPr>
+          <a:xfrm>
+            <a:off x="457200" y="932688"/>
+            <a:ext cx="11247120" cy="731520"/>
           </a:xfrm>
           <a:prstGeom prst="rect">
             <a:avLst/>
@@ -16942,88 +16876,6 @@
           </a:bodyPr>
           <a:lstStyle/>
           <a:p>
-            <a:pPr algn="r"/>
-            <a:r>
-              <a:rPr sz="1050" b="1">
-                <a:solidFill>
-                  <a:srgbClr val="0F2C68"/>
-                </a:solidFill>
-                <a:latin typeface="HSE Sans"/>
-              </a:rPr>
-              <a:t>Защита курсовой</a:t>
-            </a:r>
-          </a:p>
-          <a:p>
-            <a:pPr algn="r"/>
-            <a:r>
-              <a:rPr sz="1050">
-                <a:solidFill>
-                  <a:srgbClr val="595959"/>
-                </a:solidFill>
-                <a:latin typeface="HSE Sans"/>
-              </a:rPr>
-              <a:t>Пермь, 2026</a:t>
-            </a:r>
-          </a:p>
-        </p:txBody>
-      </p:sp>
-      <p:cxnSp>
-        <p:nvCxnSpPr>
-          <p:cNvPr id="5" name="Connector 4"/>
-          <p:cNvCxnSpPr/>
-          <p:nvPr/>
-        </p:nvCxnSpPr>
-        <p:spPr>
-          <a:xfrm>
-            <a:off x="502920" y="749808"/>
-            <a:ext cx="11183112" cy="0"/>
-          </a:xfrm>
-          <a:prstGeom prst="bentConnector3">
-            <a:avLst/>
-          </a:prstGeom>
-          <a:ln w="12700">
-            <a:solidFill>
-              <a:srgbClr val="0F2C68"/>
-            </a:solidFill>
-          </a:ln>
-        </p:spPr>
-        <p:style>
-          <a:lnRef idx="2">
-            <a:schemeClr val="accent1"/>
-          </a:lnRef>
-          <a:fillRef idx="0">
-            <a:schemeClr val="accent1"/>
-          </a:fillRef>
-          <a:effectRef idx="1">
-            <a:schemeClr val="accent1"/>
-          </a:effectRef>
-          <a:fontRef idx="minor">
-            <a:schemeClr val="tx1"/>
-          </a:fontRef>
-        </p:style>
-      </p:cxnSp>
-      <p:sp>
-        <p:nvSpPr>
-          <p:cNvPr id="6" name="TextBox 5"/>
-          <p:cNvSpPr txBox="1"/>
-          <p:nvPr/>
-        </p:nvSpPr>
-        <p:spPr>
-          <a:xfrm>
-            <a:off x="502920" y="868680"/>
-            <a:ext cx="11155680" cy="731520"/>
-          </a:xfrm>
-          <a:prstGeom prst="rect">
-            <a:avLst/>
-          </a:prstGeom>
-          <a:noFill/>
-        </p:spPr>
-        <p:txBody>
-          <a:bodyPr wrap="square">
-            <a:spAutoFit/>
-          </a:bodyPr>
-          <a:lstStyle/>
-          <a:p>
             <a:r>
               <a:rPr sz="3200" b="1">
                 <a:solidFill>
@@ -17038,7 +16890,7 @@
       </p:sp>
       <p:pic>
         <p:nvPicPr>
-          <p:cNvPr id="7" name="Picture 6" descr="05_sequence_recommend.png"/>
+          <p:cNvPr id="6" name="Picture 5" descr="05_sequence_recommend.png"/>
           <p:cNvPicPr>
             <a:picLocks noChangeAspect="1"/>
           </p:cNvPicPr>
@@ -17062,7 +16914,7 @@
       </p:pic>
       <p:sp>
         <p:nvSpPr>
-          <p:cNvPr id="8" name="TextBox 7"/>
+          <p:cNvPr id="7" name="TextBox 6"/>
           <p:cNvSpPr txBox="1"/>
           <p:nvPr/>
         </p:nvSpPr>
@@ -17121,8 +16973,8 @@
         </p:nvSpPr>
         <p:spPr>
           <a:xfrm>
-            <a:off x="502920" y="164592"/>
-            <a:ext cx="3291840" cy="502920"/>
+            <a:off x="987552" y="246888"/>
+            <a:ext cx="2743200" cy="502920"/>
           </a:xfrm>
           <a:prstGeom prst="rect">
             <a:avLst/>
@@ -17130,7 +16982,7 @@
           <a:noFill/>
         </p:spPr>
         <p:txBody>
-          <a:bodyPr wrap="square">
+          <a:bodyPr wrap="square" anchor="ctr">
             <a:spAutoFit/>
           </a:bodyPr>
           <a:lstStyle/>
@@ -17155,8 +17007,8 @@
         </p:nvSpPr>
         <p:spPr>
           <a:xfrm>
-            <a:off x="4297680" y="164592"/>
-            <a:ext cx="1371600" cy="502920"/>
+            <a:off x="3840480" y="246888"/>
+            <a:ext cx="2011680" cy="502920"/>
           </a:xfrm>
           <a:prstGeom prst="rect">
             <a:avLst/>
@@ -17164,7 +17016,7 @@
           <a:noFill/>
         </p:spPr>
         <p:txBody>
-          <a:bodyPr wrap="square">
+          <a:bodyPr wrap="square" anchor="ctr">
             <a:spAutoFit/>
           </a:bodyPr>
           <a:lstStyle/>
@@ -17189,8 +17041,53 @@
         </p:nvSpPr>
         <p:spPr>
           <a:xfrm>
-            <a:off x="9692640" y="164592"/>
-            <a:ext cx="2194560" cy="548640"/>
+            <a:off x="6821424" y="246888"/>
+            <a:ext cx="1828800" cy="548640"/>
+          </a:xfrm>
+          <a:prstGeom prst="rect">
+            <a:avLst/>
+          </a:prstGeom>
+          <a:noFill/>
+        </p:spPr>
+        <p:txBody>
+          <a:bodyPr wrap="square" anchor="ctr">
+            <a:spAutoFit/>
+          </a:bodyPr>
+          <a:lstStyle/>
+          <a:p>
+            <a:r>
+              <a:rPr sz="1050" b="1">
+                <a:solidFill>
+                  <a:srgbClr val="0F2C68"/>
+                </a:solidFill>
+                <a:latin typeface="HSE Sans"/>
+              </a:rPr>
+              <a:t>Защита курсовой</a:t>
+            </a:r>
+          </a:p>
+          <a:p>
+            <a:r>
+              <a:rPr sz="1050">
+                <a:solidFill>
+                  <a:srgbClr val="595959"/>
+                </a:solidFill>
+                <a:latin typeface="HSE Sans"/>
+              </a:rPr>
+              <a:t>Пермь, 2026</a:t>
+            </a:r>
+          </a:p>
+        </p:txBody>
+      </p:sp>
+      <p:sp>
+        <p:nvSpPr>
+          <p:cNvPr id="5" name="TextBox 4"/>
+          <p:cNvSpPr txBox="1"/>
+          <p:nvPr/>
+        </p:nvSpPr>
+        <p:spPr>
+          <a:xfrm>
+            <a:off x="457200" y="932688"/>
+            <a:ext cx="11247120" cy="731520"/>
           </a:xfrm>
           <a:prstGeom prst="rect">
             <a:avLst/>
@@ -17203,88 +17100,6 @@
           </a:bodyPr>
           <a:lstStyle/>
           <a:p>
-            <a:pPr algn="r"/>
-            <a:r>
-              <a:rPr sz="1050" b="1">
-                <a:solidFill>
-                  <a:srgbClr val="0F2C68"/>
-                </a:solidFill>
-                <a:latin typeface="HSE Sans"/>
-              </a:rPr>
-              <a:t>Защита курсовой</a:t>
-            </a:r>
-          </a:p>
-          <a:p>
-            <a:pPr algn="r"/>
-            <a:r>
-              <a:rPr sz="1050">
-                <a:solidFill>
-                  <a:srgbClr val="595959"/>
-                </a:solidFill>
-                <a:latin typeface="HSE Sans"/>
-              </a:rPr>
-              <a:t>Пермь, 2026</a:t>
-            </a:r>
-          </a:p>
-        </p:txBody>
-      </p:sp>
-      <p:cxnSp>
-        <p:nvCxnSpPr>
-          <p:cNvPr id="5" name="Connector 4"/>
-          <p:cNvCxnSpPr/>
-          <p:nvPr/>
-        </p:nvCxnSpPr>
-        <p:spPr>
-          <a:xfrm>
-            <a:off x="502920" y="749808"/>
-            <a:ext cx="11183112" cy="0"/>
-          </a:xfrm>
-          <a:prstGeom prst="bentConnector3">
-            <a:avLst/>
-          </a:prstGeom>
-          <a:ln w="12700">
-            <a:solidFill>
-              <a:srgbClr val="0F2C68"/>
-            </a:solidFill>
-          </a:ln>
-        </p:spPr>
-        <p:style>
-          <a:lnRef idx="2">
-            <a:schemeClr val="accent1"/>
-          </a:lnRef>
-          <a:fillRef idx="0">
-            <a:schemeClr val="accent1"/>
-          </a:fillRef>
-          <a:effectRef idx="1">
-            <a:schemeClr val="accent1"/>
-          </a:effectRef>
-          <a:fontRef idx="minor">
-            <a:schemeClr val="tx1"/>
-          </a:fontRef>
-        </p:style>
-      </p:cxnSp>
-      <p:sp>
-        <p:nvSpPr>
-          <p:cNvPr id="6" name="TextBox 5"/>
-          <p:cNvSpPr txBox="1"/>
-          <p:nvPr/>
-        </p:nvSpPr>
-        <p:spPr>
-          <a:xfrm>
-            <a:off x="502920" y="868680"/>
-            <a:ext cx="11155680" cy="731520"/>
-          </a:xfrm>
-          <a:prstGeom prst="rect">
-            <a:avLst/>
-          </a:prstGeom>
-          <a:noFill/>
-        </p:spPr>
-        <p:txBody>
-          <a:bodyPr wrap="square">
-            <a:spAutoFit/>
-          </a:bodyPr>
-          <a:lstStyle/>
-          <a:p>
             <a:r>
               <a:rPr sz="3200" b="1">
                 <a:solidFill>
@@ -17299,7 +17114,7 @@
       </p:sp>
       <p:pic>
         <p:nvPicPr>
-          <p:cNvPr id="7" name="Picture 6" descr="06_activity_normalization.png"/>
+          <p:cNvPr id="6" name="Picture 5" descr="06_activity_normalization.png"/>
           <p:cNvPicPr>
             <a:picLocks noChangeAspect="1"/>
           </p:cNvPicPr>
@@ -17323,7 +17138,7 @@
       </p:pic>
       <p:sp>
         <p:nvSpPr>
-          <p:cNvPr id="8" name="TextBox 7"/>
+          <p:cNvPr id="7" name="TextBox 6"/>
           <p:cNvSpPr txBox="1"/>
           <p:nvPr/>
         </p:nvSpPr>
@@ -17442,7 +17257,7 @@
       </p:sp>
       <p:sp>
         <p:nvSpPr>
-          <p:cNvPr id="9" name="TextBox 8"/>
+          <p:cNvPr id="8" name="TextBox 7"/>
           <p:cNvSpPr txBox="1"/>
           <p:nvPr/>
         </p:nvSpPr>
@@ -17501,8 +17316,8 @@
         </p:nvSpPr>
         <p:spPr>
           <a:xfrm>
-            <a:off x="502920" y="164592"/>
-            <a:ext cx="3291840" cy="502920"/>
+            <a:off x="987552" y="246888"/>
+            <a:ext cx="2743200" cy="502920"/>
           </a:xfrm>
           <a:prstGeom prst="rect">
             <a:avLst/>
@@ -17510,7 +17325,7 @@
           <a:noFill/>
         </p:spPr>
         <p:txBody>
-          <a:bodyPr wrap="square">
+          <a:bodyPr wrap="square" anchor="ctr">
             <a:spAutoFit/>
           </a:bodyPr>
           <a:lstStyle/>
@@ -17535,8 +17350,8 @@
         </p:nvSpPr>
         <p:spPr>
           <a:xfrm>
-            <a:off x="4297680" y="164592"/>
-            <a:ext cx="1371600" cy="502920"/>
+            <a:off x="3840480" y="246888"/>
+            <a:ext cx="2011680" cy="502920"/>
           </a:xfrm>
           <a:prstGeom prst="rect">
             <a:avLst/>
@@ -17544,7 +17359,7 @@
           <a:noFill/>
         </p:spPr>
         <p:txBody>
-          <a:bodyPr wrap="square">
+          <a:bodyPr wrap="square" anchor="ctr">
             <a:spAutoFit/>
           </a:bodyPr>
           <a:lstStyle/>
@@ -17569,8 +17384,53 @@
         </p:nvSpPr>
         <p:spPr>
           <a:xfrm>
-            <a:off x="9692640" y="164592"/>
-            <a:ext cx="2194560" cy="548640"/>
+            <a:off x="6821424" y="246888"/>
+            <a:ext cx="1828800" cy="548640"/>
+          </a:xfrm>
+          <a:prstGeom prst="rect">
+            <a:avLst/>
+          </a:prstGeom>
+          <a:noFill/>
+        </p:spPr>
+        <p:txBody>
+          <a:bodyPr wrap="square" anchor="ctr">
+            <a:spAutoFit/>
+          </a:bodyPr>
+          <a:lstStyle/>
+          <a:p>
+            <a:r>
+              <a:rPr sz="1050" b="1">
+                <a:solidFill>
+                  <a:srgbClr val="0F2C68"/>
+                </a:solidFill>
+                <a:latin typeface="HSE Sans"/>
+              </a:rPr>
+              <a:t>Защита курсовой</a:t>
+            </a:r>
+          </a:p>
+          <a:p>
+            <a:r>
+              <a:rPr sz="1050">
+                <a:solidFill>
+                  <a:srgbClr val="595959"/>
+                </a:solidFill>
+                <a:latin typeface="HSE Sans"/>
+              </a:rPr>
+              <a:t>Пермь, 2026</a:t>
+            </a:r>
+          </a:p>
+        </p:txBody>
+      </p:sp>
+      <p:sp>
+        <p:nvSpPr>
+          <p:cNvPr id="5" name="TextBox 4"/>
+          <p:cNvSpPr txBox="1"/>
+          <p:nvPr/>
+        </p:nvSpPr>
+        <p:spPr>
+          <a:xfrm>
+            <a:off x="457200" y="932688"/>
+            <a:ext cx="11247120" cy="731520"/>
           </a:xfrm>
           <a:prstGeom prst="rect">
             <a:avLst/>
@@ -17583,88 +17443,6 @@
           </a:bodyPr>
           <a:lstStyle/>
           <a:p>
-            <a:pPr algn="r"/>
-            <a:r>
-              <a:rPr sz="1050" b="1">
-                <a:solidFill>
-                  <a:srgbClr val="0F2C68"/>
-                </a:solidFill>
-                <a:latin typeface="HSE Sans"/>
-              </a:rPr>
-              <a:t>Защита курсовой</a:t>
-            </a:r>
-          </a:p>
-          <a:p>
-            <a:pPr algn="r"/>
-            <a:r>
-              <a:rPr sz="1050">
-                <a:solidFill>
-                  <a:srgbClr val="595959"/>
-                </a:solidFill>
-                <a:latin typeface="HSE Sans"/>
-              </a:rPr>
-              <a:t>Пермь, 2026</a:t>
-            </a:r>
-          </a:p>
-        </p:txBody>
-      </p:sp>
-      <p:cxnSp>
-        <p:nvCxnSpPr>
-          <p:cNvPr id="5" name="Connector 4"/>
-          <p:cNvCxnSpPr/>
-          <p:nvPr/>
-        </p:nvCxnSpPr>
-        <p:spPr>
-          <a:xfrm>
-            <a:off x="502920" y="749808"/>
-            <a:ext cx="11183112" cy="0"/>
-          </a:xfrm>
-          <a:prstGeom prst="bentConnector3">
-            <a:avLst/>
-          </a:prstGeom>
-          <a:ln w="12700">
-            <a:solidFill>
-              <a:srgbClr val="0F2C68"/>
-            </a:solidFill>
-          </a:ln>
-        </p:spPr>
-        <p:style>
-          <a:lnRef idx="2">
-            <a:schemeClr val="accent1"/>
-          </a:lnRef>
-          <a:fillRef idx="0">
-            <a:schemeClr val="accent1"/>
-          </a:fillRef>
-          <a:effectRef idx="1">
-            <a:schemeClr val="accent1"/>
-          </a:effectRef>
-          <a:fontRef idx="minor">
-            <a:schemeClr val="tx1"/>
-          </a:fontRef>
-        </p:style>
-      </p:cxnSp>
-      <p:sp>
-        <p:nvSpPr>
-          <p:cNvPr id="6" name="TextBox 5"/>
-          <p:cNvSpPr txBox="1"/>
-          <p:nvPr/>
-        </p:nvSpPr>
-        <p:spPr>
-          <a:xfrm>
-            <a:off x="502920" y="868680"/>
-            <a:ext cx="11155680" cy="731520"/>
-          </a:xfrm>
-          <a:prstGeom prst="rect">
-            <a:avLst/>
-          </a:prstGeom>
-          <a:noFill/>
-        </p:spPr>
-        <p:txBody>
-          <a:bodyPr wrap="square">
-            <a:spAutoFit/>
-          </a:bodyPr>
-          <a:lstStyle/>
-          <a:p>
             <a:r>
               <a:rPr sz="3200" b="1">
                 <a:solidFill>
@@ -17679,7 +17457,7 @@
       </p:sp>
       <p:pic>
         <p:nvPicPr>
-          <p:cNvPr id="7" name="Picture 6" descr="07_copilot_graph.png"/>
+          <p:cNvPr id="6" name="Picture 5" descr="07_copilot_graph.png"/>
           <p:cNvPicPr>
             <a:picLocks noChangeAspect="1"/>
           </p:cNvPicPr>
@@ -17703,7 +17481,7 @@
       </p:pic>
       <p:sp>
         <p:nvSpPr>
-          <p:cNvPr id="8" name="TextBox 7"/>
+          <p:cNvPr id="7" name="TextBox 6"/>
           <p:cNvSpPr txBox="1"/>
           <p:nvPr/>
         </p:nvSpPr>
@@ -17830,8 +17608,8 @@
         </p:nvSpPr>
         <p:spPr>
           <a:xfrm>
-            <a:off x="502920" y="164592"/>
-            <a:ext cx="3291840" cy="502920"/>
+            <a:off x="987552" y="246888"/>
+            <a:ext cx="2743200" cy="502920"/>
           </a:xfrm>
           <a:prstGeom prst="rect">
             <a:avLst/>
@@ -17839,7 +17617,7 @@
           <a:noFill/>
         </p:spPr>
         <p:txBody>
-          <a:bodyPr wrap="square">
+          <a:bodyPr wrap="square" anchor="ctr">
             <a:spAutoFit/>
           </a:bodyPr>
           <a:lstStyle/>
@@ -17864,8 +17642,8 @@
         </p:nvSpPr>
         <p:spPr>
           <a:xfrm>
-            <a:off x="4297680" y="164592"/>
-            <a:ext cx="1371600" cy="502920"/>
+            <a:off x="3840480" y="246888"/>
+            <a:ext cx="2011680" cy="502920"/>
           </a:xfrm>
           <a:prstGeom prst="rect">
             <a:avLst/>
@@ -17873,7 +17651,7 @@
           <a:noFill/>
         </p:spPr>
         <p:txBody>
-          <a:bodyPr wrap="square">
+          <a:bodyPr wrap="square" anchor="ctr">
             <a:spAutoFit/>
           </a:bodyPr>
           <a:lstStyle/>
@@ -17898,8 +17676,53 @@
         </p:nvSpPr>
         <p:spPr>
           <a:xfrm>
-            <a:off x="9692640" y="164592"/>
-            <a:ext cx="2194560" cy="548640"/>
+            <a:off x="6821424" y="246888"/>
+            <a:ext cx="1828800" cy="548640"/>
+          </a:xfrm>
+          <a:prstGeom prst="rect">
+            <a:avLst/>
+          </a:prstGeom>
+          <a:noFill/>
+        </p:spPr>
+        <p:txBody>
+          <a:bodyPr wrap="square" anchor="ctr">
+            <a:spAutoFit/>
+          </a:bodyPr>
+          <a:lstStyle/>
+          <a:p>
+            <a:r>
+              <a:rPr sz="1050" b="1">
+                <a:solidFill>
+                  <a:srgbClr val="0F2C68"/>
+                </a:solidFill>
+                <a:latin typeface="HSE Sans"/>
+              </a:rPr>
+              <a:t>Защита курсовой</a:t>
+            </a:r>
+          </a:p>
+          <a:p>
+            <a:r>
+              <a:rPr sz="1050">
+                <a:solidFill>
+                  <a:srgbClr val="595959"/>
+                </a:solidFill>
+                <a:latin typeface="HSE Sans"/>
+              </a:rPr>
+              <a:t>Пермь, 2026</a:t>
+            </a:r>
+          </a:p>
+        </p:txBody>
+      </p:sp>
+      <p:sp>
+        <p:nvSpPr>
+          <p:cNvPr id="5" name="TextBox 4"/>
+          <p:cNvSpPr txBox="1"/>
+          <p:nvPr/>
+        </p:nvSpPr>
+        <p:spPr>
+          <a:xfrm>
+            <a:off x="457200" y="932688"/>
+            <a:ext cx="11247120" cy="731520"/>
           </a:xfrm>
           <a:prstGeom prst="rect">
             <a:avLst/>
@@ -17912,88 +17735,6 @@
           </a:bodyPr>
           <a:lstStyle/>
           <a:p>
-            <a:pPr algn="r"/>
-            <a:r>
-              <a:rPr sz="1050" b="1">
-                <a:solidFill>
-                  <a:srgbClr val="0F2C68"/>
-                </a:solidFill>
-                <a:latin typeface="HSE Sans"/>
-              </a:rPr>
-              <a:t>Защита курсовой</a:t>
-            </a:r>
-          </a:p>
-          <a:p>
-            <a:pPr algn="r"/>
-            <a:r>
-              <a:rPr sz="1050">
-                <a:solidFill>
-                  <a:srgbClr val="595959"/>
-                </a:solidFill>
-                <a:latin typeface="HSE Sans"/>
-              </a:rPr>
-              <a:t>Пермь, 2026</a:t>
-            </a:r>
-          </a:p>
-        </p:txBody>
-      </p:sp>
-      <p:cxnSp>
-        <p:nvCxnSpPr>
-          <p:cNvPr id="5" name="Connector 4"/>
-          <p:cNvCxnSpPr/>
-          <p:nvPr/>
-        </p:nvCxnSpPr>
-        <p:spPr>
-          <a:xfrm>
-            <a:off x="502920" y="749808"/>
-            <a:ext cx="11183112" cy="0"/>
-          </a:xfrm>
-          <a:prstGeom prst="bentConnector3">
-            <a:avLst/>
-          </a:prstGeom>
-          <a:ln w="12700">
-            <a:solidFill>
-              <a:srgbClr val="0F2C68"/>
-            </a:solidFill>
-          </a:ln>
-        </p:spPr>
-        <p:style>
-          <a:lnRef idx="2">
-            <a:schemeClr val="accent1"/>
-          </a:lnRef>
-          <a:fillRef idx="0">
-            <a:schemeClr val="accent1"/>
-          </a:fillRef>
-          <a:effectRef idx="1">
-            <a:schemeClr val="accent1"/>
-          </a:effectRef>
-          <a:fontRef idx="minor">
-            <a:schemeClr val="tx1"/>
-          </a:fontRef>
-        </p:style>
-      </p:cxnSp>
-      <p:sp>
-        <p:nvSpPr>
-          <p:cNvPr id="6" name="TextBox 5"/>
-          <p:cNvSpPr txBox="1"/>
-          <p:nvPr/>
-        </p:nvSpPr>
-        <p:spPr>
-          <a:xfrm>
-            <a:off x="502920" y="868680"/>
-            <a:ext cx="11155680" cy="731520"/>
-          </a:xfrm>
-          <a:prstGeom prst="rect">
-            <a:avLst/>
-          </a:prstGeom>
-          <a:noFill/>
-        </p:spPr>
-        <p:txBody>
-          <a:bodyPr wrap="square">
-            <a:spAutoFit/>
-          </a:bodyPr>
-          <a:lstStyle/>
-          <a:p>
             <a:r>
               <a:rPr sz="3200" b="1">
                 <a:solidFill>
@@ -18008,14 +17749,14 @@
       </p:sp>
       <p:sp>
         <p:nvSpPr>
-          <p:cNvPr id="7" name="Rectangle 6"/>
+          <p:cNvPr id="6" name="Rectangle 5"/>
           <p:cNvSpPr/>
           <p:nvPr/>
         </p:nvSpPr>
         <p:spPr>
           <a:xfrm>
             <a:off x="548640" y="1783080"/>
-            <a:ext cx="5486400" cy="4480560"/>
+            <a:ext cx="5486400" cy="3108960"/>
           </a:xfrm>
           <a:prstGeom prst="rect">
             <a:avLst/>
@@ -18159,7 +17900,7 @@
       </p:sp>
       <p:sp>
         <p:nvSpPr>
-          <p:cNvPr id="8" name="TextBox 7"/>
+          <p:cNvPr id="7" name="TextBox 6"/>
           <p:cNvSpPr txBox="1"/>
           <p:nvPr/>
         </p:nvSpPr>
@@ -18318,8 +18059,8 @@
         </p:nvSpPr>
         <p:spPr>
           <a:xfrm>
-            <a:off x="502920" y="164592"/>
-            <a:ext cx="3291840" cy="502920"/>
+            <a:off x="987552" y="246888"/>
+            <a:ext cx="2743200" cy="502920"/>
           </a:xfrm>
           <a:prstGeom prst="rect">
             <a:avLst/>
@@ -18327,7 +18068,7 @@
           <a:noFill/>
         </p:spPr>
         <p:txBody>
-          <a:bodyPr wrap="square">
+          <a:bodyPr wrap="square" anchor="ctr">
             <a:spAutoFit/>
           </a:bodyPr>
           <a:lstStyle/>
@@ -18352,8 +18093,8 @@
         </p:nvSpPr>
         <p:spPr>
           <a:xfrm>
-            <a:off x="4297680" y="164592"/>
-            <a:ext cx="1371600" cy="502920"/>
+            <a:off x="3840480" y="246888"/>
+            <a:ext cx="2011680" cy="502920"/>
           </a:xfrm>
           <a:prstGeom prst="rect">
             <a:avLst/>
@@ -18361,7 +18102,7 @@
           <a:noFill/>
         </p:spPr>
         <p:txBody>
-          <a:bodyPr wrap="square">
+          <a:bodyPr wrap="square" anchor="ctr">
             <a:spAutoFit/>
           </a:bodyPr>
           <a:lstStyle/>
@@ -18386,8 +18127,53 @@
         </p:nvSpPr>
         <p:spPr>
           <a:xfrm>
-            <a:off x="9692640" y="164592"/>
-            <a:ext cx="2194560" cy="548640"/>
+            <a:off x="6821424" y="246888"/>
+            <a:ext cx="1828800" cy="548640"/>
+          </a:xfrm>
+          <a:prstGeom prst="rect">
+            <a:avLst/>
+          </a:prstGeom>
+          <a:noFill/>
+        </p:spPr>
+        <p:txBody>
+          <a:bodyPr wrap="square" anchor="ctr">
+            <a:spAutoFit/>
+          </a:bodyPr>
+          <a:lstStyle/>
+          <a:p>
+            <a:r>
+              <a:rPr sz="1050" b="1">
+                <a:solidFill>
+                  <a:srgbClr val="0F2C68"/>
+                </a:solidFill>
+                <a:latin typeface="HSE Sans"/>
+              </a:rPr>
+              <a:t>Защита курсовой</a:t>
+            </a:r>
+          </a:p>
+          <a:p>
+            <a:r>
+              <a:rPr sz="1050">
+                <a:solidFill>
+                  <a:srgbClr val="595959"/>
+                </a:solidFill>
+                <a:latin typeface="HSE Sans"/>
+              </a:rPr>
+              <a:t>Пермь, 2026</a:t>
+            </a:r>
+          </a:p>
+        </p:txBody>
+      </p:sp>
+      <p:sp>
+        <p:nvSpPr>
+          <p:cNvPr id="5" name="TextBox 4"/>
+          <p:cNvSpPr txBox="1"/>
+          <p:nvPr/>
+        </p:nvSpPr>
+        <p:spPr>
+          <a:xfrm>
+            <a:off x="457200" y="932688"/>
+            <a:ext cx="11247120" cy="731520"/>
           </a:xfrm>
           <a:prstGeom prst="rect">
             <a:avLst/>
@@ -18400,88 +18186,6 @@
           </a:bodyPr>
           <a:lstStyle/>
           <a:p>
-            <a:pPr algn="r"/>
-            <a:r>
-              <a:rPr sz="1050" b="1">
-                <a:solidFill>
-                  <a:srgbClr val="0F2C68"/>
-                </a:solidFill>
-                <a:latin typeface="HSE Sans"/>
-              </a:rPr>
-              <a:t>Защита курсовой</a:t>
-            </a:r>
-          </a:p>
-          <a:p>
-            <a:pPr algn="r"/>
-            <a:r>
-              <a:rPr sz="1050">
-                <a:solidFill>
-                  <a:srgbClr val="595959"/>
-                </a:solidFill>
-                <a:latin typeface="HSE Sans"/>
-              </a:rPr>
-              <a:t>Пермь, 2026</a:t>
-            </a:r>
-          </a:p>
-        </p:txBody>
-      </p:sp>
-      <p:cxnSp>
-        <p:nvCxnSpPr>
-          <p:cNvPr id="5" name="Connector 4"/>
-          <p:cNvCxnSpPr/>
-          <p:nvPr/>
-        </p:nvCxnSpPr>
-        <p:spPr>
-          <a:xfrm>
-            <a:off x="502920" y="749808"/>
-            <a:ext cx="11183112" cy="0"/>
-          </a:xfrm>
-          <a:prstGeom prst="bentConnector3">
-            <a:avLst/>
-          </a:prstGeom>
-          <a:ln w="12700">
-            <a:solidFill>
-              <a:srgbClr val="0F2C68"/>
-            </a:solidFill>
-          </a:ln>
-        </p:spPr>
-        <p:style>
-          <a:lnRef idx="2">
-            <a:schemeClr val="accent1"/>
-          </a:lnRef>
-          <a:fillRef idx="0">
-            <a:schemeClr val="accent1"/>
-          </a:fillRef>
-          <a:effectRef idx="1">
-            <a:schemeClr val="accent1"/>
-          </a:effectRef>
-          <a:fontRef idx="minor">
-            <a:schemeClr val="tx1"/>
-          </a:fontRef>
-        </p:style>
-      </p:cxnSp>
-      <p:sp>
-        <p:nvSpPr>
-          <p:cNvPr id="6" name="TextBox 5"/>
-          <p:cNvSpPr txBox="1"/>
-          <p:nvPr/>
-        </p:nvSpPr>
-        <p:spPr>
-          <a:xfrm>
-            <a:off x="502920" y="868680"/>
-            <a:ext cx="11155680" cy="731520"/>
-          </a:xfrm>
-          <a:prstGeom prst="rect">
-            <a:avLst/>
-          </a:prstGeom>
-          <a:noFill/>
-        </p:spPr>
-        <p:txBody>
-          <a:bodyPr wrap="square">
-            <a:spAutoFit/>
-          </a:bodyPr>
-          <a:lstStyle/>
-          <a:p>
             <a:r>
               <a:rPr sz="3200" b="1">
                 <a:solidFill>
@@ -18496,7 +18200,7 @@
       </p:sp>
       <p:graphicFrame>
         <p:nvGraphicFramePr>
-          <p:cNvPr id="7" name="Table 6"/>
+          <p:cNvPr id="6" name="Table 5"/>
           <p:cNvGraphicFramePr>
             <a:graphicFrameLocks noGrp="1"/>
           </p:cNvGraphicFramePr>
@@ -19085,7 +18789,7 @@
       </p:graphicFrame>
       <p:sp>
         <p:nvSpPr>
-          <p:cNvPr id="8" name="TextBox 7"/>
+          <p:cNvPr id="7" name="TextBox 6"/>
           <p:cNvSpPr txBox="1"/>
           <p:nvPr/>
         </p:nvSpPr>
@@ -19119,7 +18823,7 @@
       </p:sp>
       <p:graphicFrame>
         <p:nvGraphicFramePr>
-          <p:cNvPr id="9" name="Table 8"/>
+          <p:cNvPr id="8" name="Table 7"/>
           <p:cNvGraphicFramePr>
             <a:graphicFrameLocks noGrp="1"/>
           </p:cNvGraphicFramePr>
@@ -19418,7 +19122,7 @@
       </p:graphicFrame>
       <p:sp>
         <p:nvSpPr>
-          <p:cNvPr id="10" name="TextBox 9"/>
+          <p:cNvPr id="9" name="TextBox 8"/>
           <p:cNvSpPr txBox="1"/>
           <p:nvPr/>
         </p:nvSpPr>
@@ -19452,7 +19156,7 @@
       </p:sp>
       <p:sp>
         <p:nvSpPr>
-          <p:cNvPr id="11" name="TextBox 10"/>
+          <p:cNvPr id="10" name="TextBox 9"/>
           <p:cNvSpPr txBox="1"/>
           <p:nvPr/>
         </p:nvSpPr>
@@ -19547,8 +19251,8 @@
         </p:nvSpPr>
         <p:spPr>
           <a:xfrm>
-            <a:off x="502920" y="164592"/>
-            <a:ext cx="3291840" cy="502920"/>
+            <a:off x="987552" y="246888"/>
+            <a:ext cx="2743200" cy="502920"/>
           </a:xfrm>
           <a:prstGeom prst="rect">
             <a:avLst/>
@@ -19556,7 +19260,7 @@
           <a:noFill/>
         </p:spPr>
         <p:txBody>
-          <a:bodyPr wrap="square">
+          <a:bodyPr wrap="square" anchor="ctr">
             <a:spAutoFit/>
           </a:bodyPr>
           <a:lstStyle/>
@@ -19581,8 +19285,8 @@
         </p:nvSpPr>
         <p:spPr>
           <a:xfrm>
-            <a:off x="4297680" y="164592"/>
-            <a:ext cx="1371600" cy="502920"/>
+            <a:off x="3840480" y="246888"/>
+            <a:ext cx="2011680" cy="502920"/>
           </a:xfrm>
           <a:prstGeom prst="rect">
             <a:avLst/>
@@ -19590,7 +19294,7 @@
           <a:noFill/>
         </p:spPr>
         <p:txBody>
-          <a:bodyPr wrap="square">
+          <a:bodyPr wrap="square" anchor="ctr">
             <a:spAutoFit/>
           </a:bodyPr>
           <a:lstStyle/>
@@ -19615,8 +19319,53 @@
         </p:nvSpPr>
         <p:spPr>
           <a:xfrm>
-            <a:off x="9692640" y="164592"/>
-            <a:ext cx="2194560" cy="548640"/>
+            <a:off x="6821424" y="246888"/>
+            <a:ext cx="1828800" cy="548640"/>
+          </a:xfrm>
+          <a:prstGeom prst="rect">
+            <a:avLst/>
+          </a:prstGeom>
+          <a:noFill/>
+        </p:spPr>
+        <p:txBody>
+          <a:bodyPr wrap="square" anchor="ctr">
+            <a:spAutoFit/>
+          </a:bodyPr>
+          <a:lstStyle/>
+          <a:p>
+            <a:r>
+              <a:rPr sz="1050" b="1">
+                <a:solidFill>
+                  <a:srgbClr val="0F2C68"/>
+                </a:solidFill>
+                <a:latin typeface="HSE Sans"/>
+              </a:rPr>
+              <a:t>Защита курсовой</a:t>
+            </a:r>
+          </a:p>
+          <a:p>
+            <a:r>
+              <a:rPr sz="1050">
+                <a:solidFill>
+                  <a:srgbClr val="595959"/>
+                </a:solidFill>
+                <a:latin typeface="HSE Sans"/>
+              </a:rPr>
+              <a:t>Пермь, 2026</a:t>
+            </a:r>
+          </a:p>
+        </p:txBody>
+      </p:sp>
+      <p:sp>
+        <p:nvSpPr>
+          <p:cNvPr id="5" name="TextBox 4"/>
+          <p:cNvSpPr txBox="1"/>
+          <p:nvPr/>
+        </p:nvSpPr>
+        <p:spPr>
+          <a:xfrm>
+            <a:off x="457200" y="932688"/>
+            <a:ext cx="11247120" cy="731520"/>
           </a:xfrm>
           <a:prstGeom prst="rect">
             <a:avLst/>
@@ -19629,66 +19378,18 @@
           </a:bodyPr>
           <a:lstStyle/>
           <a:p>
-            <a:pPr algn="r"/>
-            <a:r>
-              <a:rPr sz="1050" b="1">
+            <a:r>
+              <a:rPr sz="3200" b="1">
                 <a:solidFill>
                   <a:srgbClr val="0F2C68"/>
                 </a:solidFill>
                 <a:latin typeface="HSE Sans"/>
               </a:rPr>
-              <a:t>Защита курсовой</a:t>
-            </a:r>
-          </a:p>
-          <a:p>
-            <a:pPr algn="r"/>
-            <a:r>
-              <a:rPr sz="1050">
-                <a:solidFill>
-                  <a:srgbClr val="595959"/>
-                </a:solidFill>
-                <a:latin typeface="HSE Sans"/>
-              </a:rPr>
-              <a:t>Пермь, 2026</a:t>
+              <a:t>Заключение</a:t>
             </a:r>
           </a:p>
         </p:txBody>
       </p:sp>
-      <p:cxnSp>
-        <p:nvCxnSpPr>
-          <p:cNvPr id="5" name="Connector 4"/>
-          <p:cNvCxnSpPr/>
-          <p:nvPr/>
-        </p:nvCxnSpPr>
-        <p:spPr>
-          <a:xfrm>
-            <a:off x="502920" y="749808"/>
-            <a:ext cx="11183112" cy="0"/>
-          </a:xfrm>
-          <a:prstGeom prst="bentConnector3">
-            <a:avLst/>
-          </a:prstGeom>
-          <a:ln w="12700">
-            <a:solidFill>
-              <a:srgbClr val="0F2C68"/>
-            </a:solidFill>
-          </a:ln>
-        </p:spPr>
-        <p:style>
-          <a:lnRef idx="2">
-            <a:schemeClr val="accent1"/>
-          </a:lnRef>
-          <a:fillRef idx="0">
-            <a:schemeClr val="accent1"/>
-          </a:fillRef>
-          <a:effectRef idx="1">
-            <a:schemeClr val="accent1"/>
-          </a:effectRef>
-          <a:fontRef idx="minor">
-            <a:schemeClr val="tx1"/>
-          </a:fontRef>
-        </p:style>
-      </p:cxnSp>
       <p:sp>
         <p:nvSpPr>
           <p:cNvPr id="6" name="TextBox 5"/>
@@ -19697,40 +19398,6 @@
         </p:nvSpPr>
         <p:spPr>
           <a:xfrm>
-            <a:off x="502920" y="868680"/>
-            <a:ext cx="11155680" cy="731520"/>
-          </a:xfrm>
-          <a:prstGeom prst="rect">
-            <a:avLst/>
-          </a:prstGeom>
-          <a:noFill/>
-        </p:spPr>
-        <p:txBody>
-          <a:bodyPr wrap="square">
-            <a:spAutoFit/>
-          </a:bodyPr>
-          <a:lstStyle/>
-          <a:p>
-            <a:r>
-              <a:rPr sz="3200" b="1">
-                <a:solidFill>
-                  <a:srgbClr val="0F2C68"/>
-                </a:solidFill>
-                <a:latin typeface="HSE Sans"/>
-              </a:rPr>
-              <a:t>Заключение</a:t>
-            </a:r>
-          </a:p>
-        </p:txBody>
-      </p:sp>
-      <p:sp>
-        <p:nvSpPr>
-          <p:cNvPr id="7" name="TextBox 6"/>
-          <p:cNvSpPr txBox="1"/>
-          <p:nvPr/>
-        </p:nvSpPr>
-        <p:spPr>
-          <a:xfrm>
             <a:off x="548640" y="1737360"/>
             <a:ext cx="5577840" cy="4572000"/>
           </a:xfrm>
@@ -19828,14 +19495,14 @@
       </p:sp>
       <p:sp>
         <p:nvSpPr>
-          <p:cNvPr id="8" name="Rectangle 7"/>
+          <p:cNvPr id="7" name="Rectangle 6"/>
           <p:cNvSpPr/>
           <p:nvPr/>
         </p:nvSpPr>
         <p:spPr>
           <a:xfrm>
             <a:off x="6400800" y="1737360"/>
-            <a:ext cx="5303520" cy="4572000"/>
+            <a:ext cx="5303520" cy="3200400"/>
           </a:xfrm>
           <a:prstGeom prst="rect">
             <a:avLst/>
@@ -19987,8 +19654,8 @@
         </p:nvSpPr>
         <p:spPr>
           <a:xfrm>
-            <a:off x="502920" y="164592"/>
-            <a:ext cx="3291840" cy="502920"/>
+            <a:off x="987552" y="246888"/>
+            <a:ext cx="2743200" cy="502920"/>
           </a:xfrm>
           <a:prstGeom prst="rect">
             <a:avLst/>
@@ -19996,7 +19663,7 @@
           <a:noFill/>
         </p:spPr>
         <p:txBody>
-          <a:bodyPr wrap="square">
+          <a:bodyPr wrap="square" anchor="ctr">
             <a:spAutoFit/>
           </a:bodyPr>
           <a:lstStyle/>
@@ -20021,8 +19688,8 @@
         </p:nvSpPr>
         <p:spPr>
           <a:xfrm>
-            <a:off x="4297680" y="164592"/>
-            <a:ext cx="1371600" cy="502920"/>
+            <a:off x="3840480" y="246888"/>
+            <a:ext cx="2011680" cy="502920"/>
           </a:xfrm>
           <a:prstGeom prst="rect">
             <a:avLst/>
@@ -20030,7 +19697,7 @@
           <a:noFill/>
         </p:spPr>
         <p:txBody>
-          <a:bodyPr wrap="square">
+          <a:bodyPr wrap="square" anchor="ctr">
             <a:spAutoFit/>
           </a:bodyPr>
           <a:lstStyle/>
@@ -20055,8 +19722,8 @@
         </p:nvSpPr>
         <p:spPr>
           <a:xfrm>
-            <a:off x="9692640" y="164592"/>
-            <a:ext cx="2194560" cy="548640"/>
+            <a:off x="6821424" y="246888"/>
+            <a:ext cx="1828800" cy="548640"/>
           </a:xfrm>
           <a:prstGeom prst="rect">
             <a:avLst/>
@@ -20064,12 +19731,11 @@
           <a:noFill/>
         </p:spPr>
         <p:txBody>
-          <a:bodyPr wrap="square">
+          <a:bodyPr wrap="square" anchor="ctr">
             <a:spAutoFit/>
           </a:bodyPr>
           <a:lstStyle/>
           <a:p>
-            <a:pPr algn="r"/>
             <a:r>
               <a:rPr sz="1050" b="1">
                 <a:solidFill>
@@ -20081,7 +19747,6 @@
             </a:r>
           </a:p>
           <a:p>
-            <a:pPr algn="r"/>
             <a:r>
               <a:rPr sz="1050">
                 <a:solidFill>
@@ -20094,44 +19759,9 @@
           </a:p>
         </p:txBody>
       </p:sp>
-      <p:cxnSp>
-        <p:nvCxnSpPr>
-          <p:cNvPr id="5" name="Connector 4"/>
-          <p:cNvCxnSpPr/>
-          <p:nvPr/>
-        </p:nvCxnSpPr>
-        <p:spPr>
-          <a:xfrm>
-            <a:off x="502920" y="749808"/>
-            <a:ext cx="11183112" cy="0"/>
-          </a:xfrm>
-          <a:prstGeom prst="bentConnector3">
-            <a:avLst/>
-          </a:prstGeom>
-          <a:ln w="12700">
-            <a:solidFill>
-              <a:srgbClr val="0F2C68"/>
-            </a:solidFill>
-          </a:ln>
-        </p:spPr>
-        <p:style>
-          <a:lnRef idx="2">
-            <a:schemeClr val="accent1"/>
-          </a:lnRef>
-          <a:fillRef idx="0">
-            <a:schemeClr val="accent1"/>
-          </a:fillRef>
-          <a:effectRef idx="1">
-            <a:schemeClr val="accent1"/>
-          </a:effectRef>
-          <a:fontRef idx="minor">
-            <a:schemeClr val="tx1"/>
-          </a:fontRef>
-        </p:style>
-      </p:cxnSp>
       <p:sp>
         <p:nvSpPr>
-          <p:cNvPr id="6" name="Rectangle 5"/>
+          <p:cNvPr id="5" name="Rectangle 4"/>
           <p:cNvSpPr/>
           <p:nvPr/>
         </p:nvSpPr>
@@ -20196,7 +19826,7 @@
       </p:sp>
       <p:sp>
         <p:nvSpPr>
-          <p:cNvPr id="7" name="TextBox 6"/>
+          <p:cNvPr id="6" name="TextBox 5"/>
           <p:cNvSpPr txBox="1"/>
           <p:nvPr/>
         </p:nvSpPr>
@@ -20279,8 +19909,8 @@
         </p:nvSpPr>
         <p:spPr>
           <a:xfrm>
-            <a:off x="502920" y="164592"/>
-            <a:ext cx="3291840" cy="502920"/>
+            <a:off x="987552" y="246888"/>
+            <a:ext cx="2743200" cy="502920"/>
           </a:xfrm>
           <a:prstGeom prst="rect">
             <a:avLst/>
@@ -20288,7 +19918,7 @@
           <a:noFill/>
         </p:spPr>
         <p:txBody>
-          <a:bodyPr wrap="square">
+          <a:bodyPr wrap="square" anchor="ctr">
             <a:spAutoFit/>
           </a:bodyPr>
           <a:lstStyle/>
@@ -20313,8 +19943,8 @@
         </p:nvSpPr>
         <p:spPr>
           <a:xfrm>
-            <a:off x="4297680" y="164592"/>
-            <a:ext cx="1371600" cy="502920"/>
+            <a:off x="3840480" y="246888"/>
+            <a:ext cx="2011680" cy="502920"/>
           </a:xfrm>
           <a:prstGeom prst="rect">
             <a:avLst/>
@@ -20322,7 +19952,7 @@
           <a:noFill/>
         </p:spPr>
         <p:txBody>
-          <a:bodyPr wrap="square">
+          <a:bodyPr wrap="square" anchor="ctr">
             <a:spAutoFit/>
           </a:bodyPr>
           <a:lstStyle/>
@@ -20347,8 +19977,53 @@
         </p:nvSpPr>
         <p:spPr>
           <a:xfrm>
-            <a:off x="9692640" y="164592"/>
-            <a:ext cx="2194560" cy="548640"/>
+            <a:off x="6821424" y="246888"/>
+            <a:ext cx="1828800" cy="548640"/>
+          </a:xfrm>
+          <a:prstGeom prst="rect">
+            <a:avLst/>
+          </a:prstGeom>
+          <a:noFill/>
+        </p:spPr>
+        <p:txBody>
+          <a:bodyPr wrap="square" anchor="ctr">
+            <a:spAutoFit/>
+          </a:bodyPr>
+          <a:lstStyle/>
+          <a:p>
+            <a:r>
+              <a:rPr sz="1050" b="1">
+                <a:solidFill>
+                  <a:srgbClr val="0F2C68"/>
+                </a:solidFill>
+                <a:latin typeface="HSE Sans"/>
+              </a:rPr>
+              <a:t>Защита курсовой</a:t>
+            </a:r>
+          </a:p>
+          <a:p>
+            <a:r>
+              <a:rPr sz="1050">
+                <a:solidFill>
+                  <a:srgbClr val="595959"/>
+                </a:solidFill>
+                <a:latin typeface="HSE Sans"/>
+              </a:rPr>
+              <a:t>Пермь, 2026</a:t>
+            </a:r>
+          </a:p>
+        </p:txBody>
+      </p:sp>
+      <p:sp>
+        <p:nvSpPr>
+          <p:cNvPr id="5" name="TextBox 4"/>
+          <p:cNvSpPr txBox="1"/>
+          <p:nvPr/>
+        </p:nvSpPr>
+        <p:spPr>
+          <a:xfrm>
+            <a:off x="457200" y="932688"/>
+            <a:ext cx="11247120" cy="731520"/>
           </a:xfrm>
           <a:prstGeom prst="rect">
             <a:avLst/>
@@ -20361,66 +20036,18 @@
           </a:bodyPr>
           <a:lstStyle/>
           <a:p>
-            <a:pPr algn="r"/>
-            <a:r>
-              <a:rPr sz="1050" b="1">
+            <a:r>
+              <a:rPr sz="3200" b="1">
                 <a:solidFill>
                   <a:srgbClr val="0F2C68"/>
                 </a:solidFill>
                 <a:latin typeface="HSE Sans"/>
               </a:rPr>
-              <a:t>Защита курсовой</a:t>
-            </a:r>
-          </a:p>
-          <a:p>
-            <a:pPr algn="r"/>
-            <a:r>
-              <a:rPr sz="1050">
-                <a:solidFill>
-                  <a:srgbClr val="595959"/>
-                </a:solidFill>
-                <a:latin typeface="HSE Sans"/>
-              </a:rPr>
-              <a:t>Пермь, 2026</a:t>
+              <a:t>Актуальность</a:t>
             </a:r>
           </a:p>
         </p:txBody>
       </p:sp>
-      <p:cxnSp>
-        <p:nvCxnSpPr>
-          <p:cNvPr id="5" name="Connector 4"/>
-          <p:cNvCxnSpPr/>
-          <p:nvPr/>
-        </p:nvCxnSpPr>
-        <p:spPr>
-          <a:xfrm>
-            <a:off x="502920" y="749808"/>
-            <a:ext cx="11183112" cy="0"/>
-          </a:xfrm>
-          <a:prstGeom prst="bentConnector3">
-            <a:avLst/>
-          </a:prstGeom>
-          <a:ln w="12700">
-            <a:solidFill>
-              <a:srgbClr val="0F2C68"/>
-            </a:solidFill>
-          </a:ln>
-        </p:spPr>
-        <p:style>
-          <a:lnRef idx="2">
-            <a:schemeClr val="accent1"/>
-          </a:lnRef>
-          <a:fillRef idx="0">
-            <a:schemeClr val="accent1"/>
-          </a:fillRef>
-          <a:effectRef idx="1">
-            <a:schemeClr val="accent1"/>
-          </a:effectRef>
-          <a:fontRef idx="minor">
-            <a:schemeClr val="tx1"/>
-          </a:fontRef>
-        </p:style>
-      </p:cxnSp>
       <p:sp>
         <p:nvSpPr>
           <p:cNvPr id="6" name="TextBox 5"/>
@@ -20429,40 +20056,6 @@
         </p:nvSpPr>
         <p:spPr>
           <a:xfrm>
-            <a:off x="502920" y="868680"/>
-            <a:ext cx="11155680" cy="731520"/>
-          </a:xfrm>
-          <a:prstGeom prst="rect">
-            <a:avLst/>
-          </a:prstGeom>
-          <a:noFill/>
-        </p:spPr>
-        <p:txBody>
-          <a:bodyPr wrap="square">
-            <a:spAutoFit/>
-          </a:bodyPr>
-          <a:lstStyle/>
-          <a:p>
-            <a:r>
-              <a:rPr sz="3200" b="1">
-                <a:solidFill>
-                  <a:srgbClr val="0F2C68"/>
-                </a:solidFill>
-                <a:latin typeface="HSE Sans"/>
-              </a:rPr>
-              <a:t>Актуальность</a:t>
-            </a:r>
-          </a:p>
-        </p:txBody>
-      </p:sp>
-      <p:sp>
-        <p:nvSpPr>
-          <p:cNvPr id="7" name="TextBox 6"/>
-          <p:cNvSpPr txBox="1"/>
-          <p:nvPr/>
-        </p:nvSpPr>
-        <p:spPr>
-          <a:xfrm>
             <a:off x="548640" y="1783080"/>
             <a:ext cx="6583680" cy="4389120"/>
           </a:xfrm>
@@ -20560,7 +20153,7 @@
       </p:sp>
       <p:sp>
         <p:nvSpPr>
-          <p:cNvPr id="8" name="Rectangle 7"/>
+          <p:cNvPr id="7" name="Rectangle 6"/>
           <p:cNvSpPr/>
           <p:nvPr/>
         </p:nvSpPr>
@@ -20631,7 +20224,7 @@
       </p:sp>
       <p:sp>
         <p:nvSpPr>
-          <p:cNvPr id="9" name="Rectangle 8"/>
+          <p:cNvPr id="8" name="Rectangle 7"/>
           <p:cNvSpPr/>
           <p:nvPr/>
         </p:nvSpPr>
@@ -20702,7 +20295,7 @@
       </p:sp>
       <p:sp>
         <p:nvSpPr>
-          <p:cNvPr id="10" name="Rectangle 9"/>
+          <p:cNvPr id="9" name="Rectangle 8"/>
           <p:cNvSpPr/>
           <p:nvPr/>
         </p:nvSpPr>
@@ -20797,8 +20390,8 @@
         </p:nvSpPr>
         <p:spPr>
           <a:xfrm>
-            <a:off x="502920" y="164592"/>
-            <a:ext cx="3291840" cy="502920"/>
+            <a:off x="987552" y="246888"/>
+            <a:ext cx="2743200" cy="502920"/>
           </a:xfrm>
           <a:prstGeom prst="rect">
             <a:avLst/>
@@ -20806,7 +20399,7 @@
           <a:noFill/>
         </p:spPr>
         <p:txBody>
-          <a:bodyPr wrap="square">
+          <a:bodyPr wrap="square" anchor="ctr">
             <a:spAutoFit/>
           </a:bodyPr>
           <a:lstStyle/>
@@ -20831,8 +20424,8 @@
         </p:nvSpPr>
         <p:spPr>
           <a:xfrm>
-            <a:off x="4297680" y="164592"/>
-            <a:ext cx="1371600" cy="502920"/>
+            <a:off x="3840480" y="246888"/>
+            <a:ext cx="2011680" cy="502920"/>
           </a:xfrm>
           <a:prstGeom prst="rect">
             <a:avLst/>
@@ -20840,7 +20433,7 @@
           <a:noFill/>
         </p:spPr>
         <p:txBody>
-          <a:bodyPr wrap="square">
+          <a:bodyPr wrap="square" anchor="ctr">
             <a:spAutoFit/>
           </a:bodyPr>
           <a:lstStyle/>
@@ -20865,8 +20458,53 @@
         </p:nvSpPr>
         <p:spPr>
           <a:xfrm>
-            <a:off x="9692640" y="164592"/>
-            <a:ext cx="2194560" cy="548640"/>
+            <a:off x="6821424" y="246888"/>
+            <a:ext cx="1828800" cy="548640"/>
+          </a:xfrm>
+          <a:prstGeom prst="rect">
+            <a:avLst/>
+          </a:prstGeom>
+          <a:noFill/>
+        </p:spPr>
+        <p:txBody>
+          <a:bodyPr wrap="square" anchor="ctr">
+            <a:spAutoFit/>
+          </a:bodyPr>
+          <a:lstStyle/>
+          <a:p>
+            <a:r>
+              <a:rPr sz="1050" b="1">
+                <a:solidFill>
+                  <a:srgbClr val="0F2C68"/>
+                </a:solidFill>
+                <a:latin typeface="HSE Sans"/>
+              </a:rPr>
+              <a:t>Защита курсовой</a:t>
+            </a:r>
+          </a:p>
+          <a:p>
+            <a:r>
+              <a:rPr sz="1050">
+                <a:solidFill>
+                  <a:srgbClr val="595959"/>
+                </a:solidFill>
+                <a:latin typeface="HSE Sans"/>
+              </a:rPr>
+              <a:t>Пермь, 2026</a:t>
+            </a:r>
+          </a:p>
+        </p:txBody>
+      </p:sp>
+      <p:sp>
+        <p:nvSpPr>
+          <p:cNvPr id="5" name="TextBox 4"/>
+          <p:cNvSpPr txBox="1"/>
+          <p:nvPr/>
+        </p:nvSpPr>
+        <p:spPr>
+          <a:xfrm>
+            <a:off x="457200" y="932688"/>
+            <a:ext cx="11247120" cy="731520"/>
           </a:xfrm>
           <a:prstGeom prst="rect">
             <a:avLst/>
@@ -20879,88 +20517,6 @@
           </a:bodyPr>
           <a:lstStyle/>
           <a:p>
-            <a:pPr algn="r"/>
-            <a:r>
-              <a:rPr sz="1050" b="1">
-                <a:solidFill>
-                  <a:srgbClr val="0F2C68"/>
-                </a:solidFill>
-                <a:latin typeface="HSE Sans"/>
-              </a:rPr>
-              <a:t>Защита курсовой</a:t>
-            </a:r>
-          </a:p>
-          <a:p>
-            <a:pPr algn="r"/>
-            <a:r>
-              <a:rPr sz="1050">
-                <a:solidFill>
-                  <a:srgbClr val="595959"/>
-                </a:solidFill>
-                <a:latin typeface="HSE Sans"/>
-              </a:rPr>
-              <a:t>Пермь, 2026</a:t>
-            </a:r>
-          </a:p>
-        </p:txBody>
-      </p:sp>
-      <p:cxnSp>
-        <p:nvCxnSpPr>
-          <p:cNvPr id="5" name="Connector 4"/>
-          <p:cNvCxnSpPr/>
-          <p:nvPr/>
-        </p:nvCxnSpPr>
-        <p:spPr>
-          <a:xfrm>
-            <a:off x="502920" y="749808"/>
-            <a:ext cx="11183112" cy="0"/>
-          </a:xfrm>
-          <a:prstGeom prst="bentConnector3">
-            <a:avLst/>
-          </a:prstGeom>
-          <a:ln w="12700">
-            <a:solidFill>
-              <a:srgbClr val="0F2C68"/>
-            </a:solidFill>
-          </a:ln>
-        </p:spPr>
-        <p:style>
-          <a:lnRef idx="2">
-            <a:schemeClr val="accent1"/>
-          </a:lnRef>
-          <a:fillRef idx="0">
-            <a:schemeClr val="accent1"/>
-          </a:fillRef>
-          <a:effectRef idx="1">
-            <a:schemeClr val="accent1"/>
-          </a:effectRef>
-          <a:fontRef idx="minor">
-            <a:schemeClr val="tx1"/>
-          </a:fontRef>
-        </p:style>
-      </p:cxnSp>
-      <p:sp>
-        <p:nvSpPr>
-          <p:cNvPr id="6" name="TextBox 5"/>
-          <p:cNvSpPr txBox="1"/>
-          <p:nvPr/>
-        </p:nvSpPr>
-        <p:spPr>
-          <a:xfrm>
-            <a:off x="502920" y="868680"/>
-            <a:ext cx="11155680" cy="731520"/>
-          </a:xfrm>
-          <a:prstGeom prst="rect">
-            <a:avLst/>
-          </a:prstGeom>
-          <a:noFill/>
-        </p:spPr>
-        <p:txBody>
-          <a:bodyPr wrap="square">
-            <a:spAutoFit/>
-          </a:bodyPr>
-          <a:lstStyle/>
-          <a:p>
             <a:r>
               <a:rPr sz="3200" b="1">
                 <a:solidFill>
@@ -20975,7 +20531,7 @@
       </p:sp>
       <p:sp>
         <p:nvSpPr>
-          <p:cNvPr id="7" name="Rectangle 6"/>
+          <p:cNvPr id="6" name="Rectangle 5"/>
           <p:cNvSpPr/>
           <p:nvPr/>
         </p:nvSpPr>
@@ -21046,7 +20602,7 @@
       </p:sp>
       <p:sp>
         <p:nvSpPr>
-          <p:cNvPr id="8" name="Rectangle 7"/>
+          <p:cNvPr id="7" name="Rectangle 6"/>
           <p:cNvSpPr/>
           <p:nvPr/>
         </p:nvSpPr>
@@ -21141,8 +20697,8 @@
         </p:nvSpPr>
         <p:spPr>
           <a:xfrm>
-            <a:off x="502920" y="164592"/>
-            <a:ext cx="3291840" cy="502920"/>
+            <a:off x="987552" y="246888"/>
+            <a:ext cx="2743200" cy="502920"/>
           </a:xfrm>
           <a:prstGeom prst="rect">
             <a:avLst/>
@@ -21150,7 +20706,7 @@
           <a:noFill/>
         </p:spPr>
         <p:txBody>
-          <a:bodyPr wrap="square">
+          <a:bodyPr wrap="square" anchor="ctr">
             <a:spAutoFit/>
           </a:bodyPr>
           <a:lstStyle/>
@@ -21175,8 +20731,8 @@
         </p:nvSpPr>
         <p:spPr>
           <a:xfrm>
-            <a:off x="4297680" y="164592"/>
-            <a:ext cx="1371600" cy="502920"/>
+            <a:off x="3840480" y="246888"/>
+            <a:ext cx="2011680" cy="502920"/>
           </a:xfrm>
           <a:prstGeom prst="rect">
             <a:avLst/>
@@ -21184,7 +20740,7 @@
           <a:noFill/>
         </p:spPr>
         <p:txBody>
-          <a:bodyPr wrap="square">
+          <a:bodyPr wrap="square" anchor="ctr">
             <a:spAutoFit/>
           </a:bodyPr>
           <a:lstStyle/>
@@ -21209,8 +20765,53 @@
         </p:nvSpPr>
         <p:spPr>
           <a:xfrm>
-            <a:off x="9692640" y="164592"/>
-            <a:ext cx="2194560" cy="548640"/>
+            <a:off x="6821424" y="246888"/>
+            <a:ext cx="1828800" cy="548640"/>
+          </a:xfrm>
+          <a:prstGeom prst="rect">
+            <a:avLst/>
+          </a:prstGeom>
+          <a:noFill/>
+        </p:spPr>
+        <p:txBody>
+          <a:bodyPr wrap="square" anchor="ctr">
+            <a:spAutoFit/>
+          </a:bodyPr>
+          <a:lstStyle/>
+          <a:p>
+            <a:r>
+              <a:rPr sz="1050" b="1">
+                <a:solidFill>
+                  <a:srgbClr val="0F2C68"/>
+                </a:solidFill>
+                <a:latin typeface="HSE Sans"/>
+              </a:rPr>
+              <a:t>Защита курсовой</a:t>
+            </a:r>
+          </a:p>
+          <a:p>
+            <a:r>
+              <a:rPr sz="1050">
+                <a:solidFill>
+                  <a:srgbClr val="595959"/>
+                </a:solidFill>
+                <a:latin typeface="HSE Sans"/>
+              </a:rPr>
+              <a:t>Пермь, 2026</a:t>
+            </a:r>
+          </a:p>
+        </p:txBody>
+      </p:sp>
+      <p:sp>
+        <p:nvSpPr>
+          <p:cNvPr id="5" name="TextBox 4"/>
+          <p:cNvSpPr txBox="1"/>
+          <p:nvPr/>
+        </p:nvSpPr>
+        <p:spPr>
+          <a:xfrm>
+            <a:off x="457200" y="932688"/>
+            <a:ext cx="11247120" cy="731520"/>
           </a:xfrm>
           <a:prstGeom prst="rect">
             <a:avLst/>
@@ -21223,88 +20824,6 @@
           </a:bodyPr>
           <a:lstStyle/>
           <a:p>
-            <a:pPr algn="r"/>
-            <a:r>
-              <a:rPr sz="1050" b="1">
-                <a:solidFill>
-                  <a:srgbClr val="0F2C68"/>
-                </a:solidFill>
-                <a:latin typeface="HSE Sans"/>
-              </a:rPr>
-              <a:t>Защита курсовой</a:t>
-            </a:r>
-          </a:p>
-          <a:p>
-            <a:pPr algn="r"/>
-            <a:r>
-              <a:rPr sz="1050">
-                <a:solidFill>
-                  <a:srgbClr val="595959"/>
-                </a:solidFill>
-                <a:latin typeface="HSE Sans"/>
-              </a:rPr>
-              <a:t>Пермь, 2026</a:t>
-            </a:r>
-          </a:p>
-        </p:txBody>
-      </p:sp>
-      <p:cxnSp>
-        <p:nvCxnSpPr>
-          <p:cNvPr id="5" name="Connector 4"/>
-          <p:cNvCxnSpPr/>
-          <p:nvPr/>
-        </p:nvCxnSpPr>
-        <p:spPr>
-          <a:xfrm>
-            <a:off x="502920" y="749808"/>
-            <a:ext cx="11183112" cy="0"/>
-          </a:xfrm>
-          <a:prstGeom prst="bentConnector3">
-            <a:avLst/>
-          </a:prstGeom>
-          <a:ln w="12700">
-            <a:solidFill>
-              <a:srgbClr val="0F2C68"/>
-            </a:solidFill>
-          </a:ln>
-        </p:spPr>
-        <p:style>
-          <a:lnRef idx="2">
-            <a:schemeClr val="accent1"/>
-          </a:lnRef>
-          <a:fillRef idx="0">
-            <a:schemeClr val="accent1"/>
-          </a:fillRef>
-          <a:effectRef idx="1">
-            <a:schemeClr val="accent1"/>
-          </a:effectRef>
-          <a:fontRef idx="minor">
-            <a:schemeClr val="tx1"/>
-          </a:fontRef>
-        </p:style>
-      </p:cxnSp>
-      <p:sp>
-        <p:nvSpPr>
-          <p:cNvPr id="6" name="TextBox 5"/>
-          <p:cNvSpPr txBox="1"/>
-          <p:nvPr/>
-        </p:nvSpPr>
-        <p:spPr>
-          <a:xfrm>
-            <a:off x="502920" y="868680"/>
-            <a:ext cx="11155680" cy="731520"/>
-          </a:xfrm>
-          <a:prstGeom prst="rect">
-            <a:avLst/>
-          </a:prstGeom>
-          <a:noFill/>
-        </p:spPr>
-        <p:txBody>
-          <a:bodyPr wrap="square">
-            <a:spAutoFit/>
-          </a:bodyPr>
-          <a:lstStyle/>
-          <a:p>
             <a:r>
               <a:rPr sz="3200" b="1">
                 <a:solidFill>
@@ -21319,14 +20838,14 @@
       </p:sp>
       <p:sp>
         <p:nvSpPr>
-          <p:cNvPr id="7" name="Rectangle 6"/>
+          <p:cNvPr id="6" name="Rectangle 5"/>
           <p:cNvSpPr/>
           <p:nvPr/>
         </p:nvSpPr>
         <p:spPr>
           <a:xfrm>
             <a:off x="548640" y="1783080"/>
-            <a:ext cx="5029200" cy="4480560"/>
+            <a:ext cx="5029200" cy="3017520"/>
           </a:xfrm>
           <a:prstGeom prst="rect">
             <a:avLst/>
@@ -21390,7 +20909,7 @@
       </p:sp>
       <p:sp>
         <p:nvSpPr>
-          <p:cNvPr id="8" name="TextBox 7"/>
+          <p:cNvPr id="7" name="TextBox 6"/>
           <p:cNvSpPr txBox="1"/>
           <p:nvPr/>
         </p:nvSpPr>
@@ -21509,7 +21028,7 @@
       </p:sp>
       <p:sp>
         <p:nvSpPr>
-          <p:cNvPr id="9" name="TextBox 8"/>
+          <p:cNvPr id="8" name="TextBox 7"/>
           <p:cNvSpPr txBox="1"/>
           <p:nvPr/>
         </p:nvSpPr>
@@ -21567,8 +21086,8 @@
         </p:nvSpPr>
         <p:spPr>
           <a:xfrm>
-            <a:off x="502920" y="164592"/>
-            <a:ext cx="3291840" cy="502920"/>
+            <a:off x="987552" y="246888"/>
+            <a:ext cx="2743200" cy="502920"/>
           </a:xfrm>
           <a:prstGeom prst="rect">
             <a:avLst/>
@@ -21576,7 +21095,7 @@
           <a:noFill/>
         </p:spPr>
         <p:txBody>
-          <a:bodyPr wrap="square">
+          <a:bodyPr wrap="square" anchor="ctr">
             <a:spAutoFit/>
           </a:bodyPr>
           <a:lstStyle/>
@@ -21601,8 +21120,8 @@
         </p:nvSpPr>
         <p:spPr>
           <a:xfrm>
-            <a:off x="4297680" y="164592"/>
-            <a:ext cx="1371600" cy="502920"/>
+            <a:off x="3840480" y="246888"/>
+            <a:ext cx="2011680" cy="502920"/>
           </a:xfrm>
           <a:prstGeom prst="rect">
             <a:avLst/>
@@ -21610,7 +21129,7 @@
           <a:noFill/>
         </p:spPr>
         <p:txBody>
-          <a:bodyPr wrap="square">
+          <a:bodyPr wrap="square" anchor="ctr">
             <a:spAutoFit/>
           </a:bodyPr>
           <a:lstStyle/>
@@ -21635,8 +21154,8 @@
         </p:nvSpPr>
         <p:spPr>
           <a:xfrm>
-            <a:off x="9692640" y="164592"/>
-            <a:ext cx="2194560" cy="548640"/>
+            <a:off x="6821424" y="246888"/>
+            <a:ext cx="1828800" cy="548640"/>
           </a:xfrm>
           <a:prstGeom prst="rect">
             <a:avLst/>
@@ -21644,12 +21163,11 @@
           <a:noFill/>
         </p:spPr>
         <p:txBody>
-          <a:bodyPr wrap="square">
+          <a:bodyPr wrap="square" anchor="ctr">
             <a:spAutoFit/>
           </a:bodyPr>
           <a:lstStyle/>
           <a:p>
-            <a:pPr algn="r"/>
             <a:r>
               <a:rPr sz="1050" b="1">
                 <a:solidFill>
@@ -21661,7 +21179,6 @@
             </a:r>
           </a:p>
           <a:p>
-            <a:pPr algn="r"/>
             <a:r>
               <a:rPr sz="1050">
                 <a:solidFill>
@@ -21674,51 +21191,16 @@
           </a:p>
         </p:txBody>
       </p:sp>
-      <p:cxnSp>
-        <p:nvCxnSpPr>
-          <p:cNvPr id="5" name="Connector 4"/>
-          <p:cNvCxnSpPr/>
-          <p:nvPr/>
-        </p:nvCxnSpPr>
-        <p:spPr>
-          <a:xfrm>
-            <a:off x="502920" y="749808"/>
-            <a:ext cx="11183112" cy="0"/>
-          </a:xfrm>
-          <a:prstGeom prst="bentConnector3">
-            <a:avLst/>
-          </a:prstGeom>
-          <a:ln w="12700">
-            <a:solidFill>
-              <a:srgbClr val="0F2C68"/>
-            </a:solidFill>
-          </a:ln>
-        </p:spPr>
-        <p:style>
-          <a:lnRef idx="2">
-            <a:schemeClr val="accent1"/>
-          </a:lnRef>
-          <a:fillRef idx="0">
-            <a:schemeClr val="accent1"/>
-          </a:fillRef>
-          <a:effectRef idx="1">
-            <a:schemeClr val="accent1"/>
-          </a:effectRef>
-          <a:fontRef idx="minor">
-            <a:schemeClr val="tx1"/>
-          </a:fontRef>
-        </p:style>
-      </p:cxnSp>
       <p:sp>
         <p:nvSpPr>
-          <p:cNvPr id="6" name="Oval 5"/>
+          <p:cNvPr id="5" name="Oval 4"/>
           <p:cNvSpPr/>
           <p:nvPr/>
         </p:nvSpPr>
         <p:spPr>
           <a:xfrm>
-            <a:off x="4480560" y="2788920"/>
-            <a:ext cx="3246120" cy="1371600"/>
+            <a:off x="4041648" y="2788920"/>
+            <a:ext cx="4114800" cy="1371600"/>
           </a:xfrm>
           <a:prstGeom prst="ellipse">
             <a:avLst/>
@@ -21753,7 +21235,7 @@
           <a:p>
             <a:pPr algn="ctr"/>
             <a:r>
-              <a:rPr sz="2800" b="1">
+              <a:rPr sz="2700" b="1">
                 <a:solidFill>
                   <a:srgbClr val="FFFFFF"/>
                 </a:solidFill>
@@ -21766,7 +21248,7 @@
       </p:sp>
       <p:sp>
         <p:nvSpPr>
-          <p:cNvPr id="7" name="Oval 6"/>
+          <p:cNvPr id="6" name="Oval 5"/>
           <p:cNvSpPr/>
           <p:nvPr/>
         </p:nvSpPr>
@@ -21821,7 +21303,7 @@
       </p:sp>
       <p:sp>
         <p:nvSpPr>
-          <p:cNvPr id="8" name="Oval 7"/>
+          <p:cNvPr id="7" name="Oval 6"/>
           <p:cNvSpPr/>
           <p:nvPr/>
         </p:nvSpPr>
@@ -21876,7 +21358,7 @@
       </p:sp>
       <p:sp>
         <p:nvSpPr>
-          <p:cNvPr id="9" name="Oval 8"/>
+          <p:cNvPr id="8" name="Oval 7"/>
           <p:cNvSpPr/>
           <p:nvPr/>
         </p:nvSpPr>
@@ -21931,7 +21413,7 @@
       </p:sp>
       <p:sp>
         <p:nvSpPr>
-          <p:cNvPr id="10" name="Oval 9"/>
+          <p:cNvPr id="9" name="Oval 8"/>
           <p:cNvSpPr/>
           <p:nvPr/>
         </p:nvSpPr>
@@ -21986,7 +21468,7 @@
       </p:sp>
       <p:sp>
         <p:nvSpPr>
-          <p:cNvPr id="11" name="Oval 10"/>
+          <p:cNvPr id="10" name="Oval 9"/>
           <p:cNvSpPr/>
           <p:nvPr/>
         </p:nvSpPr>
@@ -22065,8 +21547,8 @@
         </p:nvSpPr>
         <p:spPr>
           <a:xfrm>
-            <a:off x="502920" y="164592"/>
-            <a:ext cx="3291840" cy="502920"/>
+            <a:off x="987552" y="246888"/>
+            <a:ext cx="2743200" cy="502920"/>
           </a:xfrm>
           <a:prstGeom prst="rect">
             <a:avLst/>
@@ -22074,7 +21556,7 @@
           <a:noFill/>
         </p:spPr>
         <p:txBody>
-          <a:bodyPr wrap="square">
+          <a:bodyPr wrap="square" anchor="ctr">
             <a:spAutoFit/>
           </a:bodyPr>
           <a:lstStyle/>
@@ -22099,8 +21581,8 @@
         </p:nvSpPr>
         <p:spPr>
           <a:xfrm>
-            <a:off x="4297680" y="164592"/>
-            <a:ext cx="1371600" cy="502920"/>
+            <a:off x="3840480" y="246888"/>
+            <a:ext cx="2011680" cy="502920"/>
           </a:xfrm>
           <a:prstGeom prst="rect">
             <a:avLst/>
@@ -22108,7 +21590,7 @@
           <a:noFill/>
         </p:spPr>
         <p:txBody>
-          <a:bodyPr wrap="square">
+          <a:bodyPr wrap="square" anchor="ctr">
             <a:spAutoFit/>
           </a:bodyPr>
           <a:lstStyle/>
@@ -22133,8 +21615,53 @@
         </p:nvSpPr>
         <p:spPr>
           <a:xfrm>
-            <a:off x="9692640" y="164592"/>
-            <a:ext cx="2194560" cy="548640"/>
+            <a:off x="6821424" y="246888"/>
+            <a:ext cx="1828800" cy="548640"/>
+          </a:xfrm>
+          <a:prstGeom prst="rect">
+            <a:avLst/>
+          </a:prstGeom>
+          <a:noFill/>
+        </p:spPr>
+        <p:txBody>
+          <a:bodyPr wrap="square" anchor="ctr">
+            <a:spAutoFit/>
+          </a:bodyPr>
+          <a:lstStyle/>
+          <a:p>
+            <a:r>
+              <a:rPr sz="1050" b="1">
+                <a:solidFill>
+                  <a:srgbClr val="0F2C68"/>
+                </a:solidFill>
+                <a:latin typeface="HSE Sans"/>
+              </a:rPr>
+              <a:t>Защита курсовой</a:t>
+            </a:r>
+          </a:p>
+          <a:p>
+            <a:r>
+              <a:rPr sz="1050">
+                <a:solidFill>
+                  <a:srgbClr val="595959"/>
+                </a:solidFill>
+                <a:latin typeface="HSE Sans"/>
+              </a:rPr>
+              <a:t>Пермь, 2026</a:t>
+            </a:r>
+          </a:p>
+        </p:txBody>
+      </p:sp>
+      <p:sp>
+        <p:nvSpPr>
+          <p:cNvPr id="5" name="TextBox 4"/>
+          <p:cNvSpPr txBox="1"/>
+          <p:nvPr/>
+        </p:nvSpPr>
+        <p:spPr>
+          <a:xfrm>
+            <a:off x="457200" y="932688"/>
+            <a:ext cx="11247120" cy="731520"/>
           </a:xfrm>
           <a:prstGeom prst="rect">
             <a:avLst/>
@@ -22147,88 +21674,6 @@
           </a:bodyPr>
           <a:lstStyle/>
           <a:p>
-            <a:pPr algn="r"/>
-            <a:r>
-              <a:rPr sz="1050" b="1">
-                <a:solidFill>
-                  <a:srgbClr val="0F2C68"/>
-                </a:solidFill>
-                <a:latin typeface="HSE Sans"/>
-              </a:rPr>
-              <a:t>Защита курсовой</a:t>
-            </a:r>
-          </a:p>
-          <a:p>
-            <a:pPr algn="r"/>
-            <a:r>
-              <a:rPr sz="1050">
-                <a:solidFill>
-                  <a:srgbClr val="595959"/>
-                </a:solidFill>
-                <a:latin typeface="HSE Sans"/>
-              </a:rPr>
-              <a:t>Пермь, 2026</a:t>
-            </a:r>
-          </a:p>
-        </p:txBody>
-      </p:sp>
-      <p:cxnSp>
-        <p:nvCxnSpPr>
-          <p:cNvPr id="5" name="Connector 4"/>
-          <p:cNvCxnSpPr/>
-          <p:nvPr/>
-        </p:nvCxnSpPr>
-        <p:spPr>
-          <a:xfrm>
-            <a:off x="502920" y="749808"/>
-            <a:ext cx="11183112" cy="0"/>
-          </a:xfrm>
-          <a:prstGeom prst="bentConnector3">
-            <a:avLst/>
-          </a:prstGeom>
-          <a:ln w="12700">
-            <a:solidFill>
-              <a:srgbClr val="0F2C68"/>
-            </a:solidFill>
-          </a:ln>
-        </p:spPr>
-        <p:style>
-          <a:lnRef idx="2">
-            <a:schemeClr val="accent1"/>
-          </a:lnRef>
-          <a:fillRef idx="0">
-            <a:schemeClr val="accent1"/>
-          </a:fillRef>
-          <a:effectRef idx="1">
-            <a:schemeClr val="accent1"/>
-          </a:effectRef>
-          <a:fontRef idx="minor">
-            <a:schemeClr val="tx1"/>
-          </a:fontRef>
-        </p:style>
-      </p:cxnSp>
-      <p:sp>
-        <p:nvSpPr>
-          <p:cNvPr id="6" name="TextBox 5"/>
-          <p:cNvSpPr txBox="1"/>
-          <p:nvPr/>
-        </p:nvSpPr>
-        <p:spPr>
-          <a:xfrm>
-            <a:off x="502920" y="868680"/>
-            <a:ext cx="11155680" cy="731520"/>
-          </a:xfrm>
-          <a:prstGeom prst="rect">
-            <a:avLst/>
-          </a:prstGeom>
-          <a:noFill/>
-        </p:spPr>
-        <p:txBody>
-          <a:bodyPr wrap="square">
-            <a:spAutoFit/>
-          </a:bodyPr>
-          <a:lstStyle/>
-          <a:p>
             <a:r>
               <a:rPr sz="3200" b="1">
                 <a:solidFill>
@@ -22243,7 +21688,7 @@
       </p:sp>
       <p:graphicFrame>
         <p:nvGraphicFramePr>
-          <p:cNvPr id="7" name="Table 6"/>
+          <p:cNvPr id="6" name="Table 5"/>
           <p:cNvGraphicFramePr>
             <a:graphicFrameLocks noGrp="1"/>
           </p:cNvGraphicFramePr>
@@ -22866,7 +22311,7 @@
       </p:graphicFrame>
       <p:sp>
         <p:nvSpPr>
-          <p:cNvPr id="8" name="TextBox 7"/>
+          <p:cNvPr id="7" name="TextBox 6"/>
           <p:cNvSpPr txBox="1"/>
           <p:nvPr/>
         </p:nvSpPr>
@@ -22925,8 +22370,8 @@
         </p:nvSpPr>
         <p:spPr>
           <a:xfrm>
-            <a:off x="502920" y="164592"/>
-            <a:ext cx="3291840" cy="502920"/>
+            <a:off x="987552" y="246888"/>
+            <a:ext cx="2743200" cy="502920"/>
           </a:xfrm>
           <a:prstGeom prst="rect">
             <a:avLst/>
@@ -22934,7 +22379,7 @@
           <a:noFill/>
         </p:spPr>
         <p:txBody>
-          <a:bodyPr wrap="square">
+          <a:bodyPr wrap="square" anchor="ctr">
             <a:spAutoFit/>
           </a:bodyPr>
           <a:lstStyle/>
@@ -22959,8 +22404,8 @@
         </p:nvSpPr>
         <p:spPr>
           <a:xfrm>
-            <a:off x="4297680" y="164592"/>
-            <a:ext cx="1371600" cy="502920"/>
+            <a:off x="3840480" y="246888"/>
+            <a:ext cx="2011680" cy="502920"/>
           </a:xfrm>
           <a:prstGeom prst="rect">
             <a:avLst/>
@@ -22968,7 +22413,7 @@
           <a:noFill/>
         </p:spPr>
         <p:txBody>
-          <a:bodyPr wrap="square">
+          <a:bodyPr wrap="square" anchor="ctr">
             <a:spAutoFit/>
           </a:bodyPr>
           <a:lstStyle/>
@@ -22993,8 +22438,53 @@
         </p:nvSpPr>
         <p:spPr>
           <a:xfrm>
-            <a:off x="9692640" y="164592"/>
-            <a:ext cx="2194560" cy="548640"/>
+            <a:off x="6821424" y="246888"/>
+            <a:ext cx="1828800" cy="548640"/>
+          </a:xfrm>
+          <a:prstGeom prst="rect">
+            <a:avLst/>
+          </a:prstGeom>
+          <a:noFill/>
+        </p:spPr>
+        <p:txBody>
+          <a:bodyPr wrap="square" anchor="ctr">
+            <a:spAutoFit/>
+          </a:bodyPr>
+          <a:lstStyle/>
+          <a:p>
+            <a:r>
+              <a:rPr sz="1050" b="1">
+                <a:solidFill>
+                  <a:srgbClr val="0F2C68"/>
+                </a:solidFill>
+                <a:latin typeface="HSE Sans"/>
+              </a:rPr>
+              <a:t>Защита курсовой</a:t>
+            </a:r>
+          </a:p>
+          <a:p>
+            <a:r>
+              <a:rPr sz="1050">
+                <a:solidFill>
+                  <a:srgbClr val="595959"/>
+                </a:solidFill>
+                <a:latin typeface="HSE Sans"/>
+              </a:rPr>
+              <a:t>Пермь, 2026</a:t>
+            </a:r>
+          </a:p>
+        </p:txBody>
+      </p:sp>
+      <p:sp>
+        <p:nvSpPr>
+          <p:cNvPr id="5" name="TextBox 4"/>
+          <p:cNvSpPr txBox="1"/>
+          <p:nvPr/>
+        </p:nvSpPr>
+        <p:spPr>
+          <a:xfrm>
+            <a:off x="457200" y="932688"/>
+            <a:ext cx="11247120" cy="731520"/>
           </a:xfrm>
           <a:prstGeom prst="rect">
             <a:avLst/>
@@ -23007,88 +22497,6 @@
           </a:bodyPr>
           <a:lstStyle/>
           <a:p>
-            <a:pPr algn="r"/>
-            <a:r>
-              <a:rPr sz="1050" b="1">
-                <a:solidFill>
-                  <a:srgbClr val="0F2C68"/>
-                </a:solidFill>
-                <a:latin typeface="HSE Sans"/>
-              </a:rPr>
-              <a:t>Защита курсовой</a:t>
-            </a:r>
-          </a:p>
-          <a:p>
-            <a:pPr algn="r"/>
-            <a:r>
-              <a:rPr sz="1050">
-                <a:solidFill>
-                  <a:srgbClr val="595959"/>
-                </a:solidFill>
-                <a:latin typeface="HSE Sans"/>
-              </a:rPr>
-              <a:t>Пермь, 2026</a:t>
-            </a:r>
-          </a:p>
-        </p:txBody>
-      </p:sp>
-      <p:cxnSp>
-        <p:nvCxnSpPr>
-          <p:cNvPr id="5" name="Connector 4"/>
-          <p:cNvCxnSpPr/>
-          <p:nvPr/>
-        </p:nvCxnSpPr>
-        <p:spPr>
-          <a:xfrm>
-            <a:off x="502920" y="749808"/>
-            <a:ext cx="11183112" cy="0"/>
-          </a:xfrm>
-          <a:prstGeom prst="bentConnector3">
-            <a:avLst/>
-          </a:prstGeom>
-          <a:ln w="12700">
-            <a:solidFill>
-              <a:srgbClr val="0F2C68"/>
-            </a:solidFill>
-          </a:ln>
-        </p:spPr>
-        <p:style>
-          <a:lnRef idx="2">
-            <a:schemeClr val="accent1"/>
-          </a:lnRef>
-          <a:fillRef idx="0">
-            <a:schemeClr val="accent1"/>
-          </a:fillRef>
-          <a:effectRef idx="1">
-            <a:schemeClr val="accent1"/>
-          </a:effectRef>
-          <a:fontRef idx="minor">
-            <a:schemeClr val="tx1"/>
-          </a:fontRef>
-        </p:style>
-      </p:cxnSp>
-      <p:sp>
-        <p:nvSpPr>
-          <p:cNvPr id="6" name="TextBox 5"/>
-          <p:cNvSpPr txBox="1"/>
-          <p:nvPr/>
-        </p:nvSpPr>
-        <p:spPr>
-          <a:xfrm>
-            <a:off x="502920" y="868680"/>
-            <a:ext cx="11155680" cy="731520"/>
-          </a:xfrm>
-          <a:prstGeom prst="rect">
-            <a:avLst/>
-          </a:prstGeom>
-          <a:noFill/>
-        </p:spPr>
-        <p:txBody>
-          <a:bodyPr wrap="square">
-            <a:spAutoFit/>
-          </a:bodyPr>
-          <a:lstStyle/>
-          <a:p>
             <a:r>
               <a:rPr sz="3200" b="1">
                 <a:solidFill>
@@ -23103,7 +22511,7 @@
       </p:sp>
       <p:pic>
         <p:nvPicPr>
-          <p:cNvPr id="7" name="Picture 6" descr="01_use_case.png"/>
+          <p:cNvPr id="6" name="Picture 5" descr="01_use_case.png"/>
           <p:cNvPicPr>
             <a:picLocks noChangeAspect="1"/>
           </p:cNvPicPr>
@@ -23127,7 +22535,7 @@
       </p:pic>
       <p:sp>
         <p:nvSpPr>
-          <p:cNvPr id="8" name="TextBox 7"/>
+          <p:cNvPr id="7" name="TextBox 6"/>
           <p:cNvSpPr txBox="1"/>
           <p:nvPr/>
         </p:nvSpPr>
@@ -23270,8 +22678,8 @@
         </p:nvSpPr>
         <p:spPr>
           <a:xfrm>
-            <a:off x="502920" y="164592"/>
-            <a:ext cx="3291840" cy="502920"/>
+            <a:off x="987552" y="246888"/>
+            <a:ext cx="2743200" cy="502920"/>
           </a:xfrm>
           <a:prstGeom prst="rect">
             <a:avLst/>
@@ -23279,7 +22687,7 @@
           <a:noFill/>
         </p:spPr>
         <p:txBody>
-          <a:bodyPr wrap="square">
+          <a:bodyPr wrap="square" anchor="ctr">
             <a:spAutoFit/>
           </a:bodyPr>
           <a:lstStyle/>
@@ -23304,8 +22712,8 @@
         </p:nvSpPr>
         <p:spPr>
           <a:xfrm>
-            <a:off x="4297680" y="164592"/>
-            <a:ext cx="1371600" cy="502920"/>
+            <a:off x="3840480" y="246888"/>
+            <a:ext cx="2011680" cy="502920"/>
           </a:xfrm>
           <a:prstGeom prst="rect">
             <a:avLst/>
@@ -23313,7 +22721,7 @@
           <a:noFill/>
         </p:spPr>
         <p:txBody>
-          <a:bodyPr wrap="square">
+          <a:bodyPr wrap="square" anchor="ctr">
             <a:spAutoFit/>
           </a:bodyPr>
           <a:lstStyle/>
@@ -23338,8 +22746,53 @@
         </p:nvSpPr>
         <p:spPr>
           <a:xfrm>
-            <a:off x="9692640" y="164592"/>
-            <a:ext cx="2194560" cy="548640"/>
+            <a:off x="6821424" y="246888"/>
+            <a:ext cx="1828800" cy="548640"/>
+          </a:xfrm>
+          <a:prstGeom prst="rect">
+            <a:avLst/>
+          </a:prstGeom>
+          <a:noFill/>
+        </p:spPr>
+        <p:txBody>
+          <a:bodyPr wrap="square" anchor="ctr">
+            <a:spAutoFit/>
+          </a:bodyPr>
+          <a:lstStyle/>
+          <a:p>
+            <a:r>
+              <a:rPr sz="1050" b="1">
+                <a:solidFill>
+                  <a:srgbClr val="0F2C68"/>
+                </a:solidFill>
+                <a:latin typeface="HSE Sans"/>
+              </a:rPr>
+              <a:t>Защита курсовой</a:t>
+            </a:r>
+          </a:p>
+          <a:p>
+            <a:r>
+              <a:rPr sz="1050">
+                <a:solidFill>
+                  <a:srgbClr val="595959"/>
+                </a:solidFill>
+                <a:latin typeface="HSE Sans"/>
+              </a:rPr>
+              <a:t>Пермь, 2026</a:t>
+            </a:r>
+          </a:p>
+        </p:txBody>
+      </p:sp>
+      <p:sp>
+        <p:nvSpPr>
+          <p:cNvPr id="5" name="TextBox 4"/>
+          <p:cNvSpPr txBox="1"/>
+          <p:nvPr/>
+        </p:nvSpPr>
+        <p:spPr>
+          <a:xfrm>
+            <a:off x="457200" y="932688"/>
+            <a:ext cx="11247120" cy="731520"/>
           </a:xfrm>
           <a:prstGeom prst="rect">
             <a:avLst/>
@@ -23352,88 +22805,6 @@
           </a:bodyPr>
           <a:lstStyle/>
           <a:p>
-            <a:pPr algn="r"/>
-            <a:r>
-              <a:rPr sz="1050" b="1">
-                <a:solidFill>
-                  <a:srgbClr val="0F2C68"/>
-                </a:solidFill>
-                <a:latin typeface="HSE Sans"/>
-              </a:rPr>
-              <a:t>Защита курсовой</a:t>
-            </a:r>
-          </a:p>
-          <a:p>
-            <a:pPr algn="r"/>
-            <a:r>
-              <a:rPr sz="1050">
-                <a:solidFill>
-                  <a:srgbClr val="595959"/>
-                </a:solidFill>
-                <a:latin typeface="HSE Sans"/>
-              </a:rPr>
-              <a:t>Пермь, 2026</a:t>
-            </a:r>
-          </a:p>
-        </p:txBody>
-      </p:sp>
-      <p:cxnSp>
-        <p:nvCxnSpPr>
-          <p:cNvPr id="5" name="Connector 4"/>
-          <p:cNvCxnSpPr/>
-          <p:nvPr/>
-        </p:nvCxnSpPr>
-        <p:spPr>
-          <a:xfrm>
-            <a:off x="502920" y="749808"/>
-            <a:ext cx="11183112" cy="0"/>
-          </a:xfrm>
-          <a:prstGeom prst="bentConnector3">
-            <a:avLst/>
-          </a:prstGeom>
-          <a:ln w="12700">
-            <a:solidFill>
-              <a:srgbClr val="0F2C68"/>
-            </a:solidFill>
-          </a:ln>
-        </p:spPr>
-        <p:style>
-          <a:lnRef idx="2">
-            <a:schemeClr val="accent1"/>
-          </a:lnRef>
-          <a:fillRef idx="0">
-            <a:schemeClr val="accent1"/>
-          </a:fillRef>
-          <a:effectRef idx="1">
-            <a:schemeClr val="accent1"/>
-          </a:effectRef>
-          <a:fontRef idx="minor">
-            <a:schemeClr val="tx1"/>
-          </a:fontRef>
-        </p:style>
-      </p:cxnSp>
-      <p:sp>
-        <p:nvSpPr>
-          <p:cNvPr id="6" name="TextBox 5"/>
-          <p:cNvSpPr txBox="1"/>
-          <p:nvPr/>
-        </p:nvSpPr>
-        <p:spPr>
-          <a:xfrm>
-            <a:off x="502920" y="868680"/>
-            <a:ext cx="11155680" cy="731520"/>
-          </a:xfrm>
-          <a:prstGeom prst="rect">
-            <a:avLst/>
-          </a:prstGeom>
-          <a:noFill/>
-        </p:spPr>
-        <p:txBody>
-          <a:bodyPr wrap="square">
-            <a:spAutoFit/>
-          </a:bodyPr>
-          <a:lstStyle/>
-          <a:p>
             <a:r>
               <a:rPr sz="3200" b="1">
                 <a:solidFill>
@@ -23448,7 +22819,7 @@
       </p:sp>
       <p:pic>
         <p:nvPicPr>
-          <p:cNvPr id="7" name="Picture 6" descr="02_business_process.png"/>
+          <p:cNvPr id="6" name="Picture 5" descr="02_business_process.png"/>
           <p:cNvPicPr>
             <a:picLocks noChangeAspect="1"/>
           </p:cNvPicPr>
@@ -23472,7 +22843,7 @@
       </p:pic>
       <p:sp>
         <p:nvSpPr>
-          <p:cNvPr id="8" name="TextBox 7"/>
+          <p:cNvPr id="7" name="TextBox 6"/>
           <p:cNvSpPr txBox="1"/>
           <p:nvPr/>
         </p:nvSpPr>
@@ -23531,8 +22902,8 @@
         </p:nvSpPr>
         <p:spPr>
           <a:xfrm>
-            <a:off x="502920" y="164592"/>
-            <a:ext cx="3291840" cy="502920"/>
+            <a:off x="987552" y="246888"/>
+            <a:ext cx="2743200" cy="502920"/>
           </a:xfrm>
           <a:prstGeom prst="rect">
             <a:avLst/>
@@ -23540,7 +22911,7 @@
           <a:noFill/>
         </p:spPr>
         <p:txBody>
-          <a:bodyPr wrap="square">
+          <a:bodyPr wrap="square" anchor="ctr">
             <a:spAutoFit/>
           </a:bodyPr>
           <a:lstStyle/>
@@ -23565,8 +22936,8 @@
         </p:nvSpPr>
         <p:spPr>
           <a:xfrm>
-            <a:off x="4297680" y="164592"/>
-            <a:ext cx="1371600" cy="502920"/>
+            <a:off x="3840480" y="246888"/>
+            <a:ext cx="2011680" cy="502920"/>
           </a:xfrm>
           <a:prstGeom prst="rect">
             <a:avLst/>
@@ -23574,7 +22945,7 @@
           <a:noFill/>
         </p:spPr>
         <p:txBody>
-          <a:bodyPr wrap="square">
+          <a:bodyPr wrap="square" anchor="ctr">
             <a:spAutoFit/>
           </a:bodyPr>
           <a:lstStyle/>
@@ -23599,8 +22970,53 @@
         </p:nvSpPr>
         <p:spPr>
           <a:xfrm>
-            <a:off x="9692640" y="164592"/>
-            <a:ext cx="2194560" cy="548640"/>
+            <a:off x="6821424" y="246888"/>
+            <a:ext cx="1828800" cy="548640"/>
+          </a:xfrm>
+          <a:prstGeom prst="rect">
+            <a:avLst/>
+          </a:prstGeom>
+          <a:noFill/>
+        </p:spPr>
+        <p:txBody>
+          <a:bodyPr wrap="square" anchor="ctr">
+            <a:spAutoFit/>
+          </a:bodyPr>
+          <a:lstStyle/>
+          <a:p>
+            <a:r>
+              <a:rPr sz="1050" b="1">
+                <a:solidFill>
+                  <a:srgbClr val="0F2C68"/>
+                </a:solidFill>
+                <a:latin typeface="HSE Sans"/>
+              </a:rPr>
+              <a:t>Защита курсовой</a:t>
+            </a:r>
+          </a:p>
+          <a:p>
+            <a:r>
+              <a:rPr sz="1050">
+                <a:solidFill>
+                  <a:srgbClr val="595959"/>
+                </a:solidFill>
+                <a:latin typeface="HSE Sans"/>
+              </a:rPr>
+              <a:t>Пермь, 2026</a:t>
+            </a:r>
+          </a:p>
+        </p:txBody>
+      </p:sp>
+      <p:sp>
+        <p:nvSpPr>
+          <p:cNvPr id="5" name="TextBox 4"/>
+          <p:cNvSpPr txBox="1"/>
+          <p:nvPr/>
+        </p:nvSpPr>
+        <p:spPr>
+          <a:xfrm>
+            <a:off x="457200" y="932688"/>
+            <a:ext cx="11247120" cy="731520"/>
           </a:xfrm>
           <a:prstGeom prst="rect">
             <a:avLst/>
@@ -23613,88 +23029,6 @@
           </a:bodyPr>
           <a:lstStyle/>
           <a:p>
-            <a:pPr algn="r"/>
-            <a:r>
-              <a:rPr sz="1050" b="1">
-                <a:solidFill>
-                  <a:srgbClr val="0F2C68"/>
-                </a:solidFill>
-                <a:latin typeface="HSE Sans"/>
-              </a:rPr>
-              <a:t>Защита курсовой</a:t>
-            </a:r>
-          </a:p>
-          <a:p>
-            <a:pPr algn="r"/>
-            <a:r>
-              <a:rPr sz="1050">
-                <a:solidFill>
-                  <a:srgbClr val="595959"/>
-                </a:solidFill>
-                <a:latin typeface="HSE Sans"/>
-              </a:rPr>
-              <a:t>Пермь, 2026</a:t>
-            </a:r>
-          </a:p>
-        </p:txBody>
-      </p:sp>
-      <p:cxnSp>
-        <p:nvCxnSpPr>
-          <p:cNvPr id="5" name="Connector 4"/>
-          <p:cNvCxnSpPr/>
-          <p:nvPr/>
-        </p:nvCxnSpPr>
-        <p:spPr>
-          <a:xfrm>
-            <a:off x="502920" y="749808"/>
-            <a:ext cx="11183112" cy="0"/>
-          </a:xfrm>
-          <a:prstGeom prst="bentConnector3">
-            <a:avLst/>
-          </a:prstGeom>
-          <a:ln w="12700">
-            <a:solidFill>
-              <a:srgbClr val="0F2C68"/>
-            </a:solidFill>
-          </a:ln>
-        </p:spPr>
-        <p:style>
-          <a:lnRef idx="2">
-            <a:schemeClr val="accent1"/>
-          </a:lnRef>
-          <a:fillRef idx="0">
-            <a:schemeClr val="accent1"/>
-          </a:fillRef>
-          <a:effectRef idx="1">
-            <a:schemeClr val="accent1"/>
-          </a:effectRef>
-          <a:fontRef idx="minor">
-            <a:schemeClr val="tx1"/>
-          </a:fontRef>
-        </p:style>
-      </p:cxnSp>
-      <p:sp>
-        <p:nvSpPr>
-          <p:cNvPr id="6" name="TextBox 5"/>
-          <p:cNvSpPr txBox="1"/>
-          <p:nvPr/>
-        </p:nvSpPr>
-        <p:spPr>
-          <a:xfrm>
-            <a:off x="502920" y="868680"/>
-            <a:ext cx="11155680" cy="731520"/>
-          </a:xfrm>
-          <a:prstGeom prst="rect">
-            <a:avLst/>
-          </a:prstGeom>
-          <a:noFill/>
-        </p:spPr>
-        <p:txBody>
-          <a:bodyPr wrap="square">
-            <a:spAutoFit/>
-          </a:bodyPr>
-          <a:lstStyle/>
-          <a:p>
             <a:r>
               <a:rPr sz="3200" b="1">
                 <a:solidFill>
@@ -23709,7 +23043,7 @@
       </p:sp>
       <p:pic>
         <p:nvPicPr>
-          <p:cNvPr id="7" name="Picture 6" descr="03_c4_containers.png"/>
+          <p:cNvPr id="6" name="Picture 5" descr="03_c4_containers.png"/>
           <p:cNvPicPr>
             <a:picLocks noChangeAspect="1"/>
           </p:cNvPicPr>
@@ -23733,7 +23067,7 @@
       </p:pic>
       <p:sp>
         <p:nvSpPr>
-          <p:cNvPr id="8" name="TextBox 7"/>
+          <p:cNvPr id="7" name="TextBox 6"/>
           <p:cNvSpPr txBox="1"/>
           <p:nvPr/>
         </p:nvSpPr>
@@ -23852,7 +23186,7 @@
       </p:sp>
       <p:sp>
         <p:nvSpPr>
-          <p:cNvPr id="9" name="TextBox 8"/>
+          <p:cNvPr id="8" name="TextBox 7"/>
           <p:cNvSpPr txBox="1"/>
           <p:nvPr/>
         </p:nvSpPr>

--- a/docs/Презентация_защита_EventMind.pptx
+++ b/docs/Презентация_защита_EventMind.pptx
@@ -14246,26 +14246,15 @@
               </a:rPr>
             </a:br>
             <a:r>
-              <a:rPr sz="3000" b="1">
+              <a:rPr sz="2600" b="1">
                 <a:solidFill>
                   <a:srgbClr val="0F2C68"/>
                 </a:solidFill>
                 <a:latin typeface="HSE Sans"/>
               </a:rPr>
-              <a:t>EventMind — система агрегации IT-мероприятий</a:t>
+              <a:t>Разработка приложения для агрегации информации об IT-событиях и выдачи персональных рекомендаций на основе модели пользователя</a:t>
             </a:r>
             <a:endParaRPr lang="ru-RU" dirty="0"/>
-          </a:p>
-          <a:p>
-            <a:r>
-              <a:rPr sz="3000" b="1">
-                <a:solidFill>
-                  <a:srgbClr val="0F2C68"/>
-                </a:solidFill>
-                <a:latin typeface="HSE Sans"/>
-              </a:rPr>
-              <a:t>и персонализированных AI-рекомендаций</a:t>
-            </a:r>
           </a:p>
         </p:txBody>
       </p:sp>
@@ -14566,7 +14555,7 @@
               <a:rPr sz="1400">
                 <a:latin typeface="HSE Sans"/>
               </a:rPr>
-              <a:t>Доцент к.ф.-м.н., доцент кафедры информационных технологий в бизнесе</a:t>
+              <a:t>Доцент кафедры информационных технологий в бизнесе</a:t>
             </a:r>
           </a:p>
           <a:p>
@@ -14574,7 +14563,7 @@
               <a:rPr sz="1400" b="1">
                 <a:latin typeface="HSE Sans"/>
               </a:rPr>
-              <a:t>Замятина Е.Б.</a:t>
+              <a:t>Городилов А.Ю.</a:t>
             </a:r>
           </a:p>
         </p:txBody>

--- a/docs/Презентация_защита_EventMind.pptx
+++ b/docs/Презентация_защита_EventMind.pptx
@@ -14591,12 +14591,14 @@
           </a:xfrm>
         </p:spPr>
         <p:txBody>
-          <a:bodyPr/>
+          <a:bodyPr wrap="square"/>
           <a:lstStyle/>
           <a:p>
             <a:r>
-              <a:rPr lang="ru-RU" sz="1200" dirty="0"/>
-              <a:t>«Программная инженерия»</a:t>
+              <a:rPr sz="1200">
+                <a:latin typeface="HSE Sans"/>
+              </a:rPr>
+              <a:t>«Бизнес-аналитика»</a:t>
             </a:r>
             <a:endParaRPr lang="ru-RU" dirty="0"/>
           </a:p>
@@ -14625,12 +14627,14 @@
           </a:xfrm>
         </p:spPr>
         <p:txBody>
-          <a:bodyPr/>
+          <a:bodyPr wrap="square"/>
           <a:lstStyle/>
           <a:p>
             <a:r>
-              <a:rPr lang="ru-RU" sz="1600" dirty="0"/>
-              <a:t>Факультет экономики, менеджмента и бизнес-информатики</a:t>
+              <a:rPr sz="1600">
+                <a:latin typeface="HSE Sans"/>
+              </a:rPr>
+              <a:t>Факультет магистерская школа</a:t>
             </a:r>
             <a:endParaRPr lang="ru-RU" dirty="0"/>
           </a:p>
@@ -19855,7 +19859,7 @@
                 </a:solidFill>
                 <a:latin typeface="HSE Sans"/>
               </a:rPr>
-              <a:t>НИУ ВШЭ — Пермь · Программная инженерия</a:t>
+              <a:t>НИУ ВШЭ — Пермь · Бизнес-аналитика</a:t>
             </a:r>
           </a:p>
           <a:p>

--- a/docs/Презентация_защита_EventMind.pptx
+++ b/docs/Презентация_защита_EventMind.pptx
@@ -4191,8 +4191,8 @@
         </p:nvSpPr>
         <p:spPr>
           <a:xfrm>
-            <a:off x="10410201" y="328930"/>
-            <a:ext cx="936672" cy="307777"/>
+            <a:off x="10410201" y="192024"/>
+            <a:ext cx="936672" cy="585216"/>
           </a:xfrm>
           <a:prstGeom prst="rect">
             <a:avLst/>
@@ -4200,13 +4200,13 @@
           <a:noFill/>
         </p:spPr>
         <p:txBody>
-          <a:bodyPr wrap="square" lIns="0" tIns="0" rIns="0" bIns="0" rtlCol="0">
-            <a:spAutoFit/>
+          <a:bodyPr wrap="square" lIns="0" tIns="0" rIns="0" bIns="0" rtlCol="0" anchor="ctr">
+            <a:noAutofit/>
           </a:bodyPr>
           <a:lstStyle/>
           <a:p>
             <a:fld id="{32AF94B5-93D7-5247-B727-C7089232F508}" type="slidenum">
-              <a:rPr lang="ru-RU" sz="2000" smtClean="0">
+              <a:rPr lang="ru-RU" sz="1050" smtClean="0">
                 <a:solidFill>
                   <a:srgbClr val="102D69"/>
                 </a:solidFill>
@@ -4215,7 +4215,7 @@
               <a:t>‹#›</a:t>
             </a:fld>
             <a:r>
-              <a:rPr lang="en-US" sz="2000" dirty="0">
+              <a:rPr lang="en-US" sz="1050" dirty="0">
                 <a:solidFill>
                   <a:srgbClr val="102D69"/>
                 </a:solidFill>
@@ -4224,7 +4224,7 @@
               <a:t> / </a:t>
             </a:r>
             <a:r>
-              <a:rPr lang="ru-RU" sz="2000" dirty="0">
+              <a:rPr lang="ru-RU" sz="1050" dirty="0">
                 <a:solidFill>
                   <a:srgbClr val="102D69"/>
                 </a:solidFill>
@@ -14671,8 +14671,8 @@
         </p:nvSpPr>
         <p:spPr>
           <a:xfrm>
-            <a:off x="987552" y="246888"/>
-            <a:ext cx="2743200" cy="502920"/>
+            <a:off x="987552" y="192024"/>
+            <a:ext cx="2743200" cy="585216"/>
           </a:xfrm>
           <a:prstGeom prst="rect">
             <a:avLst/>
@@ -14705,8 +14705,8 @@
         </p:nvSpPr>
         <p:spPr>
           <a:xfrm>
-            <a:off x="3840480" y="246888"/>
-            <a:ext cx="2011680" cy="502920"/>
+            <a:off x="3840480" y="192024"/>
+            <a:ext cx="2011680" cy="585216"/>
           </a:xfrm>
           <a:prstGeom prst="rect">
             <a:avLst/>
@@ -14739,8 +14739,8 @@
         </p:nvSpPr>
         <p:spPr>
           <a:xfrm>
-            <a:off x="6821424" y="246888"/>
-            <a:ext cx="1828800" cy="548640"/>
+            <a:off x="6821424" y="192024"/>
+            <a:ext cx="1828800" cy="585216"/>
           </a:xfrm>
           <a:prstGeom prst="rect">
             <a:avLst/>
@@ -14895,8 +14895,8 @@
         </p:nvSpPr>
         <p:spPr>
           <a:xfrm>
-            <a:off x="987552" y="246888"/>
-            <a:ext cx="2743200" cy="502920"/>
+            <a:off x="987552" y="192024"/>
+            <a:ext cx="2743200" cy="585216"/>
           </a:xfrm>
           <a:prstGeom prst="rect">
             <a:avLst/>
@@ -14929,8 +14929,8 @@
         </p:nvSpPr>
         <p:spPr>
           <a:xfrm>
-            <a:off x="3840480" y="246888"/>
-            <a:ext cx="2011680" cy="502920"/>
+            <a:off x="3840480" y="192024"/>
+            <a:ext cx="2011680" cy="585216"/>
           </a:xfrm>
           <a:prstGeom prst="rect">
             <a:avLst/>
@@ -14963,8 +14963,8 @@
         </p:nvSpPr>
         <p:spPr>
           <a:xfrm>
-            <a:off x="6821424" y="246888"/>
-            <a:ext cx="1828800" cy="548640"/>
+            <a:off x="6821424" y="192024"/>
+            <a:ext cx="1828800" cy="585216"/>
           </a:xfrm>
           <a:prstGeom prst="rect">
             <a:avLst/>
@@ -15767,8 +15767,8 @@
         </p:nvSpPr>
         <p:spPr>
           <a:xfrm>
-            <a:off x="987552" y="246888"/>
-            <a:ext cx="2743200" cy="502920"/>
+            <a:off x="987552" y="192024"/>
+            <a:ext cx="2743200" cy="585216"/>
           </a:xfrm>
           <a:prstGeom prst="rect">
             <a:avLst/>
@@ -15801,8 +15801,8 @@
         </p:nvSpPr>
         <p:spPr>
           <a:xfrm>
-            <a:off x="3840480" y="246888"/>
-            <a:ext cx="2011680" cy="502920"/>
+            <a:off x="3840480" y="192024"/>
+            <a:ext cx="2011680" cy="585216"/>
           </a:xfrm>
           <a:prstGeom prst="rect">
             <a:avLst/>
@@ -15835,8 +15835,8 @@
         </p:nvSpPr>
         <p:spPr>
           <a:xfrm>
-            <a:off x="6821424" y="246888"/>
-            <a:ext cx="1828800" cy="548640"/>
+            <a:off x="6821424" y="192024"/>
+            <a:ext cx="1828800" cy="585216"/>
           </a:xfrm>
           <a:prstGeom prst="rect">
             <a:avLst/>
@@ -16742,8 +16742,8 @@
         </p:nvSpPr>
         <p:spPr>
           <a:xfrm>
-            <a:off x="987552" y="246888"/>
-            <a:ext cx="2743200" cy="502920"/>
+            <a:off x="987552" y="192024"/>
+            <a:ext cx="2743200" cy="585216"/>
           </a:xfrm>
           <a:prstGeom prst="rect">
             <a:avLst/>
@@ -16776,8 +16776,8 @@
         </p:nvSpPr>
         <p:spPr>
           <a:xfrm>
-            <a:off x="3840480" y="246888"/>
-            <a:ext cx="2011680" cy="502920"/>
+            <a:off x="3840480" y="192024"/>
+            <a:ext cx="2011680" cy="585216"/>
           </a:xfrm>
           <a:prstGeom prst="rect">
             <a:avLst/>
@@ -16810,8 +16810,8 @@
         </p:nvSpPr>
         <p:spPr>
           <a:xfrm>
-            <a:off x="6821424" y="246888"/>
-            <a:ext cx="1828800" cy="548640"/>
+            <a:off x="6821424" y="192024"/>
+            <a:ext cx="1828800" cy="585216"/>
           </a:xfrm>
           <a:prstGeom prst="rect">
             <a:avLst/>
@@ -16966,8 +16966,8 @@
         </p:nvSpPr>
         <p:spPr>
           <a:xfrm>
-            <a:off x="987552" y="246888"/>
-            <a:ext cx="2743200" cy="502920"/>
+            <a:off x="987552" y="192024"/>
+            <a:ext cx="2743200" cy="585216"/>
           </a:xfrm>
           <a:prstGeom prst="rect">
             <a:avLst/>
@@ -17000,8 +17000,8 @@
         </p:nvSpPr>
         <p:spPr>
           <a:xfrm>
-            <a:off x="3840480" y="246888"/>
-            <a:ext cx="2011680" cy="502920"/>
+            <a:off x="3840480" y="192024"/>
+            <a:ext cx="2011680" cy="585216"/>
           </a:xfrm>
           <a:prstGeom prst="rect">
             <a:avLst/>
@@ -17034,8 +17034,8 @@
         </p:nvSpPr>
         <p:spPr>
           <a:xfrm>
-            <a:off x="6821424" y="246888"/>
-            <a:ext cx="1828800" cy="548640"/>
+            <a:off x="6821424" y="192024"/>
+            <a:ext cx="1828800" cy="585216"/>
           </a:xfrm>
           <a:prstGeom prst="rect">
             <a:avLst/>
@@ -17309,8 +17309,8 @@
         </p:nvSpPr>
         <p:spPr>
           <a:xfrm>
-            <a:off x="987552" y="246888"/>
-            <a:ext cx="2743200" cy="502920"/>
+            <a:off x="987552" y="192024"/>
+            <a:ext cx="2743200" cy="585216"/>
           </a:xfrm>
           <a:prstGeom prst="rect">
             <a:avLst/>
@@ -17343,8 +17343,8 @@
         </p:nvSpPr>
         <p:spPr>
           <a:xfrm>
-            <a:off x="3840480" y="246888"/>
-            <a:ext cx="2011680" cy="502920"/>
+            <a:off x="3840480" y="192024"/>
+            <a:ext cx="2011680" cy="585216"/>
           </a:xfrm>
           <a:prstGeom prst="rect">
             <a:avLst/>
@@ -17377,8 +17377,8 @@
         </p:nvSpPr>
         <p:spPr>
           <a:xfrm>
-            <a:off x="6821424" y="246888"/>
-            <a:ext cx="1828800" cy="548640"/>
+            <a:off x="6821424" y="192024"/>
+            <a:ext cx="1828800" cy="585216"/>
           </a:xfrm>
           <a:prstGeom prst="rect">
             <a:avLst/>
@@ -17601,8 +17601,8 @@
         </p:nvSpPr>
         <p:spPr>
           <a:xfrm>
-            <a:off x="987552" y="246888"/>
-            <a:ext cx="2743200" cy="502920"/>
+            <a:off x="987552" y="192024"/>
+            <a:ext cx="2743200" cy="585216"/>
           </a:xfrm>
           <a:prstGeom prst="rect">
             <a:avLst/>
@@ -17635,8 +17635,8 @@
         </p:nvSpPr>
         <p:spPr>
           <a:xfrm>
-            <a:off x="3840480" y="246888"/>
-            <a:ext cx="2011680" cy="502920"/>
+            <a:off x="3840480" y="192024"/>
+            <a:ext cx="2011680" cy="585216"/>
           </a:xfrm>
           <a:prstGeom prst="rect">
             <a:avLst/>
@@ -17669,8 +17669,8 @@
         </p:nvSpPr>
         <p:spPr>
           <a:xfrm>
-            <a:off x="6821424" y="246888"/>
-            <a:ext cx="1828800" cy="548640"/>
+            <a:off x="6821424" y="192024"/>
+            <a:ext cx="1828800" cy="585216"/>
           </a:xfrm>
           <a:prstGeom prst="rect">
             <a:avLst/>
@@ -18052,8 +18052,8 @@
         </p:nvSpPr>
         <p:spPr>
           <a:xfrm>
-            <a:off x="987552" y="246888"/>
-            <a:ext cx="2743200" cy="502920"/>
+            <a:off x="987552" y="192024"/>
+            <a:ext cx="2743200" cy="585216"/>
           </a:xfrm>
           <a:prstGeom prst="rect">
             <a:avLst/>
@@ -18086,8 +18086,8 @@
         </p:nvSpPr>
         <p:spPr>
           <a:xfrm>
-            <a:off x="3840480" y="246888"/>
-            <a:ext cx="2011680" cy="502920"/>
+            <a:off x="3840480" y="192024"/>
+            <a:ext cx="2011680" cy="585216"/>
           </a:xfrm>
           <a:prstGeom prst="rect">
             <a:avLst/>
@@ -18120,8 +18120,8 @@
         </p:nvSpPr>
         <p:spPr>
           <a:xfrm>
-            <a:off x="6821424" y="246888"/>
-            <a:ext cx="1828800" cy="548640"/>
+            <a:off x="6821424" y="192024"/>
+            <a:ext cx="1828800" cy="585216"/>
           </a:xfrm>
           <a:prstGeom prst="rect">
             <a:avLst/>
@@ -19244,8 +19244,8 @@
         </p:nvSpPr>
         <p:spPr>
           <a:xfrm>
-            <a:off x="987552" y="246888"/>
-            <a:ext cx="2743200" cy="502920"/>
+            <a:off x="987552" y="192024"/>
+            <a:ext cx="2743200" cy="585216"/>
           </a:xfrm>
           <a:prstGeom prst="rect">
             <a:avLst/>
@@ -19278,8 +19278,8 @@
         </p:nvSpPr>
         <p:spPr>
           <a:xfrm>
-            <a:off x="3840480" y="246888"/>
-            <a:ext cx="2011680" cy="502920"/>
+            <a:off x="3840480" y="192024"/>
+            <a:ext cx="2011680" cy="585216"/>
           </a:xfrm>
           <a:prstGeom prst="rect">
             <a:avLst/>
@@ -19312,8 +19312,8 @@
         </p:nvSpPr>
         <p:spPr>
           <a:xfrm>
-            <a:off x="6821424" y="246888"/>
-            <a:ext cx="1828800" cy="548640"/>
+            <a:off x="6821424" y="192024"/>
+            <a:ext cx="1828800" cy="585216"/>
           </a:xfrm>
           <a:prstGeom prst="rect">
             <a:avLst/>
@@ -19647,8 +19647,8 @@
         </p:nvSpPr>
         <p:spPr>
           <a:xfrm>
-            <a:off x="987552" y="246888"/>
-            <a:ext cx="2743200" cy="502920"/>
+            <a:off x="987552" y="192024"/>
+            <a:ext cx="2743200" cy="585216"/>
           </a:xfrm>
           <a:prstGeom prst="rect">
             <a:avLst/>
@@ -19681,8 +19681,8 @@
         </p:nvSpPr>
         <p:spPr>
           <a:xfrm>
-            <a:off x="3840480" y="246888"/>
-            <a:ext cx="2011680" cy="502920"/>
+            <a:off x="3840480" y="192024"/>
+            <a:ext cx="2011680" cy="585216"/>
           </a:xfrm>
           <a:prstGeom prst="rect">
             <a:avLst/>
@@ -19715,8 +19715,8 @@
         </p:nvSpPr>
         <p:spPr>
           <a:xfrm>
-            <a:off x="6821424" y="246888"/>
-            <a:ext cx="1828800" cy="548640"/>
+            <a:off x="6821424" y="192024"/>
+            <a:ext cx="1828800" cy="585216"/>
           </a:xfrm>
           <a:prstGeom prst="rect">
             <a:avLst/>
@@ -19902,8 +19902,8 @@
         </p:nvSpPr>
         <p:spPr>
           <a:xfrm>
-            <a:off x="987552" y="246888"/>
-            <a:ext cx="2743200" cy="502920"/>
+            <a:off x="987552" y="192024"/>
+            <a:ext cx="2743200" cy="585216"/>
           </a:xfrm>
           <a:prstGeom prst="rect">
             <a:avLst/>
@@ -19936,8 +19936,8 @@
         </p:nvSpPr>
         <p:spPr>
           <a:xfrm>
-            <a:off x="3840480" y="246888"/>
-            <a:ext cx="2011680" cy="502920"/>
+            <a:off x="3840480" y="192024"/>
+            <a:ext cx="2011680" cy="585216"/>
           </a:xfrm>
           <a:prstGeom prst="rect">
             <a:avLst/>
@@ -19970,8 +19970,8 @@
         </p:nvSpPr>
         <p:spPr>
           <a:xfrm>
-            <a:off x="6821424" y="246888"/>
-            <a:ext cx="1828800" cy="548640"/>
+            <a:off x="6821424" y="192024"/>
+            <a:ext cx="1828800" cy="585216"/>
           </a:xfrm>
           <a:prstGeom prst="rect">
             <a:avLst/>
@@ -20383,8 +20383,8 @@
         </p:nvSpPr>
         <p:spPr>
           <a:xfrm>
-            <a:off x="987552" y="246888"/>
-            <a:ext cx="2743200" cy="502920"/>
+            <a:off x="987552" y="192024"/>
+            <a:ext cx="2743200" cy="585216"/>
           </a:xfrm>
           <a:prstGeom prst="rect">
             <a:avLst/>
@@ -20417,8 +20417,8 @@
         </p:nvSpPr>
         <p:spPr>
           <a:xfrm>
-            <a:off x="3840480" y="246888"/>
-            <a:ext cx="2011680" cy="502920"/>
+            <a:off x="3840480" y="192024"/>
+            <a:ext cx="2011680" cy="585216"/>
           </a:xfrm>
           <a:prstGeom prst="rect">
             <a:avLst/>
@@ -20451,8 +20451,8 @@
         </p:nvSpPr>
         <p:spPr>
           <a:xfrm>
-            <a:off x="6821424" y="246888"/>
-            <a:ext cx="1828800" cy="548640"/>
+            <a:off x="6821424" y="192024"/>
+            <a:ext cx="1828800" cy="585216"/>
           </a:xfrm>
           <a:prstGeom prst="rect">
             <a:avLst/>
@@ -20690,8 +20690,8 @@
         </p:nvSpPr>
         <p:spPr>
           <a:xfrm>
-            <a:off x="987552" y="246888"/>
-            <a:ext cx="2743200" cy="502920"/>
+            <a:off x="987552" y="192024"/>
+            <a:ext cx="2743200" cy="585216"/>
           </a:xfrm>
           <a:prstGeom prst="rect">
             <a:avLst/>
@@ -20724,8 +20724,8 @@
         </p:nvSpPr>
         <p:spPr>
           <a:xfrm>
-            <a:off x="3840480" y="246888"/>
-            <a:ext cx="2011680" cy="502920"/>
+            <a:off x="3840480" y="192024"/>
+            <a:ext cx="2011680" cy="585216"/>
           </a:xfrm>
           <a:prstGeom prst="rect">
             <a:avLst/>
@@ -20758,8 +20758,8 @@
         </p:nvSpPr>
         <p:spPr>
           <a:xfrm>
-            <a:off x="6821424" y="246888"/>
-            <a:ext cx="1828800" cy="548640"/>
+            <a:off x="6821424" y="192024"/>
+            <a:ext cx="1828800" cy="585216"/>
           </a:xfrm>
           <a:prstGeom prst="rect">
             <a:avLst/>
@@ -21079,8 +21079,8 @@
         </p:nvSpPr>
         <p:spPr>
           <a:xfrm>
-            <a:off x="987552" y="246888"/>
-            <a:ext cx="2743200" cy="502920"/>
+            <a:off x="987552" y="192024"/>
+            <a:ext cx="2743200" cy="585216"/>
           </a:xfrm>
           <a:prstGeom prst="rect">
             <a:avLst/>
@@ -21113,8 +21113,8 @@
         </p:nvSpPr>
         <p:spPr>
           <a:xfrm>
-            <a:off x="3840480" y="246888"/>
-            <a:ext cx="2011680" cy="502920"/>
+            <a:off x="3840480" y="192024"/>
+            <a:ext cx="2011680" cy="585216"/>
           </a:xfrm>
           <a:prstGeom prst="rect">
             <a:avLst/>
@@ -21147,8 +21147,8 @@
         </p:nvSpPr>
         <p:spPr>
           <a:xfrm>
-            <a:off x="6821424" y="246888"/>
-            <a:ext cx="1828800" cy="548640"/>
+            <a:off x="6821424" y="192024"/>
+            <a:ext cx="1828800" cy="585216"/>
           </a:xfrm>
           <a:prstGeom prst="rect">
             <a:avLst/>
@@ -21540,8 +21540,8 @@
         </p:nvSpPr>
         <p:spPr>
           <a:xfrm>
-            <a:off x="987552" y="246888"/>
-            <a:ext cx="2743200" cy="502920"/>
+            <a:off x="987552" y="192024"/>
+            <a:ext cx="2743200" cy="585216"/>
           </a:xfrm>
           <a:prstGeom prst="rect">
             <a:avLst/>
@@ -21574,8 +21574,8 @@
         </p:nvSpPr>
         <p:spPr>
           <a:xfrm>
-            <a:off x="3840480" y="246888"/>
-            <a:ext cx="2011680" cy="502920"/>
+            <a:off x="3840480" y="192024"/>
+            <a:ext cx="2011680" cy="585216"/>
           </a:xfrm>
           <a:prstGeom prst="rect">
             <a:avLst/>
@@ -21608,8 +21608,8 @@
         </p:nvSpPr>
         <p:spPr>
           <a:xfrm>
-            <a:off x="6821424" y="246888"/>
-            <a:ext cx="1828800" cy="548640"/>
+            <a:off x="6821424" y="192024"/>
+            <a:ext cx="1828800" cy="585216"/>
           </a:xfrm>
           <a:prstGeom prst="rect">
             <a:avLst/>
@@ -22363,8 +22363,8 @@
         </p:nvSpPr>
         <p:spPr>
           <a:xfrm>
-            <a:off x="987552" y="246888"/>
-            <a:ext cx="2743200" cy="502920"/>
+            <a:off x="987552" y="192024"/>
+            <a:ext cx="2743200" cy="585216"/>
           </a:xfrm>
           <a:prstGeom prst="rect">
             <a:avLst/>
@@ -22397,8 +22397,8 @@
         </p:nvSpPr>
         <p:spPr>
           <a:xfrm>
-            <a:off x="3840480" y="246888"/>
-            <a:ext cx="2011680" cy="502920"/>
+            <a:off x="3840480" y="192024"/>
+            <a:ext cx="2011680" cy="585216"/>
           </a:xfrm>
           <a:prstGeom prst="rect">
             <a:avLst/>
@@ -22431,8 +22431,8 @@
         </p:nvSpPr>
         <p:spPr>
           <a:xfrm>
-            <a:off x="6821424" y="246888"/>
-            <a:ext cx="1828800" cy="548640"/>
+            <a:off x="6821424" y="192024"/>
+            <a:ext cx="1828800" cy="585216"/>
           </a:xfrm>
           <a:prstGeom prst="rect">
             <a:avLst/>
@@ -22671,8 +22671,8 @@
         </p:nvSpPr>
         <p:spPr>
           <a:xfrm>
-            <a:off x="987552" y="246888"/>
-            <a:ext cx="2743200" cy="502920"/>
+            <a:off x="987552" y="192024"/>
+            <a:ext cx="2743200" cy="585216"/>
           </a:xfrm>
           <a:prstGeom prst="rect">
             <a:avLst/>
@@ -22705,8 +22705,8 @@
         </p:nvSpPr>
         <p:spPr>
           <a:xfrm>
-            <a:off x="3840480" y="246888"/>
-            <a:ext cx="2011680" cy="502920"/>
+            <a:off x="3840480" y="192024"/>
+            <a:ext cx="2011680" cy="585216"/>
           </a:xfrm>
           <a:prstGeom prst="rect">
             <a:avLst/>
@@ -22739,8 +22739,8 @@
         </p:nvSpPr>
         <p:spPr>
           <a:xfrm>
-            <a:off x="6821424" y="246888"/>
-            <a:ext cx="1828800" cy="548640"/>
+            <a:off x="6821424" y="192024"/>
+            <a:ext cx="1828800" cy="585216"/>
           </a:xfrm>
           <a:prstGeom prst="rect">
             <a:avLst/>
@@ -22895,8 +22895,8 @@
         </p:nvSpPr>
         <p:spPr>
           <a:xfrm>
-            <a:off x="987552" y="246888"/>
-            <a:ext cx="2743200" cy="502920"/>
+            <a:off x="987552" y="192024"/>
+            <a:ext cx="2743200" cy="585216"/>
           </a:xfrm>
           <a:prstGeom prst="rect">
             <a:avLst/>
@@ -22929,8 +22929,8 @@
         </p:nvSpPr>
         <p:spPr>
           <a:xfrm>
-            <a:off x="3840480" y="246888"/>
-            <a:ext cx="2011680" cy="502920"/>
+            <a:off x="3840480" y="192024"/>
+            <a:ext cx="2011680" cy="585216"/>
           </a:xfrm>
           <a:prstGeom prst="rect">
             <a:avLst/>
@@ -22963,8 +22963,8 @@
         </p:nvSpPr>
         <p:spPr>
           <a:xfrm>
-            <a:off x="6821424" y="246888"/>
-            <a:ext cx="1828800" cy="548640"/>
+            <a:off x="6821424" y="192024"/>
+            <a:ext cx="1828800" cy="585216"/>
           </a:xfrm>
           <a:prstGeom prst="rect">
             <a:avLst/>

--- a/docs/Презентация_защита_EventMind.pptx
+++ b/docs/Презентация_защита_EventMind.pptx
@@ -26,7 +26,6 @@
     <p:sldId id="286" r:id="rId9"/>
     <p:sldId id="287" r:id="rId8"/>
     <p:sldId id="288" r:id="rId7"/>
-    <p:sldId id="289" r:id="rId6"/>
   </p:sldIdLst>
   <p:sldSz cx="12192000" cy="6858000"/>
   <p:notesSz cx="6858000" cy="9144000"/>
@@ -4230,7 +4229,7 @@
                 </a:solidFill>
                 <a:latin typeface="HSE Sans" panose="02000000000000000000" pitchFamily="2" charset="0"/>
               </a:rPr>
-              <a:t>19</a:t>
+              <a:t>18</a:t>
             </a:r>
           </a:p>
         </p:txBody>
@@ -15057,7 +15056,7 @@
                 <a:gridCol w="3931920"/>
                 <a:gridCol w="4892040"/>
               </a:tblGrid>
-              <a:tr h="466344">
+              <a:tr h="518160">
                 <a:tc>
                   <a:txBody>
                     <a:bodyPr lIns="76200" rIns="76200" tIns="38100" bIns="38100"/>
@@ -15125,7 +15124,7 @@
                   </a:tcPr>
                 </a:tc>
               </a:tr>
-              <a:tr h="466344">
+              <a:tr h="518160">
                 <a:tc>
                   <a:txBody>
                     <a:bodyPr lIns="76200" rIns="76200" tIns="38100" bIns="38100"/>
@@ -15193,7 +15192,7 @@
                   </a:tcPr>
                 </a:tc>
               </a:tr>
-              <a:tr h="466344">
+              <a:tr h="518160">
                 <a:tc>
                   <a:txBody>
                     <a:bodyPr lIns="76200" rIns="76200" tIns="38100" bIns="38100"/>
@@ -15261,7 +15260,7 @@
                   </a:tcPr>
                 </a:tc>
               </a:tr>
-              <a:tr h="466344">
+              <a:tr h="518160">
                 <a:tc>
                   <a:txBody>
                     <a:bodyPr lIns="76200" rIns="76200" tIns="38100" bIns="38100"/>
@@ -15329,7 +15328,7 @@
                   </a:tcPr>
                 </a:tc>
               </a:tr>
-              <a:tr h="466344">
+              <a:tr h="518160">
                 <a:tc>
                   <a:txBody>
                     <a:bodyPr lIns="76200" rIns="76200" tIns="38100" bIns="38100"/>
@@ -15397,7 +15396,7 @@
                   </a:tcPr>
                 </a:tc>
               </a:tr>
-              <a:tr h="466344">
+              <a:tr h="518160">
                 <a:tc>
                   <a:txBody>
                     <a:bodyPr lIns="76200" rIns="76200" tIns="38100" bIns="38100"/>
@@ -15465,7 +15464,7 @@
                   </a:tcPr>
                 </a:tc>
               </a:tr>
-              <a:tr h="466344">
+              <a:tr h="518160">
                 <a:tc>
                   <a:txBody>
                     <a:bodyPr lIns="76200" rIns="76200" tIns="38100" bIns="38100"/>
@@ -15533,7 +15532,7 @@
                   </a:tcPr>
                 </a:tc>
               </a:tr>
-              <a:tr h="466344">
+              <a:tr h="518160">
                 <a:tc>
                   <a:txBody>
                     <a:bodyPr lIns="76200" rIns="76200" tIns="38100" bIns="38100"/>
@@ -15546,7 +15545,7 @@
                           </a:solidFill>
                           <a:latin typeface="HSE Sans"/>
                         </a:rPr>
-                        <a:t>AI-агенты</a:t>
+                        <a:t>LLM</a:t>
                       </a:r>
                     </a:p>
                   </a:txBody>
@@ -15568,7 +15567,7 @@
                           </a:solidFill>
                           <a:latin typeface="HSE Sans"/>
                         </a:rPr>
-                        <a:t>LangGraph + LangChain</a:t>
+                        <a:t>Gemini → Groq 70b → Groq 8b</a:t>
                       </a:r>
                     </a:p>
                   </a:txBody>
@@ -15590,7 +15589,7 @@
                           </a:solidFill>
                           <a:latin typeface="HSE Sans"/>
                         </a:rPr>
-                        <a:t>Supervisor-Worker граф</a:t>
+                        <a:t>Нормализация и объяснения рекомендаций</a:t>
                       </a:r>
                     </a:p>
                   </a:txBody>
@@ -15601,7 +15600,7 @@
                   </a:tcPr>
                 </a:tc>
               </a:tr>
-              <a:tr h="466344">
+              <a:tr h="518160">
                 <a:tc>
                   <a:txBody>
                     <a:bodyPr lIns="76200" rIns="76200" tIns="38100" bIns="38100"/>
@@ -15614,7 +15613,7 @@
                           </a:solidFill>
                           <a:latin typeface="HSE Sans"/>
                         </a:rPr>
-                        <a:t>LLM</a:t>
+                        <a:t>Планировщик</a:t>
                       </a:r>
                     </a:p>
                   </a:txBody>
@@ -15636,7 +15635,7 @@
                           </a:solidFill>
                           <a:latin typeface="HSE Sans"/>
                         </a:rPr>
-                        <a:t>Gemini → Groq 70b → Groq 8b</a:t>
+                        <a:t>APScheduler</a:t>
                       </a:r>
                     </a:p>
                   </a:txBody>
@@ -15658,81 +15657,13 @@
                           </a:solidFill>
                           <a:latin typeface="HSE Sans"/>
                         </a:rPr>
-                        <a:t>Нормализация, объяснения, копилот</a:t>
+                        <a:t>Дайджест, ingestion, backfill</a:t>
                       </a:r>
                     </a:p>
                   </a:txBody>
                   <a:tcPr anchor="ctr">
                     <a:solidFill>
                       <a:srgbClr val="EAEFF7"/>
-                    </a:solidFill>
-                  </a:tcPr>
-                </a:tc>
-              </a:tr>
-              <a:tr h="466344">
-                <a:tc>
-                  <a:txBody>
-                    <a:bodyPr lIns="76200" rIns="76200" tIns="38100" bIns="38100"/>
-                    <a:lstStyle/>
-                    <a:p>
-                      <a:r>
-                        <a:rPr sz="1200" b="1">
-                          <a:solidFill>
-                            <a:srgbClr val="0F2C68"/>
-                          </a:solidFill>
-                          <a:latin typeface="HSE Sans"/>
-                        </a:rPr>
-                        <a:t>Планировщик</a:t>
-                      </a:r>
-                    </a:p>
-                  </a:txBody>
-                  <a:tcPr anchor="ctr">
-                    <a:solidFill>
-                      <a:srgbClr val="FFFFFF"/>
-                    </a:solidFill>
-                  </a:tcPr>
-                </a:tc>
-                <a:tc>
-                  <a:txBody>
-                    <a:bodyPr lIns="76200" rIns="76200" tIns="38100" bIns="38100"/>
-                    <a:lstStyle/>
-                    <a:p>
-                      <a:r>
-                        <a:rPr sz="1200" b="0">
-                          <a:solidFill>
-                            <a:srgbClr val="595959"/>
-                          </a:solidFill>
-                          <a:latin typeface="HSE Sans"/>
-                        </a:rPr>
-                        <a:t>APScheduler</a:t>
-                      </a:r>
-                    </a:p>
-                  </a:txBody>
-                  <a:tcPr anchor="ctr">
-                    <a:solidFill>
-                      <a:srgbClr val="FFFFFF"/>
-                    </a:solidFill>
-                  </a:tcPr>
-                </a:tc>
-                <a:tc>
-                  <a:txBody>
-                    <a:bodyPr lIns="76200" rIns="76200" tIns="38100" bIns="38100"/>
-                    <a:lstStyle/>
-                    <a:p>
-                      <a:r>
-                        <a:rPr sz="1200" b="0">
-                          <a:solidFill>
-                            <a:srgbClr val="595959"/>
-                          </a:solidFill>
-                          <a:latin typeface="HSE Sans"/>
-                        </a:rPr>
-                        <a:t>Дайджест, ingestion, backfill</a:t>
-                      </a:r>
-                    </a:p>
-                  </a:txBody>
-                  <a:tcPr anchor="ctr">
-                    <a:solidFill>
-                      <a:srgbClr val="FFFFFF"/>
                     </a:solidFill>
                   </a:tcPr>
                 </a:tc>
@@ -17443,298 +17374,6 @@
                 </a:solidFill>
                 <a:latin typeface="HSE Sans"/>
               </a:rPr>
-              <a:t>AI-копилот: Supervisor-Worker</a:t>
-            </a:r>
-          </a:p>
-        </p:txBody>
-      </p:sp>
-      <p:pic>
-        <p:nvPicPr>
-          <p:cNvPr id="6" name="Picture 5" descr="07_copilot_graph.png"/>
-          <p:cNvPicPr>
-            <a:picLocks noChangeAspect="1"/>
-          </p:cNvPicPr>
-          <p:nvPr/>
-        </p:nvPicPr>
-        <p:blipFill>
-          <a:blip r:embed="rId2"/>
-          <a:stretch>
-            <a:fillRect/>
-          </a:stretch>
-        </p:blipFill>
-        <p:spPr>
-          <a:xfrm>
-            <a:off x="1010194" y="1691640"/>
-            <a:ext cx="6574971" cy="4663440"/>
-          </a:xfrm>
-          <a:prstGeom prst="rect">
-            <a:avLst/>
-          </a:prstGeom>
-        </p:spPr>
-      </p:pic>
-      <p:sp>
-        <p:nvSpPr>
-          <p:cNvPr id="7" name="TextBox 6"/>
-          <p:cNvSpPr txBox="1"/>
-          <p:nvPr/>
-        </p:nvSpPr>
-        <p:spPr>
-          <a:xfrm>
-            <a:off x="8229600" y="1783080"/>
-            <a:ext cx="3566160" cy="4572000"/>
-          </a:xfrm>
-          <a:prstGeom prst="rect">
-            <a:avLst/>
-          </a:prstGeom>
-          <a:noFill/>
-        </p:spPr>
-        <p:txBody>
-          <a:bodyPr wrap="square" anchor="t">
-            <a:spAutoFit/>
-          </a:bodyPr>
-          <a:lstStyle/>
-          <a:p>
-            <a:pPr>
-              <a:spcAft>
-                <a:spcPts val="900"/>
-              </a:spcAft>
-            </a:pPr>
-            <a:r>
-              <a:rPr sz="1250" b="0">
-                <a:solidFill>
-                  <a:srgbClr val="0F2C68"/>
-                </a:solidFill>
-                <a:latin typeface="HSE Sans"/>
-              </a:rPr>
-              <a:t>•  Граф LangGraph: retrieve → supervisor → specialist → finalize</a:t>
-            </a:r>
-          </a:p>
-          <a:p>
-            <a:pPr>
-              <a:spcAft>
-                <a:spcPts val="900"/>
-              </a:spcAft>
-            </a:pPr>
-            <a:r>
-              <a:rPr sz="1250" b="0">
-                <a:solidFill>
-                  <a:srgbClr val="0F2C68"/>
-                </a:solidFill>
-                <a:latin typeface="HSE Sans"/>
-              </a:rPr>
-              <a:t>•  5 специалистов: recommendation, career_coach, roadmap, explainer, summary</a:t>
-            </a:r>
-          </a:p>
-          <a:p>
-            <a:pPr>
-              <a:spcAft>
-                <a:spcPts val="900"/>
-              </a:spcAft>
-            </a:pPr>
-            <a:r>
-              <a:rPr sz="1250" b="0">
-                <a:solidFill>
-                  <a:srgbClr val="0F2C68"/>
-                </a:solidFill>
-                <a:latin typeface="HSE Sans"/>
-              </a:rPr>
-              <a:t>•  6 function-calling tools</a:t>
-            </a:r>
-          </a:p>
-          <a:p>
-            <a:pPr>
-              <a:spcAft>
-                <a:spcPts val="900"/>
-              </a:spcAft>
-            </a:pPr>
-            <a:r>
-              <a:rPr sz="1250" b="0">
-                <a:solidFill>
-                  <a:srgbClr val="0F2C68"/>
-                </a:solidFill>
-                <a:latin typeface="HSE Sans"/>
-              </a:rPr>
-              <a:t>•  Мульти-туровый диалог + long-term память</a:t>
-            </a:r>
-          </a:p>
-          <a:p>
-            <a:pPr>
-              <a:spcAft>
-                <a:spcPts val="900"/>
-              </a:spcAft>
-            </a:pPr>
-            <a:r>
-              <a:rPr sz="1250" b="0">
-                <a:solidFill>
-                  <a:srgbClr val="0F2C68"/>
-                </a:solidFill>
-                <a:latin typeface="HSE Sans"/>
-              </a:rPr>
-              <a:t>•  Явный, тестируемый граф — не «магия»</a:t>
-            </a:r>
-          </a:p>
-        </p:txBody>
-      </p:sp>
-    </p:spTree>
-  </p:cSld>
-  <p:clrMapOvr>
-    <a:masterClrMapping/>
-  </p:clrMapOvr>
-</p:sld>
-</file>
-
-<file path=ppt/slides/slide16.xml><?xml version="1.0" encoding="utf-8"?>
-<p:sld xmlns:a="http://schemas.openxmlformats.org/drawingml/2006/main" xmlns:p="http://schemas.openxmlformats.org/presentationml/2006/main" xmlns:r="http://schemas.openxmlformats.org/officeDocument/2006/relationships">
-  <p:cSld>
-    <p:spTree>
-      <p:nvGrpSpPr>
-        <p:cNvPr id="1" name=""/>
-        <p:cNvGrpSpPr/>
-        <p:nvPr/>
-      </p:nvGrpSpPr>
-      <p:grpSpPr/>
-      <p:sp>
-        <p:nvSpPr>
-          <p:cNvPr id="2" name="TextBox 1"/>
-          <p:cNvSpPr txBox="1"/>
-          <p:nvPr/>
-        </p:nvSpPr>
-        <p:spPr>
-          <a:xfrm>
-            <a:off x="987552" y="192024"/>
-            <a:ext cx="2743200" cy="585216"/>
-          </a:xfrm>
-          <a:prstGeom prst="rect">
-            <a:avLst/>
-          </a:prstGeom>
-          <a:noFill/>
-        </p:spPr>
-        <p:txBody>
-          <a:bodyPr wrap="square" anchor="ctr">
-            <a:spAutoFit/>
-          </a:bodyPr>
-          <a:lstStyle/>
-          <a:p>
-            <a:r>
-              <a:rPr sz="1050" b="1">
-                <a:solidFill>
-                  <a:srgbClr val="0F2C68"/>
-                </a:solidFill>
-                <a:latin typeface="HSE Sans"/>
-              </a:rPr>
-              <a:t>EventMind — IT-события и AI-рекомендации</a:t>
-            </a:r>
-          </a:p>
-        </p:txBody>
-      </p:sp>
-      <p:sp>
-        <p:nvSpPr>
-          <p:cNvPr id="3" name="TextBox 2"/>
-          <p:cNvSpPr txBox="1"/>
-          <p:nvPr/>
-        </p:nvSpPr>
-        <p:spPr>
-          <a:xfrm>
-            <a:off x="3840480" y="192024"/>
-            <a:ext cx="2011680" cy="585216"/>
-          </a:xfrm>
-          <a:prstGeom prst="rect">
-            <a:avLst/>
-          </a:prstGeom>
-          <a:noFill/>
-        </p:spPr>
-        <p:txBody>
-          <a:bodyPr wrap="square" anchor="ctr">
-            <a:spAutoFit/>
-          </a:bodyPr>
-          <a:lstStyle/>
-          <a:p>
-            <a:r>
-              <a:rPr sz="1050">
-                <a:solidFill>
-                  <a:srgbClr val="595959"/>
-                </a:solidFill>
-                <a:latin typeface="HSE Sans"/>
-              </a:rPr>
-              <a:t>Белов Егор</a:t>
-            </a:r>
-          </a:p>
-        </p:txBody>
-      </p:sp>
-      <p:sp>
-        <p:nvSpPr>
-          <p:cNvPr id="4" name="TextBox 3"/>
-          <p:cNvSpPr txBox="1"/>
-          <p:nvPr/>
-        </p:nvSpPr>
-        <p:spPr>
-          <a:xfrm>
-            <a:off x="6821424" y="192024"/>
-            <a:ext cx="1828800" cy="585216"/>
-          </a:xfrm>
-          <a:prstGeom prst="rect">
-            <a:avLst/>
-          </a:prstGeom>
-          <a:noFill/>
-        </p:spPr>
-        <p:txBody>
-          <a:bodyPr wrap="square" anchor="ctr">
-            <a:spAutoFit/>
-          </a:bodyPr>
-          <a:lstStyle/>
-          <a:p>
-            <a:r>
-              <a:rPr sz="1050" b="1">
-                <a:solidFill>
-                  <a:srgbClr val="0F2C68"/>
-                </a:solidFill>
-                <a:latin typeface="HSE Sans"/>
-              </a:rPr>
-              <a:t>Защита курсовой</a:t>
-            </a:r>
-          </a:p>
-          <a:p>
-            <a:r>
-              <a:rPr sz="1050">
-                <a:solidFill>
-                  <a:srgbClr val="595959"/>
-                </a:solidFill>
-                <a:latin typeface="HSE Sans"/>
-              </a:rPr>
-              <a:t>Пермь, 2026</a:t>
-            </a:r>
-          </a:p>
-        </p:txBody>
-      </p:sp>
-      <p:sp>
-        <p:nvSpPr>
-          <p:cNvPr id="5" name="TextBox 4"/>
-          <p:cNvSpPr txBox="1"/>
-          <p:nvPr/>
-        </p:nvSpPr>
-        <p:spPr>
-          <a:xfrm>
-            <a:off x="457200" y="932688"/>
-            <a:ext cx="11247120" cy="731520"/>
-          </a:xfrm>
-          <a:prstGeom prst="rect">
-            <a:avLst/>
-          </a:prstGeom>
-          <a:noFill/>
-        </p:spPr>
-        <p:txBody>
-          <a:bodyPr wrap="square">
-            <a:spAutoFit/>
-          </a:bodyPr>
-          <a:lstStyle/>
-          <a:p>
-            <a:r>
-              <a:rPr sz="3200" b="1">
-                <a:solidFill>
-                  <a:srgbClr val="0F2C68"/>
-                </a:solidFill>
-                <a:latin typeface="HSE Sans"/>
-              </a:rPr>
               <a:t>LLM-цепочка и надёжность</a:t>
             </a:r>
           </a:p>
@@ -17925,7 +17564,7 @@
                 </a:solidFill>
                 <a:latin typeface="HSE Sans"/>
               </a:rPr>
-              <a:t>•  Три уровня graceful-degradation:</a:t>
+              <a:t>•  Graceful-degradation на двух уровнях:</a:t>
             </a:r>
           </a:p>
           <a:p>
@@ -17958,22 +17597,6 @@
                 <a:latin typeface="HSE Sans"/>
               </a:rPr>
               <a:t>–  hybrid → rule-only выдача при сбое</a:t>
-            </a:r>
-          </a:p>
-          <a:p>
-            <a:pPr lvl="1">
-              <a:spcAft>
-                <a:spcPts val="1000"/>
-              </a:spcAft>
-            </a:pPr>
-            <a:r>
-              <a:rPr sz="1200" b="0">
-                <a:solidFill>
-                  <a:srgbClr val="595959"/>
-                </a:solidFill>
-                <a:latin typeface="HSE Sans"/>
-              </a:rPr>
-              <a:t>–  Copilot → сохранение сессии, «AI временно недоступен»</a:t>
             </a:r>
           </a:p>
           <a:p>
@@ -18034,7 +17657,7 @@
 </p:sld>
 </file>
 
-<file path=ppt/slides/slide17.xml><?xml version="1.0" encoding="utf-8"?>
+<file path=ppt/slides/slide16.xml><?xml version="1.0" encoding="utf-8"?>
 <p:sld xmlns:a="http://schemas.openxmlformats.org/drawingml/2006/main" xmlns:p="http://schemas.openxmlformats.org/presentationml/2006/main" xmlns:r="http://schemas.openxmlformats.org/officeDocument/2006/relationships">
   <p:cSld>
     <p:spTree>
@@ -19197,7 +18820,7 @@
                 </a:solidFill>
                 <a:latin typeface="HSE Sans"/>
               </a:rPr>
-              <a:t>•  369 автотестов в tests/ (scoring, bayesian, bandit, gnn, memory, ingestion, copilot, security).</a:t>
+              <a:t>•  369 автотестов в tests/ (scoring, bayesian, bandit, gnn, memory, ingestion, security).</a:t>
             </a:r>
           </a:p>
           <a:p>
@@ -19214,6 +18837,409 @@
                 <a:latin typeface="HSE Sans"/>
               </a:rPr>
               <a:t>•  Воспроизводимые скрипты оценки с фиксированным seed=42.</a:t>
+            </a:r>
+          </a:p>
+        </p:txBody>
+      </p:sp>
+    </p:spTree>
+  </p:cSld>
+  <p:clrMapOvr>
+    <a:masterClrMapping/>
+  </p:clrMapOvr>
+</p:sld>
+</file>
+
+<file path=ppt/slides/slide17.xml><?xml version="1.0" encoding="utf-8"?>
+<p:sld xmlns:a="http://schemas.openxmlformats.org/drawingml/2006/main" xmlns:p="http://schemas.openxmlformats.org/presentationml/2006/main" xmlns:r="http://schemas.openxmlformats.org/officeDocument/2006/relationships">
+  <p:cSld>
+    <p:spTree>
+      <p:nvGrpSpPr>
+        <p:cNvPr id="1" name=""/>
+        <p:cNvGrpSpPr/>
+        <p:nvPr/>
+      </p:nvGrpSpPr>
+      <p:grpSpPr/>
+      <p:sp>
+        <p:nvSpPr>
+          <p:cNvPr id="2" name="TextBox 1"/>
+          <p:cNvSpPr txBox="1"/>
+          <p:nvPr/>
+        </p:nvSpPr>
+        <p:spPr>
+          <a:xfrm>
+            <a:off x="987552" y="192024"/>
+            <a:ext cx="2743200" cy="585216"/>
+          </a:xfrm>
+          <a:prstGeom prst="rect">
+            <a:avLst/>
+          </a:prstGeom>
+          <a:noFill/>
+        </p:spPr>
+        <p:txBody>
+          <a:bodyPr wrap="square" anchor="ctr">
+            <a:spAutoFit/>
+          </a:bodyPr>
+          <a:lstStyle/>
+          <a:p>
+            <a:r>
+              <a:rPr sz="1050" b="1">
+                <a:solidFill>
+                  <a:srgbClr val="0F2C68"/>
+                </a:solidFill>
+                <a:latin typeface="HSE Sans"/>
+              </a:rPr>
+              <a:t>EventMind — IT-события и AI-рекомендации</a:t>
+            </a:r>
+          </a:p>
+        </p:txBody>
+      </p:sp>
+      <p:sp>
+        <p:nvSpPr>
+          <p:cNvPr id="3" name="TextBox 2"/>
+          <p:cNvSpPr txBox="1"/>
+          <p:nvPr/>
+        </p:nvSpPr>
+        <p:spPr>
+          <a:xfrm>
+            <a:off x="3840480" y="192024"/>
+            <a:ext cx="2011680" cy="585216"/>
+          </a:xfrm>
+          <a:prstGeom prst="rect">
+            <a:avLst/>
+          </a:prstGeom>
+          <a:noFill/>
+        </p:spPr>
+        <p:txBody>
+          <a:bodyPr wrap="square" anchor="ctr">
+            <a:spAutoFit/>
+          </a:bodyPr>
+          <a:lstStyle/>
+          <a:p>
+            <a:r>
+              <a:rPr sz="1050">
+                <a:solidFill>
+                  <a:srgbClr val="595959"/>
+                </a:solidFill>
+                <a:latin typeface="HSE Sans"/>
+              </a:rPr>
+              <a:t>Белов Егор</a:t>
+            </a:r>
+          </a:p>
+        </p:txBody>
+      </p:sp>
+      <p:sp>
+        <p:nvSpPr>
+          <p:cNvPr id="4" name="TextBox 3"/>
+          <p:cNvSpPr txBox="1"/>
+          <p:nvPr/>
+        </p:nvSpPr>
+        <p:spPr>
+          <a:xfrm>
+            <a:off x="6821424" y="192024"/>
+            <a:ext cx="1828800" cy="585216"/>
+          </a:xfrm>
+          <a:prstGeom prst="rect">
+            <a:avLst/>
+          </a:prstGeom>
+          <a:noFill/>
+        </p:spPr>
+        <p:txBody>
+          <a:bodyPr wrap="square" anchor="ctr">
+            <a:spAutoFit/>
+          </a:bodyPr>
+          <a:lstStyle/>
+          <a:p>
+            <a:r>
+              <a:rPr sz="1050" b="1">
+                <a:solidFill>
+                  <a:srgbClr val="0F2C68"/>
+                </a:solidFill>
+                <a:latin typeface="HSE Sans"/>
+              </a:rPr>
+              <a:t>Защита курсовой</a:t>
+            </a:r>
+          </a:p>
+          <a:p>
+            <a:r>
+              <a:rPr sz="1050">
+                <a:solidFill>
+                  <a:srgbClr val="595959"/>
+                </a:solidFill>
+                <a:latin typeface="HSE Sans"/>
+              </a:rPr>
+              <a:t>Пермь, 2026</a:t>
+            </a:r>
+          </a:p>
+        </p:txBody>
+      </p:sp>
+      <p:sp>
+        <p:nvSpPr>
+          <p:cNvPr id="5" name="TextBox 4"/>
+          <p:cNvSpPr txBox="1"/>
+          <p:nvPr/>
+        </p:nvSpPr>
+        <p:spPr>
+          <a:xfrm>
+            <a:off x="457200" y="932688"/>
+            <a:ext cx="11247120" cy="731520"/>
+          </a:xfrm>
+          <a:prstGeom prst="rect">
+            <a:avLst/>
+          </a:prstGeom>
+          <a:noFill/>
+        </p:spPr>
+        <p:txBody>
+          <a:bodyPr wrap="square">
+            <a:spAutoFit/>
+          </a:bodyPr>
+          <a:lstStyle/>
+          <a:p>
+            <a:r>
+              <a:rPr sz="3200" b="1">
+                <a:solidFill>
+                  <a:srgbClr val="0F2C68"/>
+                </a:solidFill>
+                <a:latin typeface="HSE Sans"/>
+              </a:rPr>
+              <a:t>Заключение</a:t>
+            </a:r>
+          </a:p>
+        </p:txBody>
+      </p:sp>
+      <p:sp>
+        <p:nvSpPr>
+          <p:cNvPr id="6" name="TextBox 5"/>
+          <p:cNvSpPr txBox="1"/>
+          <p:nvPr/>
+        </p:nvSpPr>
+        <p:spPr>
+          <a:xfrm>
+            <a:off x="548640" y="1737360"/>
+            <a:ext cx="5577840" cy="4572000"/>
+          </a:xfrm>
+          <a:prstGeom prst="rect">
+            <a:avLst/>
+          </a:prstGeom>
+          <a:noFill/>
+        </p:spPr>
+        <p:txBody>
+          <a:bodyPr wrap="square" anchor="t">
+            <a:spAutoFit/>
+          </a:bodyPr>
+          <a:lstStyle/>
+          <a:p>
+            <a:pPr>
+              <a:spcAft>
+                <a:spcPts val="1100"/>
+              </a:spcAft>
+            </a:pPr>
+            <a:r>
+              <a:rPr sz="1550" b="0">
+                <a:solidFill>
+                  <a:srgbClr val="0F2C68"/>
+                </a:solidFill>
+                <a:latin typeface="HSE Sans"/>
+              </a:rPr>
+              <a:t>•  Все поставленные задачи выполнены.</a:t>
+            </a:r>
+          </a:p>
+          <a:p>
+            <a:pPr>
+              <a:spcAft>
+                <a:spcPts val="1100"/>
+              </a:spcAft>
+            </a:pPr>
+            <a:r>
+              <a:rPr sz="1550" b="0">
+                <a:solidFill>
+                  <a:srgbClr val="0F2C68"/>
+                </a:solidFill>
+                <a:latin typeface="HSE Sans"/>
+              </a:rPr>
+              <a:t>•  Собрана рабочая система: API + бот + планировщик вокруг общей БД (PostgreSQL + pgvector).</a:t>
+            </a:r>
+          </a:p>
+          <a:p>
+            <a:pPr>
+              <a:spcAft>
+                <a:spcPts val="1100"/>
+              </a:spcAft>
+            </a:pPr>
+            <a:r>
+              <a:rPr sz="1550" b="0">
+                <a:solidFill>
+                  <a:srgbClr val="0F2C68"/>
+                </a:solidFill>
+                <a:latin typeface="HSE Sans"/>
+              </a:rPr>
+              <a:t>•  Реализован гибридный рекомендатель из 9 компонент с объяснением выбора.</a:t>
+            </a:r>
+          </a:p>
+          <a:p>
+            <a:pPr>
+              <a:spcAft>
+                <a:spcPts val="1100"/>
+              </a:spcAft>
+            </a:pPr>
+            <a:r>
+              <a:rPr sz="1550" b="0">
+                <a:solidFill>
+                  <a:srgbClr val="0F2C68"/>
+                </a:solidFill>
+                <a:latin typeface="HSE Sans"/>
+              </a:rPr>
+              <a:t>•  Сбор из 6 источников с AI-нормализацией и дедупом.</a:t>
+            </a:r>
+          </a:p>
+          <a:p>
+            <a:pPr>
+              <a:spcAft>
+                <a:spcPts val="1100"/>
+              </a:spcAft>
+            </a:pPr>
+            <a:r>
+              <a:rPr sz="1550" b="0">
+                <a:solidFill>
+                  <a:srgbClr val="0F2C68"/>
+                </a:solidFill>
+                <a:latin typeface="HSE Sans"/>
+              </a:rPr>
+              <a:t>•  Качество подтверждено метриками и 369 тестами.</a:t>
+            </a:r>
+          </a:p>
+        </p:txBody>
+      </p:sp>
+      <p:sp>
+        <p:nvSpPr>
+          <p:cNvPr id="7" name="Rectangle 6"/>
+          <p:cNvSpPr/>
+          <p:nvPr/>
+        </p:nvSpPr>
+        <p:spPr>
+          <a:xfrm>
+            <a:off x="6400800" y="1737360"/>
+            <a:ext cx="5303520" cy="3200400"/>
+          </a:xfrm>
+          <a:prstGeom prst="rect">
+            <a:avLst/>
+          </a:prstGeom>
+          <a:solidFill>
+            <a:srgbClr val="FDEFE3"/>
+          </a:solidFill>
+          <a:ln w="9525">
+            <a:solidFill>
+              <a:srgbClr val="0F2C68"/>
+            </a:solidFill>
+          </a:ln>
+          <a:effectLst/>
+        </p:spPr>
+        <p:style>
+          <a:lnRef idx="1">
+            <a:schemeClr val="accent1"/>
+          </a:lnRef>
+          <a:fillRef idx="3">
+            <a:schemeClr val="accent1"/>
+          </a:fillRef>
+          <a:effectRef idx="2">
+            <a:schemeClr val="accent1"/>
+          </a:effectRef>
+          <a:fontRef idx="minor">
+            <a:schemeClr val="lt1"/>
+          </a:fontRef>
+        </p:style>
+        <p:txBody>
+          <a:bodyPr rtlCol="0" anchor="t" wrap="square" lIns="101600" rIns="101600" tIns="101600" bIns="101600"/>
+          <a:lstStyle/>
+          <a:p>
+            <a:pPr algn="ctr"/>
+            <a:r>
+              <a:rPr sz="1500" b="1">
+                <a:solidFill>
+                  <a:srgbClr val="ED7D31"/>
+                </a:solidFill>
+                <a:latin typeface="HSE Sans"/>
+              </a:rPr>
+              <a:t>Направления развития</a:t>
+            </a:r>
+          </a:p>
+          <a:p>
+            <a:pPr>
+              <a:spcBef>
+                <a:spcPts val="300"/>
+              </a:spcBef>
+            </a:pPr>
+            <a:r>
+              <a:rPr sz="1250">
+                <a:solidFill>
+                  <a:srgbClr val="595959"/>
+                </a:solidFill>
+                <a:latin typeface="HSE Sans"/>
+              </a:rPr>
+              <a:t>• Расширение списка источников событий</a:t>
+            </a:r>
+          </a:p>
+          <a:p>
+            <a:pPr>
+              <a:spcBef>
+                <a:spcPts val="300"/>
+              </a:spcBef>
+            </a:pPr>
+            <a:r>
+              <a:rPr sz="1250">
+                <a:solidFill>
+                  <a:srgbClr val="595959"/>
+                </a:solidFill>
+                <a:latin typeface="HSE Sans"/>
+              </a:rPr>
+              <a:t>• Включение GNN-сигнала на большем датасете</a:t>
+            </a:r>
+          </a:p>
+          <a:p>
+            <a:pPr>
+              <a:spcBef>
+                <a:spcPts val="300"/>
+              </a:spcBef>
+            </a:pPr>
+            <a:r>
+              <a:rPr sz="1250">
+                <a:solidFill>
+                  <a:srgbClr val="595959"/>
+                </a:solidFill>
+                <a:latin typeface="HSE Sans"/>
+              </a:rPr>
+              <a:t>• Расширение пользовательских сценариев бота</a:t>
+            </a:r>
+          </a:p>
+          <a:p>
+            <a:pPr>
+              <a:spcBef>
+                <a:spcPts val="300"/>
+              </a:spcBef>
+            </a:pPr>
+            <a:r>
+              <a:rPr sz="1250">
+                <a:solidFill>
+                  <a:srgbClr val="595959"/>
+                </a:solidFill>
+                <a:latin typeface="HSE Sans"/>
+              </a:rPr>
+              <a:t>• A/B-тестирование весов рекомендатора</a:t>
+            </a:r>
+          </a:p>
+          <a:p>
+            <a:pPr>
+              <a:spcBef>
+                <a:spcPts val="300"/>
+              </a:spcBef>
+            </a:pPr>
+            <a:r>
+              <a:rPr sz="1250">
+                <a:solidFill>
+                  <a:srgbClr val="595959"/>
+                </a:solidFill>
+                <a:latin typeface="HSE Sans"/>
+              </a:rPr>
+              <a:t>• Развитие в магистерскую работу</a:t>
             </a:r>
           </a:p>
         </p:txBody>
@@ -19351,409 +19377,6 @@
       </p:sp>
       <p:sp>
         <p:nvSpPr>
-          <p:cNvPr id="5" name="TextBox 4"/>
-          <p:cNvSpPr txBox="1"/>
-          <p:nvPr/>
-        </p:nvSpPr>
-        <p:spPr>
-          <a:xfrm>
-            <a:off x="457200" y="932688"/>
-            <a:ext cx="11247120" cy="731520"/>
-          </a:xfrm>
-          <a:prstGeom prst="rect">
-            <a:avLst/>
-          </a:prstGeom>
-          <a:noFill/>
-        </p:spPr>
-        <p:txBody>
-          <a:bodyPr wrap="square">
-            <a:spAutoFit/>
-          </a:bodyPr>
-          <a:lstStyle/>
-          <a:p>
-            <a:r>
-              <a:rPr sz="3200" b="1">
-                <a:solidFill>
-                  <a:srgbClr val="0F2C68"/>
-                </a:solidFill>
-                <a:latin typeface="HSE Sans"/>
-              </a:rPr>
-              <a:t>Заключение</a:t>
-            </a:r>
-          </a:p>
-        </p:txBody>
-      </p:sp>
-      <p:sp>
-        <p:nvSpPr>
-          <p:cNvPr id="6" name="TextBox 5"/>
-          <p:cNvSpPr txBox="1"/>
-          <p:nvPr/>
-        </p:nvSpPr>
-        <p:spPr>
-          <a:xfrm>
-            <a:off x="548640" y="1737360"/>
-            <a:ext cx="5577840" cy="4572000"/>
-          </a:xfrm>
-          <a:prstGeom prst="rect">
-            <a:avLst/>
-          </a:prstGeom>
-          <a:noFill/>
-        </p:spPr>
-        <p:txBody>
-          <a:bodyPr wrap="square" anchor="t">
-            <a:spAutoFit/>
-          </a:bodyPr>
-          <a:lstStyle/>
-          <a:p>
-            <a:pPr>
-              <a:spcAft>
-                <a:spcPts val="1100"/>
-              </a:spcAft>
-            </a:pPr>
-            <a:r>
-              <a:rPr sz="1550" b="0">
-                <a:solidFill>
-                  <a:srgbClr val="0F2C68"/>
-                </a:solidFill>
-                <a:latin typeface="HSE Sans"/>
-              </a:rPr>
-              <a:t>•  Все поставленные задачи выполнены.</a:t>
-            </a:r>
-          </a:p>
-          <a:p>
-            <a:pPr>
-              <a:spcAft>
-                <a:spcPts val="1100"/>
-              </a:spcAft>
-            </a:pPr>
-            <a:r>
-              <a:rPr sz="1550" b="0">
-                <a:solidFill>
-                  <a:srgbClr val="0F2C68"/>
-                </a:solidFill>
-                <a:latin typeface="HSE Sans"/>
-              </a:rPr>
-              <a:t>•  Собрана рабочая система: API + бот + планировщик вокруг общей БД (PostgreSQL + pgvector).</a:t>
-            </a:r>
-          </a:p>
-          <a:p>
-            <a:pPr>
-              <a:spcAft>
-                <a:spcPts val="1100"/>
-              </a:spcAft>
-            </a:pPr>
-            <a:r>
-              <a:rPr sz="1550" b="0">
-                <a:solidFill>
-                  <a:srgbClr val="0F2C68"/>
-                </a:solidFill>
-                <a:latin typeface="HSE Sans"/>
-              </a:rPr>
-              <a:t>•  Реализован гибридный рекомендатель из 9 компонент с объяснениями и AI-копилот на LangGraph.</a:t>
-            </a:r>
-          </a:p>
-          <a:p>
-            <a:pPr>
-              <a:spcAft>
-                <a:spcPts val="1100"/>
-              </a:spcAft>
-            </a:pPr>
-            <a:r>
-              <a:rPr sz="1550" b="0">
-                <a:solidFill>
-                  <a:srgbClr val="0F2C68"/>
-                </a:solidFill>
-                <a:latin typeface="HSE Sans"/>
-              </a:rPr>
-              <a:t>•  Сбор из 6 источников с AI-нормализацией и дедупом.</a:t>
-            </a:r>
-          </a:p>
-          <a:p>
-            <a:pPr>
-              <a:spcAft>
-                <a:spcPts val="1100"/>
-              </a:spcAft>
-            </a:pPr>
-            <a:r>
-              <a:rPr sz="1550" b="0">
-                <a:solidFill>
-                  <a:srgbClr val="0F2C68"/>
-                </a:solidFill>
-                <a:latin typeface="HSE Sans"/>
-              </a:rPr>
-              <a:t>•  Качество подтверждено метриками и 369 тестами.</a:t>
-            </a:r>
-          </a:p>
-        </p:txBody>
-      </p:sp>
-      <p:sp>
-        <p:nvSpPr>
-          <p:cNvPr id="7" name="Rectangle 6"/>
-          <p:cNvSpPr/>
-          <p:nvPr/>
-        </p:nvSpPr>
-        <p:spPr>
-          <a:xfrm>
-            <a:off x="6400800" y="1737360"/>
-            <a:ext cx="5303520" cy="3200400"/>
-          </a:xfrm>
-          <a:prstGeom prst="rect">
-            <a:avLst/>
-          </a:prstGeom>
-          <a:solidFill>
-            <a:srgbClr val="FDEFE3"/>
-          </a:solidFill>
-          <a:ln w="9525">
-            <a:solidFill>
-              <a:srgbClr val="0F2C68"/>
-            </a:solidFill>
-          </a:ln>
-          <a:effectLst/>
-        </p:spPr>
-        <p:style>
-          <a:lnRef idx="1">
-            <a:schemeClr val="accent1"/>
-          </a:lnRef>
-          <a:fillRef idx="3">
-            <a:schemeClr val="accent1"/>
-          </a:fillRef>
-          <a:effectRef idx="2">
-            <a:schemeClr val="accent1"/>
-          </a:effectRef>
-          <a:fontRef idx="minor">
-            <a:schemeClr val="lt1"/>
-          </a:fontRef>
-        </p:style>
-        <p:txBody>
-          <a:bodyPr rtlCol="0" anchor="t" wrap="square" lIns="101600" rIns="101600" tIns="101600" bIns="101600"/>
-          <a:lstStyle/>
-          <a:p>
-            <a:pPr algn="ctr"/>
-            <a:r>
-              <a:rPr sz="1500" b="1">
-                <a:solidFill>
-                  <a:srgbClr val="ED7D31"/>
-                </a:solidFill>
-                <a:latin typeface="HSE Sans"/>
-              </a:rPr>
-              <a:t>Направления развития</a:t>
-            </a:r>
-          </a:p>
-          <a:p>
-            <a:pPr>
-              <a:spcBef>
-                <a:spcPts val="300"/>
-              </a:spcBef>
-            </a:pPr>
-            <a:r>
-              <a:rPr sz="1250">
-                <a:solidFill>
-                  <a:srgbClr val="595959"/>
-                </a:solidFill>
-                <a:latin typeface="HSE Sans"/>
-              </a:rPr>
-              <a:t>• Расширение списка источников событий</a:t>
-            </a:r>
-          </a:p>
-          <a:p>
-            <a:pPr>
-              <a:spcBef>
-                <a:spcPts val="300"/>
-              </a:spcBef>
-            </a:pPr>
-            <a:r>
-              <a:rPr sz="1250">
-                <a:solidFill>
-                  <a:srgbClr val="595959"/>
-                </a:solidFill>
-                <a:latin typeface="HSE Sans"/>
-              </a:rPr>
-              <a:t>• Включение GNN-сигнала на большем датасете</a:t>
-            </a:r>
-          </a:p>
-          <a:p>
-            <a:pPr>
-              <a:spcBef>
-                <a:spcPts val="300"/>
-              </a:spcBef>
-            </a:pPr>
-            <a:r>
-              <a:rPr sz="1250">
-                <a:solidFill>
-                  <a:srgbClr val="595959"/>
-                </a:solidFill>
-                <a:latin typeface="HSE Sans"/>
-              </a:rPr>
-              <a:t>• Переработка UX AI-копилота в боте</a:t>
-            </a:r>
-          </a:p>
-          <a:p>
-            <a:pPr>
-              <a:spcBef>
-                <a:spcPts val="300"/>
-              </a:spcBef>
-            </a:pPr>
-            <a:r>
-              <a:rPr sz="1250">
-                <a:solidFill>
-                  <a:srgbClr val="595959"/>
-                </a:solidFill>
-                <a:latin typeface="HSE Sans"/>
-              </a:rPr>
-              <a:t>• A/B-тестирование весов рекомендатора</a:t>
-            </a:r>
-          </a:p>
-          <a:p>
-            <a:pPr>
-              <a:spcBef>
-                <a:spcPts val="300"/>
-              </a:spcBef>
-            </a:pPr>
-            <a:r>
-              <a:rPr sz="1250">
-                <a:solidFill>
-                  <a:srgbClr val="595959"/>
-                </a:solidFill>
-                <a:latin typeface="HSE Sans"/>
-              </a:rPr>
-              <a:t>• Развитие в магистерскую работу</a:t>
-            </a:r>
-          </a:p>
-        </p:txBody>
-      </p:sp>
-    </p:spTree>
-  </p:cSld>
-  <p:clrMapOvr>
-    <a:masterClrMapping/>
-  </p:clrMapOvr>
-</p:sld>
-</file>
-
-<file path=ppt/slides/slide19.xml><?xml version="1.0" encoding="utf-8"?>
-<p:sld xmlns:a="http://schemas.openxmlformats.org/drawingml/2006/main" xmlns:p="http://schemas.openxmlformats.org/presentationml/2006/main" xmlns:r="http://schemas.openxmlformats.org/officeDocument/2006/relationships">
-  <p:cSld>
-    <p:spTree>
-      <p:nvGrpSpPr>
-        <p:cNvPr id="1" name=""/>
-        <p:cNvGrpSpPr/>
-        <p:nvPr/>
-      </p:nvGrpSpPr>
-      <p:grpSpPr/>
-      <p:sp>
-        <p:nvSpPr>
-          <p:cNvPr id="2" name="TextBox 1"/>
-          <p:cNvSpPr txBox="1"/>
-          <p:nvPr/>
-        </p:nvSpPr>
-        <p:spPr>
-          <a:xfrm>
-            <a:off x="987552" y="192024"/>
-            <a:ext cx="2743200" cy="585216"/>
-          </a:xfrm>
-          <a:prstGeom prst="rect">
-            <a:avLst/>
-          </a:prstGeom>
-          <a:noFill/>
-        </p:spPr>
-        <p:txBody>
-          <a:bodyPr wrap="square" anchor="ctr">
-            <a:spAutoFit/>
-          </a:bodyPr>
-          <a:lstStyle/>
-          <a:p>
-            <a:r>
-              <a:rPr sz="1050" b="1">
-                <a:solidFill>
-                  <a:srgbClr val="0F2C68"/>
-                </a:solidFill>
-                <a:latin typeface="HSE Sans"/>
-              </a:rPr>
-              <a:t>EventMind — IT-события и AI-рекомендации</a:t>
-            </a:r>
-          </a:p>
-        </p:txBody>
-      </p:sp>
-      <p:sp>
-        <p:nvSpPr>
-          <p:cNvPr id="3" name="TextBox 2"/>
-          <p:cNvSpPr txBox="1"/>
-          <p:nvPr/>
-        </p:nvSpPr>
-        <p:spPr>
-          <a:xfrm>
-            <a:off x="3840480" y="192024"/>
-            <a:ext cx="2011680" cy="585216"/>
-          </a:xfrm>
-          <a:prstGeom prst="rect">
-            <a:avLst/>
-          </a:prstGeom>
-          <a:noFill/>
-        </p:spPr>
-        <p:txBody>
-          <a:bodyPr wrap="square" anchor="ctr">
-            <a:spAutoFit/>
-          </a:bodyPr>
-          <a:lstStyle/>
-          <a:p>
-            <a:r>
-              <a:rPr sz="1050">
-                <a:solidFill>
-                  <a:srgbClr val="595959"/>
-                </a:solidFill>
-                <a:latin typeface="HSE Sans"/>
-              </a:rPr>
-              <a:t>Белов Егор</a:t>
-            </a:r>
-          </a:p>
-        </p:txBody>
-      </p:sp>
-      <p:sp>
-        <p:nvSpPr>
-          <p:cNvPr id="4" name="TextBox 3"/>
-          <p:cNvSpPr txBox="1"/>
-          <p:nvPr/>
-        </p:nvSpPr>
-        <p:spPr>
-          <a:xfrm>
-            <a:off x="6821424" y="192024"/>
-            <a:ext cx="1828800" cy="585216"/>
-          </a:xfrm>
-          <a:prstGeom prst="rect">
-            <a:avLst/>
-          </a:prstGeom>
-          <a:noFill/>
-        </p:spPr>
-        <p:txBody>
-          <a:bodyPr wrap="square" anchor="ctr">
-            <a:spAutoFit/>
-          </a:bodyPr>
-          <a:lstStyle/>
-          <a:p>
-            <a:r>
-              <a:rPr sz="1050" b="1">
-                <a:solidFill>
-                  <a:srgbClr val="0F2C68"/>
-                </a:solidFill>
-                <a:latin typeface="HSE Sans"/>
-              </a:rPr>
-              <a:t>Защита курсовой</a:t>
-            </a:r>
-          </a:p>
-          <a:p>
-            <a:r>
-              <a:rPr sz="1050">
-                <a:solidFill>
-                  <a:srgbClr val="595959"/>
-                </a:solidFill>
-                <a:latin typeface="HSE Sans"/>
-              </a:rPr>
-              <a:t>Пермь, 2026</a:t>
-            </a:r>
-          </a:p>
-        </p:txBody>
-      </p:sp>
-      <p:sp>
-        <p:nvSpPr>
           <p:cNvPr id="5" name="Rectangle 4"/>
           <p:cNvSpPr/>
           <p:nvPr/>
@@ -20659,7 +20282,7 @@
                 </a:solidFill>
                 <a:latin typeface="HSE Sans"/>
               </a:rPr>
-              <a:t>Программная система, объединяющая сбор и нормализацию событий, гибридный рекомендатель и мультиагентного AI-копилота вокруг общей базы данных.</a:t>
+              <a:t>Программная система, объединяющая сбор и нормализацию событий, гибридный рекомендатель и Telegram-интерфейс вокруг общей базы данных.</a:t>
             </a:r>
           </a:p>
         </p:txBody>
@@ -20998,7 +20621,7 @@
                 </a:solidFill>
                 <a:latin typeface="HSE Sans"/>
               </a:rPr>
-              <a:t>•  Разработка Telegram-интерфейса и AI-копилота</a:t>
+              <a:t>•  Разработка Telegram-интерфейса и обратной связи</a:t>
             </a:r>
           </a:p>
           <a:p>
@@ -22640,7 +22263,7 @@
                 </a:solidFill>
                 <a:latin typeface="HSE Sans"/>
               </a:rPr>
-              <a:t>•  Диалог с AI-копилотом: план развития под цель</a:t>
+              <a:t>•  Подписка на дайджест и уведомления</a:t>
             </a:r>
           </a:p>
         </p:txBody>

--- a/docs/Презентация_защита_EventMind.pptx
+++ b/docs/Презентация_защита_EventMind.pptx
@@ -321,7 +321,7 @@
           <a:p>
             <a:fld id="{5BCAD085-E8A6-8845-BD4E-CB4CCA059FC4}" type="datetimeFigureOut">
               <a:rPr lang="en-US" smtClean="0"/>
-              <a:t>6/22/26</a:t>
+              <a:t>6/24/26</a:t>
             </a:fld>
             <a:endParaRPr lang="en-US"/>
           </a:p>
@@ -489,7 +489,7 @@
           <a:p>
             <a:fld id="{5BCAD085-E8A6-8845-BD4E-CB4CCA059FC4}" type="datetimeFigureOut">
               <a:rPr lang="en-US" smtClean="0"/>
-              <a:t>6/22/26</a:t>
+              <a:t>6/24/26</a:t>
             </a:fld>
             <a:endParaRPr lang="en-US"/>
           </a:p>
@@ -667,7 +667,7 @@
           <a:p>
             <a:fld id="{5BCAD085-E8A6-8845-BD4E-CB4CCA059FC4}" type="datetimeFigureOut">
               <a:rPr lang="en-US" smtClean="0"/>
-              <a:t>6/22/26</a:t>
+              <a:t>6/24/26</a:t>
             </a:fld>
             <a:endParaRPr lang="en-US"/>
           </a:p>
@@ -835,7 +835,7 @@
           <a:p>
             <a:fld id="{5BCAD085-E8A6-8845-BD4E-CB4CCA059FC4}" type="datetimeFigureOut">
               <a:rPr lang="en-US" smtClean="0"/>
-              <a:t>6/22/26</a:t>
+              <a:t>6/24/26</a:t>
             </a:fld>
             <a:endParaRPr lang="en-US"/>
           </a:p>
@@ -1080,7 +1080,7 @@
           <a:p>
             <a:fld id="{5BCAD085-E8A6-8845-BD4E-CB4CCA059FC4}" type="datetimeFigureOut">
               <a:rPr lang="en-US" smtClean="0"/>
-              <a:t>6/22/26</a:t>
+              <a:t>6/24/26</a:t>
             </a:fld>
             <a:endParaRPr lang="en-US"/>
           </a:p>
@@ -1365,7 +1365,7 @@
           <a:p>
             <a:fld id="{5BCAD085-E8A6-8845-BD4E-CB4CCA059FC4}" type="datetimeFigureOut">
               <a:rPr lang="en-US" smtClean="0"/>
-              <a:t>6/22/26</a:t>
+              <a:t>6/24/26</a:t>
             </a:fld>
             <a:endParaRPr lang="en-US"/>
           </a:p>
@@ -1784,7 +1784,7 @@
           <a:p>
             <a:fld id="{5BCAD085-E8A6-8845-BD4E-CB4CCA059FC4}" type="datetimeFigureOut">
               <a:rPr lang="en-US" smtClean="0"/>
-              <a:t>6/22/26</a:t>
+              <a:t>6/24/26</a:t>
             </a:fld>
             <a:endParaRPr lang="en-US"/>
           </a:p>
@@ -1901,7 +1901,7 @@
           <a:p>
             <a:fld id="{5BCAD085-E8A6-8845-BD4E-CB4CCA059FC4}" type="datetimeFigureOut">
               <a:rPr lang="en-US" smtClean="0"/>
-              <a:t>6/22/26</a:t>
+              <a:t>6/24/26</a:t>
             </a:fld>
             <a:endParaRPr lang="en-US"/>
           </a:p>
@@ -1996,7 +1996,7 @@
           <a:p>
             <a:fld id="{5BCAD085-E8A6-8845-BD4E-CB4CCA059FC4}" type="datetimeFigureOut">
               <a:rPr lang="en-US" smtClean="0"/>
-              <a:t>6/22/26</a:t>
+              <a:t>6/24/26</a:t>
             </a:fld>
             <a:endParaRPr lang="en-US"/>
           </a:p>
@@ -2271,7 +2271,7 @@
           <a:p>
             <a:fld id="{5BCAD085-E8A6-8845-BD4E-CB4CCA059FC4}" type="datetimeFigureOut">
               <a:rPr lang="en-US" smtClean="0"/>
-              <a:t>6/22/26</a:t>
+              <a:t>6/24/26</a:t>
             </a:fld>
             <a:endParaRPr lang="en-US"/>
           </a:p>
@@ -2523,7 +2523,7 @@
           <a:p>
             <a:fld id="{5BCAD085-E8A6-8845-BD4E-CB4CCA059FC4}" type="datetimeFigureOut">
               <a:rPr lang="en-US" smtClean="0"/>
-              <a:t>6/22/26</a:t>
+              <a:t>6/24/26</a:t>
             </a:fld>
             <a:endParaRPr lang="en-US"/>
           </a:p>
@@ -2734,7 +2734,7 @@
           <a:p>
             <a:fld id="{5BCAD085-E8A6-8845-BD4E-CB4CCA059FC4}" type="datetimeFigureOut">
               <a:rPr lang="en-US" smtClean="0"/>
-              <a:t>6/22/26</a:t>
+              <a:t>6/24/26</a:t>
             </a:fld>
             <a:endParaRPr lang="en-US"/>
           </a:p>
@@ -4550,8 +4550,8 @@
         </p:blipFill>
         <p:spPr>
           <a:xfrm>
-            <a:off x="3680460" y="557784"/>
-            <a:ext cx="6652260" cy="5742432"/>
+            <a:off x="3680459" y="557784"/>
+            <a:ext cx="6942125" cy="5742432"/>
           </a:xfrm>
           <a:prstGeom prst="rect">
             <a:avLst/>
@@ -5867,8 +5867,8 @@
         </p:nvSpPr>
         <p:spPr>
           <a:xfrm>
-            <a:off x="502920" y="2932818"/>
-            <a:ext cx="2697480" cy="1015663"/>
+            <a:off x="502919" y="2763315"/>
+            <a:ext cx="2735477" cy="1015663"/>
           </a:xfrm>
           <a:prstGeom prst="rect">
             <a:avLst/>
@@ -5951,8 +5951,8 @@
         </p:blipFill>
         <p:spPr>
           <a:xfrm>
-            <a:off x="3520441" y="749468"/>
-            <a:ext cx="8389210" cy="5382364"/>
+            <a:off x="3154680" y="749468"/>
+            <a:ext cx="8754971" cy="5382364"/>
           </a:xfrm>
           <a:prstGeom prst="rect">
             <a:avLst/>
@@ -8405,14 +8405,38 @@
           <a:p>
             <a:pPr algn="ctr"/>
             <a:r>
-              <a:rPr sz="1500" b="1">
-                <a:solidFill>
-                  <a:srgbClr val="0F2C68"/>
-                </a:solidFill>
-                <a:latin typeface="HSE Sans"/>
-              </a:rPr>
-              <a:t>Направления развития</a:t>
-            </a:r>
+              <a:rPr sz="1500" b="1" dirty="0" err="1">
+                <a:solidFill>
+                  <a:srgbClr val="0F2C68"/>
+                </a:solidFill>
+                <a:latin typeface="HSE Sans"/>
+              </a:rPr>
+              <a:t>Направления</a:t>
+            </a:r>
+            <a:r>
+              <a:rPr sz="1500" b="1" dirty="0">
+                <a:solidFill>
+                  <a:srgbClr val="0F2C68"/>
+                </a:solidFill>
+                <a:latin typeface="HSE Sans"/>
+              </a:rPr>
+              <a:t> </a:t>
+            </a:r>
+            <a:r>
+              <a:rPr sz="1500" b="1" dirty="0" err="1">
+                <a:solidFill>
+                  <a:srgbClr val="0F2C68"/>
+                </a:solidFill>
+                <a:latin typeface="HSE Sans"/>
+              </a:rPr>
+              <a:t>развития</a:t>
+            </a:r>
+            <a:endParaRPr sz="1500" b="1" dirty="0">
+              <a:solidFill>
+                <a:srgbClr val="0F2C68"/>
+              </a:solidFill>
+              <a:latin typeface="HSE Sans"/>
+            </a:endParaRPr>
           </a:p>
           <a:p>
             <a:pPr>
@@ -8421,14 +8445,83 @@
               </a:spcBef>
             </a:pPr>
             <a:r>
-              <a:rPr sz="1350">
-                <a:solidFill>
-                  <a:srgbClr val="595959"/>
-                </a:solidFill>
-                <a:latin typeface="HSE Sans"/>
-              </a:rPr>
-              <a:t>• Расширение списка источников событий</a:t>
-            </a:r>
+              <a:rPr sz="1350" dirty="0">
+                <a:solidFill>
+                  <a:srgbClr val="595959"/>
+                </a:solidFill>
+                <a:latin typeface="HSE Sans"/>
+              </a:rPr>
+              <a:t>• </a:t>
+            </a:r>
+            <a:r>
+              <a:rPr sz="1350" dirty="0" err="1">
+                <a:solidFill>
+                  <a:srgbClr val="595959"/>
+                </a:solidFill>
+                <a:latin typeface="HSE Sans"/>
+              </a:rPr>
+              <a:t>Расширение</a:t>
+            </a:r>
+            <a:r>
+              <a:rPr sz="1350" dirty="0">
+                <a:solidFill>
+                  <a:srgbClr val="595959"/>
+                </a:solidFill>
+                <a:latin typeface="HSE Sans"/>
+              </a:rPr>
+              <a:t> </a:t>
+            </a:r>
+            <a:r>
+              <a:rPr sz="1350" dirty="0" err="1">
+                <a:solidFill>
+                  <a:srgbClr val="595959"/>
+                </a:solidFill>
+                <a:latin typeface="HSE Sans"/>
+              </a:rPr>
+              <a:t>списка</a:t>
+            </a:r>
+            <a:r>
+              <a:rPr sz="1350" dirty="0">
+                <a:solidFill>
+                  <a:srgbClr val="595959"/>
+                </a:solidFill>
+                <a:latin typeface="HSE Sans"/>
+              </a:rPr>
+              <a:t> </a:t>
+            </a:r>
+            <a:r>
+              <a:rPr sz="1350" dirty="0" err="1">
+                <a:solidFill>
+                  <a:srgbClr val="595959"/>
+                </a:solidFill>
+                <a:latin typeface="HSE Sans"/>
+              </a:rPr>
+              <a:t>источников</a:t>
+            </a:r>
+            <a:r>
+              <a:rPr sz="1350" dirty="0">
+                <a:solidFill>
+                  <a:srgbClr val="595959"/>
+                </a:solidFill>
+                <a:latin typeface="HSE Sans"/>
+              </a:rPr>
+              <a:t> </a:t>
+            </a:r>
+            <a:r>
+              <a:rPr sz="1350" dirty="0" err="1">
+                <a:solidFill>
+                  <a:srgbClr val="595959"/>
+                </a:solidFill>
+                <a:latin typeface="HSE Sans"/>
+              </a:rPr>
+              <a:t>событий</a:t>
+            </a:r>
+            <a:endParaRPr sz="1350" dirty="0">
+              <a:solidFill>
+                <a:srgbClr val="595959"/>
+              </a:solidFill>
+              <a:latin typeface="HSE Sans"/>
+            </a:endParaRPr>
           </a:p>
           <a:p>
             <a:pPr>
@@ -8437,14 +8530,137 @@
               </a:spcBef>
             </a:pPr>
             <a:r>
-              <a:rPr sz="1350">
-                <a:solidFill>
-                  <a:srgbClr val="595959"/>
-                </a:solidFill>
-                <a:latin typeface="HSE Sans"/>
-              </a:rPr>
-              <a:t>• Включение коллаборативного сигнала на большем наборе данных</a:t>
-            </a:r>
+              <a:rPr sz="1350" dirty="0">
+                <a:solidFill>
+                  <a:srgbClr val="595959"/>
+                </a:solidFill>
+                <a:latin typeface="HSE Sans"/>
+              </a:rPr>
+              <a:t>• </a:t>
+            </a:r>
+            <a:r>
+              <a:rPr sz="1350" dirty="0" err="1">
+                <a:solidFill>
+                  <a:srgbClr val="595959"/>
+                </a:solidFill>
+                <a:latin typeface="HSE Sans"/>
+              </a:rPr>
+              <a:t>Включение</a:t>
+            </a:r>
+            <a:r>
+              <a:rPr sz="1350" dirty="0">
+                <a:solidFill>
+                  <a:srgbClr val="595959"/>
+                </a:solidFill>
+                <a:latin typeface="HSE Sans"/>
+              </a:rPr>
+              <a:t> </a:t>
+            </a:r>
+            <a:r>
+              <a:rPr sz="1350" dirty="0" err="1">
+                <a:solidFill>
+                  <a:srgbClr val="595959"/>
+                </a:solidFill>
+                <a:latin typeface="HSE Sans"/>
+              </a:rPr>
+              <a:t>коллаборативного</a:t>
+            </a:r>
+            <a:r>
+              <a:rPr sz="1350" dirty="0">
+                <a:solidFill>
+                  <a:srgbClr val="595959"/>
+                </a:solidFill>
+                <a:latin typeface="HSE Sans"/>
+              </a:rPr>
+              <a:t> </a:t>
+            </a:r>
+            <a:r>
+              <a:rPr sz="1350" dirty="0" err="1">
+                <a:solidFill>
+                  <a:srgbClr val="595959"/>
+                </a:solidFill>
+                <a:latin typeface="HSE Sans"/>
+              </a:rPr>
+              <a:t>сигнала</a:t>
+            </a:r>
+            <a:r>
+              <a:rPr sz="1350" dirty="0">
+                <a:solidFill>
+                  <a:srgbClr val="595959"/>
+                </a:solidFill>
+                <a:latin typeface="HSE Sans"/>
+              </a:rPr>
+              <a:t> </a:t>
+            </a:r>
+            <a:r>
+              <a:rPr sz="1350" dirty="0" err="1">
+                <a:solidFill>
+                  <a:srgbClr val="595959"/>
+                </a:solidFill>
+                <a:latin typeface="HSE Sans"/>
+              </a:rPr>
+              <a:t>на</a:t>
+            </a:r>
+            <a:r>
+              <a:rPr sz="1350" dirty="0">
+                <a:solidFill>
+                  <a:srgbClr val="595959"/>
+                </a:solidFill>
+                <a:latin typeface="HSE Sans"/>
+              </a:rPr>
+              <a:t> </a:t>
+            </a:r>
+            <a:r>
+              <a:rPr sz="1350" dirty="0" err="1">
+                <a:solidFill>
+                  <a:srgbClr val="595959"/>
+                </a:solidFill>
+                <a:latin typeface="HSE Sans"/>
+              </a:rPr>
+              <a:t>большем</a:t>
+            </a:r>
+            <a:r>
+              <a:rPr sz="1350" dirty="0">
+                <a:solidFill>
+                  <a:srgbClr val="595959"/>
+                </a:solidFill>
+                <a:latin typeface="HSE Sans"/>
+              </a:rPr>
+              <a:t> </a:t>
+            </a:r>
+            <a:r>
+              <a:rPr sz="1350" dirty="0" err="1">
+                <a:solidFill>
+                  <a:srgbClr val="595959"/>
+                </a:solidFill>
+                <a:latin typeface="HSE Sans"/>
+              </a:rPr>
+              <a:t>наборе</a:t>
+            </a:r>
+            <a:r>
+              <a:rPr sz="1350" dirty="0">
+                <a:solidFill>
+                  <a:srgbClr val="595959"/>
+                </a:solidFill>
+                <a:latin typeface="HSE Sans"/>
+              </a:rPr>
+              <a:t> </a:t>
+            </a:r>
+            <a:r>
+              <a:rPr sz="1350" dirty="0" err="1">
+                <a:solidFill>
+                  <a:srgbClr val="595959"/>
+                </a:solidFill>
+                <a:latin typeface="HSE Sans"/>
+              </a:rPr>
+              <a:t>данных</a:t>
+            </a:r>
+            <a:endParaRPr sz="1350" dirty="0">
+              <a:solidFill>
+                <a:srgbClr val="595959"/>
+              </a:solidFill>
+              <a:latin typeface="HSE Sans"/>
+            </a:endParaRPr>
           </a:p>
           <a:p>
             <a:pPr>
@@ -8453,14 +8669,83 @@
               </a:spcBef>
             </a:pPr>
             <a:r>
-              <a:rPr sz="1350">
-                <a:solidFill>
-                  <a:srgbClr val="595959"/>
-                </a:solidFill>
-                <a:latin typeface="HSE Sans"/>
-              </a:rPr>
-              <a:t>• Расширение пользовательских сценариев бота</a:t>
-            </a:r>
+              <a:rPr sz="1350" dirty="0">
+                <a:solidFill>
+                  <a:srgbClr val="595959"/>
+                </a:solidFill>
+                <a:latin typeface="HSE Sans"/>
+              </a:rPr>
+              <a:t>• </a:t>
+            </a:r>
+            <a:r>
+              <a:rPr sz="1350" dirty="0" err="1">
+                <a:solidFill>
+                  <a:srgbClr val="595959"/>
+                </a:solidFill>
+                <a:latin typeface="HSE Sans"/>
+              </a:rPr>
+              <a:t>Расширение</a:t>
+            </a:r>
+            <a:r>
+              <a:rPr sz="1350" dirty="0">
+                <a:solidFill>
+                  <a:srgbClr val="595959"/>
+                </a:solidFill>
+                <a:latin typeface="HSE Sans"/>
+              </a:rPr>
+              <a:t> </a:t>
+            </a:r>
+            <a:r>
+              <a:rPr sz="1350" dirty="0" err="1">
+                <a:solidFill>
+                  <a:srgbClr val="595959"/>
+                </a:solidFill>
+                <a:latin typeface="HSE Sans"/>
+              </a:rPr>
+              <a:t>пользовательских</a:t>
+            </a:r>
+            <a:r>
+              <a:rPr sz="1350" dirty="0">
+                <a:solidFill>
+                  <a:srgbClr val="595959"/>
+                </a:solidFill>
+                <a:latin typeface="HSE Sans"/>
+              </a:rPr>
+              <a:t> </a:t>
+            </a:r>
+            <a:r>
+              <a:rPr sz="1350" dirty="0" err="1">
+                <a:solidFill>
+                  <a:srgbClr val="595959"/>
+                </a:solidFill>
+                <a:latin typeface="HSE Sans"/>
+              </a:rPr>
+              <a:t>сценариев</a:t>
+            </a:r>
+            <a:r>
+              <a:rPr sz="1350" dirty="0">
+                <a:solidFill>
+                  <a:srgbClr val="595959"/>
+                </a:solidFill>
+                <a:latin typeface="HSE Sans"/>
+              </a:rPr>
+              <a:t> </a:t>
+            </a:r>
+            <a:r>
+              <a:rPr sz="1350" dirty="0" err="1">
+                <a:solidFill>
+                  <a:srgbClr val="595959"/>
+                </a:solidFill>
+                <a:latin typeface="HSE Sans"/>
+              </a:rPr>
+              <a:t>бота</a:t>
+            </a:r>
+            <a:endParaRPr sz="1350" dirty="0">
+              <a:solidFill>
+                <a:srgbClr val="595959"/>
+              </a:solidFill>
+              <a:latin typeface="HSE Sans"/>
+            </a:endParaRPr>
           </a:p>
           <a:p>
             <a:pPr>
@@ -8469,14 +8754,83 @@
               </a:spcBef>
             </a:pPr>
             <a:r>
-              <a:rPr sz="1350">
-                <a:solidFill>
-                  <a:srgbClr val="595959"/>
-                </a:solidFill>
-                <a:latin typeface="HSE Sans"/>
-              </a:rPr>
-              <a:t>• Сравнительное тестирование весов рекомендатора</a:t>
-            </a:r>
+              <a:rPr sz="1350" dirty="0">
+                <a:solidFill>
+                  <a:srgbClr val="595959"/>
+                </a:solidFill>
+                <a:latin typeface="HSE Sans"/>
+              </a:rPr>
+              <a:t>• </a:t>
+            </a:r>
+            <a:r>
+              <a:rPr sz="1350" dirty="0" err="1">
+                <a:solidFill>
+                  <a:srgbClr val="595959"/>
+                </a:solidFill>
+                <a:latin typeface="HSE Sans"/>
+              </a:rPr>
+              <a:t>Сравнительное</a:t>
+            </a:r>
+            <a:r>
+              <a:rPr sz="1350" dirty="0">
+                <a:solidFill>
+                  <a:srgbClr val="595959"/>
+                </a:solidFill>
+                <a:latin typeface="HSE Sans"/>
+              </a:rPr>
+              <a:t> </a:t>
+            </a:r>
+            <a:r>
+              <a:rPr sz="1350" dirty="0" err="1">
+                <a:solidFill>
+                  <a:srgbClr val="595959"/>
+                </a:solidFill>
+                <a:latin typeface="HSE Sans"/>
+              </a:rPr>
+              <a:t>тестирование</a:t>
+            </a:r>
+            <a:r>
+              <a:rPr sz="1350" dirty="0">
+                <a:solidFill>
+                  <a:srgbClr val="595959"/>
+                </a:solidFill>
+                <a:latin typeface="HSE Sans"/>
+              </a:rPr>
+              <a:t> </a:t>
+            </a:r>
+            <a:r>
+              <a:rPr sz="1350" dirty="0" err="1">
+                <a:solidFill>
+                  <a:srgbClr val="595959"/>
+                </a:solidFill>
+                <a:latin typeface="HSE Sans"/>
+              </a:rPr>
+              <a:t>весов</a:t>
+            </a:r>
+            <a:r>
+              <a:rPr sz="1350" dirty="0">
+                <a:solidFill>
+                  <a:srgbClr val="595959"/>
+                </a:solidFill>
+                <a:latin typeface="HSE Sans"/>
+              </a:rPr>
+              <a:t> </a:t>
+            </a:r>
+            <a:r>
+              <a:rPr sz="1350" dirty="0" err="1">
+                <a:solidFill>
+                  <a:srgbClr val="595959"/>
+                </a:solidFill>
+                <a:latin typeface="HSE Sans"/>
+              </a:rPr>
+              <a:t>рекомендатора</a:t>
+            </a:r>
+            <a:endParaRPr lang="ru-RU" sz="1350" dirty="0">
+              <a:solidFill>
+                <a:srgbClr val="595959"/>
+              </a:solidFill>
+              <a:latin typeface="HSE Sans"/>
+            </a:endParaRPr>
           </a:p>
           <a:p>
             <a:pPr>
@@ -8485,14 +8839,28 @@
               </a:spcBef>
             </a:pPr>
             <a:r>
-              <a:rPr sz="1350">
-                <a:solidFill>
-                  <a:srgbClr val="595959"/>
-                </a:solidFill>
-                <a:latin typeface="HSE Sans"/>
-              </a:rPr>
-              <a:t>• Развитие в магистерскую работу</a:t>
-            </a:r>
+              <a:rPr lang="ru-RU" sz="1350" dirty="0">
+                <a:solidFill>
+                  <a:srgbClr val="595959"/>
+                </a:solidFill>
+                <a:latin typeface="HSE Sans"/>
+              </a:rPr>
+              <a:t>• </a:t>
+            </a:r>
+            <a:r>
+              <a:rPr lang="ru-RU" sz="1350" dirty="0">
+                <a:solidFill>
+                  <a:srgbClr val="595959"/>
+                </a:solidFill>
+              </a:rPr>
+              <a:t>Расширение интерфейсов для пользователей</a:t>
+            </a:r>
+            <a:endParaRPr sz="1350" dirty="0">
+              <a:solidFill>
+                <a:srgbClr val="595959"/>
+              </a:solidFill>
+              <a:latin typeface="HSE Sans"/>
+            </a:endParaRPr>
           </a:p>
         </p:txBody>
       </p:sp>
@@ -9496,14 +9864,38 @@
           <a:p>
             <a:pPr algn="ctr"/>
             <a:r>
-              <a:rPr sz="1500" b="1">
-                <a:solidFill>
-                  <a:srgbClr val="0F2C68"/>
-                </a:solidFill>
-                <a:latin typeface="HSE Sans"/>
-              </a:rPr>
-              <a:t>Объект исследования</a:t>
-            </a:r>
+              <a:rPr sz="2000" b="1" dirty="0" err="1">
+                <a:solidFill>
+                  <a:srgbClr val="0F2C68"/>
+                </a:solidFill>
+                <a:latin typeface="HSE Sans"/>
+              </a:rPr>
+              <a:t>Объект</a:t>
+            </a:r>
+            <a:r>
+              <a:rPr sz="2000" b="1" dirty="0">
+                <a:solidFill>
+                  <a:srgbClr val="0F2C68"/>
+                </a:solidFill>
+                <a:latin typeface="HSE Sans"/>
+              </a:rPr>
+              <a:t> </a:t>
+            </a:r>
+            <a:r>
+              <a:rPr sz="2000" b="1" dirty="0" err="1">
+                <a:solidFill>
+                  <a:srgbClr val="0F2C68"/>
+                </a:solidFill>
+                <a:latin typeface="HSE Sans"/>
+              </a:rPr>
+              <a:t>исследования</a:t>
+            </a:r>
+            <a:endParaRPr sz="2000" b="1" dirty="0">
+              <a:solidFill>
+                <a:srgbClr val="0F2C68"/>
+              </a:solidFill>
+              <a:latin typeface="HSE Sans"/>
+            </a:endParaRPr>
           </a:p>
           <a:p>
             <a:pPr>
@@ -9512,13 +9904,202 @@
               </a:spcBef>
             </a:pPr>
             <a:r>
-              <a:rPr sz="1400">
-                <a:solidFill>
-                  <a:srgbClr val="595959"/>
-                </a:solidFill>
-                <a:latin typeface="HSE Sans"/>
-              </a:rPr>
-              <a:t>Процессы агрегации информации об IT-мероприятиях и построения персонализированных рекомендаций для пользователей.</a:t>
+              <a:rPr sz="1600" dirty="0" err="1">
+                <a:solidFill>
+                  <a:srgbClr val="595959"/>
+                </a:solidFill>
+                <a:latin typeface="HSE Sans"/>
+              </a:rPr>
+              <a:t>Процессы</a:t>
+            </a:r>
+            <a:r>
+              <a:rPr sz="1600" dirty="0">
+                <a:solidFill>
+                  <a:srgbClr val="595959"/>
+                </a:solidFill>
+                <a:latin typeface="HSE Sans"/>
+              </a:rPr>
+              <a:t> </a:t>
+            </a:r>
+            <a:r>
+              <a:rPr sz="1600" dirty="0" err="1">
+                <a:solidFill>
+                  <a:srgbClr val="595959"/>
+                </a:solidFill>
+                <a:latin typeface="HSE Sans"/>
+              </a:rPr>
+              <a:t>агрегации</a:t>
+            </a:r>
+            <a:r>
+              <a:rPr sz="1600" dirty="0">
+                <a:solidFill>
+                  <a:srgbClr val="595959"/>
+                </a:solidFill>
+                <a:latin typeface="HSE Sans"/>
+              </a:rPr>
+              <a:t> </a:t>
+            </a:r>
+            <a:r>
+              <a:rPr sz="1600" dirty="0" err="1">
+                <a:solidFill>
+                  <a:srgbClr val="595959"/>
+                </a:solidFill>
+                <a:latin typeface="HSE Sans"/>
+              </a:rPr>
+              <a:t>информации</a:t>
+            </a:r>
+            <a:r>
+              <a:rPr sz="1600" dirty="0">
+                <a:solidFill>
+                  <a:srgbClr val="595959"/>
+                </a:solidFill>
+                <a:latin typeface="HSE Sans"/>
+              </a:rPr>
+              <a:t> </a:t>
+            </a:r>
+            <a:r>
+              <a:rPr sz="1600" dirty="0" err="1">
+                <a:solidFill>
+                  <a:srgbClr val="595959"/>
+                </a:solidFill>
+                <a:latin typeface="HSE Sans"/>
+              </a:rPr>
+              <a:t>об</a:t>
+            </a:r>
+            <a:r>
+              <a:rPr sz="1600" dirty="0">
+                <a:solidFill>
+                  <a:srgbClr val="595959"/>
+                </a:solidFill>
+                <a:latin typeface="HSE Sans"/>
+              </a:rPr>
+              <a:t> IT-</a:t>
+            </a:r>
+            <a:r>
+              <a:rPr sz="1600" dirty="0" err="1">
+                <a:solidFill>
+                  <a:srgbClr val="595959"/>
+                </a:solidFill>
+                <a:latin typeface="HSE Sans"/>
+              </a:rPr>
+              <a:t>мероприятиях</a:t>
+            </a:r>
+            <a:r>
+              <a:rPr sz="1600" dirty="0">
+                <a:solidFill>
+                  <a:srgbClr val="595959"/>
+                </a:solidFill>
+                <a:latin typeface="HSE Sans"/>
+              </a:rPr>
+              <a:t> </a:t>
+            </a:r>
+            <a:r>
+              <a:rPr sz="1600" dirty="0" err="1">
+                <a:solidFill>
+                  <a:srgbClr val="595959"/>
+                </a:solidFill>
+                <a:latin typeface="HSE Sans"/>
+              </a:rPr>
+              <a:t>и</a:t>
+            </a:r>
+            <a:r>
+              <a:rPr sz="1600" dirty="0">
+                <a:solidFill>
+                  <a:srgbClr val="595959"/>
+                </a:solidFill>
+                <a:latin typeface="HSE Sans"/>
+              </a:rPr>
+              <a:t> </a:t>
+            </a:r>
+            <a:r>
+              <a:rPr sz="1600" dirty="0" err="1">
+                <a:solidFill>
+                  <a:srgbClr val="595959"/>
+                </a:solidFill>
+                <a:latin typeface="HSE Sans"/>
+              </a:rPr>
+              <a:t>построения</a:t>
+            </a:r>
+            <a:r>
+              <a:rPr sz="1600" dirty="0">
+                <a:solidFill>
+                  <a:srgbClr val="595959"/>
+                </a:solidFill>
+                <a:latin typeface="HSE Sans"/>
+              </a:rPr>
+              <a:t> </a:t>
+            </a:r>
+            <a:r>
+              <a:rPr sz="1600" dirty="0" err="1">
+                <a:solidFill>
+                  <a:srgbClr val="595959"/>
+                </a:solidFill>
+                <a:latin typeface="HSE Sans"/>
+              </a:rPr>
+              <a:t>персонализированных</a:t>
+            </a:r>
+            <a:r>
+              <a:rPr sz="1600" dirty="0">
+                <a:solidFill>
+                  <a:srgbClr val="595959"/>
+                </a:solidFill>
+                <a:latin typeface="HSE Sans"/>
+              </a:rPr>
+              <a:t> </a:t>
+            </a:r>
+            <a:r>
+              <a:rPr sz="1600" dirty="0" err="1">
+                <a:solidFill>
+                  <a:srgbClr val="595959"/>
+                </a:solidFill>
+                <a:latin typeface="HSE Sans"/>
+              </a:rPr>
+              <a:t>рекомендаций</a:t>
+            </a:r>
+            <a:r>
+              <a:rPr sz="1600" dirty="0">
+                <a:solidFill>
+                  <a:srgbClr val="595959"/>
+                </a:solidFill>
+                <a:latin typeface="HSE Sans"/>
+              </a:rPr>
+              <a:t> </a:t>
+            </a:r>
+            <a:r>
+              <a:rPr sz="1600" dirty="0" err="1">
+                <a:solidFill>
+                  <a:srgbClr val="595959"/>
+                </a:solidFill>
+                <a:latin typeface="HSE Sans"/>
+              </a:rPr>
+              <a:t>для</a:t>
+            </a:r>
+            <a:r>
+              <a:rPr sz="1600" dirty="0">
+                <a:solidFill>
+                  <a:srgbClr val="595959"/>
+                </a:solidFill>
+                <a:latin typeface="HSE Sans"/>
+              </a:rPr>
+              <a:t> </a:t>
+            </a:r>
+            <a:r>
+              <a:rPr sz="1600" dirty="0" err="1">
+                <a:solidFill>
+                  <a:srgbClr val="595959"/>
+                </a:solidFill>
+                <a:latin typeface="HSE Sans"/>
+              </a:rPr>
+              <a:t>пользователей</a:t>
+            </a:r>
+            <a:r>
+              <a:rPr sz="1600" dirty="0">
+                <a:solidFill>
+                  <a:srgbClr val="595959"/>
+                </a:solidFill>
+                <a:latin typeface="HSE Sans"/>
+              </a:rPr>
+              <a:t>.</a:t>
             </a:r>
           </a:p>
         </p:txBody>
@@ -9567,14 +10148,38 @@
           <a:p>
             <a:pPr algn="ctr"/>
             <a:r>
-              <a:rPr sz="1500" b="1">
-                <a:solidFill>
-                  <a:srgbClr val="0F2C68"/>
-                </a:solidFill>
-                <a:latin typeface="HSE Sans"/>
-              </a:rPr>
-              <a:t>Предмет исследования</a:t>
-            </a:r>
+              <a:rPr sz="2000" b="1" dirty="0" err="1">
+                <a:solidFill>
+                  <a:srgbClr val="0F2C68"/>
+                </a:solidFill>
+                <a:latin typeface="HSE Sans"/>
+              </a:rPr>
+              <a:t>Предмет</a:t>
+            </a:r>
+            <a:r>
+              <a:rPr sz="2000" b="1" dirty="0">
+                <a:solidFill>
+                  <a:srgbClr val="0F2C68"/>
+                </a:solidFill>
+                <a:latin typeface="HSE Sans"/>
+              </a:rPr>
+              <a:t> </a:t>
+            </a:r>
+            <a:r>
+              <a:rPr sz="2000" b="1" dirty="0" err="1">
+                <a:solidFill>
+                  <a:srgbClr val="0F2C68"/>
+                </a:solidFill>
+                <a:latin typeface="HSE Sans"/>
+              </a:rPr>
+              <a:t>исследования</a:t>
+            </a:r>
+            <a:endParaRPr sz="2000" b="1" dirty="0">
+              <a:solidFill>
+                <a:srgbClr val="0F2C68"/>
+              </a:solidFill>
+              <a:latin typeface="HSE Sans"/>
+            </a:endParaRPr>
           </a:p>
           <a:p>
             <a:pPr>
@@ -9583,13 +10188,292 @@
               </a:spcBef>
             </a:pPr>
             <a:r>
-              <a:rPr sz="1400">
-                <a:solidFill>
-                  <a:srgbClr val="595959"/>
-                </a:solidFill>
-                <a:latin typeface="HSE Sans"/>
-              </a:rPr>
-              <a:t>Программная система, объединяющая сбор и нормализацию событий, гибридный рекомендатель и пользовательский интерфейс вокруг общей базы данных.</a:t>
+              <a:rPr sz="1600" dirty="0" err="1">
+                <a:solidFill>
+                  <a:srgbClr val="595959"/>
+                </a:solidFill>
+                <a:latin typeface="HSE Sans"/>
+              </a:rPr>
+              <a:t>Программная</a:t>
+            </a:r>
+            <a:r>
+              <a:rPr sz="1600" dirty="0">
+                <a:solidFill>
+                  <a:srgbClr val="595959"/>
+                </a:solidFill>
+                <a:latin typeface="HSE Sans"/>
+              </a:rPr>
+              <a:t> </a:t>
+            </a:r>
+            <a:r>
+              <a:rPr sz="1600" dirty="0" err="1">
+                <a:solidFill>
+                  <a:srgbClr val="595959"/>
+                </a:solidFill>
+                <a:latin typeface="HSE Sans"/>
+              </a:rPr>
+              <a:t>система</a:t>
+            </a:r>
+            <a:r>
+              <a:rPr sz="1600" dirty="0">
+                <a:solidFill>
+                  <a:srgbClr val="595959"/>
+                </a:solidFill>
+                <a:latin typeface="HSE Sans"/>
+              </a:rPr>
+              <a:t>, </a:t>
+            </a:r>
+            <a:r>
+              <a:rPr sz="1600" dirty="0" err="1">
+                <a:solidFill>
+                  <a:srgbClr val="595959"/>
+                </a:solidFill>
+                <a:latin typeface="HSE Sans"/>
+              </a:rPr>
+              <a:t>объединяющая</a:t>
+            </a:r>
+            <a:r>
+              <a:rPr sz="1600" dirty="0">
+                <a:solidFill>
+                  <a:srgbClr val="595959"/>
+                </a:solidFill>
+                <a:latin typeface="HSE Sans"/>
+              </a:rPr>
+              <a:t> </a:t>
+            </a:r>
+            <a:r>
+              <a:rPr sz="1600" dirty="0" err="1">
+                <a:solidFill>
+                  <a:srgbClr val="595959"/>
+                </a:solidFill>
+                <a:latin typeface="HSE Sans"/>
+              </a:rPr>
+              <a:t>сбор</a:t>
+            </a:r>
+            <a:r>
+              <a:rPr sz="1600" dirty="0">
+                <a:solidFill>
+                  <a:srgbClr val="595959"/>
+                </a:solidFill>
+                <a:latin typeface="HSE Sans"/>
+              </a:rPr>
+              <a:t> </a:t>
+            </a:r>
+            <a:r>
+              <a:rPr sz="1600" dirty="0" err="1">
+                <a:solidFill>
+                  <a:srgbClr val="595959"/>
+                </a:solidFill>
+                <a:latin typeface="HSE Sans"/>
+              </a:rPr>
+              <a:t>и</a:t>
+            </a:r>
+            <a:r>
+              <a:rPr sz="1600" dirty="0">
+                <a:solidFill>
+                  <a:srgbClr val="595959"/>
+                </a:solidFill>
+                <a:latin typeface="HSE Sans"/>
+              </a:rPr>
+              <a:t> </a:t>
+            </a:r>
+            <a:r>
+              <a:rPr sz="1600" dirty="0" err="1">
+                <a:solidFill>
+                  <a:srgbClr val="595959"/>
+                </a:solidFill>
+                <a:latin typeface="HSE Sans"/>
+              </a:rPr>
+              <a:t>нормализацию</a:t>
+            </a:r>
+            <a:r>
+              <a:rPr sz="1600" dirty="0">
+                <a:solidFill>
+                  <a:srgbClr val="595959"/>
+                </a:solidFill>
+                <a:latin typeface="HSE Sans"/>
+              </a:rPr>
+              <a:t> </a:t>
+            </a:r>
+            <a:r>
+              <a:rPr sz="1600" dirty="0" err="1">
+                <a:solidFill>
+                  <a:srgbClr val="595959"/>
+                </a:solidFill>
+                <a:latin typeface="HSE Sans"/>
+              </a:rPr>
+              <a:t>событий</a:t>
+            </a:r>
+            <a:r>
+              <a:rPr sz="1600" dirty="0">
+                <a:solidFill>
+                  <a:srgbClr val="595959"/>
+                </a:solidFill>
+                <a:latin typeface="HSE Sans"/>
+              </a:rPr>
+              <a:t>, </a:t>
+            </a:r>
+            <a:r>
+              <a:rPr sz="1600" dirty="0" err="1">
+                <a:solidFill>
+                  <a:srgbClr val="595959"/>
+                </a:solidFill>
+                <a:latin typeface="HSE Sans"/>
+              </a:rPr>
+              <a:t>гибридный</a:t>
+            </a:r>
+            <a:r>
+              <a:rPr sz="1600" dirty="0">
+                <a:solidFill>
+                  <a:srgbClr val="595959"/>
+                </a:solidFill>
+                <a:latin typeface="HSE Sans"/>
+              </a:rPr>
+              <a:t> </a:t>
+            </a:r>
+            <a:r>
+              <a:rPr sz="1600" dirty="0" err="1">
+                <a:solidFill>
+                  <a:srgbClr val="595959"/>
+                </a:solidFill>
+                <a:latin typeface="HSE Sans"/>
+              </a:rPr>
+              <a:t>рекомендатель</a:t>
+            </a:r>
+            <a:r>
+              <a:rPr sz="1600" dirty="0">
+                <a:solidFill>
+                  <a:srgbClr val="595959"/>
+                </a:solidFill>
+                <a:latin typeface="HSE Sans"/>
+              </a:rPr>
+              <a:t> </a:t>
+            </a:r>
+            <a:r>
+              <a:rPr sz="1600" dirty="0" err="1">
+                <a:solidFill>
+                  <a:srgbClr val="595959"/>
+                </a:solidFill>
+                <a:latin typeface="HSE Sans"/>
+              </a:rPr>
+              <a:t>и</a:t>
+            </a:r>
+            <a:r>
+              <a:rPr sz="1600" dirty="0">
+                <a:solidFill>
+                  <a:srgbClr val="595959"/>
+                </a:solidFill>
+                <a:latin typeface="HSE Sans"/>
+              </a:rPr>
+              <a:t> </a:t>
+            </a:r>
+            <a:r>
+              <a:rPr sz="1600" dirty="0" err="1">
+                <a:solidFill>
+                  <a:srgbClr val="595959"/>
+                </a:solidFill>
+                <a:latin typeface="HSE Sans"/>
+              </a:rPr>
+              <a:t>пользовательский</a:t>
+            </a:r>
+            <a:r>
+              <a:rPr sz="1600" dirty="0">
+                <a:solidFill>
+                  <a:srgbClr val="595959"/>
+                </a:solidFill>
+                <a:latin typeface="HSE Sans"/>
+              </a:rPr>
+              <a:t> </a:t>
+            </a:r>
+            <a:r>
+              <a:rPr sz="1600" dirty="0" err="1">
+                <a:solidFill>
+                  <a:srgbClr val="595959"/>
+                </a:solidFill>
+                <a:latin typeface="HSE Sans"/>
+              </a:rPr>
+              <a:t>интерфейс</a:t>
+            </a:r>
+            <a:r>
+              <a:rPr sz="1600" dirty="0">
+                <a:solidFill>
+                  <a:srgbClr val="595959"/>
+                </a:solidFill>
+                <a:latin typeface="HSE Sans"/>
+              </a:rPr>
+              <a:t> </a:t>
+            </a:r>
+            <a:r>
+              <a:rPr sz="1600" dirty="0" err="1">
+                <a:solidFill>
+                  <a:srgbClr val="595959"/>
+                </a:solidFill>
+                <a:latin typeface="HSE Sans"/>
+              </a:rPr>
+              <a:t>вокруг</a:t>
+            </a:r>
+            <a:r>
+              <a:rPr sz="1600" dirty="0">
+                <a:solidFill>
+                  <a:srgbClr val="595959"/>
+                </a:solidFill>
+                <a:latin typeface="HSE Sans"/>
+              </a:rPr>
+              <a:t> </a:t>
+            </a:r>
+            <a:r>
+              <a:rPr sz="1600" dirty="0" err="1">
+                <a:solidFill>
+                  <a:srgbClr val="595959"/>
+                </a:solidFill>
+                <a:latin typeface="HSE Sans"/>
+              </a:rPr>
+              <a:t>общей</a:t>
+            </a:r>
+            <a:r>
+              <a:rPr sz="1600" dirty="0">
+                <a:solidFill>
+                  <a:srgbClr val="595959"/>
+                </a:solidFill>
+                <a:latin typeface="HSE Sans"/>
+              </a:rPr>
+              <a:t> </a:t>
+            </a:r>
+            <a:r>
+              <a:rPr sz="1600" dirty="0" err="1">
+                <a:solidFill>
+                  <a:srgbClr val="595959"/>
+                </a:solidFill>
+                <a:latin typeface="HSE Sans"/>
+              </a:rPr>
+              <a:t>базы</a:t>
+            </a:r>
+            <a:r>
+              <a:rPr sz="1600" dirty="0">
+                <a:solidFill>
+                  <a:srgbClr val="595959"/>
+                </a:solidFill>
+                <a:latin typeface="HSE Sans"/>
+              </a:rPr>
+              <a:t> </a:t>
+            </a:r>
+            <a:r>
+              <a:rPr sz="1600" dirty="0" err="1">
+                <a:solidFill>
+                  <a:srgbClr val="595959"/>
+                </a:solidFill>
+                <a:latin typeface="HSE Sans"/>
+              </a:rPr>
+              <a:t>данных</a:t>
+            </a:r>
+            <a:r>
+              <a:rPr sz="1600" dirty="0">
+                <a:solidFill>
+                  <a:srgbClr val="595959"/>
+                </a:solidFill>
+                <a:latin typeface="HSE Sans"/>
+              </a:rPr>
+              <a:t>.</a:t>
             </a:r>
           </a:p>
         </p:txBody>
@@ -9849,7 +10733,7 @@
           <a:p>
             <a:pPr algn="ctr"/>
             <a:r>
-              <a:rPr sz="1500" b="1">
+              <a:rPr sz="2000" b="1" dirty="0" err="1">
                 <a:solidFill>
                   <a:srgbClr val="0F2C68"/>
                 </a:solidFill>
@@ -9857,6 +10741,12 @@
               </a:rPr>
               <a:t>Цель</a:t>
             </a:r>
+            <a:endParaRPr sz="2000" b="1" dirty="0">
+              <a:solidFill>
+                <a:srgbClr val="0F2C68"/>
+              </a:solidFill>
+              <a:latin typeface="HSE Sans"/>
+            </a:endParaRPr>
           </a:p>
           <a:p>
             <a:pPr>
@@ -9865,13 +10755,436 @@
               </a:spcBef>
             </a:pPr>
             <a:r>
-              <a:rPr sz="1400">
-                <a:solidFill>
-                  <a:srgbClr val="595959"/>
-                </a:solidFill>
-                <a:latin typeface="HSE Sans"/>
-              </a:rPr>
-              <a:t>Разработать систему, которая автоматически собирает анонсы IT-мероприятий из множества источников, нормализует их и строит для каждого пользователя персональную ленту рекомендаций с понятным объяснением выбора.</a:t>
+              <a:rPr sz="1600" dirty="0" err="1">
+                <a:solidFill>
+                  <a:srgbClr val="595959"/>
+                </a:solidFill>
+                <a:latin typeface="HSE Sans"/>
+              </a:rPr>
+              <a:t>Разработать</a:t>
+            </a:r>
+            <a:r>
+              <a:rPr sz="1600" dirty="0">
+                <a:solidFill>
+                  <a:srgbClr val="595959"/>
+                </a:solidFill>
+                <a:latin typeface="HSE Sans"/>
+              </a:rPr>
+              <a:t> </a:t>
+            </a:r>
+            <a:r>
+              <a:rPr sz="1600" dirty="0" err="1">
+                <a:solidFill>
+                  <a:srgbClr val="595959"/>
+                </a:solidFill>
+                <a:latin typeface="HSE Sans"/>
+              </a:rPr>
+              <a:t>систему</a:t>
+            </a:r>
+            <a:r>
+              <a:rPr sz="1600" dirty="0">
+                <a:solidFill>
+                  <a:srgbClr val="595959"/>
+                </a:solidFill>
+                <a:latin typeface="HSE Sans"/>
+              </a:rPr>
+              <a:t>, </a:t>
+            </a:r>
+            <a:r>
+              <a:rPr sz="1600" dirty="0" err="1">
+                <a:solidFill>
+                  <a:srgbClr val="595959"/>
+                </a:solidFill>
+                <a:latin typeface="HSE Sans"/>
+              </a:rPr>
+              <a:t>которая</a:t>
+            </a:r>
+            <a:r>
+              <a:rPr sz="1600" dirty="0">
+                <a:solidFill>
+                  <a:srgbClr val="595959"/>
+                </a:solidFill>
+                <a:latin typeface="HSE Sans"/>
+              </a:rPr>
+              <a:t> </a:t>
+            </a:r>
+            <a:r>
+              <a:rPr sz="1600" dirty="0" err="1">
+                <a:solidFill>
+                  <a:srgbClr val="595959"/>
+                </a:solidFill>
+                <a:latin typeface="HSE Sans"/>
+              </a:rPr>
+              <a:t>автоматически</a:t>
+            </a:r>
+            <a:r>
+              <a:rPr sz="1600" dirty="0">
+                <a:solidFill>
+                  <a:srgbClr val="595959"/>
+                </a:solidFill>
+                <a:latin typeface="HSE Sans"/>
+              </a:rPr>
+              <a:t> </a:t>
+            </a:r>
+            <a:r>
+              <a:rPr sz="1600" dirty="0" err="1">
+                <a:solidFill>
+                  <a:srgbClr val="595959"/>
+                </a:solidFill>
+                <a:latin typeface="HSE Sans"/>
+              </a:rPr>
+              <a:t>собирает</a:t>
+            </a:r>
+            <a:r>
+              <a:rPr sz="1600" dirty="0">
+                <a:solidFill>
+                  <a:srgbClr val="595959"/>
+                </a:solidFill>
+                <a:latin typeface="HSE Sans"/>
+              </a:rPr>
+              <a:t> </a:t>
+            </a:r>
+            <a:r>
+              <a:rPr sz="1600" dirty="0" err="1">
+                <a:solidFill>
+                  <a:srgbClr val="595959"/>
+                </a:solidFill>
+                <a:latin typeface="HSE Sans"/>
+              </a:rPr>
+              <a:t>анонсы</a:t>
+            </a:r>
+            <a:r>
+              <a:rPr sz="1600" dirty="0">
+                <a:solidFill>
+                  <a:srgbClr val="595959"/>
+                </a:solidFill>
+                <a:latin typeface="HSE Sans"/>
+              </a:rPr>
+              <a:t> IT-</a:t>
+            </a:r>
+            <a:r>
+              <a:rPr sz="1600" dirty="0" err="1">
+                <a:solidFill>
+                  <a:srgbClr val="595959"/>
+                </a:solidFill>
+                <a:latin typeface="HSE Sans"/>
+              </a:rPr>
+              <a:t>мероприятий</a:t>
+            </a:r>
+            <a:r>
+              <a:rPr sz="1600" dirty="0">
+                <a:solidFill>
+                  <a:srgbClr val="595959"/>
+                </a:solidFill>
+                <a:latin typeface="HSE Sans"/>
+              </a:rPr>
+              <a:t> </a:t>
+            </a:r>
+            <a:r>
+              <a:rPr sz="1600" dirty="0" err="1">
+                <a:solidFill>
+                  <a:srgbClr val="595959"/>
+                </a:solidFill>
+                <a:latin typeface="HSE Sans"/>
+              </a:rPr>
+              <a:t>из</a:t>
+            </a:r>
+            <a:r>
+              <a:rPr sz="1600" dirty="0">
+                <a:solidFill>
+                  <a:srgbClr val="595959"/>
+                </a:solidFill>
+                <a:latin typeface="HSE Sans"/>
+              </a:rPr>
+              <a:t> </a:t>
+            </a:r>
+            <a:r>
+              <a:rPr sz="1600" dirty="0" err="1">
+                <a:solidFill>
+                  <a:srgbClr val="595959"/>
+                </a:solidFill>
+                <a:latin typeface="HSE Sans"/>
+              </a:rPr>
+              <a:t>множества</a:t>
+            </a:r>
+            <a:r>
+              <a:rPr sz="1600" dirty="0">
+                <a:solidFill>
+                  <a:srgbClr val="595959"/>
+                </a:solidFill>
+                <a:latin typeface="HSE Sans"/>
+              </a:rPr>
+              <a:t> </a:t>
+            </a:r>
+            <a:r>
+              <a:rPr sz="1600" dirty="0" err="1">
+                <a:solidFill>
+                  <a:srgbClr val="595959"/>
+                </a:solidFill>
+                <a:latin typeface="HSE Sans"/>
+              </a:rPr>
+              <a:t>источников</a:t>
+            </a:r>
+            <a:r>
+              <a:rPr sz="1600" dirty="0">
+                <a:solidFill>
+                  <a:srgbClr val="595959"/>
+                </a:solidFill>
+                <a:latin typeface="HSE Sans"/>
+              </a:rPr>
+              <a:t>, </a:t>
+            </a:r>
+            <a:r>
+              <a:rPr sz="1600" dirty="0" err="1">
+                <a:solidFill>
+                  <a:srgbClr val="595959"/>
+                </a:solidFill>
+                <a:latin typeface="HSE Sans"/>
+              </a:rPr>
+              <a:t>нормализует</a:t>
+            </a:r>
+            <a:r>
+              <a:rPr sz="1600" dirty="0">
+                <a:solidFill>
+                  <a:srgbClr val="595959"/>
+                </a:solidFill>
+                <a:latin typeface="HSE Sans"/>
+              </a:rPr>
+              <a:t> </a:t>
+            </a:r>
+            <a:r>
+              <a:rPr sz="1600" dirty="0" err="1">
+                <a:solidFill>
+                  <a:srgbClr val="595959"/>
+                </a:solidFill>
+                <a:latin typeface="HSE Sans"/>
+              </a:rPr>
+              <a:t>их</a:t>
+            </a:r>
+            <a:r>
+              <a:rPr sz="1600" dirty="0">
+                <a:solidFill>
+                  <a:srgbClr val="595959"/>
+                </a:solidFill>
+                <a:latin typeface="HSE Sans"/>
+              </a:rPr>
+              <a:t> </a:t>
+            </a:r>
+            <a:r>
+              <a:rPr sz="1600" dirty="0" err="1">
+                <a:solidFill>
+                  <a:srgbClr val="595959"/>
+                </a:solidFill>
+                <a:latin typeface="HSE Sans"/>
+              </a:rPr>
+              <a:t>и</a:t>
+            </a:r>
+            <a:r>
+              <a:rPr sz="1600" dirty="0">
+                <a:solidFill>
+                  <a:srgbClr val="595959"/>
+                </a:solidFill>
+                <a:latin typeface="HSE Sans"/>
+              </a:rPr>
+              <a:t> </a:t>
+            </a:r>
+            <a:r>
+              <a:rPr sz="1600" dirty="0" err="1">
+                <a:solidFill>
+                  <a:srgbClr val="595959"/>
+                </a:solidFill>
+                <a:latin typeface="HSE Sans"/>
+              </a:rPr>
+              <a:t>строит</a:t>
+            </a:r>
+            <a:r>
+              <a:rPr sz="1600" dirty="0">
+                <a:solidFill>
+                  <a:srgbClr val="595959"/>
+                </a:solidFill>
+                <a:latin typeface="HSE Sans"/>
+              </a:rPr>
+              <a:t> </a:t>
+            </a:r>
+            <a:r>
+              <a:rPr sz="1600" dirty="0" err="1">
+                <a:solidFill>
+                  <a:srgbClr val="595959"/>
+                </a:solidFill>
+                <a:latin typeface="HSE Sans"/>
+              </a:rPr>
+              <a:t>для</a:t>
+            </a:r>
+            <a:r>
+              <a:rPr sz="1600" dirty="0">
+                <a:solidFill>
+                  <a:srgbClr val="595959"/>
+                </a:solidFill>
+                <a:latin typeface="HSE Sans"/>
+              </a:rPr>
+              <a:t> </a:t>
+            </a:r>
+            <a:r>
+              <a:rPr sz="1600" dirty="0" err="1">
+                <a:solidFill>
+                  <a:srgbClr val="595959"/>
+                </a:solidFill>
+                <a:latin typeface="HSE Sans"/>
+              </a:rPr>
+              <a:t>каждого</a:t>
+            </a:r>
+            <a:r>
+              <a:rPr sz="1600" dirty="0">
+                <a:solidFill>
+                  <a:srgbClr val="595959"/>
+                </a:solidFill>
+                <a:latin typeface="HSE Sans"/>
+              </a:rPr>
+              <a:t> </a:t>
+            </a:r>
+            <a:r>
+              <a:rPr sz="1600" dirty="0" err="1">
+                <a:solidFill>
+                  <a:srgbClr val="595959"/>
+                </a:solidFill>
+                <a:latin typeface="HSE Sans"/>
+              </a:rPr>
+              <a:t>пользователя</a:t>
+            </a:r>
+            <a:r>
+              <a:rPr sz="1600" dirty="0">
+                <a:solidFill>
+                  <a:srgbClr val="595959"/>
+                </a:solidFill>
+                <a:latin typeface="HSE Sans"/>
+              </a:rPr>
+              <a:t> </a:t>
+            </a:r>
+            <a:r>
+              <a:rPr sz="1600" dirty="0" err="1">
+                <a:solidFill>
+                  <a:srgbClr val="595959"/>
+                </a:solidFill>
+                <a:latin typeface="HSE Sans"/>
+              </a:rPr>
+              <a:t>персональную</a:t>
+            </a:r>
+            <a:r>
+              <a:rPr sz="1600" dirty="0">
+                <a:solidFill>
+                  <a:srgbClr val="595959"/>
+                </a:solidFill>
+                <a:latin typeface="HSE Sans"/>
+              </a:rPr>
+              <a:t> </a:t>
+            </a:r>
+            <a:r>
+              <a:rPr sz="1600" dirty="0" err="1">
+                <a:solidFill>
+                  <a:srgbClr val="595959"/>
+                </a:solidFill>
+                <a:latin typeface="HSE Sans"/>
+              </a:rPr>
+              <a:t>ленту</a:t>
+            </a:r>
+            <a:r>
+              <a:rPr sz="1600" dirty="0">
+                <a:solidFill>
+                  <a:srgbClr val="595959"/>
+                </a:solidFill>
+                <a:latin typeface="HSE Sans"/>
+              </a:rPr>
+              <a:t> </a:t>
+            </a:r>
+            <a:r>
+              <a:rPr sz="1600" dirty="0" err="1">
+                <a:solidFill>
+                  <a:srgbClr val="595959"/>
+                </a:solidFill>
+                <a:latin typeface="HSE Sans"/>
+              </a:rPr>
+              <a:t>рекомендаций</a:t>
+            </a:r>
+            <a:r>
+              <a:rPr sz="1600" dirty="0">
+                <a:solidFill>
+                  <a:srgbClr val="595959"/>
+                </a:solidFill>
+                <a:latin typeface="HSE Sans"/>
+              </a:rPr>
+              <a:t> </a:t>
+            </a:r>
+            <a:r>
+              <a:rPr sz="1600" dirty="0" err="1">
+                <a:solidFill>
+                  <a:srgbClr val="595959"/>
+                </a:solidFill>
+                <a:latin typeface="HSE Sans"/>
+              </a:rPr>
+              <a:t>с</a:t>
+            </a:r>
+            <a:r>
+              <a:rPr sz="1600" dirty="0">
+                <a:solidFill>
+                  <a:srgbClr val="595959"/>
+                </a:solidFill>
+                <a:latin typeface="HSE Sans"/>
+              </a:rPr>
+              <a:t> </a:t>
+            </a:r>
+            <a:r>
+              <a:rPr sz="1600" dirty="0" err="1">
+                <a:solidFill>
+                  <a:srgbClr val="595959"/>
+                </a:solidFill>
+                <a:latin typeface="HSE Sans"/>
+              </a:rPr>
+              <a:t>понятным</a:t>
+            </a:r>
+            <a:r>
+              <a:rPr sz="1600" dirty="0">
+                <a:solidFill>
+                  <a:srgbClr val="595959"/>
+                </a:solidFill>
+                <a:latin typeface="HSE Sans"/>
+              </a:rPr>
+              <a:t> </a:t>
+            </a:r>
+            <a:r>
+              <a:rPr sz="1600" dirty="0" err="1">
+                <a:solidFill>
+                  <a:srgbClr val="595959"/>
+                </a:solidFill>
+                <a:latin typeface="HSE Sans"/>
+              </a:rPr>
+              <a:t>объяснением</a:t>
+            </a:r>
+            <a:r>
+              <a:rPr sz="1600" dirty="0">
+                <a:solidFill>
+                  <a:srgbClr val="595959"/>
+                </a:solidFill>
+                <a:latin typeface="HSE Sans"/>
+              </a:rPr>
+              <a:t> </a:t>
+            </a:r>
+            <a:r>
+              <a:rPr sz="1600" dirty="0" err="1">
+                <a:solidFill>
+                  <a:srgbClr val="595959"/>
+                </a:solidFill>
+                <a:latin typeface="HSE Sans"/>
+              </a:rPr>
+              <a:t>выбора</a:t>
+            </a:r>
+            <a:r>
+              <a:rPr sz="1600" dirty="0">
+                <a:solidFill>
+                  <a:srgbClr val="595959"/>
+                </a:solidFill>
+                <a:latin typeface="HSE Sans"/>
+              </a:rPr>
+              <a:t>.</a:t>
             </a:r>
           </a:p>
         </p:txBody>
@@ -9884,7 +11197,7 @@
         </p:nvSpPr>
         <p:spPr>
           <a:xfrm>
-            <a:off x="5852160" y="914400"/>
+            <a:off x="5852160" y="1753362"/>
             <a:ext cx="3657600" cy="548640"/>
           </a:xfrm>
           <a:prstGeom prst="rect">
@@ -9899,7 +11212,7 @@
           <a:lstStyle/>
           <a:p>
             <a:r>
-              <a:rPr sz="2000" b="1">
+              <a:rPr sz="2000" b="1" dirty="0" err="1">
                 <a:solidFill>
                   <a:srgbClr val="0F2C68"/>
                 </a:solidFill>
@@ -9907,6 +11220,12 @@
               </a:rPr>
               <a:t>Задачи</a:t>
             </a:r>
+            <a:endParaRPr sz="2000" b="1" dirty="0">
+              <a:solidFill>
+                <a:srgbClr val="0F2C68"/>
+              </a:solidFill>
+              <a:latin typeface="HSE Sans"/>
+            </a:endParaRPr>
           </a:p>
         </p:txBody>
       </p:sp>
@@ -9918,7 +11237,7 @@
         </p:nvSpPr>
         <p:spPr>
           <a:xfrm>
-            <a:off x="5852160" y="1554480"/>
+            <a:off x="5852160" y="2302002"/>
             <a:ext cx="5852160" cy="4937760"/>
           </a:xfrm>
           <a:prstGeom prst="rect">
@@ -9938,14 +11257,119 @@
               </a:spcAft>
             </a:pPr>
             <a:r>
-              <a:rPr sz="1550" b="0">
-                <a:solidFill>
-                  <a:srgbClr val="0F2C68"/>
-                </a:solidFill>
-                <a:latin typeface="HSE Sans"/>
-              </a:rPr>
-              <a:t>•  Анализ предметной области и существующих решений</a:t>
-            </a:r>
+              <a:rPr sz="1550" b="0" dirty="0">
+                <a:solidFill>
+                  <a:srgbClr val="0F2C68"/>
+                </a:solidFill>
+                <a:latin typeface="HSE Sans"/>
+              </a:rPr>
+              <a:t>•  </a:t>
+            </a:r>
+            <a:r>
+              <a:rPr sz="1550" b="0" dirty="0" err="1">
+                <a:solidFill>
+                  <a:srgbClr val="0F2C68"/>
+                </a:solidFill>
+                <a:latin typeface="HSE Sans"/>
+              </a:rPr>
+              <a:t>Анализ</a:t>
+            </a:r>
+            <a:r>
+              <a:rPr sz="1550" b="0" dirty="0">
+                <a:solidFill>
+                  <a:srgbClr val="0F2C68"/>
+                </a:solidFill>
+                <a:latin typeface="HSE Sans"/>
+              </a:rPr>
+              <a:t> </a:t>
+            </a:r>
+            <a:r>
+              <a:rPr sz="1550" b="0" dirty="0" err="1">
+                <a:solidFill>
+                  <a:srgbClr val="0F2C68"/>
+                </a:solidFill>
+                <a:latin typeface="HSE Sans"/>
+              </a:rPr>
+              <a:t>предметной</a:t>
+            </a:r>
+            <a:r>
+              <a:rPr sz="1550" b="0" dirty="0">
+                <a:solidFill>
+                  <a:srgbClr val="0F2C68"/>
+                </a:solidFill>
+                <a:latin typeface="HSE Sans"/>
+              </a:rPr>
+              <a:t> </a:t>
+            </a:r>
+            <a:r>
+              <a:rPr sz="1550" b="0" dirty="0" err="1">
+                <a:solidFill>
+                  <a:srgbClr val="0F2C68"/>
+                </a:solidFill>
+                <a:latin typeface="HSE Sans"/>
+              </a:rPr>
+              <a:t>области</a:t>
+            </a:r>
+            <a:r>
+              <a:rPr sz="1550" b="0" dirty="0">
+                <a:solidFill>
+                  <a:srgbClr val="0F2C68"/>
+                </a:solidFill>
+                <a:latin typeface="HSE Sans"/>
+              </a:rPr>
+              <a:t> </a:t>
+            </a:r>
+            <a:r>
+              <a:rPr sz="1550" b="0" dirty="0" err="1">
+                <a:solidFill>
+                  <a:srgbClr val="0F2C68"/>
+                </a:solidFill>
+                <a:latin typeface="HSE Sans"/>
+              </a:rPr>
+              <a:t>и</a:t>
+            </a:r>
+            <a:r>
+              <a:rPr sz="1550" b="0" dirty="0">
+                <a:solidFill>
+                  <a:srgbClr val="0F2C68"/>
+                </a:solidFill>
+                <a:latin typeface="HSE Sans"/>
+              </a:rPr>
+              <a:t> </a:t>
+            </a:r>
+            <a:r>
+              <a:rPr sz="1550" b="0" dirty="0" err="1">
+                <a:solidFill>
+                  <a:srgbClr val="0F2C68"/>
+                </a:solidFill>
+                <a:latin typeface="HSE Sans"/>
+              </a:rPr>
+              <a:t>существующих</a:t>
+            </a:r>
+            <a:r>
+              <a:rPr sz="1550" b="0" dirty="0">
+                <a:solidFill>
+                  <a:srgbClr val="0F2C68"/>
+                </a:solidFill>
+                <a:latin typeface="HSE Sans"/>
+              </a:rPr>
+              <a:t> </a:t>
+            </a:r>
+            <a:r>
+              <a:rPr sz="1550" b="0" dirty="0" err="1">
+                <a:solidFill>
+                  <a:srgbClr val="0F2C68"/>
+                </a:solidFill>
+                <a:latin typeface="HSE Sans"/>
+              </a:rPr>
+              <a:t>решений</a:t>
+            </a:r>
+            <a:endParaRPr sz="1550" b="0" dirty="0">
+              <a:solidFill>
+                <a:srgbClr val="0F2C68"/>
+              </a:solidFill>
+              <a:latin typeface="HSE Sans"/>
+            </a:endParaRPr>
           </a:p>
           <a:p>
             <a:pPr>
@@ -9954,14 +11378,101 @@
               </a:spcAft>
             </a:pPr>
             <a:r>
-              <a:rPr sz="1550" b="0">
-                <a:solidFill>
-                  <a:srgbClr val="0F2C68"/>
-                </a:solidFill>
-                <a:latin typeface="HSE Sans"/>
-              </a:rPr>
-              <a:t>•  Анализ подходов к построению рекомендаций</a:t>
-            </a:r>
+              <a:rPr sz="1550" b="0" dirty="0">
+                <a:solidFill>
+                  <a:srgbClr val="0F2C68"/>
+                </a:solidFill>
+                <a:latin typeface="HSE Sans"/>
+              </a:rPr>
+              <a:t>•  </a:t>
+            </a:r>
+            <a:r>
+              <a:rPr sz="1550" b="0" dirty="0" err="1">
+                <a:solidFill>
+                  <a:srgbClr val="0F2C68"/>
+                </a:solidFill>
+                <a:latin typeface="HSE Sans"/>
+              </a:rPr>
+              <a:t>Анализ</a:t>
+            </a:r>
+            <a:r>
+              <a:rPr sz="1550" b="0" dirty="0">
+                <a:solidFill>
+                  <a:srgbClr val="0F2C68"/>
+                </a:solidFill>
+                <a:latin typeface="HSE Sans"/>
+              </a:rPr>
+              <a:t> </a:t>
+            </a:r>
+            <a:r>
+              <a:rPr sz="1550" b="0" dirty="0" err="1">
+                <a:solidFill>
+                  <a:srgbClr val="0F2C68"/>
+                </a:solidFill>
+                <a:latin typeface="HSE Sans"/>
+              </a:rPr>
+              <a:t>подходов</a:t>
+            </a:r>
+            <a:r>
+              <a:rPr sz="1550" b="0" dirty="0">
+                <a:solidFill>
+                  <a:srgbClr val="0F2C68"/>
+                </a:solidFill>
+                <a:latin typeface="HSE Sans"/>
+              </a:rPr>
+              <a:t> </a:t>
+            </a:r>
+            <a:r>
+              <a:rPr sz="1550" b="0" dirty="0" err="1">
+                <a:solidFill>
+                  <a:srgbClr val="0F2C68"/>
+                </a:solidFill>
+                <a:latin typeface="HSE Sans"/>
+              </a:rPr>
+              <a:t>к</a:t>
+            </a:r>
+            <a:r>
+              <a:rPr sz="1550" b="0" dirty="0">
+                <a:solidFill>
+                  <a:srgbClr val="0F2C68"/>
+                </a:solidFill>
+                <a:latin typeface="HSE Sans"/>
+              </a:rPr>
+              <a:t> </a:t>
+            </a:r>
+            <a:r>
+              <a:rPr sz="1550" b="0" dirty="0" err="1">
+                <a:solidFill>
+                  <a:srgbClr val="0F2C68"/>
+                </a:solidFill>
+                <a:latin typeface="HSE Sans"/>
+              </a:rPr>
+              <a:t>построению</a:t>
+            </a:r>
+            <a:r>
+              <a:rPr sz="1550" b="0" dirty="0">
+                <a:solidFill>
+                  <a:srgbClr val="0F2C68"/>
+                </a:solidFill>
+                <a:latin typeface="HSE Sans"/>
+              </a:rPr>
+              <a:t> </a:t>
+            </a:r>
+            <a:r>
+              <a:rPr sz="1550" b="0" dirty="0" err="1">
+                <a:solidFill>
+                  <a:srgbClr val="0F2C68"/>
+                </a:solidFill>
+                <a:latin typeface="HSE Sans"/>
+              </a:rPr>
+              <a:t>рекомендаций</a:t>
+            </a:r>
+            <a:endParaRPr sz="1550" b="0" dirty="0">
+              <a:solidFill>
+                <a:srgbClr val="0F2C68"/>
+              </a:solidFill>
+              <a:latin typeface="HSE Sans"/>
+            </a:endParaRPr>
           </a:p>
           <a:p>
             <a:pPr>
@@ -9970,14 +11481,65 @@
               </a:spcAft>
             </a:pPr>
             <a:r>
-              <a:rPr sz="1550" b="0">
-                <a:solidFill>
-                  <a:srgbClr val="0F2C68"/>
-                </a:solidFill>
-                <a:latin typeface="HSE Sans"/>
-              </a:rPr>
-              <a:t>•  Проектирование архитектуры системы</a:t>
-            </a:r>
+              <a:rPr sz="1550" b="0" dirty="0">
+                <a:solidFill>
+                  <a:srgbClr val="0F2C68"/>
+                </a:solidFill>
+                <a:latin typeface="HSE Sans"/>
+              </a:rPr>
+              <a:t>•  </a:t>
+            </a:r>
+            <a:r>
+              <a:rPr sz="1550" b="0" dirty="0" err="1">
+                <a:solidFill>
+                  <a:srgbClr val="0F2C68"/>
+                </a:solidFill>
+                <a:latin typeface="HSE Sans"/>
+              </a:rPr>
+              <a:t>Проектирование</a:t>
+            </a:r>
+            <a:r>
+              <a:rPr sz="1550" b="0" dirty="0">
+                <a:solidFill>
+                  <a:srgbClr val="0F2C68"/>
+                </a:solidFill>
+                <a:latin typeface="HSE Sans"/>
+              </a:rPr>
+              <a:t> </a:t>
+            </a:r>
+            <a:r>
+              <a:rPr sz="1550" b="0" dirty="0" err="1">
+                <a:solidFill>
+                  <a:srgbClr val="0F2C68"/>
+                </a:solidFill>
+                <a:latin typeface="HSE Sans"/>
+              </a:rPr>
+              <a:t>архитектуры</a:t>
+            </a:r>
+            <a:r>
+              <a:rPr sz="1550" b="0" dirty="0">
+                <a:solidFill>
+                  <a:srgbClr val="0F2C68"/>
+                </a:solidFill>
+                <a:latin typeface="HSE Sans"/>
+              </a:rPr>
+              <a:t> </a:t>
+            </a:r>
+            <a:r>
+              <a:rPr sz="1550" b="0" dirty="0" err="1">
+                <a:solidFill>
+                  <a:srgbClr val="0F2C68"/>
+                </a:solidFill>
+                <a:latin typeface="HSE Sans"/>
+              </a:rPr>
+              <a:t>системы</a:t>
+            </a:r>
+            <a:endParaRPr sz="1550" b="0" dirty="0">
+              <a:solidFill>
+                <a:srgbClr val="0F2C68"/>
+              </a:solidFill>
+              <a:latin typeface="HSE Sans"/>
+            </a:endParaRPr>
           </a:p>
           <a:p>
             <a:pPr>
@@ -9986,14 +11548,155 @@
               </a:spcAft>
             </a:pPr>
             <a:r>
-              <a:rPr sz="1550" b="0">
-                <a:solidFill>
-                  <a:srgbClr val="0F2C68"/>
-                </a:solidFill>
-                <a:latin typeface="HSE Sans"/>
-              </a:rPr>
-              <a:t>•  Сбор и автоматическая нормализация событий из разных источников</a:t>
-            </a:r>
+              <a:rPr sz="1550" b="0" dirty="0">
+                <a:solidFill>
+                  <a:srgbClr val="0F2C68"/>
+                </a:solidFill>
+                <a:latin typeface="HSE Sans"/>
+              </a:rPr>
+              <a:t>•  </a:t>
+            </a:r>
+            <a:r>
+              <a:rPr sz="1550" b="0" dirty="0" err="1">
+                <a:solidFill>
+                  <a:srgbClr val="0F2C68"/>
+                </a:solidFill>
+                <a:latin typeface="HSE Sans"/>
+              </a:rPr>
+              <a:t>Сбор</a:t>
+            </a:r>
+            <a:r>
+              <a:rPr sz="1550" b="0" dirty="0">
+                <a:solidFill>
+                  <a:srgbClr val="0F2C68"/>
+                </a:solidFill>
+                <a:latin typeface="HSE Sans"/>
+              </a:rPr>
+              <a:t> </a:t>
+            </a:r>
+            <a:r>
+              <a:rPr sz="1550" b="0" dirty="0" err="1">
+                <a:solidFill>
+                  <a:srgbClr val="0F2C68"/>
+                </a:solidFill>
+                <a:latin typeface="HSE Sans"/>
+              </a:rPr>
+              <a:t>и</a:t>
+            </a:r>
+            <a:r>
+              <a:rPr sz="1550" b="0" dirty="0">
+                <a:solidFill>
+                  <a:srgbClr val="0F2C68"/>
+                </a:solidFill>
+                <a:latin typeface="HSE Sans"/>
+              </a:rPr>
+              <a:t> </a:t>
+            </a:r>
+            <a:r>
+              <a:rPr sz="1550" b="0" dirty="0" err="1">
+                <a:solidFill>
+                  <a:srgbClr val="0F2C68"/>
+                </a:solidFill>
+                <a:latin typeface="HSE Sans"/>
+              </a:rPr>
+              <a:t>автоматическая</a:t>
+            </a:r>
+            <a:r>
+              <a:rPr sz="1550" b="0" dirty="0">
+                <a:solidFill>
+                  <a:srgbClr val="0F2C68"/>
+                </a:solidFill>
+                <a:latin typeface="HSE Sans"/>
+              </a:rPr>
+              <a:t> </a:t>
+            </a:r>
+            <a:r>
+              <a:rPr sz="1550" b="0" dirty="0" err="1">
+                <a:solidFill>
+                  <a:srgbClr val="0F2C68"/>
+                </a:solidFill>
+                <a:latin typeface="HSE Sans"/>
+              </a:rPr>
+              <a:t>нормализация</a:t>
+            </a:r>
+            <a:r>
+              <a:rPr sz="1550" b="0" dirty="0">
+                <a:solidFill>
+                  <a:srgbClr val="0F2C68"/>
+                </a:solidFill>
+                <a:latin typeface="HSE Sans"/>
+              </a:rPr>
+              <a:t> </a:t>
+            </a:r>
+            <a:r>
+              <a:rPr sz="1550" b="0" dirty="0" err="1">
+                <a:solidFill>
+                  <a:srgbClr val="0F2C68"/>
+                </a:solidFill>
+                <a:latin typeface="HSE Sans"/>
+              </a:rPr>
+              <a:t>событий</a:t>
+            </a:r>
+            <a:r>
+              <a:rPr sz="1550" b="0" dirty="0">
+                <a:solidFill>
+                  <a:srgbClr val="0F2C68"/>
+                </a:solidFill>
+                <a:latin typeface="HSE Sans"/>
+              </a:rPr>
+              <a:t> </a:t>
+            </a:r>
+            <a:r>
+              <a:rPr sz="1550" b="0" dirty="0" err="1">
+                <a:solidFill>
+                  <a:srgbClr val="0F2C68"/>
+                </a:solidFill>
+                <a:latin typeface="HSE Sans"/>
+              </a:rPr>
+              <a:t>из</a:t>
+            </a:r>
+            <a:r>
+              <a:rPr sz="1550" b="0" dirty="0">
+                <a:solidFill>
+                  <a:srgbClr val="0F2C68"/>
+                </a:solidFill>
+                <a:latin typeface="HSE Sans"/>
+              </a:rPr>
+              <a:t> </a:t>
+            </a:r>
+            <a:r>
+              <a:rPr sz="1550" b="0" dirty="0" err="1">
+                <a:solidFill>
+                  <a:srgbClr val="0F2C68"/>
+                </a:solidFill>
+                <a:latin typeface="HSE Sans"/>
+              </a:rPr>
+              <a:t>разных</a:t>
+            </a:r>
+            <a:r>
+              <a:rPr sz="1550" b="0" dirty="0">
+                <a:solidFill>
+                  <a:srgbClr val="0F2C68"/>
+                </a:solidFill>
+                <a:latin typeface="HSE Sans"/>
+              </a:rPr>
+              <a:t> </a:t>
+            </a:r>
+            <a:r>
+              <a:rPr sz="1550" b="0" dirty="0" err="1">
+                <a:solidFill>
+                  <a:srgbClr val="0F2C68"/>
+                </a:solidFill>
+                <a:latin typeface="HSE Sans"/>
+              </a:rPr>
+              <a:t>источников</a:t>
+            </a:r>
+            <a:endParaRPr sz="1550" b="0" dirty="0">
+              <a:solidFill>
+                <a:srgbClr val="0F2C68"/>
+              </a:solidFill>
+              <a:latin typeface="HSE Sans"/>
+            </a:endParaRPr>
           </a:p>
           <a:p>
             <a:pPr>
@@ -10002,14 +11705,83 @@
               </a:spcAft>
             </a:pPr>
             <a:r>
-              <a:rPr sz="1550" b="0">
-                <a:solidFill>
-                  <a:srgbClr val="0F2C68"/>
-                </a:solidFill>
-                <a:latin typeface="HSE Sans"/>
-              </a:rPr>
-              <a:t>•  Реализация гибридного алгоритма рекомендаций</a:t>
-            </a:r>
+              <a:rPr sz="1550" b="0" dirty="0">
+                <a:solidFill>
+                  <a:srgbClr val="0F2C68"/>
+                </a:solidFill>
+                <a:latin typeface="HSE Sans"/>
+              </a:rPr>
+              <a:t>•  </a:t>
+            </a:r>
+            <a:r>
+              <a:rPr sz="1550" b="0" dirty="0" err="1">
+                <a:solidFill>
+                  <a:srgbClr val="0F2C68"/>
+                </a:solidFill>
+                <a:latin typeface="HSE Sans"/>
+              </a:rPr>
+              <a:t>Реализация</a:t>
+            </a:r>
+            <a:r>
+              <a:rPr sz="1550" b="0" dirty="0">
+                <a:solidFill>
+                  <a:srgbClr val="0F2C68"/>
+                </a:solidFill>
+                <a:latin typeface="HSE Sans"/>
+              </a:rPr>
+              <a:t> </a:t>
+            </a:r>
+            <a:r>
+              <a:rPr sz="1550" b="0" dirty="0" err="1">
+                <a:solidFill>
+                  <a:srgbClr val="0F2C68"/>
+                </a:solidFill>
+                <a:latin typeface="HSE Sans"/>
+              </a:rPr>
+              <a:t>гибридного</a:t>
+            </a:r>
+            <a:r>
+              <a:rPr sz="1550" b="0" dirty="0">
+                <a:solidFill>
+                  <a:srgbClr val="0F2C68"/>
+                </a:solidFill>
+                <a:latin typeface="HSE Sans"/>
+              </a:rPr>
+              <a:t> </a:t>
+            </a:r>
+            <a:r>
+              <a:rPr sz="1550" b="0" dirty="0" err="1">
+                <a:solidFill>
+                  <a:srgbClr val="0F2C68"/>
+                </a:solidFill>
+                <a:latin typeface="HSE Sans"/>
+              </a:rPr>
+              <a:t>алгоритма</a:t>
+            </a:r>
+            <a:r>
+              <a:rPr sz="1550" b="0" dirty="0">
+                <a:solidFill>
+                  <a:srgbClr val="0F2C68"/>
+                </a:solidFill>
+                <a:latin typeface="HSE Sans"/>
+              </a:rPr>
+              <a:t> </a:t>
+            </a:r>
+            <a:r>
+              <a:rPr sz="1550" b="0" dirty="0" err="1">
+                <a:solidFill>
+                  <a:srgbClr val="0F2C68"/>
+                </a:solidFill>
+                <a:latin typeface="HSE Sans"/>
+              </a:rPr>
+              <a:t>рекомендаций</a:t>
+            </a:r>
+            <a:endParaRPr sz="1550" b="0" dirty="0">
+              <a:solidFill>
+                <a:srgbClr val="0F2C68"/>
+              </a:solidFill>
+              <a:latin typeface="HSE Sans"/>
+            </a:endParaRPr>
           </a:p>
           <a:p>
             <a:pPr>
@@ -10018,14 +11790,119 @@
               </a:spcAft>
             </a:pPr>
             <a:r>
-              <a:rPr sz="1550" b="0">
-                <a:solidFill>
-                  <a:srgbClr val="0F2C68"/>
-                </a:solidFill>
-                <a:latin typeface="HSE Sans"/>
-              </a:rPr>
-              <a:t>•  Разработка пользовательского интерфейса и обратной связи</a:t>
-            </a:r>
+              <a:rPr sz="1550" b="0" dirty="0">
+                <a:solidFill>
+                  <a:srgbClr val="0F2C68"/>
+                </a:solidFill>
+                <a:latin typeface="HSE Sans"/>
+              </a:rPr>
+              <a:t>•  </a:t>
+            </a:r>
+            <a:r>
+              <a:rPr sz="1550" b="0" dirty="0" err="1">
+                <a:solidFill>
+                  <a:srgbClr val="0F2C68"/>
+                </a:solidFill>
+                <a:latin typeface="HSE Sans"/>
+              </a:rPr>
+              <a:t>Разработка</a:t>
+            </a:r>
+            <a:r>
+              <a:rPr sz="1550" b="0" dirty="0">
+                <a:solidFill>
+                  <a:srgbClr val="0F2C68"/>
+                </a:solidFill>
+                <a:latin typeface="HSE Sans"/>
+              </a:rPr>
+              <a:t> </a:t>
+            </a:r>
+            <a:r>
+              <a:rPr sz="1550" b="0" dirty="0" err="1">
+                <a:solidFill>
+                  <a:srgbClr val="0F2C68"/>
+                </a:solidFill>
+                <a:latin typeface="HSE Sans"/>
+              </a:rPr>
+              <a:t>пользовательского</a:t>
+            </a:r>
+            <a:r>
+              <a:rPr sz="1550" b="0" dirty="0">
+                <a:solidFill>
+                  <a:srgbClr val="0F2C68"/>
+                </a:solidFill>
+                <a:latin typeface="HSE Sans"/>
+              </a:rPr>
+              <a:t> </a:t>
+            </a:r>
+            <a:r>
+              <a:rPr sz="1550" b="0" dirty="0" err="1">
+                <a:solidFill>
+                  <a:srgbClr val="0F2C68"/>
+                </a:solidFill>
+                <a:latin typeface="HSE Sans"/>
+              </a:rPr>
+              <a:t>интерфейса</a:t>
+            </a:r>
+            <a:r>
+              <a:rPr sz="1550" b="0" dirty="0">
+                <a:solidFill>
+                  <a:srgbClr val="0F2C68"/>
+                </a:solidFill>
+                <a:latin typeface="HSE Sans"/>
+              </a:rPr>
+              <a:t> </a:t>
+            </a:r>
+            <a:r>
+              <a:rPr sz="1550" b="0" dirty="0" err="1">
+                <a:solidFill>
+                  <a:srgbClr val="0F2C68"/>
+                </a:solidFill>
+                <a:latin typeface="HSE Sans"/>
+              </a:rPr>
+              <a:t>и</a:t>
+            </a:r>
+            <a:r>
+              <a:rPr sz="1550" b="0" dirty="0">
+                <a:solidFill>
+                  <a:srgbClr val="0F2C68"/>
+                </a:solidFill>
+                <a:latin typeface="HSE Sans"/>
+              </a:rPr>
+              <a:t> </a:t>
+            </a:r>
+            <a:r>
+              <a:rPr sz="1550" b="0" dirty="0" err="1">
+                <a:solidFill>
+                  <a:srgbClr val="0F2C68"/>
+                </a:solidFill>
+                <a:latin typeface="HSE Sans"/>
+              </a:rPr>
+              <a:t>обратной</a:t>
+            </a:r>
+            <a:r>
+              <a:rPr sz="1550" b="0" dirty="0">
+                <a:solidFill>
+                  <a:srgbClr val="0F2C68"/>
+                </a:solidFill>
+                <a:latin typeface="HSE Sans"/>
+              </a:rPr>
+              <a:t> </a:t>
+            </a:r>
+            <a:r>
+              <a:rPr sz="1550" b="0" dirty="0" err="1">
+                <a:solidFill>
+                  <a:srgbClr val="0F2C68"/>
+                </a:solidFill>
+                <a:latin typeface="HSE Sans"/>
+              </a:rPr>
+              <a:t>связи</a:t>
+            </a:r>
+            <a:endParaRPr sz="1550" b="0" dirty="0">
+              <a:solidFill>
+                <a:srgbClr val="0F2C68"/>
+              </a:solidFill>
+              <a:latin typeface="HSE Sans"/>
+            </a:endParaRPr>
           </a:p>
           <a:p>
             <a:pPr>
@@ -10034,14 +11911,101 @@
               </a:spcAft>
             </a:pPr>
             <a:r>
-              <a:rPr sz="1550" b="0">
-                <a:solidFill>
-                  <a:srgbClr val="0F2C68"/>
-                </a:solidFill>
-                <a:latin typeface="HSE Sans"/>
-              </a:rPr>
-              <a:t>•  Тестирование и оценка качества рекомендаций</a:t>
-            </a:r>
+              <a:rPr sz="1550" b="0" dirty="0">
+                <a:solidFill>
+                  <a:srgbClr val="0F2C68"/>
+                </a:solidFill>
+                <a:latin typeface="HSE Sans"/>
+              </a:rPr>
+              <a:t>•  </a:t>
+            </a:r>
+            <a:r>
+              <a:rPr sz="1550" b="0" dirty="0" err="1">
+                <a:solidFill>
+                  <a:srgbClr val="0F2C68"/>
+                </a:solidFill>
+                <a:latin typeface="HSE Sans"/>
+              </a:rPr>
+              <a:t>Тестирование</a:t>
+            </a:r>
+            <a:r>
+              <a:rPr sz="1550" b="0" dirty="0">
+                <a:solidFill>
+                  <a:srgbClr val="0F2C68"/>
+                </a:solidFill>
+                <a:latin typeface="HSE Sans"/>
+              </a:rPr>
+              <a:t> </a:t>
+            </a:r>
+            <a:r>
+              <a:rPr sz="1550" b="0" dirty="0" err="1">
+                <a:solidFill>
+                  <a:srgbClr val="0F2C68"/>
+                </a:solidFill>
+                <a:latin typeface="HSE Sans"/>
+              </a:rPr>
+              <a:t>и</a:t>
+            </a:r>
+            <a:r>
+              <a:rPr sz="1550" b="0" dirty="0">
+                <a:solidFill>
+                  <a:srgbClr val="0F2C68"/>
+                </a:solidFill>
+                <a:latin typeface="HSE Sans"/>
+              </a:rPr>
+              <a:t> </a:t>
+            </a:r>
+            <a:r>
+              <a:rPr sz="1550" b="0" dirty="0" err="1">
+                <a:solidFill>
+                  <a:srgbClr val="0F2C68"/>
+                </a:solidFill>
+                <a:latin typeface="HSE Sans"/>
+              </a:rPr>
+              <a:t>оценка</a:t>
+            </a:r>
+            <a:r>
+              <a:rPr sz="1550" b="0" dirty="0">
+                <a:solidFill>
+                  <a:srgbClr val="0F2C68"/>
+                </a:solidFill>
+                <a:latin typeface="HSE Sans"/>
+              </a:rPr>
+              <a:t> </a:t>
+            </a:r>
+            <a:r>
+              <a:rPr sz="1550" b="0" dirty="0" err="1">
+                <a:solidFill>
+                  <a:srgbClr val="0F2C68"/>
+                </a:solidFill>
+                <a:latin typeface="HSE Sans"/>
+              </a:rPr>
+              <a:t>качества</a:t>
+            </a:r>
+            <a:r>
+              <a:rPr sz="1550" b="0" dirty="0">
+                <a:solidFill>
+                  <a:srgbClr val="0F2C68"/>
+                </a:solidFill>
+                <a:latin typeface="HSE Sans"/>
+              </a:rPr>
+              <a:t> </a:t>
+            </a:r>
+            <a:r>
+              <a:rPr sz="1550" b="0" dirty="0" err="1">
+                <a:solidFill>
+                  <a:srgbClr val="0F2C68"/>
+                </a:solidFill>
+                <a:latin typeface="HSE Sans"/>
+              </a:rPr>
+              <a:t>рекомендаций</a:t>
+            </a:r>
+            <a:endParaRPr sz="1550" b="0" dirty="0">
+              <a:solidFill>
+                <a:srgbClr val="0F2C68"/>
+              </a:solidFill>
+              <a:latin typeface="HSE Sans"/>
+            </a:endParaRPr>
           </a:p>
         </p:txBody>
       </p:sp>
@@ -12580,8 +14544,8 @@
         </p:blipFill>
         <p:spPr>
           <a:xfrm>
-            <a:off x="1784554" y="1645920"/>
-            <a:ext cx="4294730" cy="4754880"/>
+            <a:off x="1179576" y="1533906"/>
+            <a:ext cx="5529834" cy="5127168"/>
           </a:xfrm>
           <a:prstGeom prst="rect">
             <a:avLst/>

--- a/docs/Презентация_защита_EventMind.pptx
+++ b/docs/Презентация_защита_EventMind.pptx
@@ -4,6 +4,9 @@
   <p:sldMasterIdLst>
     <p:sldMasterId id="2147483648" r:id="rId1"/>
   </p:sldMasterIdLst>
+  <p:notesMasterIdLst>
+    <p:notesMasterId r:id="rId22"/>
+  </p:notesMasterIdLst>
   <p:sldIdLst>
     <p:sldId id="256" r:id="rId2"/>
     <p:sldId id="257" r:id="rId3"/>
@@ -142,6 +145,2987 @@
 </p:presentation>
 </file>
 
+<file path=ppt/notesMasters/notesMaster1.xml><?xml version="1.0" encoding="utf-8"?>
+<p:notesMaster xmlns:a="http://schemas.openxmlformats.org/drawingml/2006/main" xmlns:r="http://schemas.openxmlformats.org/officeDocument/2006/relationships" xmlns:p="http://schemas.openxmlformats.org/presentationml/2006/main">
+  <p:cSld>
+    <p:bg>
+      <p:bgRef idx="1001">
+        <a:schemeClr val="bg1"/>
+      </p:bgRef>
+    </p:bg>
+    <p:spTree>
+      <p:nvGrpSpPr>
+        <p:cNvPr id="1" name=""/>
+        <p:cNvGrpSpPr/>
+        <p:nvPr/>
+      </p:nvGrpSpPr>
+      <p:grpSpPr>
+        <a:xfrm>
+          <a:off x="0" y="0"/>
+          <a:ext cx="0" cy="0"/>
+          <a:chOff x="0" y="0"/>
+          <a:chExt cx="0" cy="0"/>
+        </a:xfrm>
+      </p:grpSpPr>
+      <p:sp>
+        <p:nvSpPr>
+          <p:cNvPr id="2" name="Верхний колонтитул 1"/>
+          <p:cNvSpPr>
+            <a:spLocks noGrp="1"/>
+          </p:cNvSpPr>
+          <p:nvPr>
+            <p:ph type="hdr" sz="quarter"/>
+          </p:nvPr>
+        </p:nvSpPr>
+        <p:spPr>
+          <a:xfrm>
+            <a:off x="0" y="0"/>
+            <a:ext cx="2971800" cy="458788"/>
+          </a:xfrm>
+          <a:prstGeom prst="rect">
+            <a:avLst/>
+          </a:prstGeom>
+        </p:spPr>
+        <p:txBody>
+          <a:bodyPr vert="horz" lIns="91440" tIns="45720" rIns="91440" bIns="45720" rtlCol="0"/>
+          <a:lstStyle>
+            <a:lvl1pPr algn="l">
+              <a:defRPr sz="1200"/>
+            </a:lvl1pPr>
+          </a:lstStyle>
+          <a:p>
+            <a:endParaRPr lang="ru-RU"/>
+          </a:p>
+        </p:txBody>
+      </p:sp>
+      <p:sp>
+        <p:nvSpPr>
+          <p:cNvPr id="3" name="Дата 2"/>
+          <p:cNvSpPr>
+            <a:spLocks noGrp="1"/>
+          </p:cNvSpPr>
+          <p:nvPr>
+            <p:ph type="dt" idx="1"/>
+          </p:nvPr>
+        </p:nvSpPr>
+        <p:spPr>
+          <a:xfrm>
+            <a:off x="3884613" y="0"/>
+            <a:ext cx="2971800" cy="458788"/>
+          </a:xfrm>
+          <a:prstGeom prst="rect">
+            <a:avLst/>
+          </a:prstGeom>
+        </p:spPr>
+        <p:txBody>
+          <a:bodyPr vert="horz" lIns="91440" tIns="45720" rIns="91440" bIns="45720" rtlCol="0"/>
+          <a:lstStyle>
+            <a:lvl1pPr algn="r">
+              <a:defRPr sz="1200"/>
+            </a:lvl1pPr>
+          </a:lstStyle>
+          <a:p>
+            <a:fld id="{A810C3CC-7CAE-5245-9419-51312C118B47}" type="datetimeFigureOut">
+              <a:rPr lang="ru-RU" smtClean="0"/>
+              <a:t>26.06.2026</a:t>
+            </a:fld>
+            <a:endParaRPr lang="ru-RU"/>
+          </a:p>
+        </p:txBody>
+      </p:sp>
+      <p:sp>
+        <p:nvSpPr>
+          <p:cNvPr id="4" name="Образ слайда 3"/>
+          <p:cNvSpPr>
+            <a:spLocks noGrp="1" noRot="1" noChangeAspect="1"/>
+          </p:cNvSpPr>
+          <p:nvPr>
+            <p:ph type="sldImg" idx="2"/>
+          </p:nvPr>
+        </p:nvSpPr>
+        <p:spPr>
+          <a:xfrm>
+            <a:off x="685800" y="1143000"/>
+            <a:ext cx="5486400" cy="3086100"/>
+          </a:xfrm>
+          <a:prstGeom prst="rect">
+            <a:avLst/>
+          </a:prstGeom>
+          <a:noFill/>
+          <a:ln w="12700">
+            <a:solidFill>
+              <a:prstClr val="black"/>
+            </a:solidFill>
+          </a:ln>
+        </p:spPr>
+        <p:txBody>
+          <a:bodyPr vert="horz" lIns="91440" tIns="45720" rIns="91440" bIns="45720" rtlCol="0" anchor="ctr"/>
+          <a:lstStyle/>
+          <a:p>
+            <a:endParaRPr lang="ru-RU"/>
+          </a:p>
+        </p:txBody>
+      </p:sp>
+      <p:sp>
+        <p:nvSpPr>
+          <p:cNvPr id="5" name="Заметки 4"/>
+          <p:cNvSpPr>
+            <a:spLocks noGrp="1"/>
+          </p:cNvSpPr>
+          <p:nvPr>
+            <p:ph type="body" sz="quarter" idx="3"/>
+          </p:nvPr>
+        </p:nvSpPr>
+        <p:spPr>
+          <a:xfrm>
+            <a:off x="685800" y="4400550"/>
+            <a:ext cx="5486400" cy="3600450"/>
+          </a:xfrm>
+          <a:prstGeom prst="rect">
+            <a:avLst/>
+          </a:prstGeom>
+        </p:spPr>
+        <p:txBody>
+          <a:bodyPr vert="horz" lIns="91440" tIns="45720" rIns="91440" bIns="45720" rtlCol="0"/>
+          <a:lstStyle/>
+          <a:p>
+            <a:pPr lvl="0"/>
+            <a:r>
+              <a:rPr lang="ru-RU"/>
+              <a:t>Образец текста</a:t>
+            </a:r>
+          </a:p>
+          <a:p>
+            <a:pPr lvl="1"/>
+            <a:r>
+              <a:rPr lang="ru-RU"/>
+              <a:t>Второй уровень</a:t>
+            </a:r>
+          </a:p>
+          <a:p>
+            <a:pPr lvl="2"/>
+            <a:r>
+              <a:rPr lang="ru-RU"/>
+              <a:t>Третий уровень</a:t>
+            </a:r>
+          </a:p>
+          <a:p>
+            <a:pPr lvl="3"/>
+            <a:r>
+              <a:rPr lang="ru-RU"/>
+              <a:t>Четвертый уровень</a:t>
+            </a:r>
+          </a:p>
+          <a:p>
+            <a:pPr lvl="4"/>
+            <a:r>
+              <a:rPr lang="ru-RU"/>
+              <a:t>Пятый уровень</a:t>
+            </a:r>
+          </a:p>
+        </p:txBody>
+      </p:sp>
+      <p:sp>
+        <p:nvSpPr>
+          <p:cNvPr id="6" name="Нижний колонтитул 5"/>
+          <p:cNvSpPr>
+            <a:spLocks noGrp="1"/>
+          </p:cNvSpPr>
+          <p:nvPr>
+            <p:ph type="ftr" sz="quarter" idx="4"/>
+          </p:nvPr>
+        </p:nvSpPr>
+        <p:spPr>
+          <a:xfrm>
+            <a:off x="0" y="8685213"/>
+            <a:ext cx="2971800" cy="458787"/>
+          </a:xfrm>
+          <a:prstGeom prst="rect">
+            <a:avLst/>
+          </a:prstGeom>
+        </p:spPr>
+        <p:txBody>
+          <a:bodyPr vert="horz" lIns="91440" tIns="45720" rIns="91440" bIns="45720" rtlCol="0" anchor="b"/>
+          <a:lstStyle>
+            <a:lvl1pPr algn="l">
+              <a:defRPr sz="1200"/>
+            </a:lvl1pPr>
+          </a:lstStyle>
+          <a:p>
+            <a:endParaRPr lang="ru-RU"/>
+          </a:p>
+        </p:txBody>
+      </p:sp>
+      <p:sp>
+        <p:nvSpPr>
+          <p:cNvPr id="7" name="Номер слайда 6"/>
+          <p:cNvSpPr>
+            <a:spLocks noGrp="1"/>
+          </p:cNvSpPr>
+          <p:nvPr>
+            <p:ph type="sldNum" sz="quarter" idx="5"/>
+          </p:nvPr>
+        </p:nvSpPr>
+        <p:spPr>
+          <a:xfrm>
+            <a:off x="3884613" y="8685213"/>
+            <a:ext cx="2971800" cy="458787"/>
+          </a:xfrm>
+          <a:prstGeom prst="rect">
+            <a:avLst/>
+          </a:prstGeom>
+        </p:spPr>
+        <p:txBody>
+          <a:bodyPr vert="horz" lIns="91440" tIns="45720" rIns="91440" bIns="45720" rtlCol="0" anchor="b"/>
+          <a:lstStyle>
+            <a:lvl1pPr algn="r">
+              <a:defRPr sz="1200"/>
+            </a:lvl1pPr>
+          </a:lstStyle>
+          <a:p>
+            <a:fld id="{48DA6A8A-3B81-7243-A3AE-AF4790F5F296}" type="slidenum">
+              <a:rPr lang="ru-RU" smtClean="0"/>
+              <a:t>‹#›</a:t>
+            </a:fld>
+            <a:endParaRPr lang="ru-RU"/>
+          </a:p>
+        </p:txBody>
+      </p:sp>
+    </p:spTree>
+    <p:extLst>
+      <p:ext uri="{BB962C8B-B14F-4D97-AF65-F5344CB8AC3E}">
+        <p14:creationId xmlns:p14="http://schemas.microsoft.com/office/powerpoint/2010/main" val="3554886768"/>
+      </p:ext>
+    </p:extLst>
+  </p:cSld>
+  <p:clrMap bg1="lt1" tx1="dk1" bg2="lt2" tx2="dk2" accent1="accent1" accent2="accent2" accent3="accent3" accent4="accent4" accent5="accent5" accent6="accent6" hlink="hlink" folHlink="folHlink"/>
+  <p:notesStyle>
+    <a:lvl1pPr marL="0" algn="l" defTabSz="914400" rtl="0" eaLnBrk="1" latinLnBrk="0" hangingPunct="1">
+      <a:defRPr sz="1200" kern="1200">
+        <a:solidFill>
+          <a:schemeClr val="tx1"/>
+        </a:solidFill>
+        <a:latin typeface="+mn-lt"/>
+        <a:ea typeface="+mn-ea"/>
+        <a:cs typeface="+mn-cs"/>
+      </a:defRPr>
+    </a:lvl1pPr>
+    <a:lvl2pPr marL="457200" algn="l" defTabSz="914400" rtl="0" eaLnBrk="1" latinLnBrk="0" hangingPunct="1">
+      <a:defRPr sz="1200" kern="1200">
+        <a:solidFill>
+          <a:schemeClr val="tx1"/>
+        </a:solidFill>
+        <a:latin typeface="+mn-lt"/>
+        <a:ea typeface="+mn-ea"/>
+        <a:cs typeface="+mn-cs"/>
+      </a:defRPr>
+    </a:lvl2pPr>
+    <a:lvl3pPr marL="914400" algn="l" defTabSz="914400" rtl="0" eaLnBrk="1" latinLnBrk="0" hangingPunct="1">
+      <a:defRPr sz="1200" kern="1200">
+        <a:solidFill>
+          <a:schemeClr val="tx1"/>
+        </a:solidFill>
+        <a:latin typeface="+mn-lt"/>
+        <a:ea typeface="+mn-ea"/>
+        <a:cs typeface="+mn-cs"/>
+      </a:defRPr>
+    </a:lvl3pPr>
+    <a:lvl4pPr marL="1371600" algn="l" defTabSz="914400" rtl="0" eaLnBrk="1" latinLnBrk="0" hangingPunct="1">
+      <a:defRPr sz="1200" kern="1200">
+        <a:solidFill>
+          <a:schemeClr val="tx1"/>
+        </a:solidFill>
+        <a:latin typeface="+mn-lt"/>
+        <a:ea typeface="+mn-ea"/>
+        <a:cs typeface="+mn-cs"/>
+      </a:defRPr>
+    </a:lvl4pPr>
+    <a:lvl5pPr marL="1828800" algn="l" defTabSz="914400" rtl="0" eaLnBrk="1" latinLnBrk="0" hangingPunct="1">
+      <a:defRPr sz="1200" kern="1200">
+        <a:solidFill>
+          <a:schemeClr val="tx1"/>
+        </a:solidFill>
+        <a:latin typeface="+mn-lt"/>
+        <a:ea typeface="+mn-ea"/>
+        <a:cs typeface="+mn-cs"/>
+      </a:defRPr>
+    </a:lvl5pPr>
+    <a:lvl6pPr marL="2286000" algn="l" defTabSz="914400" rtl="0" eaLnBrk="1" latinLnBrk="0" hangingPunct="1">
+      <a:defRPr sz="1200" kern="1200">
+        <a:solidFill>
+          <a:schemeClr val="tx1"/>
+        </a:solidFill>
+        <a:latin typeface="+mn-lt"/>
+        <a:ea typeface="+mn-ea"/>
+        <a:cs typeface="+mn-cs"/>
+      </a:defRPr>
+    </a:lvl6pPr>
+    <a:lvl7pPr marL="2743200" algn="l" defTabSz="914400" rtl="0" eaLnBrk="1" latinLnBrk="0" hangingPunct="1">
+      <a:defRPr sz="1200" kern="1200">
+        <a:solidFill>
+          <a:schemeClr val="tx1"/>
+        </a:solidFill>
+        <a:latin typeface="+mn-lt"/>
+        <a:ea typeface="+mn-ea"/>
+        <a:cs typeface="+mn-cs"/>
+      </a:defRPr>
+    </a:lvl7pPr>
+    <a:lvl8pPr marL="3200400" algn="l" defTabSz="914400" rtl="0" eaLnBrk="1" latinLnBrk="0" hangingPunct="1">
+      <a:defRPr sz="1200" kern="1200">
+        <a:solidFill>
+          <a:schemeClr val="tx1"/>
+        </a:solidFill>
+        <a:latin typeface="+mn-lt"/>
+        <a:ea typeface="+mn-ea"/>
+        <a:cs typeface="+mn-cs"/>
+      </a:defRPr>
+    </a:lvl8pPr>
+    <a:lvl9pPr marL="3657600" algn="l" defTabSz="914400" rtl="0" eaLnBrk="1" latinLnBrk="0" hangingPunct="1">
+      <a:defRPr sz="1200" kern="1200">
+        <a:solidFill>
+          <a:schemeClr val="tx1"/>
+        </a:solidFill>
+        <a:latin typeface="+mn-lt"/>
+        <a:ea typeface="+mn-ea"/>
+        <a:cs typeface="+mn-cs"/>
+      </a:defRPr>
+    </a:lvl9pPr>
+  </p:notesStyle>
+</p:notesMaster>
+</file>
+
+<file path=ppt/notesSlides/notesSlide1.xml><?xml version="1.0" encoding="utf-8"?>
+<p:notes xmlns:a="http://schemas.openxmlformats.org/drawingml/2006/main" xmlns:r="http://schemas.openxmlformats.org/officeDocument/2006/relationships" xmlns:p="http://schemas.openxmlformats.org/presentationml/2006/main">
+  <p:cSld>
+    <p:spTree>
+      <p:nvGrpSpPr>
+        <p:cNvPr id="1" name=""/>
+        <p:cNvGrpSpPr/>
+        <p:nvPr/>
+      </p:nvGrpSpPr>
+      <p:grpSpPr>
+        <a:xfrm>
+          <a:off x="0" y="0"/>
+          <a:ext cx="0" cy="0"/>
+          <a:chOff x="0" y="0"/>
+          <a:chExt cx="0" cy="0"/>
+        </a:xfrm>
+      </p:grpSpPr>
+      <p:sp>
+        <p:nvSpPr>
+          <p:cNvPr id="2" name="Образ слайда 1"/>
+          <p:cNvSpPr>
+            <a:spLocks noGrp="1" noRot="1" noChangeAspect="1"/>
+          </p:cNvSpPr>
+          <p:nvPr>
+            <p:ph type="sldImg"/>
+          </p:nvPr>
+        </p:nvSpPr>
+        <p:spPr/>
+      </p:sp>
+      <p:sp>
+        <p:nvSpPr>
+          <p:cNvPr id="3" name="Заметки 2"/>
+          <p:cNvSpPr>
+            <a:spLocks noGrp="1"/>
+          </p:cNvSpPr>
+          <p:nvPr>
+            <p:ph type="body" idx="1"/>
+          </p:nvPr>
+        </p:nvSpPr>
+        <p:spPr/>
+        <p:txBody>
+          <a:bodyPr/>
+          <a:lstStyle/>
+          <a:p>
+            <a:pPr marL="0" marR="0" lvl="0" indent="0" algn="l" defTabSz="914400" rtl="0" eaLnBrk="1" fontAlgn="auto" latinLnBrk="0" hangingPunct="1">
+              <a:lnSpc>
+                <a:spcPct val="100000"/>
+              </a:lnSpc>
+              <a:spcBef>
+                <a:spcPts val="0"/>
+              </a:spcBef>
+              <a:spcAft>
+                <a:spcPts val="0"/>
+              </a:spcAft>
+              <a:buClrTx/>
+              <a:buSzTx/>
+              <a:buFontTx/>
+              <a:buNone/>
+              <a:tabLst/>
+              <a:defRPr/>
+            </a:pPr>
+            <a:r>
+              <a:rPr lang="ru-RU" sz="1800" dirty="0">
+                <a:effectLst/>
+                <a:latin typeface="Cambria" panose="02040503050406030204" pitchFamily="18" charset="0"/>
+                <a:ea typeface="MS Mincho" panose="02020609040205080304" pitchFamily="49" charset="-128"/>
+                <a:cs typeface="Times New Roman" panose="02020603050405020304" pitchFamily="18" charset="0"/>
+              </a:rPr>
+              <a:t>Добрый день, уважаемая комиссия. Меня зовут Белов Егор, тема работы — Разработка приложения для агрегации информации об IT-событиях и выдачи персональных рекомендаций на основе модели пользователя; научный руководитель — Алексей Юрьевич Городилов.</a:t>
+            </a:r>
+          </a:p>
+          <a:p>
+            <a:endParaRPr lang="ru-RU" dirty="0"/>
+          </a:p>
+        </p:txBody>
+      </p:sp>
+      <p:sp>
+        <p:nvSpPr>
+          <p:cNvPr id="4" name="Номер слайда 3"/>
+          <p:cNvSpPr>
+            <a:spLocks noGrp="1"/>
+          </p:cNvSpPr>
+          <p:nvPr>
+            <p:ph type="sldNum" sz="quarter" idx="5"/>
+          </p:nvPr>
+        </p:nvSpPr>
+        <p:spPr/>
+        <p:txBody>
+          <a:bodyPr/>
+          <a:lstStyle/>
+          <a:p>
+            <a:fld id="{48DA6A8A-3B81-7243-A3AE-AF4790F5F296}" type="slidenum">
+              <a:rPr lang="ru-RU" smtClean="0"/>
+              <a:t>1</a:t>
+            </a:fld>
+            <a:endParaRPr lang="ru-RU"/>
+          </a:p>
+        </p:txBody>
+      </p:sp>
+    </p:spTree>
+    <p:extLst>
+      <p:ext uri="{BB962C8B-B14F-4D97-AF65-F5344CB8AC3E}">
+        <p14:creationId xmlns:p14="http://schemas.microsoft.com/office/powerpoint/2010/main" val="1813917937"/>
+      </p:ext>
+    </p:extLst>
+  </p:cSld>
+  <p:clrMapOvr>
+    <a:masterClrMapping/>
+  </p:clrMapOvr>
+</p:notes>
+</file>
+
+<file path=ppt/notesSlides/notesSlide10.xml><?xml version="1.0" encoding="utf-8"?>
+<p:notes xmlns:a="http://schemas.openxmlformats.org/drawingml/2006/main" xmlns:r="http://schemas.openxmlformats.org/officeDocument/2006/relationships" xmlns:p="http://schemas.openxmlformats.org/presentationml/2006/main">
+  <p:cSld>
+    <p:spTree>
+      <p:nvGrpSpPr>
+        <p:cNvPr id="1" name=""/>
+        <p:cNvGrpSpPr/>
+        <p:nvPr/>
+      </p:nvGrpSpPr>
+      <p:grpSpPr>
+        <a:xfrm>
+          <a:off x="0" y="0"/>
+          <a:ext cx="0" cy="0"/>
+          <a:chOff x="0" y="0"/>
+          <a:chExt cx="0" cy="0"/>
+        </a:xfrm>
+      </p:grpSpPr>
+      <p:sp>
+        <p:nvSpPr>
+          <p:cNvPr id="2" name="Образ слайда 1"/>
+          <p:cNvSpPr>
+            <a:spLocks noGrp="1" noRot="1" noChangeAspect="1"/>
+          </p:cNvSpPr>
+          <p:nvPr>
+            <p:ph type="sldImg"/>
+          </p:nvPr>
+        </p:nvSpPr>
+        <p:spPr/>
+      </p:sp>
+      <p:sp>
+        <p:nvSpPr>
+          <p:cNvPr id="3" name="Заметки 2"/>
+          <p:cNvSpPr>
+            <a:spLocks noGrp="1"/>
+          </p:cNvSpPr>
+          <p:nvPr>
+            <p:ph type="body" idx="1"/>
+          </p:nvPr>
+        </p:nvSpPr>
+        <p:spPr/>
+        <p:txBody>
+          <a:bodyPr/>
+          <a:lstStyle/>
+          <a:p>
+            <a:r>
+              <a:rPr lang="ru-RU" sz="1800" dirty="0">
+                <a:effectLst/>
+                <a:latin typeface="Cambria" panose="02040503050406030204" pitchFamily="18" charset="0"/>
+                <a:ea typeface="MS Mincho" panose="02020609040205080304" pitchFamily="49" charset="-128"/>
+                <a:cs typeface="Times New Roman" panose="02020603050405020304" pitchFamily="18" charset="0"/>
+              </a:rPr>
+              <a:t>Технически система — три независимых процесса вокруг общей базы. Первый — серверная часть на </a:t>
+            </a:r>
+            <a:r>
+              <a:rPr lang="en-US" sz="1800" dirty="0" err="1">
+                <a:effectLst/>
+                <a:latin typeface="Cambria" panose="02040503050406030204" pitchFamily="18" charset="0"/>
+                <a:ea typeface="MS Mincho" panose="02020609040205080304" pitchFamily="49" charset="-128"/>
+                <a:cs typeface="Times New Roman" panose="02020603050405020304" pitchFamily="18" charset="0"/>
+              </a:rPr>
+              <a:t>FastAPI</a:t>
+            </a:r>
+            <a:r>
+              <a:rPr lang="ru-RU" sz="1800" dirty="0">
+                <a:effectLst/>
+                <a:latin typeface="Cambria" panose="02040503050406030204" pitchFamily="18" charset="0"/>
+                <a:ea typeface="MS Mincho" panose="02020609040205080304" pitchFamily="49" charset="-128"/>
+                <a:cs typeface="Times New Roman" panose="02020603050405020304" pitchFamily="18" charset="0"/>
+              </a:rPr>
+              <a:t>: </a:t>
+            </a:r>
+            <a:r>
+              <a:rPr lang="ru-RU" sz="1800" dirty="0" err="1">
+                <a:effectLst/>
+                <a:latin typeface="Cambria" panose="02040503050406030204" pitchFamily="18" charset="0"/>
+                <a:ea typeface="MS Mincho" panose="02020609040205080304" pitchFamily="49" charset="-128"/>
+                <a:cs typeface="Times New Roman" panose="02020603050405020304" pitchFamily="18" charset="0"/>
+              </a:rPr>
+              <a:t>эндпоинты</a:t>
+            </a:r>
+            <a:r>
+              <a:rPr lang="ru-RU" sz="1800" dirty="0">
+                <a:effectLst/>
+                <a:latin typeface="Cambria" panose="02040503050406030204" pitchFamily="18" charset="0"/>
+                <a:ea typeface="MS Mincho" panose="02020609040205080304" pitchFamily="49" charset="-128"/>
+                <a:cs typeface="Times New Roman" panose="02020603050405020304" pitchFamily="18" charset="0"/>
+              </a:rPr>
+              <a:t>, </a:t>
+            </a:r>
+            <a:r>
+              <a:rPr lang="ru-RU" sz="1800" dirty="0" err="1">
+                <a:effectLst/>
+                <a:latin typeface="Cambria" panose="02040503050406030204" pitchFamily="18" charset="0"/>
+                <a:ea typeface="MS Mincho" panose="02020609040205080304" pitchFamily="49" charset="-128"/>
+                <a:cs typeface="Times New Roman" panose="02020603050405020304" pitchFamily="18" charset="0"/>
+              </a:rPr>
+              <a:t>рекомендатель</a:t>
+            </a:r>
+            <a:r>
+              <a:rPr lang="ru-RU" sz="1800" dirty="0">
+                <a:effectLst/>
+                <a:latin typeface="Cambria" panose="02040503050406030204" pitchFamily="18" charset="0"/>
+                <a:ea typeface="MS Mincho" panose="02020609040205080304" pitchFamily="49" charset="-128"/>
+                <a:cs typeface="Times New Roman" panose="02020603050405020304" pitchFamily="18" charset="0"/>
+              </a:rPr>
+              <a:t>, генерация объяснений и отбор кандидатов по вектору.</a:t>
+            </a:r>
+            <a:r>
+              <a:rPr lang="ru-RU" dirty="0">
+                <a:effectLst/>
+              </a:rPr>
+              <a:t> </a:t>
+            </a:r>
+            <a:endParaRPr lang="ru-RU" dirty="0"/>
+          </a:p>
+        </p:txBody>
+      </p:sp>
+      <p:sp>
+        <p:nvSpPr>
+          <p:cNvPr id="4" name="Номер слайда 3"/>
+          <p:cNvSpPr>
+            <a:spLocks noGrp="1"/>
+          </p:cNvSpPr>
+          <p:nvPr>
+            <p:ph type="sldNum" sz="quarter" idx="5"/>
+          </p:nvPr>
+        </p:nvSpPr>
+        <p:spPr/>
+        <p:txBody>
+          <a:bodyPr/>
+          <a:lstStyle/>
+          <a:p>
+            <a:fld id="{48DA6A8A-3B81-7243-A3AE-AF4790F5F296}" type="slidenum">
+              <a:rPr lang="ru-RU" smtClean="0"/>
+              <a:t>10</a:t>
+            </a:fld>
+            <a:endParaRPr lang="ru-RU"/>
+          </a:p>
+        </p:txBody>
+      </p:sp>
+    </p:spTree>
+    <p:extLst>
+      <p:ext uri="{BB962C8B-B14F-4D97-AF65-F5344CB8AC3E}">
+        <p14:creationId xmlns:p14="http://schemas.microsoft.com/office/powerpoint/2010/main" val="1578200227"/>
+      </p:ext>
+    </p:extLst>
+  </p:cSld>
+  <p:clrMapOvr>
+    <a:masterClrMapping/>
+  </p:clrMapOvr>
+</p:notes>
+</file>
+
+<file path=ppt/notesSlides/notesSlide11.xml><?xml version="1.0" encoding="utf-8"?>
+<p:notes xmlns:a="http://schemas.openxmlformats.org/drawingml/2006/main" xmlns:r="http://schemas.openxmlformats.org/officeDocument/2006/relationships" xmlns:p="http://schemas.openxmlformats.org/presentationml/2006/main">
+  <p:cSld>
+    <p:spTree>
+      <p:nvGrpSpPr>
+        <p:cNvPr id="1" name=""/>
+        <p:cNvGrpSpPr/>
+        <p:nvPr/>
+      </p:nvGrpSpPr>
+      <p:grpSpPr>
+        <a:xfrm>
+          <a:off x="0" y="0"/>
+          <a:ext cx="0" cy="0"/>
+          <a:chOff x="0" y="0"/>
+          <a:chExt cx="0" cy="0"/>
+        </a:xfrm>
+      </p:grpSpPr>
+      <p:sp>
+        <p:nvSpPr>
+          <p:cNvPr id="2" name="Образ слайда 1"/>
+          <p:cNvSpPr>
+            <a:spLocks noGrp="1" noRot="1" noChangeAspect="1"/>
+          </p:cNvSpPr>
+          <p:nvPr>
+            <p:ph type="sldImg"/>
+          </p:nvPr>
+        </p:nvSpPr>
+        <p:spPr/>
+      </p:sp>
+      <p:sp>
+        <p:nvSpPr>
+          <p:cNvPr id="3" name="Заметки 2"/>
+          <p:cNvSpPr>
+            <a:spLocks noGrp="1"/>
+          </p:cNvSpPr>
+          <p:nvPr>
+            <p:ph type="body" idx="1"/>
+          </p:nvPr>
+        </p:nvSpPr>
+        <p:spPr/>
+        <p:txBody>
+          <a:bodyPr/>
+          <a:lstStyle/>
+          <a:p>
+            <a:pPr marL="0" marR="0" lvl="0" indent="0" algn="l" defTabSz="914400" rtl="0" eaLnBrk="1" fontAlgn="auto" latinLnBrk="0" hangingPunct="1">
+              <a:lnSpc>
+                <a:spcPct val="100000"/>
+              </a:lnSpc>
+              <a:spcBef>
+                <a:spcPts val="0"/>
+              </a:spcBef>
+              <a:spcAft>
+                <a:spcPts val="0"/>
+              </a:spcAft>
+              <a:buClrTx/>
+              <a:buSzTx/>
+              <a:buFontTx/>
+              <a:buNone/>
+              <a:tabLst/>
+              <a:defRPr/>
+            </a:pPr>
+            <a:r>
+              <a:rPr lang="ru-RU" sz="1800" dirty="0">
+                <a:effectLst/>
+                <a:latin typeface="Cambria" panose="02040503050406030204" pitchFamily="18" charset="0"/>
+                <a:ea typeface="MS Mincho" panose="02020609040205080304" pitchFamily="49" charset="-128"/>
+                <a:cs typeface="Times New Roman" panose="02020603050405020304" pitchFamily="18" charset="0"/>
+              </a:rPr>
+              <a:t>Второй — </a:t>
+            </a:r>
+            <a:r>
+              <a:rPr lang="en-US" sz="1800" dirty="0">
+                <a:effectLst/>
+                <a:latin typeface="Cambria" panose="02040503050406030204" pitchFamily="18" charset="0"/>
+                <a:ea typeface="MS Mincho" panose="02020609040205080304" pitchFamily="49" charset="-128"/>
+                <a:cs typeface="Times New Roman" panose="02020603050405020304" pitchFamily="18" charset="0"/>
+              </a:rPr>
+              <a:t>Telegram</a:t>
+            </a:r>
+            <a:r>
+              <a:rPr lang="ru-RU" sz="1800" dirty="0">
+                <a:effectLst/>
+                <a:latin typeface="Cambria" panose="02040503050406030204" pitchFamily="18" charset="0"/>
+                <a:ea typeface="MS Mincho" panose="02020609040205080304" pitchFamily="49" charset="-128"/>
+                <a:cs typeface="Times New Roman" panose="02020603050405020304" pitchFamily="18" charset="0"/>
+              </a:rPr>
+              <a:t>-бот: команды, мастер настройки профиля и карточки событий с кнопками. Бот выбран как интерфейс — не требует установки и работает там, где пользователь и так читает анонсы.</a:t>
+            </a:r>
+          </a:p>
+          <a:p>
+            <a:endParaRPr lang="ru-RU" dirty="0"/>
+          </a:p>
+        </p:txBody>
+      </p:sp>
+      <p:sp>
+        <p:nvSpPr>
+          <p:cNvPr id="4" name="Номер слайда 3"/>
+          <p:cNvSpPr>
+            <a:spLocks noGrp="1"/>
+          </p:cNvSpPr>
+          <p:nvPr>
+            <p:ph type="sldNum" sz="quarter" idx="5"/>
+          </p:nvPr>
+        </p:nvSpPr>
+        <p:spPr/>
+        <p:txBody>
+          <a:bodyPr/>
+          <a:lstStyle/>
+          <a:p>
+            <a:fld id="{48DA6A8A-3B81-7243-A3AE-AF4790F5F296}" type="slidenum">
+              <a:rPr lang="ru-RU" smtClean="0"/>
+              <a:t>11</a:t>
+            </a:fld>
+            <a:endParaRPr lang="ru-RU"/>
+          </a:p>
+        </p:txBody>
+      </p:sp>
+    </p:spTree>
+    <p:extLst>
+      <p:ext uri="{BB962C8B-B14F-4D97-AF65-F5344CB8AC3E}">
+        <p14:creationId xmlns:p14="http://schemas.microsoft.com/office/powerpoint/2010/main" val="1931101289"/>
+      </p:ext>
+    </p:extLst>
+  </p:cSld>
+  <p:clrMapOvr>
+    <a:masterClrMapping/>
+  </p:clrMapOvr>
+</p:notes>
+</file>
+
+<file path=ppt/notesSlides/notesSlide12.xml><?xml version="1.0" encoding="utf-8"?>
+<p:notes xmlns:a="http://schemas.openxmlformats.org/drawingml/2006/main" xmlns:r="http://schemas.openxmlformats.org/officeDocument/2006/relationships" xmlns:p="http://schemas.openxmlformats.org/presentationml/2006/main">
+  <p:cSld>
+    <p:spTree>
+      <p:nvGrpSpPr>
+        <p:cNvPr id="1" name=""/>
+        <p:cNvGrpSpPr/>
+        <p:nvPr/>
+      </p:nvGrpSpPr>
+      <p:grpSpPr>
+        <a:xfrm>
+          <a:off x="0" y="0"/>
+          <a:ext cx="0" cy="0"/>
+          <a:chOff x="0" y="0"/>
+          <a:chExt cx="0" cy="0"/>
+        </a:xfrm>
+      </p:grpSpPr>
+      <p:sp>
+        <p:nvSpPr>
+          <p:cNvPr id="2" name="Образ слайда 1"/>
+          <p:cNvSpPr>
+            <a:spLocks noGrp="1" noRot="1" noChangeAspect="1"/>
+          </p:cNvSpPr>
+          <p:nvPr>
+            <p:ph type="sldImg"/>
+          </p:nvPr>
+        </p:nvSpPr>
+        <p:spPr/>
+      </p:sp>
+      <p:sp>
+        <p:nvSpPr>
+          <p:cNvPr id="3" name="Заметки 2"/>
+          <p:cNvSpPr>
+            <a:spLocks noGrp="1"/>
+          </p:cNvSpPr>
+          <p:nvPr>
+            <p:ph type="body" idx="1"/>
+          </p:nvPr>
+        </p:nvSpPr>
+        <p:spPr/>
+        <p:txBody>
+          <a:bodyPr/>
+          <a:lstStyle/>
+          <a:p>
+            <a:r>
+              <a:rPr lang="ru-RU" sz="1800" dirty="0">
+                <a:effectLst/>
+                <a:latin typeface="Cambria" panose="02040503050406030204" pitchFamily="18" charset="0"/>
+                <a:ea typeface="MS Mincho" panose="02020609040205080304" pitchFamily="49" charset="-128"/>
+                <a:cs typeface="Times New Roman" panose="02020603050405020304" pitchFamily="18" charset="0"/>
+              </a:rPr>
+              <a:t>Третий — планировщик: фоновое, что не должно замедлять пользователя, — рассылка дайджеста, периодический сбор событий и прогрев векторов.</a:t>
+            </a:r>
+            <a:r>
+              <a:rPr lang="ru-RU" dirty="0">
+                <a:effectLst/>
+              </a:rPr>
+              <a:t> </a:t>
+            </a:r>
+            <a:endParaRPr lang="ru-RU" dirty="0"/>
+          </a:p>
+        </p:txBody>
+      </p:sp>
+      <p:sp>
+        <p:nvSpPr>
+          <p:cNvPr id="4" name="Номер слайда 3"/>
+          <p:cNvSpPr>
+            <a:spLocks noGrp="1"/>
+          </p:cNvSpPr>
+          <p:nvPr>
+            <p:ph type="sldNum" sz="quarter" idx="5"/>
+          </p:nvPr>
+        </p:nvSpPr>
+        <p:spPr/>
+        <p:txBody>
+          <a:bodyPr/>
+          <a:lstStyle/>
+          <a:p>
+            <a:fld id="{48DA6A8A-3B81-7243-A3AE-AF4790F5F296}" type="slidenum">
+              <a:rPr lang="ru-RU" smtClean="0"/>
+              <a:t>12</a:t>
+            </a:fld>
+            <a:endParaRPr lang="ru-RU"/>
+          </a:p>
+        </p:txBody>
+      </p:sp>
+    </p:spTree>
+    <p:extLst>
+      <p:ext uri="{BB962C8B-B14F-4D97-AF65-F5344CB8AC3E}">
+        <p14:creationId xmlns:p14="http://schemas.microsoft.com/office/powerpoint/2010/main" val="889283761"/>
+      </p:ext>
+    </p:extLst>
+  </p:cSld>
+  <p:clrMapOvr>
+    <a:masterClrMapping/>
+  </p:clrMapOvr>
+</p:notes>
+</file>
+
+<file path=ppt/notesSlides/notesSlide13.xml><?xml version="1.0" encoding="utf-8"?>
+<p:notes xmlns:a="http://schemas.openxmlformats.org/drawingml/2006/main" xmlns:r="http://schemas.openxmlformats.org/officeDocument/2006/relationships" xmlns:p="http://schemas.openxmlformats.org/presentationml/2006/main">
+  <p:cSld>
+    <p:spTree>
+      <p:nvGrpSpPr>
+        <p:cNvPr id="1" name=""/>
+        <p:cNvGrpSpPr/>
+        <p:nvPr/>
+      </p:nvGrpSpPr>
+      <p:grpSpPr>
+        <a:xfrm>
+          <a:off x="0" y="0"/>
+          <a:ext cx="0" cy="0"/>
+          <a:chOff x="0" y="0"/>
+          <a:chExt cx="0" cy="0"/>
+        </a:xfrm>
+      </p:grpSpPr>
+      <p:sp>
+        <p:nvSpPr>
+          <p:cNvPr id="2" name="Образ слайда 1"/>
+          <p:cNvSpPr>
+            <a:spLocks noGrp="1" noRot="1" noChangeAspect="1"/>
+          </p:cNvSpPr>
+          <p:nvPr>
+            <p:ph type="sldImg"/>
+          </p:nvPr>
+        </p:nvSpPr>
+        <p:spPr/>
+      </p:sp>
+      <p:sp>
+        <p:nvSpPr>
+          <p:cNvPr id="3" name="Заметки 2"/>
+          <p:cNvSpPr>
+            <a:spLocks noGrp="1"/>
+          </p:cNvSpPr>
+          <p:nvPr>
+            <p:ph type="body" idx="1"/>
+          </p:nvPr>
+        </p:nvSpPr>
+        <p:spPr/>
+        <p:txBody>
+          <a:bodyPr/>
+          <a:lstStyle/>
+          <a:p>
+            <a:r>
+              <a:rPr lang="ru-RU" sz="1800" dirty="0">
+                <a:effectLst/>
+                <a:latin typeface="Cambria" panose="02040503050406030204" pitchFamily="18" charset="0"/>
+                <a:ea typeface="MS Mincho" panose="02020609040205080304" pitchFamily="49" charset="-128"/>
+                <a:cs typeface="Times New Roman" panose="02020603050405020304" pitchFamily="18" charset="0"/>
+              </a:rPr>
+              <a:t>Всё держится на модели данных, а она и есть модель пользователя. По каждому хранится несколько слоёв: профиль с весами интересов, реакции, вектор предпочтений, статистика по темам, состояние бандита и заметки памяти о целях. Векторы лежат в </a:t>
+            </a:r>
+            <a:r>
+              <a:rPr lang="en-US" sz="1800" dirty="0" err="1">
+                <a:effectLst/>
+                <a:latin typeface="Cambria" panose="02040503050406030204" pitchFamily="18" charset="0"/>
+                <a:ea typeface="MS Mincho" panose="02020609040205080304" pitchFamily="49" charset="-128"/>
+                <a:cs typeface="Times New Roman" panose="02020603050405020304" pitchFamily="18" charset="0"/>
+              </a:rPr>
+              <a:t>pgvector</a:t>
+            </a:r>
+            <a:r>
+              <a:rPr lang="ru-RU" sz="1800" dirty="0">
+                <a:effectLst/>
+                <a:latin typeface="Cambria" panose="02040503050406030204" pitchFamily="18" charset="0"/>
+                <a:ea typeface="MS Mincho" panose="02020609040205080304" pitchFamily="49" charset="-128"/>
+                <a:cs typeface="Times New Roman" panose="02020603050405020304" pitchFamily="18" charset="0"/>
+              </a:rPr>
+              <a:t>, поэтому близкие по смыслу события ищутся на стороне базы.</a:t>
+            </a:r>
+            <a:r>
+              <a:rPr lang="ru-RU" dirty="0">
+                <a:effectLst/>
+              </a:rPr>
+              <a:t> </a:t>
+            </a:r>
+            <a:endParaRPr lang="ru-RU" dirty="0"/>
+          </a:p>
+        </p:txBody>
+      </p:sp>
+      <p:sp>
+        <p:nvSpPr>
+          <p:cNvPr id="4" name="Номер слайда 3"/>
+          <p:cNvSpPr>
+            <a:spLocks noGrp="1"/>
+          </p:cNvSpPr>
+          <p:nvPr>
+            <p:ph type="sldNum" sz="quarter" idx="5"/>
+          </p:nvPr>
+        </p:nvSpPr>
+        <p:spPr/>
+        <p:txBody>
+          <a:bodyPr/>
+          <a:lstStyle/>
+          <a:p>
+            <a:fld id="{48DA6A8A-3B81-7243-A3AE-AF4790F5F296}" type="slidenum">
+              <a:rPr lang="ru-RU" smtClean="0"/>
+              <a:t>13</a:t>
+            </a:fld>
+            <a:endParaRPr lang="ru-RU"/>
+          </a:p>
+        </p:txBody>
+      </p:sp>
+    </p:spTree>
+    <p:extLst>
+      <p:ext uri="{BB962C8B-B14F-4D97-AF65-F5344CB8AC3E}">
+        <p14:creationId xmlns:p14="http://schemas.microsoft.com/office/powerpoint/2010/main" val="236693769"/>
+      </p:ext>
+    </p:extLst>
+  </p:cSld>
+  <p:clrMapOvr>
+    <a:masterClrMapping/>
+  </p:clrMapOvr>
+</p:notes>
+</file>
+
+<file path=ppt/notesSlides/notesSlide14.xml><?xml version="1.0" encoding="utf-8"?>
+<p:notes xmlns:a="http://schemas.openxmlformats.org/drawingml/2006/main" xmlns:r="http://schemas.openxmlformats.org/officeDocument/2006/relationships" xmlns:p="http://schemas.openxmlformats.org/presentationml/2006/main">
+  <p:cSld>
+    <p:spTree>
+      <p:nvGrpSpPr>
+        <p:cNvPr id="1" name=""/>
+        <p:cNvGrpSpPr/>
+        <p:nvPr/>
+      </p:nvGrpSpPr>
+      <p:grpSpPr>
+        <a:xfrm>
+          <a:off x="0" y="0"/>
+          <a:ext cx="0" cy="0"/>
+          <a:chOff x="0" y="0"/>
+          <a:chExt cx="0" cy="0"/>
+        </a:xfrm>
+      </p:grpSpPr>
+      <p:sp>
+        <p:nvSpPr>
+          <p:cNvPr id="2" name="Образ слайда 1"/>
+          <p:cNvSpPr>
+            <a:spLocks noGrp="1" noRot="1" noChangeAspect="1"/>
+          </p:cNvSpPr>
+          <p:nvPr>
+            <p:ph type="sldImg"/>
+          </p:nvPr>
+        </p:nvSpPr>
+        <p:spPr/>
+      </p:sp>
+      <p:sp>
+        <p:nvSpPr>
+          <p:cNvPr id="3" name="Заметки 2"/>
+          <p:cNvSpPr>
+            <a:spLocks noGrp="1"/>
+          </p:cNvSpPr>
+          <p:nvPr>
+            <p:ph type="body" idx="1"/>
+          </p:nvPr>
+        </p:nvSpPr>
+        <p:spPr/>
+        <p:txBody>
+          <a:bodyPr/>
+          <a:lstStyle/>
+          <a:p>
+            <a:r>
+              <a:rPr lang="ru-RU" sz="1800" dirty="0">
+                <a:effectLst/>
+                <a:latin typeface="Cambria" panose="02040503050406030204" pitchFamily="18" charset="0"/>
+                <a:ea typeface="MS Mincho" panose="02020609040205080304" pitchFamily="49" charset="-128"/>
+                <a:cs typeface="Times New Roman" panose="02020603050405020304" pitchFamily="18" charset="0"/>
+              </a:rPr>
+              <a:t>И мы подходим к сердцу работы — </a:t>
+            </a:r>
+            <a:r>
+              <a:rPr lang="ru-RU" sz="1800" dirty="0" err="1">
+                <a:effectLst/>
+                <a:latin typeface="Cambria" panose="02040503050406030204" pitchFamily="18" charset="0"/>
+                <a:ea typeface="MS Mincho" panose="02020609040205080304" pitchFamily="49" charset="-128"/>
+                <a:cs typeface="Times New Roman" panose="02020603050405020304" pitchFamily="18" charset="0"/>
+              </a:rPr>
+              <a:t>рекомендателю</a:t>
+            </a:r>
+            <a:r>
+              <a:rPr lang="ru-RU" sz="1800" dirty="0">
+                <a:effectLst/>
+                <a:latin typeface="Cambria" panose="02040503050406030204" pitchFamily="18" charset="0"/>
+                <a:ea typeface="MS Mincho" panose="02020609040205080304" pitchFamily="49" charset="-128"/>
+                <a:cs typeface="Times New Roman" panose="02020603050405020304" pitchFamily="18" charset="0"/>
+              </a:rPr>
+              <a:t>. Для каждого события он считает девять сигналов и складывает во взвешенную сумму: не один «правильный» алгоритм, а ансамбль, где каждый сигнал отвечает за свой аспект и страхует остальные. Самый весомый — семантическая близость: интересы и описание сравниваются по смыслу, поэтому «</a:t>
+            </a:r>
+            <a:r>
+              <a:rPr lang="ru-RU" sz="1800" dirty="0" err="1">
+                <a:effectLst/>
+                <a:latin typeface="Cambria" panose="02040503050406030204" pitchFamily="18" charset="0"/>
+                <a:ea typeface="MS Mincho" panose="02020609040205080304" pitchFamily="49" charset="-128"/>
+                <a:cs typeface="Times New Roman" panose="02020603050405020304" pitchFamily="18" charset="0"/>
+              </a:rPr>
+              <a:t>нейросети</a:t>
+            </a:r>
+            <a:r>
+              <a:rPr lang="ru-RU" sz="1800" dirty="0">
+                <a:effectLst/>
+                <a:latin typeface="Cambria" panose="02040503050406030204" pitchFamily="18" charset="0"/>
+                <a:ea typeface="MS Mincho" panose="02020609040205080304" pitchFamily="49" charset="-128"/>
+                <a:cs typeface="Times New Roman" panose="02020603050405020304" pitchFamily="18" charset="0"/>
+              </a:rPr>
+              <a:t>» и «глубокое обучение» система считает близкими. Правила профиля дают прямое совпадение тем, формата и города — грубый, но честный и объяснимый сигнал. Байесовская статистика методом Томпсона учитывает реакции по каждой теме, причём старые затухают, чтобы успевать за сменой интересов. Две оценки модели — качество и актуальность — намеренно с малым весом. Свежесть поднимает ближайшие события. Соответствие карьерной цели сравнивает желаемые навыки со стеком события — тот самый учёт цели, которого нет у обычных афиш. Контекстный бандит </a:t>
+            </a:r>
+            <a:r>
+              <a:rPr lang="ru-RU" sz="1800" dirty="0" err="1">
+                <a:effectLst/>
+                <a:latin typeface="Cambria" panose="02040503050406030204" pitchFamily="18" charset="0"/>
+                <a:ea typeface="MS Mincho" panose="02020609040205080304" pitchFamily="49" charset="-128"/>
+                <a:cs typeface="Times New Roman" panose="02020603050405020304" pitchFamily="18" charset="0"/>
+              </a:rPr>
+              <a:t>дообучается</a:t>
+            </a:r>
+            <a:r>
+              <a:rPr lang="ru-RU" sz="1800" dirty="0">
+                <a:effectLst/>
+                <a:latin typeface="Cambria" panose="02040503050406030204" pitchFamily="18" charset="0"/>
+                <a:ea typeface="MS Mincho" panose="02020609040205080304" pitchFamily="49" charset="-128"/>
+                <a:cs typeface="Times New Roman" panose="02020603050405020304" pitchFamily="18" charset="0"/>
+              </a:rPr>
+              <a:t> на лету и даёт бонус за исследование нового. Девятый, </a:t>
+            </a:r>
+            <a:r>
+              <a:rPr lang="ru-RU" sz="1800" dirty="0" err="1">
+                <a:effectLst/>
+                <a:latin typeface="Cambria" panose="02040503050406030204" pitchFamily="18" charset="0"/>
+                <a:ea typeface="MS Mincho" panose="02020609040205080304" pitchFamily="49" charset="-128"/>
+                <a:cs typeface="Times New Roman" panose="02020603050405020304" pitchFamily="18" charset="0"/>
+              </a:rPr>
+              <a:t>коллаборативный</a:t>
+            </a:r>
+            <a:r>
+              <a:rPr lang="ru-RU" sz="1800" dirty="0">
+                <a:effectLst/>
+                <a:latin typeface="Cambria" panose="02040503050406030204" pitchFamily="18" charset="0"/>
+                <a:ea typeface="MS Mincho" panose="02020609040205080304" pitchFamily="49" charset="-128"/>
+                <a:cs typeface="Times New Roman" panose="02020603050405020304" pitchFamily="18" charset="0"/>
+              </a:rPr>
+              <a:t>, отключён осознанно — на малых данных он шумит. Поверх суммы — </a:t>
+            </a:r>
+            <a:r>
+              <a:rPr lang="ru-RU" sz="1800" dirty="0" err="1">
+                <a:effectLst/>
+                <a:latin typeface="Cambria" panose="02040503050406030204" pitchFamily="18" charset="0"/>
+                <a:ea typeface="MS Mincho" panose="02020609040205080304" pitchFamily="49" charset="-128"/>
+                <a:cs typeface="Times New Roman" panose="02020603050405020304" pitchFamily="18" charset="0"/>
+              </a:rPr>
+              <a:t>переранжирование</a:t>
+            </a:r>
+            <a:r>
+              <a:rPr lang="ru-RU" sz="1800" dirty="0">
+                <a:effectLst/>
+                <a:latin typeface="Cambria" panose="02040503050406030204" pitchFamily="18" charset="0"/>
+                <a:ea typeface="MS Mincho" panose="02020609040205080304" pitchFamily="49" charset="-128"/>
+                <a:cs typeface="Times New Roman" panose="02020603050405020304" pitchFamily="18" charset="0"/>
+              </a:rPr>
+              <a:t> </a:t>
+            </a:r>
+            <a:r>
+              <a:rPr lang="en-US" sz="1800" dirty="0">
+                <a:effectLst/>
+                <a:latin typeface="Cambria" panose="02040503050406030204" pitchFamily="18" charset="0"/>
+                <a:ea typeface="MS Mincho" panose="02020609040205080304" pitchFamily="49" charset="-128"/>
+                <a:cs typeface="Times New Roman" panose="02020603050405020304" pitchFamily="18" charset="0"/>
+              </a:rPr>
+              <a:t>MMR</a:t>
+            </a:r>
+            <a:r>
+              <a:rPr lang="ru-RU" sz="1800" dirty="0">
+                <a:effectLst/>
+                <a:latin typeface="Cambria" panose="02040503050406030204" pitchFamily="18" charset="0"/>
+                <a:ea typeface="MS Mincho" panose="02020609040205080304" pitchFamily="49" charset="-128"/>
+                <a:cs typeface="Times New Roman" panose="02020603050405020304" pitchFamily="18" charset="0"/>
+              </a:rPr>
+              <a:t>: жертвует малой долей релевантности ради разнообразия, чтобы в топе не было пяти одинаковых </a:t>
+            </a:r>
+            <a:r>
+              <a:rPr lang="ru-RU" sz="1800" dirty="0" err="1">
+                <a:effectLst/>
+                <a:latin typeface="Cambria" panose="02040503050406030204" pitchFamily="18" charset="0"/>
+                <a:ea typeface="MS Mincho" panose="02020609040205080304" pitchFamily="49" charset="-128"/>
+                <a:cs typeface="Times New Roman" panose="02020603050405020304" pitchFamily="18" charset="0"/>
+              </a:rPr>
+              <a:t>митапов</a:t>
+            </a:r>
+            <a:r>
+              <a:rPr lang="ru-RU" sz="1800" dirty="0">
+                <a:effectLst/>
+                <a:latin typeface="Cambria" panose="02040503050406030204" pitchFamily="18" charset="0"/>
+                <a:ea typeface="MS Mincho" panose="02020609040205080304" pitchFamily="49" charset="-128"/>
+                <a:cs typeface="Times New Roman" panose="02020603050405020304" pitchFamily="18" charset="0"/>
+              </a:rPr>
+              <a:t>, плюс </a:t>
+            </a:r>
+            <a:r>
+              <a:rPr lang="ru-RU" sz="1800" dirty="0" err="1">
+                <a:effectLst/>
+                <a:latin typeface="Cambria" panose="02040503050406030204" pitchFamily="18" charset="0"/>
+                <a:ea typeface="MS Mincho" panose="02020609040205080304" pitchFamily="49" charset="-128"/>
+                <a:cs typeface="Times New Roman" panose="02020603050405020304" pitchFamily="18" charset="0"/>
+              </a:rPr>
+              <a:t>антиповтор</a:t>
+            </a:r>
+            <a:r>
+              <a:rPr lang="ru-RU" sz="1800" dirty="0">
+                <a:effectLst/>
+                <a:latin typeface="Cambria" panose="02040503050406030204" pitchFamily="18" charset="0"/>
+                <a:ea typeface="MS Mincho" panose="02020609040205080304" pitchFamily="49" charset="-128"/>
+                <a:cs typeface="Times New Roman" panose="02020603050405020304" pitchFamily="18" charset="0"/>
+              </a:rPr>
+              <a:t> серий. И каждый сигнал изолирован, так что сбой одного не ломает выдачу.</a:t>
+            </a:r>
+            <a:r>
+              <a:rPr lang="ru-RU" dirty="0">
+                <a:effectLst/>
+              </a:rPr>
+              <a:t> </a:t>
+            </a:r>
+            <a:endParaRPr lang="ru-RU" dirty="0"/>
+          </a:p>
+        </p:txBody>
+      </p:sp>
+      <p:sp>
+        <p:nvSpPr>
+          <p:cNvPr id="4" name="Номер слайда 3"/>
+          <p:cNvSpPr>
+            <a:spLocks noGrp="1"/>
+          </p:cNvSpPr>
+          <p:nvPr>
+            <p:ph type="sldNum" sz="quarter" idx="5"/>
+          </p:nvPr>
+        </p:nvSpPr>
+        <p:spPr/>
+        <p:txBody>
+          <a:bodyPr/>
+          <a:lstStyle/>
+          <a:p>
+            <a:fld id="{48DA6A8A-3B81-7243-A3AE-AF4790F5F296}" type="slidenum">
+              <a:rPr lang="ru-RU" smtClean="0"/>
+              <a:t>14</a:t>
+            </a:fld>
+            <a:endParaRPr lang="ru-RU"/>
+          </a:p>
+        </p:txBody>
+      </p:sp>
+    </p:spTree>
+    <p:extLst>
+      <p:ext uri="{BB962C8B-B14F-4D97-AF65-F5344CB8AC3E}">
+        <p14:creationId xmlns:p14="http://schemas.microsoft.com/office/powerpoint/2010/main" val="1111564423"/>
+      </p:ext>
+    </p:extLst>
+  </p:cSld>
+  <p:clrMapOvr>
+    <a:masterClrMapping/>
+  </p:clrMapOvr>
+</p:notes>
+</file>
+
+<file path=ppt/notesSlides/notesSlide15.xml><?xml version="1.0" encoding="utf-8"?>
+<p:notes xmlns:a="http://schemas.openxmlformats.org/drawingml/2006/main" xmlns:r="http://schemas.openxmlformats.org/officeDocument/2006/relationships" xmlns:p="http://schemas.openxmlformats.org/presentationml/2006/main">
+  <p:cSld>
+    <p:spTree>
+      <p:nvGrpSpPr>
+        <p:cNvPr id="1" name=""/>
+        <p:cNvGrpSpPr/>
+        <p:nvPr/>
+      </p:nvGrpSpPr>
+      <p:grpSpPr>
+        <a:xfrm>
+          <a:off x="0" y="0"/>
+          <a:ext cx="0" cy="0"/>
+          <a:chOff x="0" y="0"/>
+          <a:chExt cx="0" cy="0"/>
+        </a:xfrm>
+      </p:grpSpPr>
+      <p:sp>
+        <p:nvSpPr>
+          <p:cNvPr id="2" name="Образ слайда 1"/>
+          <p:cNvSpPr>
+            <a:spLocks noGrp="1" noRot="1" noChangeAspect="1"/>
+          </p:cNvSpPr>
+          <p:nvPr>
+            <p:ph type="sldImg"/>
+          </p:nvPr>
+        </p:nvSpPr>
+        <p:spPr/>
+      </p:sp>
+      <p:sp>
+        <p:nvSpPr>
+          <p:cNvPr id="3" name="Заметки 2"/>
+          <p:cNvSpPr>
+            <a:spLocks noGrp="1"/>
+          </p:cNvSpPr>
+          <p:nvPr>
+            <p:ph type="body" idx="1"/>
+          </p:nvPr>
+        </p:nvSpPr>
+        <p:spPr/>
+        <p:txBody>
+          <a:bodyPr/>
+          <a:lstStyle/>
+          <a:p>
+            <a:pPr marL="0" marR="0" lvl="0" indent="0" algn="l" defTabSz="914400" rtl="0" eaLnBrk="1" fontAlgn="auto" latinLnBrk="0" hangingPunct="1">
+              <a:lnSpc>
+                <a:spcPct val="100000"/>
+              </a:lnSpc>
+              <a:spcBef>
+                <a:spcPts val="0"/>
+              </a:spcBef>
+              <a:spcAft>
+                <a:spcPts val="0"/>
+              </a:spcAft>
+              <a:buClrTx/>
+              <a:buSzTx/>
+              <a:buFontTx/>
+              <a:buNone/>
+              <a:tabLst/>
+              <a:defRPr/>
+            </a:pPr>
+            <a:r>
+              <a:rPr lang="ru-RU" sz="1800" dirty="0">
+                <a:effectLst/>
+                <a:latin typeface="Cambria" panose="02040503050406030204" pitchFamily="18" charset="0"/>
+                <a:ea typeface="MS Mincho" panose="02020609040205080304" pitchFamily="49" charset="-128"/>
+                <a:cs typeface="Times New Roman" panose="02020603050405020304" pitchFamily="18" charset="0"/>
+              </a:rPr>
+              <a:t>По шагам это так: гибрид считает девять сигналов, складывает в балл, сортирует, </a:t>
+            </a:r>
+            <a:r>
+              <a:rPr lang="ru-RU" sz="1800" dirty="0" err="1">
+                <a:effectLst/>
+                <a:latin typeface="Cambria" panose="02040503050406030204" pitchFamily="18" charset="0"/>
+                <a:ea typeface="MS Mincho" panose="02020609040205080304" pitchFamily="49" charset="-128"/>
+                <a:cs typeface="Times New Roman" panose="02020603050405020304" pitchFamily="18" charset="0"/>
+              </a:rPr>
+              <a:t>переранжирует</a:t>
+            </a:r>
+            <a:r>
+              <a:rPr lang="ru-RU" sz="1800" dirty="0">
+                <a:effectLst/>
+                <a:latin typeface="Cambria" panose="02040503050406030204" pitchFamily="18" charset="0"/>
+                <a:ea typeface="MS Mincho" panose="02020609040205080304" pitchFamily="49" charset="-128"/>
+                <a:cs typeface="Times New Roman" panose="02020603050405020304" pitchFamily="18" charset="0"/>
+              </a:rPr>
+              <a:t> и берёт лучшие. Важная деталь — объяснения формирует один вызов модели сразу на все события, а не на каждое отдельно, это экономит время ответа и лимиты бесплатных моделей. И пишет модель строго по реальным данным события — это </a:t>
+            </a:r>
+            <a:r>
+              <a:rPr lang="en-US" sz="1800" dirty="0">
+                <a:effectLst/>
+                <a:latin typeface="Cambria" panose="02040503050406030204" pitchFamily="18" charset="0"/>
+                <a:ea typeface="MS Mincho" panose="02020609040205080304" pitchFamily="49" charset="-128"/>
+                <a:cs typeface="Times New Roman" panose="02020603050405020304" pitchFamily="18" charset="0"/>
+              </a:rPr>
+              <a:t>RAG</a:t>
+            </a:r>
+            <a:r>
+              <a:rPr lang="ru-RU" sz="1800" dirty="0">
+                <a:effectLst/>
+                <a:latin typeface="Cambria" panose="02040503050406030204" pitchFamily="18" charset="0"/>
+                <a:ea typeface="MS Mincho" panose="02020609040205080304" pitchFamily="49" charset="-128"/>
+                <a:cs typeface="Times New Roman" panose="02020603050405020304" pitchFamily="18" charset="0"/>
+              </a:rPr>
+              <a:t>, поэтому ничего не выдумывает. Замыкает цикл обратная связь: </a:t>
+            </a:r>
+            <a:r>
+              <a:rPr lang="ru-RU" sz="1800" dirty="0" err="1">
+                <a:effectLst/>
+                <a:latin typeface="Cambria" panose="02040503050406030204" pitchFamily="18" charset="0"/>
+                <a:ea typeface="MS Mincho" panose="02020609040205080304" pitchFamily="49" charset="-128"/>
+                <a:cs typeface="Times New Roman" panose="02020603050405020304" pitchFamily="18" charset="0"/>
+              </a:rPr>
+              <a:t>лайк</a:t>
+            </a:r>
+            <a:r>
+              <a:rPr lang="ru-RU" sz="1800" dirty="0">
+                <a:effectLst/>
+                <a:latin typeface="Cambria" panose="02040503050406030204" pitchFamily="18" charset="0"/>
+                <a:ea typeface="MS Mincho" panose="02020609040205080304" pitchFamily="49" charset="-128"/>
+                <a:cs typeface="Times New Roman" panose="02020603050405020304" pitchFamily="18" charset="0"/>
+              </a:rPr>
+              <a:t>, </a:t>
+            </a:r>
+            <a:r>
+              <a:rPr lang="ru-RU" sz="1800" dirty="0" err="1">
+                <a:effectLst/>
+                <a:latin typeface="Cambria" panose="02040503050406030204" pitchFamily="18" charset="0"/>
+                <a:ea typeface="MS Mincho" panose="02020609040205080304" pitchFamily="49" charset="-128"/>
+                <a:cs typeface="Times New Roman" panose="02020603050405020304" pitchFamily="18" charset="0"/>
+              </a:rPr>
+              <a:t>дизлайк</a:t>
+            </a:r>
+            <a:r>
+              <a:rPr lang="ru-RU" sz="1800" dirty="0">
+                <a:effectLst/>
+                <a:latin typeface="Cambria" panose="02040503050406030204" pitchFamily="18" charset="0"/>
+                <a:ea typeface="MS Mincho" panose="02020609040205080304" pitchFamily="49" charset="-128"/>
+                <a:cs typeface="Times New Roman" panose="02020603050405020304" pitchFamily="18" charset="0"/>
+              </a:rPr>
+              <a:t> или сохранение сразу обновляют профиль, статистику и бандит, и лента подстраивается почти мгновенно.</a:t>
+            </a:r>
+          </a:p>
+          <a:p>
+            <a:endParaRPr lang="ru-RU" dirty="0"/>
+          </a:p>
+        </p:txBody>
+      </p:sp>
+      <p:sp>
+        <p:nvSpPr>
+          <p:cNvPr id="4" name="Номер слайда 3"/>
+          <p:cNvSpPr>
+            <a:spLocks noGrp="1"/>
+          </p:cNvSpPr>
+          <p:nvPr>
+            <p:ph type="sldNum" sz="quarter" idx="5"/>
+          </p:nvPr>
+        </p:nvSpPr>
+        <p:spPr/>
+        <p:txBody>
+          <a:bodyPr/>
+          <a:lstStyle/>
+          <a:p>
+            <a:fld id="{48DA6A8A-3B81-7243-A3AE-AF4790F5F296}" type="slidenum">
+              <a:rPr lang="ru-RU" smtClean="0"/>
+              <a:t>15</a:t>
+            </a:fld>
+            <a:endParaRPr lang="ru-RU"/>
+          </a:p>
+        </p:txBody>
+      </p:sp>
+    </p:spTree>
+    <p:extLst>
+      <p:ext uri="{BB962C8B-B14F-4D97-AF65-F5344CB8AC3E}">
+        <p14:creationId xmlns:p14="http://schemas.microsoft.com/office/powerpoint/2010/main" val="964914795"/>
+      </p:ext>
+    </p:extLst>
+  </p:cSld>
+  <p:clrMapOvr>
+    <a:masterClrMapping/>
+  </p:clrMapOvr>
+</p:notes>
+</file>
+
+<file path=ppt/notesSlides/notesSlide16.xml><?xml version="1.0" encoding="utf-8"?>
+<p:notes xmlns:a="http://schemas.openxmlformats.org/drawingml/2006/main" xmlns:r="http://schemas.openxmlformats.org/officeDocument/2006/relationships" xmlns:p="http://schemas.openxmlformats.org/presentationml/2006/main">
+  <p:cSld>
+    <p:spTree>
+      <p:nvGrpSpPr>
+        <p:cNvPr id="1" name=""/>
+        <p:cNvGrpSpPr/>
+        <p:nvPr/>
+      </p:nvGrpSpPr>
+      <p:grpSpPr>
+        <a:xfrm>
+          <a:off x="0" y="0"/>
+          <a:ext cx="0" cy="0"/>
+          <a:chOff x="0" y="0"/>
+          <a:chExt cx="0" cy="0"/>
+        </a:xfrm>
+      </p:grpSpPr>
+      <p:sp>
+        <p:nvSpPr>
+          <p:cNvPr id="2" name="Образ слайда 1"/>
+          <p:cNvSpPr>
+            <a:spLocks noGrp="1" noRot="1" noChangeAspect="1"/>
+          </p:cNvSpPr>
+          <p:nvPr>
+            <p:ph type="sldImg"/>
+          </p:nvPr>
+        </p:nvSpPr>
+        <p:spPr/>
+      </p:sp>
+      <p:sp>
+        <p:nvSpPr>
+          <p:cNvPr id="3" name="Заметки 2"/>
+          <p:cNvSpPr>
+            <a:spLocks noGrp="1"/>
+          </p:cNvSpPr>
+          <p:nvPr>
+            <p:ph type="body" idx="1"/>
+          </p:nvPr>
+        </p:nvSpPr>
+        <p:spPr/>
+        <p:txBody>
+          <a:bodyPr/>
+          <a:lstStyle/>
+          <a:p>
+            <a:r>
+              <a:rPr lang="ru-RU" sz="1800" dirty="0">
+                <a:effectLst/>
+                <a:latin typeface="Cambria" panose="02040503050406030204" pitchFamily="18" charset="0"/>
+                <a:ea typeface="MS Mincho" panose="02020609040205080304" pitchFamily="49" charset="-128"/>
+                <a:cs typeface="Times New Roman" panose="02020603050405020304" pitchFamily="18" charset="0"/>
+              </a:rPr>
+              <a:t>Вернусь к началу — откуда берутся события. Данные приходят из шести источников в таблицу сырых записей и нормализуются языковой моделью с проверкой типов и дат. Здесь решены два затруднения: дубликаты отсекаются по близости векторов, а повторный сбор идемпотентен — событие не </a:t>
+            </a:r>
+            <a:r>
+              <a:rPr lang="ru-RU" sz="1800" dirty="0" err="1">
+                <a:effectLst/>
+                <a:latin typeface="Cambria" panose="02040503050406030204" pitchFamily="18" charset="0"/>
+                <a:ea typeface="MS Mincho" panose="02020609040205080304" pitchFamily="49" charset="-128"/>
+                <a:cs typeface="Times New Roman" panose="02020603050405020304" pitchFamily="18" charset="0"/>
+              </a:rPr>
+              <a:t>задваивается</a:t>
+            </a:r>
+            <a:r>
+              <a:rPr lang="ru-RU" sz="1800" dirty="0">
+                <a:effectLst/>
+                <a:latin typeface="Cambria" panose="02040503050406030204" pitchFamily="18" charset="0"/>
+                <a:ea typeface="MS Mincho" panose="02020609040205080304" pitchFamily="49" charset="-128"/>
+                <a:cs typeface="Times New Roman" panose="02020603050405020304" pitchFamily="18" charset="0"/>
+              </a:rPr>
+              <a:t>.</a:t>
+            </a:r>
+            <a:r>
+              <a:rPr lang="ru-RU" dirty="0">
+                <a:effectLst/>
+              </a:rPr>
+              <a:t> </a:t>
+            </a:r>
+            <a:endParaRPr lang="ru-RU" dirty="0"/>
+          </a:p>
+        </p:txBody>
+      </p:sp>
+      <p:sp>
+        <p:nvSpPr>
+          <p:cNvPr id="4" name="Номер слайда 3"/>
+          <p:cNvSpPr>
+            <a:spLocks noGrp="1"/>
+          </p:cNvSpPr>
+          <p:nvPr>
+            <p:ph type="sldNum" sz="quarter" idx="5"/>
+          </p:nvPr>
+        </p:nvSpPr>
+        <p:spPr/>
+        <p:txBody>
+          <a:bodyPr/>
+          <a:lstStyle/>
+          <a:p>
+            <a:fld id="{48DA6A8A-3B81-7243-A3AE-AF4790F5F296}" type="slidenum">
+              <a:rPr lang="ru-RU" smtClean="0"/>
+              <a:t>16</a:t>
+            </a:fld>
+            <a:endParaRPr lang="ru-RU"/>
+          </a:p>
+        </p:txBody>
+      </p:sp>
+    </p:spTree>
+    <p:extLst>
+      <p:ext uri="{BB962C8B-B14F-4D97-AF65-F5344CB8AC3E}">
+        <p14:creationId xmlns:p14="http://schemas.microsoft.com/office/powerpoint/2010/main" val="3946918934"/>
+      </p:ext>
+    </p:extLst>
+  </p:cSld>
+  <p:clrMapOvr>
+    <a:masterClrMapping/>
+  </p:clrMapOvr>
+</p:notes>
+</file>
+
+<file path=ppt/notesSlides/notesSlide17.xml><?xml version="1.0" encoding="utf-8"?>
+<p:notes xmlns:a="http://schemas.openxmlformats.org/drawingml/2006/main" xmlns:r="http://schemas.openxmlformats.org/officeDocument/2006/relationships" xmlns:p="http://schemas.openxmlformats.org/presentationml/2006/main">
+  <p:cSld>
+    <p:spTree>
+      <p:nvGrpSpPr>
+        <p:cNvPr id="1" name=""/>
+        <p:cNvGrpSpPr/>
+        <p:nvPr/>
+      </p:nvGrpSpPr>
+      <p:grpSpPr>
+        <a:xfrm>
+          <a:off x="0" y="0"/>
+          <a:ext cx="0" cy="0"/>
+          <a:chOff x="0" y="0"/>
+          <a:chExt cx="0" cy="0"/>
+        </a:xfrm>
+      </p:grpSpPr>
+      <p:sp>
+        <p:nvSpPr>
+          <p:cNvPr id="2" name="Образ слайда 1"/>
+          <p:cNvSpPr>
+            <a:spLocks noGrp="1" noRot="1" noChangeAspect="1"/>
+          </p:cNvSpPr>
+          <p:nvPr>
+            <p:ph type="sldImg"/>
+          </p:nvPr>
+        </p:nvSpPr>
+        <p:spPr/>
+      </p:sp>
+      <p:sp>
+        <p:nvSpPr>
+          <p:cNvPr id="3" name="Заметки 2"/>
+          <p:cNvSpPr>
+            <a:spLocks noGrp="1"/>
+          </p:cNvSpPr>
+          <p:nvPr>
+            <p:ph type="body" idx="1"/>
+          </p:nvPr>
+        </p:nvSpPr>
+        <p:spPr/>
+        <p:txBody>
+          <a:bodyPr/>
+          <a:lstStyle/>
+          <a:p>
+            <a:r>
+              <a:rPr lang="ru-RU" sz="1800" dirty="0">
+                <a:effectLst/>
+                <a:latin typeface="Cambria" panose="02040503050406030204" pitchFamily="18" charset="0"/>
+                <a:ea typeface="MS Mincho" panose="02020609040205080304" pitchFamily="49" charset="-128"/>
+                <a:cs typeface="Times New Roman" panose="02020603050405020304" pitchFamily="18" charset="0"/>
+              </a:rPr>
+              <a:t>Раз система так завязана на языковые модели — про надёжность. Принцип — плавная деградация на двух уровнях: модели подключены цепочкой, основная </a:t>
+            </a:r>
+            <a:r>
+              <a:rPr lang="en-US" sz="1800" dirty="0">
+                <a:effectLst/>
+                <a:latin typeface="Cambria" panose="02040503050406030204" pitchFamily="18" charset="0"/>
+                <a:ea typeface="MS Mincho" panose="02020609040205080304" pitchFamily="49" charset="-128"/>
+                <a:cs typeface="Times New Roman" panose="02020603050405020304" pitchFamily="18" charset="0"/>
+              </a:rPr>
+              <a:t>Gemini</a:t>
+            </a:r>
+            <a:r>
+              <a:rPr lang="ru-RU" sz="1800" dirty="0">
+                <a:effectLst/>
+                <a:latin typeface="Cambria" panose="02040503050406030204" pitchFamily="18" charset="0"/>
+                <a:ea typeface="MS Mincho" panose="02020609040205080304" pitchFamily="49" charset="-128"/>
+                <a:cs typeface="Times New Roman" panose="02020603050405020304" pitchFamily="18" charset="0"/>
+              </a:rPr>
+              <a:t>, при сбое запрос уходит на резервные </a:t>
+            </a:r>
+            <a:r>
+              <a:rPr lang="en-US" sz="1800" dirty="0" err="1">
+                <a:effectLst/>
+                <a:latin typeface="Cambria" panose="02040503050406030204" pitchFamily="18" charset="0"/>
+                <a:ea typeface="MS Mincho" panose="02020609040205080304" pitchFamily="49" charset="-128"/>
+                <a:cs typeface="Times New Roman" panose="02020603050405020304" pitchFamily="18" charset="0"/>
+              </a:rPr>
+              <a:t>Groq</a:t>
+            </a:r>
+            <a:r>
+              <a:rPr lang="ru-RU" sz="1800" dirty="0">
+                <a:effectLst/>
+                <a:latin typeface="Cambria" panose="02040503050406030204" pitchFamily="18" charset="0"/>
+                <a:ea typeface="MS Mincho" panose="02020609040205080304" pitchFamily="49" charset="-128"/>
+                <a:cs typeface="Times New Roman" panose="02020603050405020304" pitchFamily="18" charset="0"/>
+              </a:rPr>
+              <a:t>; а если отказывает целый компонент </a:t>
+            </a:r>
+            <a:r>
+              <a:rPr lang="ru-RU" sz="1800" dirty="0" err="1">
+                <a:effectLst/>
+                <a:latin typeface="Cambria" panose="02040503050406030204" pitchFamily="18" charset="0"/>
+                <a:ea typeface="MS Mincho" panose="02020609040205080304" pitchFamily="49" charset="-128"/>
+                <a:cs typeface="Times New Roman" panose="02020603050405020304" pitchFamily="18" charset="0"/>
+              </a:rPr>
+              <a:t>рекомендателя</a:t>
+            </a:r>
+            <a:r>
+              <a:rPr lang="ru-RU" sz="1800" dirty="0">
+                <a:effectLst/>
+                <a:latin typeface="Cambria" panose="02040503050406030204" pitchFamily="18" charset="0"/>
+                <a:ea typeface="MS Mincho" panose="02020609040205080304" pitchFamily="49" charset="-128"/>
+                <a:cs typeface="Times New Roman" panose="02020603050405020304" pitchFamily="18" charset="0"/>
+              </a:rPr>
+              <a:t>, система откатывается к выдаче по правилам. При любом сбое пользователь всё равно получает ленту.</a:t>
+            </a:r>
+            <a:r>
+              <a:rPr lang="ru-RU" dirty="0">
+                <a:effectLst/>
+              </a:rPr>
+              <a:t> </a:t>
+            </a:r>
+            <a:endParaRPr lang="ru-RU" dirty="0"/>
+          </a:p>
+        </p:txBody>
+      </p:sp>
+      <p:sp>
+        <p:nvSpPr>
+          <p:cNvPr id="4" name="Номер слайда 3"/>
+          <p:cNvSpPr>
+            <a:spLocks noGrp="1"/>
+          </p:cNvSpPr>
+          <p:nvPr>
+            <p:ph type="sldNum" sz="quarter" idx="5"/>
+          </p:nvPr>
+        </p:nvSpPr>
+        <p:spPr/>
+        <p:txBody>
+          <a:bodyPr/>
+          <a:lstStyle/>
+          <a:p>
+            <a:fld id="{48DA6A8A-3B81-7243-A3AE-AF4790F5F296}" type="slidenum">
+              <a:rPr lang="ru-RU" smtClean="0"/>
+              <a:t>17</a:t>
+            </a:fld>
+            <a:endParaRPr lang="ru-RU"/>
+          </a:p>
+        </p:txBody>
+      </p:sp>
+    </p:spTree>
+    <p:extLst>
+      <p:ext uri="{BB962C8B-B14F-4D97-AF65-F5344CB8AC3E}">
+        <p14:creationId xmlns:p14="http://schemas.microsoft.com/office/powerpoint/2010/main" val="3850181805"/>
+      </p:ext>
+    </p:extLst>
+  </p:cSld>
+  <p:clrMapOvr>
+    <a:masterClrMapping/>
+  </p:clrMapOvr>
+</p:notes>
+</file>
+
+<file path=ppt/notesSlides/notesSlide18.xml><?xml version="1.0" encoding="utf-8"?>
+<p:notes xmlns:a="http://schemas.openxmlformats.org/drawingml/2006/main" xmlns:r="http://schemas.openxmlformats.org/officeDocument/2006/relationships" xmlns:p="http://schemas.openxmlformats.org/presentationml/2006/main">
+  <p:cSld>
+    <p:spTree>
+      <p:nvGrpSpPr>
+        <p:cNvPr id="1" name=""/>
+        <p:cNvGrpSpPr/>
+        <p:nvPr/>
+      </p:nvGrpSpPr>
+      <p:grpSpPr>
+        <a:xfrm>
+          <a:off x="0" y="0"/>
+          <a:ext cx="0" cy="0"/>
+          <a:chOff x="0" y="0"/>
+          <a:chExt cx="0" cy="0"/>
+        </a:xfrm>
+      </p:grpSpPr>
+      <p:sp>
+        <p:nvSpPr>
+          <p:cNvPr id="2" name="Образ слайда 1"/>
+          <p:cNvSpPr>
+            <a:spLocks noGrp="1" noRot="1" noChangeAspect="1"/>
+          </p:cNvSpPr>
+          <p:nvPr>
+            <p:ph type="sldImg"/>
+          </p:nvPr>
+        </p:nvSpPr>
+        <p:spPr/>
+      </p:sp>
+      <p:sp>
+        <p:nvSpPr>
+          <p:cNvPr id="3" name="Заметки 2"/>
+          <p:cNvSpPr>
+            <a:spLocks noGrp="1"/>
+          </p:cNvSpPr>
+          <p:nvPr>
+            <p:ph type="body" idx="1"/>
+          </p:nvPr>
+        </p:nvSpPr>
+        <p:spPr/>
+        <p:txBody>
+          <a:bodyPr/>
+          <a:lstStyle/>
+          <a:p>
+            <a:r>
+              <a:rPr lang="ru-RU" sz="1800" dirty="0">
+                <a:effectLst/>
+                <a:latin typeface="Cambria" panose="02040503050406030204" pitchFamily="18" charset="0"/>
+                <a:ea typeface="MS Mincho" panose="02020609040205080304" pitchFamily="49" charset="-128"/>
+                <a:cs typeface="Times New Roman" panose="02020603050405020304" pitchFamily="18" charset="0"/>
+              </a:rPr>
+              <a:t>Осталось показать, что это работает. Качество я проверил двумя независимыми способами. Первый — </a:t>
+            </a:r>
+            <a:r>
+              <a:rPr lang="ru-RU" sz="1800" dirty="0" err="1">
+                <a:effectLst/>
+                <a:latin typeface="Cambria" panose="02040503050406030204" pitchFamily="18" charset="0"/>
+                <a:ea typeface="MS Mincho" panose="02020609040205080304" pitchFamily="49" charset="-128"/>
+                <a:cs typeface="Times New Roman" panose="02020603050405020304" pitchFamily="18" charset="0"/>
+              </a:rPr>
+              <a:t>оффлайн</a:t>
+            </a:r>
+            <a:r>
+              <a:rPr lang="ru-RU" sz="1800" dirty="0">
+                <a:effectLst/>
+                <a:latin typeface="Cambria" panose="02040503050406030204" pitchFamily="18" charset="0"/>
+                <a:ea typeface="MS Mincho" panose="02020609040205080304" pitchFamily="49" charset="-128"/>
+                <a:cs typeface="Times New Roman" panose="02020603050405020304" pitchFamily="18" charset="0"/>
+              </a:rPr>
+              <a:t> </a:t>
+            </a:r>
+            <a:r>
+              <a:rPr lang="ru-RU" sz="1800" dirty="0" err="1">
+                <a:effectLst/>
+                <a:latin typeface="Cambria" panose="02040503050406030204" pitchFamily="18" charset="0"/>
+                <a:ea typeface="MS Mincho" panose="02020609040205080304" pitchFamily="49" charset="-128"/>
+                <a:cs typeface="Times New Roman" panose="02020603050405020304" pitchFamily="18" charset="0"/>
+              </a:rPr>
+              <a:t>leave-one-out</a:t>
+            </a:r>
+            <a:r>
+              <a:rPr lang="ru-RU" sz="1800" dirty="0">
+                <a:effectLst/>
+                <a:latin typeface="Cambria" panose="02040503050406030204" pitchFamily="18" charset="0"/>
+                <a:ea typeface="MS Mincho" panose="02020609040205080304" pitchFamily="49" charset="-128"/>
+                <a:cs typeface="Times New Roman" panose="02020603050405020304" pitchFamily="18" charset="0"/>
+              </a:rPr>
+              <a:t>: у пользователя скрываю одно понравившееся событие и смотрю, вернёт ли система его в топ. Гибрид заметно обходит базовое правило: нужное событие встаёт выше в выдаче. На топ-10 разрыв сглаживается — но гибрид находит релевантное раньше, а для ленты важно именно это. Второй — оценка моделью-судьёй: по релевантности гибрид лучше, по разнообразию немного уступает. Это осознанный компромисс, который регулируется </a:t>
+            </a:r>
+            <a:r>
+              <a:rPr lang="ru-RU" sz="1800" dirty="0" err="1">
+                <a:effectLst/>
+                <a:latin typeface="Cambria" panose="02040503050406030204" pitchFamily="18" charset="0"/>
+                <a:ea typeface="MS Mincho" panose="02020609040205080304" pitchFamily="49" charset="-128"/>
+                <a:cs typeface="Times New Roman" panose="02020603050405020304" pitchFamily="18" charset="0"/>
+              </a:rPr>
+              <a:t>переранжированием</a:t>
+            </a:r>
+            <a:r>
+              <a:rPr lang="ru-RU" sz="1800" dirty="0">
+                <a:effectLst/>
+                <a:latin typeface="Cambria" panose="02040503050406030204" pitchFamily="18" charset="0"/>
+                <a:ea typeface="MS Mincho" panose="02020609040205080304" pitchFamily="49" charset="-128"/>
+                <a:cs typeface="Times New Roman" panose="02020603050405020304" pitchFamily="18" charset="0"/>
+              </a:rPr>
+              <a:t>. Все измерения воспроизводимы, код покрыт тестами.</a:t>
+            </a:r>
+            <a:r>
+              <a:rPr lang="ru-RU" dirty="0">
+                <a:effectLst/>
+              </a:rPr>
+              <a:t> </a:t>
+            </a:r>
+            <a:endParaRPr lang="ru-RU" dirty="0"/>
+          </a:p>
+        </p:txBody>
+      </p:sp>
+      <p:sp>
+        <p:nvSpPr>
+          <p:cNvPr id="4" name="Номер слайда 3"/>
+          <p:cNvSpPr>
+            <a:spLocks noGrp="1"/>
+          </p:cNvSpPr>
+          <p:nvPr>
+            <p:ph type="sldNum" sz="quarter" idx="5"/>
+          </p:nvPr>
+        </p:nvSpPr>
+        <p:spPr/>
+        <p:txBody>
+          <a:bodyPr/>
+          <a:lstStyle/>
+          <a:p>
+            <a:fld id="{48DA6A8A-3B81-7243-A3AE-AF4790F5F296}" type="slidenum">
+              <a:rPr lang="ru-RU" smtClean="0"/>
+              <a:t>18</a:t>
+            </a:fld>
+            <a:endParaRPr lang="ru-RU"/>
+          </a:p>
+        </p:txBody>
+      </p:sp>
+    </p:spTree>
+    <p:extLst>
+      <p:ext uri="{BB962C8B-B14F-4D97-AF65-F5344CB8AC3E}">
+        <p14:creationId xmlns:p14="http://schemas.microsoft.com/office/powerpoint/2010/main" val="3328837716"/>
+      </p:ext>
+    </p:extLst>
+  </p:cSld>
+  <p:clrMapOvr>
+    <a:masterClrMapping/>
+  </p:clrMapOvr>
+</p:notes>
+</file>
+
+<file path=ppt/notesSlides/notesSlide19.xml><?xml version="1.0" encoding="utf-8"?>
+<p:notes xmlns:a="http://schemas.openxmlformats.org/drawingml/2006/main" xmlns:r="http://schemas.openxmlformats.org/officeDocument/2006/relationships" xmlns:p="http://schemas.openxmlformats.org/presentationml/2006/main">
+  <p:cSld>
+    <p:spTree>
+      <p:nvGrpSpPr>
+        <p:cNvPr id="1" name=""/>
+        <p:cNvGrpSpPr/>
+        <p:nvPr/>
+      </p:nvGrpSpPr>
+      <p:grpSpPr>
+        <a:xfrm>
+          <a:off x="0" y="0"/>
+          <a:ext cx="0" cy="0"/>
+          <a:chOff x="0" y="0"/>
+          <a:chExt cx="0" cy="0"/>
+        </a:xfrm>
+      </p:grpSpPr>
+      <p:sp>
+        <p:nvSpPr>
+          <p:cNvPr id="2" name="Образ слайда 1"/>
+          <p:cNvSpPr>
+            <a:spLocks noGrp="1" noRot="1" noChangeAspect="1"/>
+          </p:cNvSpPr>
+          <p:nvPr>
+            <p:ph type="sldImg"/>
+          </p:nvPr>
+        </p:nvSpPr>
+        <p:spPr/>
+      </p:sp>
+      <p:sp>
+        <p:nvSpPr>
+          <p:cNvPr id="3" name="Заметки 2"/>
+          <p:cNvSpPr>
+            <a:spLocks noGrp="1"/>
+          </p:cNvSpPr>
+          <p:nvPr>
+            <p:ph type="body" idx="1"/>
+          </p:nvPr>
+        </p:nvSpPr>
+        <p:spPr/>
+        <p:txBody>
+          <a:bodyPr/>
+          <a:lstStyle/>
+          <a:p>
+            <a:r>
+              <a:rPr lang="ru-RU" sz="1800" dirty="0">
+                <a:effectLst/>
+                <a:latin typeface="Cambria" panose="02040503050406030204" pitchFamily="18" charset="0"/>
+                <a:ea typeface="MS Mincho" panose="02020609040205080304" pitchFamily="49" charset="-128"/>
+                <a:cs typeface="Times New Roman" panose="02020603050405020304" pitchFamily="18" charset="0"/>
+              </a:rPr>
+              <a:t>Подведу итог. Все задачи выполнены: собрана рабочая система из сервера, бота и планировщика вокруг общей базы; реализован гибридный </a:t>
+            </a:r>
+            <a:r>
+              <a:rPr lang="ru-RU" sz="1800" dirty="0" err="1">
+                <a:effectLst/>
+                <a:latin typeface="Cambria" panose="02040503050406030204" pitchFamily="18" charset="0"/>
+                <a:ea typeface="MS Mincho" panose="02020609040205080304" pitchFamily="49" charset="-128"/>
+                <a:cs typeface="Times New Roman" panose="02020603050405020304" pitchFamily="18" charset="0"/>
+              </a:rPr>
+              <a:t>рекомендатель</a:t>
+            </a:r>
+            <a:r>
+              <a:rPr lang="ru-RU" sz="1800" dirty="0">
+                <a:effectLst/>
+                <a:latin typeface="Cambria" panose="02040503050406030204" pitchFamily="18" charset="0"/>
+                <a:ea typeface="MS Mincho" panose="02020609040205080304" pitchFamily="49" charset="-128"/>
+                <a:cs typeface="Times New Roman" panose="02020603050405020304" pitchFamily="18" charset="0"/>
+              </a:rPr>
+              <a:t> из девяти компонент с объяснением выбора; настроен сбор из шести источников с нормализацией и </a:t>
+            </a:r>
+            <a:r>
+              <a:rPr lang="ru-RU" sz="1800" dirty="0" err="1">
+                <a:effectLst/>
+                <a:latin typeface="Cambria" panose="02040503050406030204" pitchFamily="18" charset="0"/>
+                <a:ea typeface="MS Mincho" panose="02020609040205080304" pitchFamily="49" charset="-128"/>
+                <a:cs typeface="Times New Roman" panose="02020603050405020304" pitchFamily="18" charset="0"/>
+              </a:rPr>
+              <a:t>дедупликацией</a:t>
+            </a:r>
+            <a:r>
+              <a:rPr lang="ru-RU" sz="1800" dirty="0">
+                <a:effectLst/>
+                <a:latin typeface="Cambria" panose="02040503050406030204" pitchFamily="18" charset="0"/>
+                <a:ea typeface="MS Mincho" panose="02020609040205080304" pitchFamily="49" charset="-128"/>
+                <a:cs typeface="Times New Roman" panose="02020603050405020304" pitchFamily="18" charset="0"/>
+              </a:rPr>
+              <a:t>; качество подтверждено метриками и тестами. Направления развития — расширение источников, </a:t>
+            </a:r>
+            <a:r>
+              <a:rPr lang="ru-RU" sz="1800" dirty="0" err="1">
+                <a:effectLst/>
+                <a:latin typeface="Cambria" panose="02040503050406030204" pitchFamily="18" charset="0"/>
+                <a:ea typeface="MS Mincho" panose="02020609040205080304" pitchFamily="49" charset="-128"/>
+                <a:cs typeface="Times New Roman" panose="02020603050405020304" pitchFamily="18" charset="0"/>
+              </a:rPr>
+              <a:t>коллаборативный</a:t>
+            </a:r>
+            <a:r>
+              <a:rPr lang="ru-RU" sz="1800" dirty="0">
+                <a:effectLst/>
+                <a:latin typeface="Cambria" panose="02040503050406030204" pitchFamily="18" charset="0"/>
+                <a:ea typeface="MS Mincho" panose="02020609040205080304" pitchFamily="49" charset="-128"/>
+                <a:cs typeface="Times New Roman" panose="02020603050405020304" pitchFamily="18" charset="0"/>
+              </a:rPr>
+              <a:t> сигнал на большем наборе данных и развитие работы в магистерскую.</a:t>
+            </a:r>
+            <a:r>
+              <a:rPr lang="ru-RU" dirty="0">
+                <a:effectLst/>
+              </a:rPr>
+              <a:t> </a:t>
+            </a:r>
+            <a:endParaRPr lang="ru-RU" dirty="0"/>
+          </a:p>
+        </p:txBody>
+      </p:sp>
+      <p:sp>
+        <p:nvSpPr>
+          <p:cNvPr id="4" name="Номер слайда 3"/>
+          <p:cNvSpPr>
+            <a:spLocks noGrp="1"/>
+          </p:cNvSpPr>
+          <p:nvPr>
+            <p:ph type="sldNum" sz="quarter" idx="5"/>
+          </p:nvPr>
+        </p:nvSpPr>
+        <p:spPr/>
+        <p:txBody>
+          <a:bodyPr/>
+          <a:lstStyle/>
+          <a:p>
+            <a:fld id="{48DA6A8A-3B81-7243-A3AE-AF4790F5F296}" type="slidenum">
+              <a:rPr lang="ru-RU" smtClean="0"/>
+              <a:t>19</a:t>
+            </a:fld>
+            <a:endParaRPr lang="ru-RU"/>
+          </a:p>
+        </p:txBody>
+      </p:sp>
+    </p:spTree>
+    <p:extLst>
+      <p:ext uri="{BB962C8B-B14F-4D97-AF65-F5344CB8AC3E}">
+        <p14:creationId xmlns:p14="http://schemas.microsoft.com/office/powerpoint/2010/main" val="654420961"/>
+      </p:ext>
+    </p:extLst>
+  </p:cSld>
+  <p:clrMapOvr>
+    <a:masterClrMapping/>
+  </p:clrMapOvr>
+</p:notes>
+</file>
+
+<file path=ppt/notesSlides/notesSlide2.xml><?xml version="1.0" encoding="utf-8"?>
+<p:notes xmlns:a="http://schemas.openxmlformats.org/drawingml/2006/main" xmlns:r="http://schemas.openxmlformats.org/officeDocument/2006/relationships" xmlns:p="http://schemas.openxmlformats.org/presentationml/2006/main">
+  <p:cSld>
+    <p:spTree>
+      <p:nvGrpSpPr>
+        <p:cNvPr id="1" name=""/>
+        <p:cNvGrpSpPr/>
+        <p:nvPr/>
+      </p:nvGrpSpPr>
+      <p:grpSpPr>
+        <a:xfrm>
+          <a:off x="0" y="0"/>
+          <a:ext cx="0" cy="0"/>
+          <a:chOff x="0" y="0"/>
+          <a:chExt cx="0" cy="0"/>
+        </a:xfrm>
+      </p:grpSpPr>
+      <p:sp>
+        <p:nvSpPr>
+          <p:cNvPr id="2" name="Образ слайда 1"/>
+          <p:cNvSpPr>
+            <a:spLocks noGrp="1" noRot="1" noChangeAspect="1"/>
+          </p:cNvSpPr>
+          <p:nvPr>
+            <p:ph type="sldImg"/>
+          </p:nvPr>
+        </p:nvSpPr>
+        <p:spPr/>
+      </p:sp>
+      <p:sp>
+        <p:nvSpPr>
+          <p:cNvPr id="3" name="Заметки 2"/>
+          <p:cNvSpPr>
+            <a:spLocks noGrp="1"/>
+          </p:cNvSpPr>
+          <p:nvPr>
+            <p:ph type="body" idx="1"/>
+          </p:nvPr>
+        </p:nvSpPr>
+        <p:spPr/>
+        <p:txBody>
+          <a:bodyPr/>
+          <a:lstStyle/>
+          <a:p>
+            <a:r>
+              <a:rPr lang="ru-RU" sz="1800" dirty="0">
+                <a:effectLst/>
+                <a:latin typeface="Cambria" panose="02040503050406030204" pitchFamily="18" charset="0"/>
+                <a:ea typeface="MS Mincho" panose="02020609040205080304" pitchFamily="49" charset="-128"/>
+                <a:cs typeface="Times New Roman" panose="02020603050405020304" pitchFamily="18" charset="0"/>
+              </a:rPr>
+              <a:t>Начну с того, зачем это нужно. </a:t>
+            </a:r>
+            <a:r>
+              <a:rPr lang="en-US" sz="1800" dirty="0">
+                <a:effectLst/>
+                <a:latin typeface="Cambria" panose="02040503050406030204" pitchFamily="18" charset="0"/>
+                <a:ea typeface="MS Mincho" panose="02020609040205080304" pitchFamily="49" charset="-128"/>
+                <a:cs typeface="Times New Roman" panose="02020603050405020304" pitchFamily="18" charset="0"/>
+              </a:rPr>
+              <a:t>IT</a:t>
+            </a:r>
+            <a:r>
+              <a:rPr lang="ru-RU" sz="1800" dirty="0">
+                <a:effectLst/>
+                <a:latin typeface="Cambria" panose="02040503050406030204" pitchFamily="18" charset="0"/>
+                <a:ea typeface="MS Mincho" panose="02020609040205080304" pitchFamily="49" charset="-128"/>
+                <a:cs typeface="Times New Roman" panose="02020603050405020304" pitchFamily="18" charset="0"/>
+              </a:rPr>
+              <a:t>-мероприятий выходят десятки в неделю, но анонсы разбросаны по сайтам, </a:t>
+            </a:r>
+            <a:r>
+              <a:rPr lang="ru-RU" sz="1800" dirty="0" err="1">
+                <a:effectLst/>
+                <a:latin typeface="Cambria" panose="02040503050406030204" pitchFamily="18" charset="0"/>
+                <a:ea typeface="MS Mincho" panose="02020609040205080304" pitchFamily="49" charset="-128"/>
+                <a:cs typeface="Times New Roman" panose="02020603050405020304" pitchFamily="18" charset="0"/>
+              </a:rPr>
+              <a:t>агрегаторам</a:t>
+            </a:r>
+            <a:r>
+              <a:rPr lang="ru-RU" sz="1800" dirty="0">
+                <a:effectLst/>
+                <a:latin typeface="Cambria" panose="02040503050406030204" pitchFamily="18" charset="0"/>
+                <a:ea typeface="MS Mincho" panose="02020609040205080304" pitchFamily="49" charset="-128"/>
+                <a:cs typeface="Times New Roman" panose="02020603050405020304" pitchFamily="18" charset="0"/>
+              </a:rPr>
+              <a:t> и каналам — единой точки входа нет, и подходящее приходится отбирать вручную. Значит, события надо собрать автоматически и выстроить из них персональную ленту.</a:t>
+            </a:r>
+            <a:r>
+              <a:rPr lang="ru-RU" dirty="0">
+                <a:effectLst/>
+              </a:rPr>
+              <a:t> </a:t>
+            </a:r>
+            <a:endParaRPr lang="ru-RU" dirty="0"/>
+          </a:p>
+        </p:txBody>
+      </p:sp>
+      <p:sp>
+        <p:nvSpPr>
+          <p:cNvPr id="4" name="Номер слайда 3"/>
+          <p:cNvSpPr>
+            <a:spLocks noGrp="1"/>
+          </p:cNvSpPr>
+          <p:nvPr>
+            <p:ph type="sldNum" sz="quarter" idx="5"/>
+          </p:nvPr>
+        </p:nvSpPr>
+        <p:spPr/>
+        <p:txBody>
+          <a:bodyPr/>
+          <a:lstStyle/>
+          <a:p>
+            <a:fld id="{48DA6A8A-3B81-7243-A3AE-AF4790F5F296}" type="slidenum">
+              <a:rPr lang="ru-RU" smtClean="0"/>
+              <a:t>2</a:t>
+            </a:fld>
+            <a:endParaRPr lang="ru-RU"/>
+          </a:p>
+        </p:txBody>
+      </p:sp>
+    </p:spTree>
+    <p:extLst>
+      <p:ext uri="{BB962C8B-B14F-4D97-AF65-F5344CB8AC3E}">
+        <p14:creationId xmlns:p14="http://schemas.microsoft.com/office/powerpoint/2010/main" val="2164849063"/>
+      </p:ext>
+    </p:extLst>
+  </p:cSld>
+  <p:clrMapOvr>
+    <a:masterClrMapping/>
+  </p:clrMapOvr>
+</p:notes>
+</file>
+
+<file path=ppt/notesSlides/notesSlide20.xml><?xml version="1.0" encoding="utf-8"?>
+<p:notes xmlns:a="http://schemas.openxmlformats.org/drawingml/2006/main" xmlns:r="http://schemas.openxmlformats.org/officeDocument/2006/relationships" xmlns:p="http://schemas.openxmlformats.org/presentationml/2006/main">
+  <p:cSld>
+    <p:spTree>
+      <p:nvGrpSpPr>
+        <p:cNvPr id="1" name=""/>
+        <p:cNvGrpSpPr/>
+        <p:nvPr/>
+      </p:nvGrpSpPr>
+      <p:grpSpPr>
+        <a:xfrm>
+          <a:off x="0" y="0"/>
+          <a:ext cx="0" cy="0"/>
+          <a:chOff x="0" y="0"/>
+          <a:chExt cx="0" cy="0"/>
+        </a:xfrm>
+      </p:grpSpPr>
+      <p:sp>
+        <p:nvSpPr>
+          <p:cNvPr id="2" name="Образ слайда 1"/>
+          <p:cNvSpPr>
+            <a:spLocks noGrp="1" noRot="1" noChangeAspect="1"/>
+          </p:cNvSpPr>
+          <p:nvPr>
+            <p:ph type="sldImg"/>
+          </p:nvPr>
+        </p:nvSpPr>
+        <p:spPr/>
+      </p:sp>
+      <p:sp>
+        <p:nvSpPr>
+          <p:cNvPr id="3" name="Заметки 2"/>
+          <p:cNvSpPr>
+            <a:spLocks noGrp="1"/>
+          </p:cNvSpPr>
+          <p:nvPr>
+            <p:ph type="body" idx="1"/>
+          </p:nvPr>
+        </p:nvSpPr>
+        <p:spPr/>
+        <p:txBody>
+          <a:bodyPr/>
+          <a:lstStyle/>
+          <a:p>
+            <a:r>
+              <a:rPr lang="ru-RU" sz="1800" dirty="0">
+                <a:effectLst/>
+                <a:latin typeface="Cambria" panose="02040503050406030204" pitchFamily="18" charset="0"/>
+                <a:ea typeface="MS Mincho" panose="02020609040205080304" pitchFamily="49" charset="-128"/>
+                <a:cs typeface="Times New Roman" panose="02020603050405020304" pitchFamily="18" charset="0"/>
+              </a:rPr>
+              <a:t>На этом всё. </a:t>
+            </a:r>
+            <a:r>
+              <a:rPr lang="ru-RU" sz="1800">
+                <a:effectLst/>
+                <a:latin typeface="Cambria" panose="02040503050406030204" pitchFamily="18" charset="0"/>
+                <a:ea typeface="MS Mincho" panose="02020609040205080304" pitchFamily="49" charset="-128"/>
+                <a:cs typeface="Times New Roman" panose="02020603050405020304" pitchFamily="18" charset="0"/>
+              </a:rPr>
+              <a:t>Благодарю за внимание и готов ответить на ваши вопросы.</a:t>
+            </a:r>
+            <a:r>
+              <a:rPr lang="ru-RU">
+                <a:effectLst/>
+              </a:rPr>
+              <a:t> </a:t>
+            </a:r>
+            <a:endParaRPr lang="ru-RU"/>
+          </a:p>
+        </p:txBody>
+      </p:sp>
+      <p:sp>
+        <p:nvSpPr>
+          <p:cNvPr id="4" name="Номер слайда 3"/>
+          <p:cNvSpPr>
+            <a:spLocks noGrp="1"/>
+          </p:cNvSpPr>
+          <p:nvPr>
+            <p:ph type="sldNum" sz="quarter" idx="5"/>
+          </p:nvPr>
+        </p:nvSpPr>
+        <p:spPr/>
+        <p:txBody>
+          <a:bodyPr/>
+          <a:lstStyle/>
+          <a:p>
+            <a:fld id="{48DA6A8A-3B81-7243-A3AE-AF4790F5F296}" type="slidenum">
+              <a:rPr lang="ru-RU" smtClean="0"/>
+              <a:t>20</a:t>
+            </a:fld>
+            <a:endParaRPr lang="ru-RU"/>
+          </a:p>
+        </p:txBody>
+      </p:sp>
+    </p:spTree>
+    <p:extLst>
+      <p:ext uri="{BB962C8B-B14F-4D97-AF65-F5344CB8AC3E}">
+        <p14:creationId xmlns:p14="http://schemas.microsoft.com/office/powerpoint/2010/main" val="3845447042"/>
+      </p:ext>
+    </p:extLst>
+  </p:cSld>
+  <p:clrMapOvr>
+    <a:masterClrMapping/>
+  </p:clrMapOvr>
+</p:notes>
+</file>
+
+<file path=ppt/notesSlides/notesSlide3.xml><?xml version="1.0" encoding="utf-8"?>
+<p:notes xmlns:a="http://schemas.openxmlformats.org/drawingml/2006/main" xmlns:r="http://schemas.openxmlformats.org/officeDocument/2006/relationships" xmlns:p="http://schemas.openxmlformats.org/presentationml/2006/main">
+  <p:cSld>
+    <p:spTree>
+      <p:nvGrpSpPr>
+        <p:cNvPr id="1" name=""/>
+        <p:cNvGrpSpPr/>
+        <p:nvPr/>
+      </p:nvGrpSpPr>
+      <p:grpSpPr>
+        <a:xfrm>
+          <a:off x="0" y="0"/>
+          <a:ext cx="0" cy="0"/>
+          <a:chOff x="0" y="0"/>
+          <a:chExt cx="0" cy="0"/>
+        </a:xfrm>
+      </p:grpSpPr>
+      <p:sp>
+        <p:nvSpPr>
+          <p:cNvPr id="2" name="Образ слайда 1"/>
+          <p:cNvSpPr>
+            <a:spLocks noGrp="1" noRot="1" noChangeAspect="1"/>
+          </p:cNvSpPr>
+          <p:nvPr>
+            <p:ph type="sldImg"/>
+          </p:nvPr>
+        </p:nvSpPr>
+        <p:spPr/>
+      </p:sp>
+      <p:sp>
+        <p:nvSpPr>
+          <p:cNvPr id="3" name="Заметки 2"/>
+          <p:cNvSpPr>
+            <a:spLocks noGrp="1"/>
+          </p:cNvSpPr>
+          <p:nvPr>
+            <p:ph type="body" idx="1"/>
+          </p:nvPr>
+        </p:nvSpPr>
+        <p:spPr/>
+        <p:txBody>
+          <a:bodyPr/>
+          <a:lstStyle/>
+          <a:p>
+            <a:r>
+              <a:rPr lang="ru-RU" sz="1800" dirty="0">
+                <a:effectLst/>
+                <a:latin typeface="Cambria" panose="02040503050406030204" pitchFamily="18" charset="0"/>
+                <a:ea typeface="MS Mincho" panose="02020609040205080304" pitchFamily="49" charset="-128"/>
+                <a:cs typeface="Times New Roman" panose="02020603050405020304" pitchFamily="18" charset="0"/>
+              </a:rPr>
+              <a:t>Если строго: объект работы — процессы агрегации событий и построения рекомендаций, предмет — программная система, объединяющая сбор, </a:t>
+            </a:r>
+            <a:r>
+              <a:rPr lang="ru-RU" sz="1800" dirty="0" err="1">
+                <a:effectLst/>
+                <a:latin typeface="Cambria" panose="02040503050406030204" pitchFamily="18" charset="0"/>
+                <a:ea typeface="MS Mincho" panose="02020609040205080304" pitchFamily="49" charset="-128"/>
+                <a:cs typeface="Times New Roman" panose="02020603050405020304" pitchFamily="18" charset="0"/>
+              </a:rPr>
+              <a:t>рекомендатель</a:t>
+            </a:r>
+            <a:r>
+              <a:rPr lang="ru-RU" sz="1800" dirty="0">
+                <a:effectLst/>
+                <a:latin typeface="Cambria" panose="02040503050406030204" pitchFamily="18" charset="0"/>
+                <a:ea typeface="MS Mincho" panose="02020609040205080304" pitchFamily="49" charset="-128"/>
+                <a:cs typeface="Times New Roman" panose="02020603050405020304" pitchFamily="18" charset="0"/>
+              </a:rPr>
+              <a:t> и интерфейс вокруг общей базы данных.</a:t>
+            </a:r>
+            <a:r>
+              <a:rPr lang="ru-RU" dirty="0">
+                <a:effectLst/>
+              </a:rPr>
+              <a:t> </a:t>
+            </a:r>
+            <a:endParaRPr lang="ru-RU" dirty="0"/>
+          </a:p>
+        </p:txBody>
+      </p:sp>
+      <p:sp>
+        <p:nvSpPr>
+          <p:cNvPr id="4" name="Номер слайда 3"/>
+          <p:cNvSpPr>
+            <a:spLocks noGrp="1"/>
+          </p:cNvSpPr>
+          <p:nvPr>
+            <p:ph type="sldNum" sz="quarter" idx="5"/>
+          </p:nvPr>
+        </p:nvSpPr>
+        <p:spPr/>
+        <p:txBody>
+          <a:bodyPr/>
+          <a:lstStyle/>
+          <a:p>
+            <a:fld id="{48DA6A8A-3B81-7243-A3AE-AF4790F5F296}" type="slidenum">
+              <a:rPr lang="ru-RU" smtClean="0"/>
+              <a:t>3</a:t>
+            </a:fld>
+            <a:endParaRPr lang="ru-RU"/>
+          </a:p>
+        </p:txBody>
+      </p:sp>
+    </p:spTree>
+    <p:extLst>
+      <p:ext uri="{BB962C8B-B14F-4D97-AF65-F5344CB8AC3E}">
+        <p14:creationId xmlns:p14="http://schemas.microsoft.com/office/powerpoint/2010/main" val="2985043698"/>
+      </p:ext>
+    </p:extLst>
+  </p:cSld>
+  <p:clrMapOvr>
+    <a:masterClrMapping/>
+  </p:clrMapOvr>
+</p:notes>
+</file>
+
+<file path=ppt/notesSlides/notesSlide4.xml><?xml version="1.0" encoding="utf-8"?>
+<p:notes xmlns:a="http://schemas.openxmlformats.org/drawingml/2006/main" xmlns:r="http://schemas.openxmlformats.org/officeDocument/2006/relationships" xmlns:p="http://schemas.openxmlformats.org/presentationml/2006/main">
+  <p:cSld>
+    <p:spTree>
+      <p:nvGrpSpPr>
+        <p:cNvPr id="1" name=""/>
+        <p:cNvGrpSpPr/>
+        <p:nvPr/>
+      </p:nvGrpSpPr>
+      <p:grpSpPr>
+        <a:xfrm>
+          <a:off x="0" y="0"/>
+          <a:ext cx="0" cy="0"/>
+          <a:chOff x="0" y="0"/>
+          <a:chExt cx="0" cy="0"/>
+        </a:xfrm>
+      </p:grpSpPr>
+      <p:sp>
+        <p:nvSpPr>
+          <p:cNvPr id="2" name="Образ слайда 1"/>
+          <p:cNvSpPr>
+            <a:spLocks noGrp="1" noRot="1" noChangeAspect="1"/>
+          </p:cNvSpPr>
+          <p:nvPr>
+            <p:ph type="sldImg"/>
+          </p:nvPr>
+        </p:nvSpPr>
+        <p:spPr/>
+      </p:sp>
+      <p:sp>
+        <p:nvSpPr>
+          <p:cNvPr id="3" name="Заметки 2"/>
+          <p:cNvSpPr>
+            <a:spLocks noGrp="1"/>
+          </p:cNvSpPr>
+          <p:nvPr>
+            <p:ph type="body" idx="1"/>
+          </p:nvPr>
+        </p:nvSpPr>
+        <p:spPr/>
+        <p:txBody>
+          <a:bodyPr/>
+          <a:lstStyle/>
+          <a:p>
+            <a:r>
+              <a:rPr lang="ru-RU" sz="1800" dirty="0">
+                <a:effectLst/>
+                <a:latin typeface="Cambria" panose="02040503050406030204" pitchFamily="18" charset="0"/>
+                <a:ea typeface="MS Mincho" panose="02020609040205080304" pitchFamily="49" charset="-128"/>
+                <a:cs typeface="Times New Roman" panose="02020603050405020304" pitchFamily="18" charset="0"/>
+              </a:rPr>
+              <a:t>Отсюда цель и задачи. Задачи задают весь маршрут — от анализа предметной области и подходов до реализации алгоритма, интерфейса с обратной связью и оценки качества.</a:t>
+            </a:r>
+            <a:r>
+              <a:rPr lang="ru-RU" dirty="0">
+                <a:effectLst/>
+              </a:rPr>
+              <a:t> </a:t>
+            </a:r>
+            <a:endParaRPr lang="ru-RU" dirty="0"/>
+          </a:p>
+        </p:txBody>
+      </p:sp>
+      <p:sp>
+        <p:nvSpPr>
+          <p:cNvPr id="4" name="Номер слайда 3"/>
+          <p:cNvSpPr>
+            <a:spLocks noGrp="1"/>
+          </p:cNvSpPr>
+          <p:nvPr>
+            <p:ph type="sldNum" sz="quarter" idx="5"/>
+          </p:nvPr>
+        </p:nvSpPr>
+        <p:spPr/>
+        <p:txBody>
+          <a:bodyPr/>
+          <a:lstStyle/>
+          <a:p>
+            <a:fld id="{48DA6A8A-3B81-7243-A3AE-AF4790F5F296}" type="slidenum">
+              <a:rPr lang="ru-RU" smtClean="0"/>
+              <a:t>4</a:t>
+            </a:fld>
+            <a:endParaRPr lang="ru-RU"/>
+          </a:p>
+        </p:txBody>
+      </p:sp>
+    </p:spTree>
+    <p:extLst>
+      <p:ext uri="{BB962C8B-B14F-4D97-AF65-F5344CB8AC3E}">
+        <p14:creationId xmlns:p14="http://schemas.microsoft.com/office/powerpoint/2010/main" val="3991063202"/>
+      </p:ext>
+    </p:extLst>
+  </p:cSld>
+  <p:clrMapOvr>
+    <a:masterClrMapping/>
+  </p:clrMapOvr>
+</p:notes>
+</file>
+
+<file path=ppt/notesSlides/notesSlide5.xml><?xml version="1.0" encoding="utf-8"?>
+<p:notes xmlns:a="http://schemas.openxmlformats.org/drawingml/2006/main" xmlns:r="http://schemas.openxmlformats.org/officeDocument/2006/relationships" xmlns:p="http://schemas.openxmlformats.org/presentationml/2006/main">
+  <p:cSld>
+    <p:spTree>
+      <p:nvGrpSpPr>
+        <p:cNvPr id="1" name=""/>
+        <p:cNvGrpSpPr/>
+        <p:nvPr/>
+      </p:nvGrpSpPr>
+      <p:grpSpPr>
+        <a:xfrm>
+          <a:off x="0" y="0"/>
+          <a:ext cx="0" cy="0"/>
+          <a:chOff x="0" y="0"/>
+          <a:chExt cx="0" cy="0"/>
+        </a:xfrm>
+      </p:grpSpPr>
+      <p:sp>
+        <p:nvSpPr>
+          <p:cNvPr id="2" name="Образ слайда 1"/>
+          <p:cNvSpPr>
+            <a:spLocks noGrp="1" noRot="1" noChangeAspect="1"/>
+          </p:cNvSpPr>
+          <p:nvPr>
+            <p:ph type="sldImg"/>
+          </p:nvPr>
+        </p:nvSpPr>
+        <p:spPr/>
+      </p:sp>
+      <p:sp>
+        <p:nvSpPr>
+          <p:cNvPr id="3" name="Заметки 2"/>
+          <p:cNvSpPr>
+            <a:spLocks noGrp="1"/>
+          </p:cNvSpPr>
+          <p:nvPr>
+            <p:ph type="body" idx="1"/>
+          </p:nvPr>
+        </p:nvSpPr>
+        <p:spPr/>
+        <p:txBody>
+          <a:bodyPr/>
+          <a:lstStyle/>
+          <a:p>
+            <a:r>
+              <a:rPr lang="ru-RU" sz="1800" dirty="0">
+                <a:effectLst/>
+                <a:latin typeface="Cambria" panose="02040503050406030204" pitchFamily="18" charset="0"/>
+                <a:ea typeface="MS Mincho" panose="02020609040205080304" pitchFamily="49" charset="-128"/>
+                <a:cs typeface="Times New Roman" panose="02020603050405020304" pitchFamily="18" charset="0"/>
+              </a:rPr>
+              <a:t>Сначала — что не так в самой области. Из пяти проблем ключевые две: рекомендации обычно даются без объяснения, почему предложено именно это событие, и не учитывают уровень и карьерную цель пользователя. На них работа нацелена в первую очередь.</a:t>
+            </a:r>
+            <a:r>
+              <a:rPr lang="ru-RU" dirty="0">
+                <a:effectLst/>
+              </a:rPr>
+              <a:t> </a:t>
+            </a:r>
+            <a:endParaRPr lang="ru-RU" dirty="0"/>
+          </a:p>
+        </p:txBody>
+      </p:sp>
+      <p:sp>
+        <p:nvSpPr>
+          <p:cNvPr id="4" name="Номер слайда 3"/>
+          <p:cNvSpPr>
+            <a:spLocks noGrp="1"/>
+          </p:cNvSpPr>
+          <p:nvPr>
+            <p:ph type="sldNum" sz="quarter" idx="5"/>
+          </p:nvPr>
+        </p:nvSpPr>
+        <p:spPr/>
+        <p:txBody>
+          <a:bodyPr/>
+          <a:lstStyle/>
+          <a:p>
+            <a:fld id="{48DA6A8A-3B81-7243-A3AE-AF4790F5F296}" type="slidenum">
+              <a:rPr lang="ru-RU" smtClean="0"/>
+              <a:t>5</a:t>
+            </a:fld>
+            <a:endParaRPr lang="ru-RU"/>
+          </a:p>
+        </p:txBody>
+      </p:sp>
+    </p:spTree>
+    <p:extLst>
+      <p:ext uri="{BB962C8B-B14F-4D97-AF65-F5344CB8AC3E}">
+        <p14:creationId xmlns:p14="http://schemas.microsoft.com/office/powerpoint/2010/main" val="3509514713"/>
+      </p:ext>
+    </p:extLst>
+  </p:cSld>
+  <p:clrMapOvr>
+    <a:masterClrMapping/>
+  </p:clrMapOvr>
+</p:notes>
+</file>
+
+<file path=ppt/notesSlides/notesSlide6.xml><?xml version="1.0" encoding="utf-8"?>
+<p:notes xmlns:a="http://schemas.openxmlformats.org/drawingml/2006/main" xmlns:r="http://schemas.openxmlformats.org/officeDocument/2006/relationships" xmlns:p="http://schemas.openxmlformats.org/presentationml/2006/main">
+  <p:cSld>
+    <p:spTree>
+      <p:nvGrpSpPr>
+        <p:cNvPr id="1" name=""/>
+        <p:cNvGrpSpPr/>
+        <p:nvPr/>
+      </p:nvGrpSpPr>
+      <p:grpSpPr>
+        <a:xfrm>
+          <a:off x="0" y="0"/>
+          <a:ext cx="0" cy="0"/>
+          <a:chOff x="0" y="0"/>
+          <a:chExt cx="0" cy="0"/>
+        </a:xfrm>
+      </p:grpSpPr>
+      <p:sp>
+        <p:nvSpPr>
+          <p:cNvPr id="2" name="Образ слайда 1"/>
+          <p:cNvSpPr>
+            <a:spLocks noGrp="1" noRot="1" noChangeAspect="1"/>
+          </p:cNvSpPr>
+          <p:nvPr>
+            <p:ph type="sldImg"/>
+          </p:nvPr>
+        </p:nvSpPr>
+        <p:spPr/>
+      </p:sp>
+      <p:sp>
+        <p:nvSpPr>
+          <p:cNvPr id="3" name="Заметки 2"/>
+          <p:cNvSpPr>
+            <a:spLocks noGrp="1"/>
+          </p:cNvSpPr>
+          <p:nvPr>
+            <p:ph type="body" idx="1"/>
+          </p:nvPr>
+        </p:nvSpPr>
+        <p:spPr/>
+        <p:txBody>
+          <a:bodyPr/>
+          <a:lstStyle/>
+          <a:p>
+            <a:r>
+              <a:rPr lang="ru-RU" sz="1800" dirty="0">
+                <a:effectLst/>
+                <a:latin typeface="Cambria" panose="02040503050406030204" pitchFamily="18" charset="0"/>
+                <a:ea typeface="MS Mincho" panose="02020609040205080304" pitchFamily="49" charset="-128"/>
+                <a:cs typeface="Times New Roman" panose="02020603050405020304" pitchFamily="18" charset="0"/>
+              </a:rPr>
+              <a:t>Обзор существующих решений это подтверждает: каждое закрывает задачу лишь частично. Универсальные площадки не специализированы на </a:t>
+            </a:r>
+            <a:r>
+              <a:rPr lang="en-US" sz="1800" dirty="0">
+                <a:effectLst/>
+                <a:latin typeface="Cambria" panose="02040503050406030204" pitchFamily="18" charset="0"/>
+                <a:ea typeface="MS Mincho" panose="02020609040205080304" pitchFamily="49" charset="-128"/>
+                <a:cs typeface="Times New Roman" panose="02020603050405020304" pitchFamily="18" charset="0"/>
+              </a:rPr>
+              <a:t>IT</a:t>
+            </a:r>
+            <a:r>
+              <a:rPr lang="ru-RU" sz="1800" dirty="0">
+                <a:effectLst/>
+                <a:latin typeface="Cambria" panose="02040503050406030204" pitchFamily="18" charset="0"/>
+                <a:ea typeface="MS Mincho" panose="02020609040205080304" pitchFamily="49" charset="-128"/>
+                <a:cs typeface="Times New Roman" panose="02020603050405020304" pitchFamily="18" charset="0"/>
+              </a:rPr>
+              <a:t>, тематические не строят персональных подборок, в каналах сообществ нет ни поиска, ни персонализации. Объединить агрегацию, учёт реакций и объяснимость не пытается ни одно — вот и ниша работы.</a:t>
+            </a:r>
+            <a:r>
+              <a:rPr lang="ru-RU" dirty="0">
+                <a:effectLst/>
+              </a:rPr>
+              <a:t> </a:t>
+            </a:r>
+            <a:endParaRPr lang="ru-RU" dirty="0"/>
+          </a:p>
+        </p:txBody>
+      </p:sp>
+      <p:sp>
+        <p:nvSpPr>
+          <p:cNvPr id="4" name="Номер слайда 3"/>
+          <p:cNvSpPr>
+            <a:spLocks noGrp="1"/>
+          </p:cNvSpPr>
+          <p:nvPr>
+            <p:ph type="sldNum" sz="quarter" idx="5"/>
+          </p:nvPr>
+        </p:nvSpPr>
+        <p:spPr/>
+        <p:txBody>
+          <a:bodyPr/>
+          <a:lstStyle/>
+          <a:p>
+            <a:fld id="{48DA6A8A-3B81-7243-A3AE-AF4790F5F296}" type="slidenum">
+              <a:rPr lang="ru-RU" smtClean="0"/>
+              <a:t>6</a:t>
+            </a:fld>
+            <a:endParaRPr lang="ru-RU"/>
+          </a:p>
+        </p:txBody>
+      </p:sp>
+    </p:spTree>
+    <p:extLst>
+      <p:ext uri="{BB962C8B-B14F-4D97-AF65-F5344CB8AC3E}">
+        <p14:creationId xmlns:p14="http://schemas.microsoft.com/office/powerpoint/2010/main" val="108955065"/>
+      </p:ext>
+    </p:extLst>
+  </p:cSld>
+  <p:clrMapOvr>
+    <a:masterClrMapping/>
+  </p:clrMapOvr>
+</p:notes>
+</file>
+
+<file path=ppt/notesSlides/notesSlide7.xml><?xml version="1.0" encoding="utf-8"?>
+<p:notes xmlns:a="http://schemas.openxmlformats.org/drawingml/2006/main" xmlns:r="http://schemas.openxmlformats.org/officeDocument/2006/relationships" xmlns:p="http://schemas.openxmlformats.org/presentationml/2006/main">
+  <p:cSld>
+    <p:spTree>
+      <p:nvGrpSpPr>
+        <p:cNvPr id="1" name=""/>
+        <p:cNvGrpSpPr/>
+        <p:nvPr/>
+      </p:nvGrpSpPr>
+      <p:grpSpPr>
+        <a:xfrm>
+          <a:off x="0" y="0"/>
+          <a:ext cx="0" cy="0"/>
+          <a:chOff x="0" y="0"/>
+          <a:chExt cx="0" cy="0"/>
+        </a:xfrm>
+      </p:grpSpPr>
+      <p:sp>
+        <p:nvSpPr>
+          <p:cNvPr id="2" name="Образ слайда 1"/>
+          <p:cNvSpPr>
+            <a:spLocks noGrp="1" noRot="1" noChangeAspect="1"/>
+          </p:cNvSpPr>
+          <p:nvPr>
+            <p:ph type="sldImg"/>
+          </p:nvPr>
+        </p:nvSpPr>
+        <p:spPr/>
+      </p:sp>
+      <p:sp>
+        <p:nvSpPr>
+          <p:cNvPr id="3" name="Заметки 2"/>
+          <p:cNvSpPr>
+            <a:spLocks noGrp="1"/>
+          </p:cNvSpPr>
+          <p:nvPr>
+            <p:ph type="body" idx="1"/>
+          </p:nvPr>
+        </p:nvSpPr>
+        <p:spPr/>
+        <p:txBody>
+          <a:bodyPr/>
+          <a:lstStyle/>
+          <a:p>
+            <a:pPr marL="0" marR="0" lvl="0" indent="0" algn="l" defTabSz="914400" rtl="0" eaLnBrk="1" fontAlgn="auto" latinLnBrk="0" hangingPunct="1">
+              <a:lnSpc>
+                <a:spcPct val="100000"/>
+              </a:lnSpc>
+              <a:spcBef>
+                <a:spcPts val="0"/>
+              </a:spcBef>
+              <a:spcAft>
+                <a:spcPts val="0"/>
+              </a:spcAft>
+              <a:buClrTx/>
+              <a:buSzTx/>
+              <a:buFontTx/>
+              <a:buNone/>
+              <a:tabLst/>
+              <a:defRPr/>
+            </a:pPr>
+            <a:r>
+              <a:rPr lang="ru-RU" sz="1800" dirty="0">
+                <a:effectLst/>
+                <a:latin typeface="Cambria" panose="02040503050406030204" pitchFamily="18" charset="0"/>
+                <a:ea typeface="MS Mincho" panose="02020609040205080304" pitchFamily="49" charset="-128"/>
+                <a:cs typeface="Times New Roman" panose="02020603050405020304" pitchFamily="18" charset="0"/>
+              </a:rPr>
+              <a:t>Раз готового решения нет, я разобрал, на чём строят рекомендации. Контентный подход сравнивает событие с интересами — работает уже при одном пользователе и объясним, но даёт узкую выдачу. </a:t>
+            </a:r>
+            <a:r>
+              <a:rPr lang="ru-RU" sz="1800" dirty="0" err="1">
+                <a:effectLst/>
+                <a:latin typeface="Cambria" panose="02040503050406030204" pitchFamily="18" charset="0"/>
+                <a:ea typeface="MS Mincho" panose="02020609040205080304" pitchFamily="49" charset="-128"/>
+                <a:cs typeface="Times New Roman" panose="02020603050405020304" pitchFamily="18" charset="0"/>
+              </a:rPr>
+              <a:t>Коллаборативный</a:t>
+            </a:r>
+            <a:r>
+              <a:rPr lang="ru-RU" sz="1800" dirty="0">
+                <a:effectLst/>
+                <a:latin typeface="Cambria" panose="02040503050406030204" pitchFamily="18" charset="0"/>
+                <a:ea typeface="MS Mincho" panose="02020609040205080304" pitchFamily="49" charset="-128"/>
+                <a:cs typeface="Times New Roman" panose="02020603050405020304" pitchFamily="18" charset="0"/>
+              </a:rPr>
+              <a:t> смотрит, что </a:t>
+            </a:r>
+            <a:r>
+              <a:rPr lang="ru-RU" sz="1800" dirty="0" err="1">
+                <a:effectLst/>
+                <a:latin typeface="Cambria" panose="02040503050406030204" pitchFamily="18" charset="0"/>
+                <a:ea typeface="MS Mincho" panose="02020609040205080304" pitchFamily="49" charset="-128"/>
+                <a:cs typeface="Times New Roman" panose="02020603050405020304" pitchFamily="18" charset="0"/>
+              </a:rPr>
+              <a:t>лайкали</a:t>
+            </a:r>
+            <a:r>
+              <a:rPr lang="ru-RU" sz="1800" dirty="0">
+                <a:effectLst/>
+                <a:latin typeface="Cambria" panose="02040503050406030204" pitchFamily="18" charset="0"/>
+                <a:ea typeface="MS Mincho" panose="02020609040205080304" pitchFamily="49" charset="-128"/>
+                <a:cs typeface="Times New Roman" panose="02020603050405020304" pitchFamily="18" charset="0"/>
+              </a:rPr>
+              <a:t> похожие люди, находит неочевидное, но страдает от холодного старта. Семантический сравнивает тексты по смыслу, снимая проблему синонимов и языков. Контекстный бандит добавляет онлайн-обучение. Ни один не самодостаточен — слабость каждого закрывает сильная сторона другого, поэтому за основу взят гибридный подход: объясним за счёт контентной части и устойчив к холодному старту.</a:t>
+            </a:r>
+          </a:p>
+        </p:txBody>
+      </p:sp>
+      <p:sp>
+        <p:nvSpPr>
+          <p:cNvPr id="4" name="Номер слайда 3"/>
+          <p:cNvSpPr>
+            <a:spLocks noGrp="1"/>
+          </p:cNvSpPr>
+          <p:nvPr>
+            <p:ph type="sldNum" sz="quarter" idx="5"/>
+          </p:nvPr>
+        </p:nvSpPr>
+        <p:spPr/>
+        <p:txBody>
+          <a:bodyPr/>
+          <a:lstStyle/>
+          <a:p>
+            <a:fld id="{48DA6A8A-3B81-7243-A3AE-AF4790F5F296}" type="slidenum">
+              <a:rPr lang="ru-RU" smtClean="0"/>
+              <a:t>7</a:t>
+            </a:fld>
+            <a:endParaRPr lang="ru-RU"/>
+          </a:p>
+        </p:txBody>
+      </p:sp>
+    </p:spTree>
+    <p:extLst>
+      <p:ext uri="{BB962C8B-B14F-4D97-AF65-F5344CB8AC3E}">
+        <p14:creationId xmlns:p14="http://schemas.microsoft.com/office/powerpoint/2010/main" val="307082336"/>
+      </p:ext>
+    </p:extLst>
+  </p:cSld>
+  <p:clrMapOvr>
+    <a:masterClrMapping/>
+  </p:clrMapOvr>
+</p:notes>
+</file>
+
+<file path=ppt/notesSlides/notesSlide8.xml><?xml version="1.0" encoding="utf-8"?>
+<p:notes xmlns:a="http://schemas.openxmlformats.org/drawingml/2006/main" xmlns:r="http://schemas.openxmlformats.org/officeDocument/2006/relationships" xmlns:p="http://schemas.openxmlformats.org/presentationml/2006/main">
+  <p:cSld>
+    <p:spTree>
+      <p:nvGrpSpPr>
+        <p:cNvPr id="1" name=""/>
+        <p:cNvGrpSpPr/>
+        <p:nvPr/>
+      </p:nvGrpSpPr>
+      <p:grpSpPr>
+        <a:xfrm>
+          <a:off x="0" y="0"/>
+          <a:ext cx="0" cy="0"/>
+          <a:chOff x="0" y="0"/>
+          <a:chExt cx="0" cy="0"/>
+        </a:xfrm>
+      </p:grpSpPr>
+      <p:sp>
+        <p:nvSpPr>
+          <p:cNvPr id="2" name="Образ слайда 1"/>
+          <p:cNvSpPr>
+            <a:spLocks noGrp="1" noRot="1" noChangeAspect="1"/>
+          </p:cNvSpPr>
+          <p:nvPr>
+            <p:ph type="sldImg"/>
+          </p:nvPr>
+        </p:nvSpPr>
+        <p:spPr/>
+      </p:sp>
+      <p:sp>
+        <p:nvSpPr>
+          <p:cNvPr id="3" name="Заметки 2"/>
+          <p:cNvSpPr>
+            <a:spLocks noGrp="1"/>
+          </p:cNvSpPr>
+          <p:nvPr>
+            <p:ph type="body" idx="1"/>
+          </p:nvPr>
+        </p:nvSpPr>
+        <p:spPr/>
+        <p:txBody>
+          <a:bodyPr/>
+          <a:lstStyle/>
+          <a:p>
+            <a:r>
+              <a:rPr lang="ru-RU" sz="1800" dirty="0">
+                <a:effectLst/>
+                <a:latin typeface="Cambria" panose="02040503050406030204" pitchFamily="18" charset="0"/>
+                <a:ea typeface="MS Mincho" panose="02020609040205080304" pitchFamily="49" charset="-128"/>
+                <a:cs typeface="Times New Roman" panose="02020603050405020304" pitchFamily="18" charset="0"/>
+              </a:rPr>
+              <a:t>Как это выглядит для пользователя: настройка профиля, персональная лента с объяснениями, оценки и сохранения, поиск обычным языком и дайджест; администратору — загрузка событий и аналитика.</a:t>
+            </a:r>
+            <a:r>
+              <a:rPr lang="ru-RU" dirty="0">
+                <a:effectLst/>
+              </a:rPr>
+              <a:t> </a:t>
+            </a:r>
+            <a:endParaRPr lang="ru-RU" dirty="0"/>
+          </a:p>
+        </p:txBody>
+      </p:sp>
+      <p:sp>
+        <p:nvSpPr>
+          <p:cNvPr id="4" name="Номер слайда 3"/>
+          <p:cNvSpPr>
+            <a:spLocks noGrp="1"/>
+          </p:cNvSpPr>
+          <p:nvPr>
+            <p:ph type="sldNum" sz="quarter" idx="5"/>
+          </p:nvPr>
+        </p:nvSpPr>
+        <p:spPr/>
+        <p:txBody>
+          <a:bodyPr/>
+          <a:lstStyle/>
+          <a:p>
+            <a:fld id="{48DA6A8A-3B81-7243-A3AE-AF4790F5F296}" type="slidenum">
+              <a:rPr lang="ru-RU" smtClean="0"/>
+              <a:t>8</a:t>
+            </a:fld>
+            <a:endParaRPr lang="ru-RU"/>
+          </a:p>
+        </p:txBody>
+      </p:sp>
+    </p:spTree>
+    <p:extLst>
+      <p:ext uri="{BB962C8B-B14F-4D97-AF65-F5344CB8AC3E}">
+        <p14:creationId xmlns:p14="http://schemas.microsoft.com/office/powerpoint/2010/main" val="3223756821"/>
+      </p:ext>
+    </p:extLst>
+  </p:cSld>
+  <p:clrMapOvr>
+    <a:masterClrMapping/>
+  </p:clrMapOvr>
+</p:notes>
+</file>
+
+<file path=ppt/notesSlides/notesSlide9.xml><?xml version="1.0" encoding="utf-8"?>
+<p:notes xmlns:a="http://schemas.openxmlformats.org/drawingml/2006/main" xmlns:r="http://schemas.openxmlformats.org/officeDocument/2006/relationships" xmlns:p="http://schemas.openxmlformats.org/presentationml/2006/main">
+  <p:cSld>
+    <p:spTree>
+      <p:nvGrpSpPr>
+        <p:cNvPr id="1" name=""/>
+        <p:cNvGrpSpPr/>
+        <p:nvPr/>
+      </p:nvGrpSpPr>
+      <p:grpSpPr>
+        <a:xfrm>
+          <a:off x="0" y="0"/>
+          <a:ext cx="0" cy="0"/>
+          <a:chOff x="0" y="0"/>
+          <a:chExt cx="0" cy="0"/>
+        </a:xfrm>
+      </p:grpSpPr>
+      <p:sp>
+        <p:nvSpPr>
+          <p:cNvPr id="2" name="Образ слайда 1"/>
+          <p:cNvSpPr>
+            <a:spLocks noGrp="1" noRot="1" noChangeAspect="1"/>
+          </p:cNvSpPr>
+          <p:nvPr>
+            <p:ph type="sldImg"/>
+          </p:nvPr>
+        </p:nvSpPr>
+        <p:spPr/>
+      </p:sp>
+      <p:sp>
+        <p:nvSpPr>
+          <p:cNvPr id="3" name="Заметки 2"/>
+          <p:cNvSpPr>
+            <a:spLocks noGrp="1"/>
+          </p:cNvSpPr>
+          <p:nvPr>
+            <p:ph type="body" idx="1"/>
+          </p:nvPr>
+        </p:nvSpPr>
+        <p:spPr/>
+        <p:txBody>
+          <a:bodyPr/>
+          <a:lstStyle/>
+          <a:p>
+            <a:r>
+              <a:rPr lang="ru-RU" sz="1800" dirty="0">
+                <a:effectLst/>
+                <a:latin typeface="Cambria" panose="02040503050406030204" pitchFamily="18" charset="0"/>
+                <a:ea typeface="MS Mincho" panose="02020609040205080304" pitchFamily="49" charset="-128"/>
+                <a:cs typeface="Times New Roman" panose="02020603050405020304" pitchFamily="18" charset="0"/>
+              </a:rPr>
+              <a:t>А вот тот же путь как процесс целиком — от сбора и нормализации событий до доставки ленты и обработки обратной связи, которая дальше уточняет рекомендации. Ключевые блоки разберу по отдельности.</a:t>
+            </a:r>
+            <a:r>
+              <a:rPr lang="ru-RU" dirty="0">
+                <a:effectLst/>
+              </a:rPr>
+              <a:t> </a:t>
+            </a:r>
+            <a:endParaRPr lang="ru-RU" dirty="0"/>
+          </a:p>
+        </p:txBody>
+      </p:sp>
+      <p:sp>
+        <p:nvSpPr>
+          <p:cNvPr id="4" name="Номер слайда 3"/>
+          <p:cNvSpPr>
+            <a:spLocks noGrp="1"/>
+          </p:cNvSpPr>
+          <p:nvPr>
+            <p:ph type="sldNum" sz="quarter" idx="5"/>
+          </p:nvPr>
+        </p:nvSpPr>
+        <p:spPr/>
+        <p:txBody>
+          <a:bodyPr/>
+          <a:lstStyle/>
+          <a:p>
+            <a:fld id="{48DA6A8A-3B81-7243-A3AE-AF4790F5F296}" type="slidenum">
+              <a:rPr lang="ru-RU" smtClean="0"/>
+              <a:t>9</a:t>
+            </a:fld>
+            <a:endParaRPr lang="ru-RU"/>
+          </a:p>
+        </p:txBody>
+      </p:sp>
+    </p:spTree>
+    <p:extLst>
+      <p:ext uri="{BB962C8B-B14F-4D97-AF65-F5344CB8AC3E}">
+        <p14:creationId xmlns:p14="http://schemas.microsoft.com/office/powerpoint/2010/main" val="3257674750"/>
+      </p:ext>
+    </p:extLst>
+  </p:cSld>
+  <p:clrMapOvr>
+    <a:masterClrMapping/>
+  </p:clrMapOvr>
+</p:notes>
+</file>
+
 <file path=ppt/slideLayouts/slideLayout1.xml><?xml version="1.0" encoding="utf-8"?>
 <p:sldLayout xmlns:a="http://schemas.openxmlformats.org/drawingml/2006/main" xmlns:r="http://schemas.openxmlformats.org/officeDocument/2006/relationships" xmlns:p="http://schemas.openxmlformats.org/presentationml/2006/main" type="title" preserve="1">
   <p:cSld name="Title Slide">
@@ -321,7 +3305,7 @@
           <a:p>
             <a:fld id="{5BCAD085-E8A6-8845-BD4E-CB4CCA059FC4}" type="datetimeFigureOut">
               <a:rPr lang="en-US" smtClean="0"/>
-              <a:t>6/24/26</a:t>
+              <a:t>6/26/26</a:t>
             </a:fld>
             <a:endParaRPr lang="en-US"/>
           </a:p>
@@ -489,7 +3473,7 @@
           <a:p>
             <a:fld id="{5BCAD085-E8A6-8845-BD4E-CB4CCA059FC4}" type="datetimeFigureOut">
               <a:rPr lang="en-US" smtClean="0"/>
-              <a:t>6/24/26</a:t>
+              <a:t>6/26/26</a:t>
             </a:fld>
             <a:endParaRPr lang="en-US"/>
           </a:p>
@@ -667,7 +3651,7 @@
           <a:p>
             <a:fld id="{5BCAD085-E8A6-8845-BD4E-CB4CCA059FC4}" type="datetimeFigureOut">
               <a:rPr lang="en-US" smtClean="0"/>
-              <a:t>6/24/26</a:t>
+              <a:t>6/26/26</a:t>
             </a:fld>
             <a:endParaRPr lang="en-US"/>
           </a:p>
@@ -835,7 +3819,7 @@
           <a:p>
             <a:fld id="{5BCAD085-E8A6-8845-BD4E-CB4CCA059FC4}" type="datetimeFigureOut">
               <a:rPr lang="en-US" smtClean="0"/>
-              <a:t>6/24/26</a:t>
+              <a:t>6/26/26</a:t>
             </a:fld>
             <a:endParaRPr lang="en-US"/>
           </a:p>
@@ -1080,7 +4064,7 @@
           <a:p>
             <a:fld id="{5BCAD085-E8A6-8845-BD4E-CB4CCA059FC4}" type="datetimeFigureOut">
               <a:rPr lang="en-US" smtClean="0"/>
-              <a:t>6/24/26</a:t>
+              <a:t>6/26/26</a:t>
             </a:fld>
             <a:endParaRPr lang="en-US"/>
           </a:p>
@@ -1365,7 +4349,7 @@
           <a:p>
             <a:fld id="{5BCAD085-E8A6-8845-BD4E-CB4CCA059FC4}" type="datetimeFigureOut">
               <a:rPr lang="en-US" smtClean="0"/>
-              <a:t>6/24/26</a:t>
+              <a:t>6/26/26</a:t>
             </a:fld>
             <a:endParaRPr lang="en-US"/>
           </a:p>
@@ -1784,7 +4768,7 @@
           <a:p>
             <a:fld id="{5BCAD085-E8A6-8845-BD4E-CB4CCA059FC4}" type="datetimeFigureOut">
               <a:rPr lang="en-US" smtClean="0"/>
-              <a:t>6/24/26</a:t>
+              <a:t>6/26/26</a:t>
             </a:fld>
             <a:endParaRPr lang="en-US"/>
           </a:p>
@@ -1901,7 +4885,7 @@
           <a:p>
             <a:fld id="{5BCAD085-E8A6-8845-BD4E-CB4CCA059FC4}" type="datetimeFigureOut">
               <a:rPr lang="en-US" smtClean="0"/>
-              <a:t>6/24/26</a:t>
+              <a:t>6/26/26</a:t>
             </a:fld>
             <a:endParaRPr lang="en-US"/>
           </a:p>
@@ -1996,7 +4980,7 @@
           <a:p>
             <a:fld id="{5BCAD085-E8A6-8845-BD4E-CB4CCA059FC4}" type="datetimeFigureOut">
               <a:rPr lang="en-US" smtClean="0"/>
-              <a:t>6/24/26</a:t>
+              <a:t>6/26/26</a:t>
             </a:fld>
             <a:endParaRPr lang="en-US"/>
           </a:p>
@@ -2271,7 +5255,7 @@
           <a:p>
             <a:fld id="{5BCAD085-E8A6-8845-BD4E-CB4CCA059FC4}" type="datetimeFigureOut">
               <a:rPr lang="en-US" smtClean="0"/>
-              <a:t>6/24/26</a:t>
+              <a:t>6/26/26</a:t>
             </a:fld>
             <a:endParaRPr lang="en-US"/>
           </a:p>
@@ -2523,7 +5507,7 @@
           <a:p>
             <a:fld id="{5BCAD085-E8A6-8845-BD4E-CB4CCA059FC4}" type="datetimeFigureOut">
               <a:rPr lang="en-US" smtClean="0"/>
-              <a:t>6/24/26</a:t>
+              <a:t>6/26/26</a:t>
             </a:fld>
             <a:endParaRPr lang="en-US"/>
           </a:p>
@@ -2734,7 +5718,7 @@
           <a:p>
             <a:fld id="{5BCAD085-E8A6-8845-BD4E-CB4CCA059FC4}" type="datetimeFigureOut">
               <a:rPr lang="en-US" smtClean="0"/>
-              <a:t>6/24/26</a:t>
+              <a:t>6/26/26</a:t>
             </a:fld>
             <a:endParaRPr lang="en-US"/>
           </a:p>
@@ -3118,7 +6102,7 @@
           <p:nvPr/>
         </p:nvPicPr>
         <p:blipFill>
-          <a:blip r:embed="rId2"/>
+          <a:blip r:embed="rId3"/>
           <a:stretch>
             <a:fillRect/>
           </a:stretch>
@@ -3142,7 +6126,7 @@
           <p:nvPr/>
         </p:nvPicPr>
         <p:blipFill>
-          <a:blip r:embed="rId3"/>
+          <a:blip r:embed="rId4"/>
           <a:stretch>
             <a:fillRect/>
           </a:stretch>
@@ -3305,14 +6289,272 @@
           <a:lstStyle/>
           <a:p>
             <a:r>
-              <a:rPr sz="2700" b="1">
-                <a:solidFill>
-                  <a:srgbClr val="0F2C68"/>
-                </a:solidFill>
-                <a:latin typeface="HSE Sans"/>
-              </a:rPr>
-              <a:t>Разработка приложения для агрегации информации об IT-событиях и выдачи персональных рекомендаций на основе модели пользователя</a:t>
-            </a:r>
+              <a:rPr sz="2700" b="1" dirty="0" err="1">
+                <a:solidFill>
+                  <a:srgbClr val="0F2C68"/>
+                </a:solidFill>
+                <a:latin typeface="HSE Sans"/>
+              </a:rPr>
+              <a:t>Разработка</a:t>
+            </a:r>
+            <a:r>
+              <a:rPr sz="2700" b="1" dirty="0">
+                <a:solidFill>
+                  <a:srgbClr val="0F2C68"/>
+                </a:solidFill>
+                <a:latin typeface="HSE Sans"/>
+              </a:rPr>
+              <a:t> </a:t>
+            </a:r>
+            <a:r>
+              <a:rPr sz="2700" b="1" dirty="0" err="1">
+                <a:solidFill>
+                  <a:srgbClr val="0F2C68"/>
+                </a:solidFill>
+                <a:latin typeface="HSE Sans"/>
+              </a:rPr>
+              <a:t>приложения</a:t>
+            </a:r>
+            <a:r>
+              <a:rPr sz="2700" b="1" dirty="0">
+                <a:solidFill>
+                  <a:srgbClr val="0F2C68"/>
+                </a:solidFill>
+                <a:latin typeface="HSE Sans"/>
+              </a:rPr>
+              <a:t> </a:t>
+            </a:r>
+            <a:r>
+              <a:rPr sz="2700" b="1" dirty="0" err="1">
+                <a:solidFill>
+                  <a:srgbClr val="0F2C68"/>
+                </a:solidFill>
+                <a:latin typeface="HSE Sans"/>
+              </a:rPr>
+              <a:t>для</a:t>
+            </a:r>
+            <a:r>
+              <a:rPr sz="2700" b="1" dirty="0">
+                <a:solidFill>
+                  <a:srgbClr val="0F2C68"/>
+                </a:solidFill>
+                <a:latin typeface="HSE Sans"/>
+              </a:rPr>
+              <a:t> </a:t>
+            </a:r>
+            <a:r>
+              <a:rPr sz="2700" b="1" dirty="0" err="1">
+                <a:solidFill>
+                  <a:srgbClr val="0F2C68"/>
+                </a:solidFill>
+                <a:latin typeface="HSE Sans"/>
+              </a:rPr>
+              <a:t>агрегации</a:t>
+            </a:r>
+            <a:r>
+              <a:rPr sz="2700" b="1" dirty="0">
+                <a:solidFill>
+                  <a:srgbClr val="0F2C68"/>
+                </a:solidFill>
+                <a:latin typeface="HSE Sans"/>
+              </a:rPr>
+              <a:t> </a:t>
+            </a:r>
+            <a:r>
+              <a:rPr sz="2700" b="1" dirty="0" err="1">
+                <a:solidFill>
+                  <a:srgbClr val="0F2C68"/>
+                </a:solidFill>
+                <a:latin typeface="HSE Sans"/>
+              </a:rPr>
+              <a:t>информации</a:t>
+            </a:r>
+            <a:r>
+              <a:rPr sz="2700" b="1" dirty="0">
+                <a:solidFill>
+                  <a:srgbClr val="0F2C68"/>
+                </a:solidFill>
+                <a:latin typeface="HSE Sans"/>
+              </a:rPr>
+              <a:t> </a:t>
+            </a:r>
+            <a:r>
+              <a:rPr sz="2700" b="1" dirty="0" err="1">
+                <a:solidFill>
+                  <a:srgbClr val="0F2C68"/>
+                </a:solidFill>
+                <a:latin typeface="HSE Sans"/>
+              </a:rPr>
+              <a:t>об</a:t>
+            </a:r>
+            <a:r>
+              <a:rPr sz="2700" b="1" dirty="0">
+                <a:solidFill>
+                  <a:srgbClr val="0F2C68"/>
+                </a:solidFill>
+                <a:latin typeface="HSE Sans"/>
+              </a:rPr>
+              <a:t> IT-</a:t>
+            </a:r>
+            <a:r>
+              <a:rPr sz="2700" b="1" dirty="0" err="1">
+                <a:solidFill>
+                  <a:srgbClr val="0F2C68"/>
+                </a:solidFill>
+                <a:latin typeface="HSE Sans"/>
+              </a:rPr>
+              <a:t>событиях</a:t>
+            </a:r>
+            <a:r>
+              <a:rPr sz="2700" b="1" dirty="0">
+                <a:solidFill>
+                  <a:srgbClr val="0F2C68"/>
+                </a:solidFill>
+                <a:latin typeface="HSE Sans"/>
+              </a:rPr>
+              <a:t> </a:t>
+            </a:r>
+            <a:r>
+              <a:rPr sz="2700" b="1" dirty="0" err="1">
+                <a:solidFill>
+                  <a:srgbClr val="0F2C68"/>
+                </a:solidFill>
+                <a:latin typeface="HSE Sans"/>
+              </a:rPr>
+              <a:t>и</a:t>
+            </a:r>
+            <a:r>
+              <a:rPr sz="2700" b="1" dirty="0">
+                <a:solidFill>
+                  <a:srgbClr val="0F2C68"/>
+                </a:solidFill>
+                <a:latin typeface="HSE Sans"/>
+              </a:rPr>
+              <a:t> </a:t>
+            </a:r>
+            <a:r>
+              <a:rPr sz="2700" b="1" dirty="0" err="1">
+                <a:solidFill>
+                  <a:srgbClr val="0F2C68"/>
+                </a:solidFill>
+                <a:latin typeface="HSE Sans"/>
+              </a:rPr>
+              <a:t>выдачи</a:t>
+            </a:r>
+            <a:r>
+              <a:rPr sz="2700" b="1" dirty="0">
+                <a:solidFill>
+                  <a:srgbClr val="0F2C68"/>
+                </a:solidFill>
+                <a:latin typeface="HSE Sans"/>
+              </a:rPr>
+              <a:t> </a:t>
+            </a:r>
+            <a:r>
+              <a:rPr sz="2700" b="1" dirty="0" err="1">
+                <a:solidFill>
+                  <a:srgbClr val="0F2C68"/>
+                </a:solidFill>
+                <a:latin typeface="HSE Sans"/>
+              </a:rPr>
+              <a:t>персональных</a:t>
+            </a:r>
+            <a:r>
+              <a:rPr sz="2700" b="1" dirty="0">
+                <a:solidFill>
+                  <a:srgbClr val="0F2C68"/>
+                </a:solidFill>
+                <a:latin typeface="HSE Sans"/>
+              </a:rPr>
+              <a:t> </a:t>
+            </a:r>
+            <a:r>
+              <a:rPr sz="2700" b="1" dirty="0" err="1">
+                <a:solidFill>
+                  <a:srgbClr val="0F2C68"/>
+                </a:solidFill>
+                <a:latin typeface="HSE Sans"/>
+              </a:rPr>
+              <a:t>рекомендаций</a:t>
+            </a:r>
+            <a:r>
+              <a:rPr sz="2700" b="1" dirty="0">
+                <a:solidFill>
+                  <a:srgbClr val="0F2C68"/>
+                </a:solidFill>
+                <a:latin typeface="HSE Sans"/>
+              </a:rPr>
+              <a:t> </a:t>
+            </a:r>
+            <a:r>
+              <a:rPr sz="2700" b="1" dirty="0" err="1">
+                <a:solidFill>
+                  <a:srgbClr val="0F2C68"/>
+                </a:solidFill>
+                <a:latin typeface="HSE Sans"/>
+              </a:rPr>
+              <a:t>на</a:t>
+            </a:r>
+            <a:r>
+              <a:rPr sz="2700" b="1" dirty="0">
+                <a:solidFill>
+                  <a:srgbClr val="0F2C68"/>
+                </a:solidFill>
+                <a:latin typeface="HSE Sans"/>
+              </a:rPr>
+              <a:t> </a:t>
+            </a:r>
+            <a:r>
+              <a:rPr sz="2700" b="1" dirty="0" err="1">
+                <a:solidFill>
+                  <a:srgbClr val="0F2C68"/>
+                </a:solidFill>
+                <a:latin typeface="HSE Sans"/>
+              </a:rPr>
+              <a:t>основе</a:t>
+            </a:r>
+            <a:r>
+              <a:rPr sz="2700" b="1" dirty="0">
+                <a:solidFill>
+                  <a:srgbClr val="0F2C68"/>
+                </a:solidFill>
+                <a:latin typeface="HSE Sans"/>
+              </a:rPr>
+              <a:t> </a:t>
+            </a:r>
+            <a:r>
+              <a:rPr sz="2700" b="1" dirty="0" err="1">
+                <a:solidFill>
+                  <a:srgbClr val="0F2C68"/>
+                </a:solidFill>
+                <a:latin typeface="HSE Sans"/>
+              </a:rPr>
+              <a:t>модели</a:t>
+            </a:r>
+            <a:r>
+              <a:rPr sz="2700" b="1" dirty="0">
+                <a:solidFill>
+                  <a:srgbClr val="0F2C68"/>
+                </a:solidFill>
+                <a:latin typeface="HSE Sans"/>
+              </a:rPr>
+              <a:t> </a:t>
+            </a:r>
+            <a:r>
+              <a:rPr sz="2700" b="1" dirty="0" err="1">
+                <a:solidFill>
+                  <a:srgbClr val="0F2C68"/>
+                </a:solidFill>
+                <a:latin typeface="HSE Sans"/>
+              </a:rPr>
+              <a:t>пользователя</a:t>
+            </a:r>
+            <a:endParaRPr sz="2700" b="1" dirty="0">
+              <a:solidFill>
+                <a:srgbClr val="0F2C68"/>
+              </a:solidFill>
+              <a:latin typeface="HSE Sans"/>
+            </a:endParaRPr>
           </a:p>
         </p:txBody>
       </p:sp>
@@ -3451,30 +6693,6 @@
           <p:nvPr/>
         </p:nvPicPr>
         <p:blipFill>
-          <a:blip r:embed="rId2"/>
-          <a:stretch>
-            <a:fillRect/>
-          </a:stretch>
-        </p:blipFill>
-        <p:spPr>
-          <a:xfrm>
-            <a:off x="0" y="0"/>
-            <a:ext cx="12191695" cy="6858000"/>
-          </a:xfrm>
-          <a:prstGeom prst="rect">
-            <a:avLst/>
-          </a:prstGeom>
-        </p:spPr>
-      </p:pic>
-      <p:pic>
-        <p:nvPicPr>
-          <p:cNvPr id="3" name="Picture 2" descr="logo_mono.png"/>
-          <p:cNvPicPr>
-            <a:picLocks noChangeAspect="1"/>
-          </p:cNvPicPr>
-          <p:nvPr/>
-        </p:nvPicPr>
-        <p:blipFill>
           <a:blip r:embed="rId3"/>
           <a:stretch>
             <a:fillRect/>
@@ -3482,155 +6700,17 @@
         </p:blipFill>
         <p:spPr>
           <a:xfrm>
-            <a:off x="475488" y="182880"/>
-            <a:ext cx="475488" cy="475488"/>
+            <a:off x="0" y="0"/>
+            <a:ext cx="12191695" cy="6858000"/>
           </a:xfrm>
           <a:prstGeom prst="rect">
             <a:avLst/>
           </a:prstGeom>
         </p:spPr>
       </p:pic>
-      <p:sp>
-        <p:nvSpPr>
-          <p:cNvPr id="4" name="TextBox 3"/>
-          <p:cNvSpPr txBox="1"/>
-          <p:nvPr/>
-        </p:nvSpPr>
-        <p:spPr>
-          <a:xfrm>
-            <a:off x="1097280" y="146304"/>
-            <a:ext cx="7680960" cy="676656"/>
-          </a:xfrm>
-          <a:prstGeom prst="rect">
-            <a:avLst/>
-          </a:prstGeom>
-          <a:noFill/>
-        </p:spPr>
-        <p:txBody>
-          <a:bodyPr wrap="square" anchor="ctr">
-            <a:spAutoFit/>
-          </a:bodyPr>
-          <a:lstStyle/>
-          <a:p>
-            <a:r>
-              <a:rPr sz="800" b="1">
-                <a:solidFill>
-                  <a:srgbClr val="0F2C68"/>
-                </a:solidFill>
-                <a:latin typeface="HSE Sans"/>
-              </a:rPr>
-              <a:t>Разработка приложения для агрегации информации об IT-событиях и выдачи персональных рекомендаций на основе модели пользователя</a:t>
-            </a:r>
-          </a:p>
-        </p:txBody>
-      </p:sp>
-      <p:sp>
-        <p:nvSpPr>
-          <p:cNvPr id="5" name="TextBox 4"/>
-          <p:cNvSpPr txBox="1"/>
-          <p:nvPr/>
-        </p:nvSpPr>
-        <p:spPr>
-          <a:xfrm>
-            <a:off x="8915400" y="146304"/>
-            <a:ext cx="2057400" cy="676656"/>
-          </a:xfrm>
-          <a:prstGeom prst="rect">
-            <a:avLst/>
-          </a:prstGeom>
-          <a:noFill/>
-        </p:spPr>
-        <p:txBody>
-          <a:bodyPr wrap="square" anchor="ctr">
-            <a:spAutoFit/>
-          </a:bodyPr>
-          <a:lstStyle/>
-          <a:p>
-            <a:pPr algn="r"/>
-            <a:r>
-              <a:rPr sz="800">
-                <a:solidFill>
-                  <a:srgbClr val="595959"/>
-                </a:solidFill>
-                <a:latin typeface="HSE Sans"/>
-              </a:rPr>
-              <a:t>Защита курсовой, 2026</a:t>
-            </a:r>
-          </a:p>
-        </p:txBody>
-      </p:sp>
-      <p:sp>
-        <p:nvSpPr>
-          <p:cNvPr id="6" name="TextBox 5"/>
-          <p:cNvSpPr txBox="1"/>
-          <p:nvPr/>
-        </p:nvSpPr>
-        <p:spPr>
-          <a:xfrm>
-            <a:off x="11018520" y="146304"/>
-            <a:ext cx="777240" cy="676656"/>
-          </a:xfrm>
-          <a:prstGeom prst="rect">
-            <a:avLst/>
-          </a:prstGeom>
-          <a:noFill/>
-        </p:spPr>
-        <p:txBody>
-          <a:bodyPr wrap="square" anchor="ctr">
-            <a:spAutoFit/>
-          </a:bodyPr>
-          <a:lstStyle/>
-          <a:p>
-            <a:pPr algn="r"/>
-            <a:r>
-              <a:rPr sz="950" b="1">
-                <a:solidFill>
-                  <a:srgbClr val="0F2C68"/>
-                </a:solidFill>
-                <a:latin typeface="HSE Sans"/>
-              </a:rPr>
-              <a:t>10 / 20</a:t>
-            </a:r>
-          </a:p>
-        </p:txBody>
-      </p:sp>
-      <p:sp>
-        <p:nvSpPr>
-          <p:cNvPr id="7" name="TextBox 6"/>
-          <p:cNvSpPr txBox="1"/>
-          <p:nvPr/>
-        </p:nvSpPr>
-        <p:spPr>
-          <a:xfrm>
-            <a:off x="502920" y="914400"/>
-            <a:ext cx="11247120" cy="777240"/>
-          </a:xfrm>
-          <a:prstGeom prst="rect">
-            <a:avLst/>
-          </a:prstGeom>
-          <a:noFill/>
-        </p:spPr>
-        <p:txBody>
-          <a:bodyPr wrap="square" anchor="ctr">
-            <a:spAutoFit/>
-          </a:bodyPr>
-          <a:lstStyle/>
-          <a:p>
-            <a:r>
-              <a:rPr sz="3000" b="1">
-                <a:solidFill>
-                  <a:srgbClr val="0F2C68"/>
-                </a:solidFill>
-                <a:latin typeface="HSE Sans"/>
-              </a:rPr>
-              <a:t>Архитектура: серверная часть</a:t>
-            </a:r>
-          </a:p>
-        </p:txBody>
-      </p:sp>
       <p:pic>
         <p:nvPicPr>
-          <p:cNvPr id="8" name="Picture 7" descr="03_c4_containers.png"/>
+          <p:cNvPr id="3" name="Picture 2" descr="logo_mono.png"/>
           <p:cNvPicPr>
             <a:picLocks noChangeAspect="1"/>
           </p:cNvPicPr>
@@ -3644,6 +6724,168 @@
         </p:blipFill>
         <p:spPr>
           <a:xfrm>
+            <a:off x="475488" y="182880"/>
+            <a:ext cx="475488" cy="475488"/>
+          </a:xfrm>
+          <a:prstGeom prst="rect">
+            <a:avLst/>
+          </a:prstGeom>
+        </p:spPr>
+      </p:pic>
+      <p:sp>
+        <p:nvSpPr>
+          <p:cNvPr id="4" name="TextBox 3"/>
+          <p:cNvSpPr txBox="1"/>
+          <p:nvPr/>
+        </p:nvSpPr>
+        <p:spPr>
+          <a:xfrm>
+            <a:off x="1097280" y="146304"/>
+            <a:ext cx="7680960" cy="676656"/>
+          </a:xfrm>
+          <a:prstGeom prst="rect">
+            <a:avLst/>
+          </a:prstGeom>
+          <a:noFill/>
+        </p:spPr>
+        <p:txBody>
+          <a:bodyPr wrap="square" anchor="ctr">
+            <a:spAutoFit/>
+          </a:bodyPr>
+          <a:lstStyle/>
+          <a:p>
+            <a:r>
+              <a:rPr sz="800" b="1">
+                <a:solidFill>
+                  <a:srgbClr val="0F2C68"/>
+                </a:solidFill>
+                <a:latin typeface="HSE Sans"/>
+              </a:rPr>
+              <a:t>Разработка приложения для агрегации информации об IT-событиях и выдачи персональных рекомендаций на основе модели пользователя</a:t>
+            </a:r>
+          </a:p>
+        </p:txBody>
+      </p:sp>
+      <p:sp>
+        <p:nvSpPr>
+          <p:cNvPr id="5" name="TextBox 4"/>
+          <p:cNvSpPr txBox="1"/>
+          <p:nvPr/>
+        </p:nvSpPr>
+        <p:spPr>
+          <a:xfrm>
+            <a:off x="8915400" y="146304"/>
+            <a:ext cx="2057400" cy="676656"/>
+          </a:xfrm>
+          <a:prstGeom prst="rect">
+            <a:avLst/>
+          </a:prstGeom>
+          <a:noFill/>
+        </p:spPr>
+        <p:txBody>
+          <a:bodyPr wrap="square" anchor="ctr">
+            <a:spAutoFit/>
+          </a:bodyPr>
+          <a:lstStyle/>
+          <a:p>
+            <a:pPr algn="r"/>
+            <a:r>
+              <a:rPr sz="800">
+                <a:solidFill>
+                  <a:srgbClr val="595959"/>
+                </a:solidFill>
+                <a:latin typeface="HSE Sans"/>
+              </a:rPr>
+              <a:t>Защита курсовой, 2026</a:t>
+            </a:r>
+          </a:p>
+        </p:txBody>
+      </p:sp>
+      <p:sp>
+        <p:nvSpPr>
+          <p:cNvPr id="6" name="TextBox 5"/>
+          <p:cNvSpPr txBox="1"/>
+          <p:nvPr/>
+        </p:nvSpPr>
+        <p:spPr>
+          <a:xfrm>
+            <a:off x="11018520" y="146304"/>
+            <a:ext cx="777240" cy="676656"/>
+          </a:xfrm>
+          <a:prstGeom prst="rect">
+            <a:avLst/>
+          </a:prstGeom>
+          <a:noFill/>
+        </p:spPr>
+        <p:txBody>
+          <a:bodyPr wrap="square" anchor="ctr">
+            <a:spAutoFit/>
+          </a:bodyPr>
+          <a:lstStyle/>
+          <a:p>
+            <a:pPr algn="r"/>
+            <a:r>
+              <a:rPr sz="950" b="1">
+                <a:solidFill>
+                  <a:srgbClr val="0F2C68"/>
+                </a:solidFill>
+                <a:latin typeface="HSE Sans"/>
+              </a:rPr>
+              <a:t>10 / 20</a:t>
+            </a:r>
+          </a:p>
+        </p:txBody>
+      </p:sp>
+      <p:sp>
+        <p:nvSpPr>
+          <p:cNvPr id="7" name="TextBox 6"/>
+          <p:cNvSpPr txBox="1"/>
+          <p:nvPr/>
+        </p:nvSpPr>
+        <p:spPr>
+          <a:xfrm>
+            <a:off x="502920" y="914400"/>
+            <a:ext cx="11247120" cy="777240"/>
+          </a:xfrm>
+          <a:prstGeom prst="rect">
+            <a:avLst/>
+          </a:prstGeom>
+          <a:noFill/>
+        </p:spPr>
+        <p:txBody>
+          <a:bodyPr wrap="square" anchor="ctr">
+            <a:spAutoFit/>
+          </a:bodyPr>
+          <a:lstStyle/>
+          <a:p>
+            <a:r>
+              <a:rPr sz="3000" b="1">
+                <a:solidFill>
+                  <a:srgbClr val="0F2C68"/>
+                </a:solidFill>
+                <a:latin typeface="HSE Sans"/>
+              </a:rPr>
+              <a:t>Архитектура: серверная часть</a:t>
+            </a:r>
+          </a:p>
+        </p:txBody>
+      </p:sp>
+      <p:pic>
+        <p:nvPicPr>
+          <p:cNvPr id="8" name="Picture 7" descr="03_c4_containers.png"/>
+          <p:cNvPicPr>
+            <a:picLocks noChangeAspect="1"/>
+          </p:cNvPicPr>
+          <p:nvPr/>
+        </p:nvPicPr>
+        <p:blipFill>
+          <a:blip r:embed="rId5"/>
+          <a:stretch>
+            <a:fillRect/>
+          </a:stretch>
+        </p:blipFill>
+        <p:spPr>
+          <a:xfrm>
             <a:off x="957045" y="1554480"/>
             <a:ext cx="4120948" cy="4846320"/>
           </a:xfrm>
@@ -3661,7 +6903,7 @@
           <p:nvPr/>
         </p:nvPicPr>
         <p:blipFill>
-          <a:blip r:embed="rId5"/>
+          <a:blip r:embed="rId6"/>
           <a:stretch>
             <a:fillRect/>
           </a:stretch>
@@ -3745,30 +6987,6 @@
           <p:nvPr/>
         </p:nvPicPr>
         <p:blipFill>
-          <a:blip r:embed="rId2"/>
-          <a:stretch>
-            <a:fillRect/>
-          </a:stretch>
-        </p:blipFill>
-        <p:spPr>
-          <a:xfrm>
-            <a:off x="0" y="0"/>
-            <a:ext cx="12191695" cy="6858000"/>
-          </a:xfrm>
-          <a:prstGeom prst="rect">
-            <a:avLst/>
-          </a:prstGeom>
-        </p:spPr>
-      </p:pic>
-      <p:pic>
-        <p:nvPicPr>
-          <p:cNvPr id="3" name="Picture 2" descr="logo_mono.png"/>
-          <p:cNvPicPr>
-            <a:picLocks noChangeAspect="1"/>
-          </p:cNvPicPr>
-          <p:nvPr/>
-        </p:nvPicPr>
-        <p:blipFill>
           <a:blip r:embed="rId3"/>
           <a:stretch>
             <a:fillRect/>
@@ -3776,155 +6994,17 @@
         </p:blipFill>
         <p:spPr>
           <a:xfrm>
-            <a:off x="475488" y="182880"/>
-            <a:ext cx="475488" cy="475488"/>
+            <a:off x="0" y="0"/>
+            <a:ext cx="12191695" cy="6858000"/>
           </a:xfrm>
           <a:prstGeom prst="rect">
             <a:avLst/>
           </a:prstGeom>
         </p:spPr>
       </p:pic>
-      <p:sp>
-        <p:nvSpPr>
-          <p:cNvPr id="4" name="TextBox 3"/>
-          <p:cNvSpPr txBox="1"/>
-          <p:nvPr/>
-        </p:nvSpPr>
-        <p:spPr>
-          <a:xfrm>
-            <a:off x="1097280" y="146304"/>
-            <a:ext cx="7680960" cy="676656"/>
-          </a:xfrm>
-          <a:prstGeom prst="rect">
-            <a:avLst/>
-          </a:prstGeom>
-          <a:noFill/>
-        </p:spPr>
-        <p:txBody>
-          <a:bodyPr wrap="square" anchor="ctr">
-            <a:spAutoFit/>
-          </a:bodyPr>
-          <a:lstStyle/>
-          <a:p>
-            <a:r>
-              <a:rPr sz="800" b="1">
-                <a:solidFill>
-                  <a:srgbClr val="0F2C68"/>
-                </a:solidFill>
-                <a:latin typeface="HSE Sans"/>
-              </a:rPr>
-              <a:t>Разработка приложения для агрегации информации об IT-событиях и выдачи персональных рекомендаций на основе модели пользователя</a:t>
-            </a:r>
-          </a:p>
-        </p:txBody>
-      </p:sp>
-      <p:sp>
-        <p:nvSpPr>
-          <p:cNvPr id="5" name="TextBox 4"/>
-          <p:cNvSpPr txBox="1"/>
-          <p:nvPr/>
-        </p:nvSpPr>
-        <p:spPr>
-          <a:xfrm>
-            <a:off x="8915400" y="146304"/>
-            <a:ext cx="2057400" cy="676656"/>
-          </a:xfrm>
-          <a:prstGeom prst="rect">
-            <a:avLst/>
-          </a:prstGeom>
-          <a:noFill/>
-        </p:spPr>
-        <p:txBody>
-          <a:bodyPr wrap="square" anchor="ctr">
-            <a:spAutoFit/>
-          </a:bodyPr>
-          <a:lstStyle/>
-          <a:p>
-            <a:pPr algn="r"/>
-            <a:r>
-              <a:rPr sz="800">
-                <a:solidFill>
-                  <a:srgbClr val="595959"/>
-                </a:solidFill>
-                <a:latin typeface="HSE Sans"/>
-              </a:rPr>
-              <a:t>Защита курсовой, 2026</a:t>
-            </a:r>
-          </a:p>
-        </p:txBody>
-      </p:sp>
-      <p:sp>
-        <p:nvSpPr>
-          <p:cNvPr id="6" name="TextBox 5"/>
-          <p:cNvSpPr txBox="1"/>
-          <p:nvPr/>
-        </p:nvSpPr>
-        <p:spPr>
-          <a:xfrm>
-            <a:off x="11018520" y="146304"/>
-            <a:ext cx="777240" cy="676656"/>
-          </a:xfrm>
-          <a:prstGeom prst="rect">
-            <a:avLst/>
-          </a:prstGeom>
-          <a:noFill/>
-        </p:spPr>
-        <p:txBody>
-          <a:bodyPr wrap="square" anchor="ctr">
-            <a:spAutoFit/>
-          </a:bodyPr>
-          <a:lstStyle/>
-          <a:p>
-            <a:pPr algn="r"/>
-            <a:r>
-              <a:rPr sz="950" b="1">
-                <a:solidFill>
-                  <a:srgbClr val="0F2C68"/>
-                </a:solidFill>
-                <a:latin typeface="HSE Sans"/>
-              </a:rPr>
-              <a:t>11 / 20</a:t>
-            </a:r>
-          </a:p>
-        </p:txBody>
-      </p:sp>
-      <p:sp>
-        <p:nvSpPr>
-          <p:cNvPr id="7" name="TextBox 6"/>
-          <p:cNvSpPr txBox="1"/>
-          <p:nvPr/>
-        </p:nvSpPr>
-        <p:spPr>
-          <a:xfrm>
-            <a:off x="502920" y="914400"/>
-            <a:ext cx="11247120" cy="777240"/>
-          </a:xfrm>
-          <a:prstGeom prst="rect">
-            <a:avLst/>
-          </a:prstGeom>
-          <a:noFill/>
-        </p:spPr>
-        <p:txBody>
-          <a:bodyPr wrap="square" anchor="ctr">
-            <a:spAutoFit/>
-          </a:bodyPr>
-          <a:lstStyle/>
-          <a:p>
-            <a:r>
-              <a:rPr sz="3000" b="1">
-                <a:solidFill>
-                  <a:srgbClr val="0F2C68"/>
-                </a:solidFill>
-                <a:latin typeface="HSE Sans"/>
-              </a:rPr>
-              <a:t>Архитектура: Telegram-бот</a:t>
-            </a:r>
-          </a:p>
-        </p:txBody>
-      </p:sp>
       <p:pic>
         <p:nvPicPr>
-          <p:cNvPr id="8" name="Picture 7" descr="03_c4_containers.png"/>
+          <p:cNvPr id="3" name="Picture 2" descr="logo_mono.png"/>
           <p:cNvPicPr>
             <a:picLocks noChangeAspect="1"/>
           </p:cNvPicPr>
@@ -3938,6 +7018,168 @@
         </p:blipFill>
         <p:spPr>
           <a:xfrm>
+            <a:off x="475488" y="182880"/>
+            <a:ext cx="475488" cy="475488"/>
+          </a:xfrm>
+          <a:prstGeom prst="rect">
+            <a:avLst/>
+          </a:prstGeom>
+        </p:spPr>
+      </p:pic>
+      <p:sp>
+        <p:nvSpPr>
+          <p:cNvPr id="4" name="TextBox 3"/>
+          <p:cNvSpPr txBox="1"/>
+          <p:nvPr/>
+        </p:nvSpPr>
+        <p:spPr>
+          <a:xfrm>
+            <a:off x="1097280" y="146304"/>
+            <a:ext cx="7680960" cy="676656"/>
+          </a:xfrm>
+          <a:prstGeom prst="rect">
+            <a:avLst/>
+          </a:prstGeom>
+          <a:noFill/>
+        </p:spPr>
+        <p:txBody>
+          <a:bodyPr wrap="square" anchor="ctr">
+            <a:spAutoFit/>
+          </a:bodyPr>
+          <a:lstStyle/>
+          <a:p>
+            <a:r>
+              <a:rPr sz="800" b="1">
+                <a:solidFill>
+                  <a:srgbClr val="0F2C68"/>
+                </a:solidFill>
+                <a:latin typeface="HSE Sans"/>
+              </a:rPr>
+              <a:t>Разработка приложения для агрегации информации об IT-событиях и выдачи персональных рекомендаций на основе модели пользователя</a:t>
+            </a:r>
+          </a:p>
+        </p:txBody>
+      </p:sp>
+      <p:sp>
+        <p:nvSpPr>
+          <p:cNvPr id="5" name="TextBox 4"/>
+          <p:cNvSpPr txBox="1"/>
+          <p:nvPr/>
+        </p:nvSpPr>
+        <p:spPr>
+          <a:xfrm>
+            <a:off x="8915400" y="146304"/>
+            <a:ext cx="2057400" cy="676656"/>
+          </a:xfrm>
+          <a:prstGeom prst="rect">
+            <a:avLst/>
+          </a:prstGeom>
+          <a:noFill/>
+        </p:spPr>
+        <p:txBody>
+          <a:bodyPr wrap="square" anchor="ctr">
+            <a:spAutoFit/>
+          </a:bodyPr>
+          <a:lstStyle/>
+          <a:p>
+            <a:pPr algn="r"/>
+            <a:r>
+              <a:rPr sz="800">
+                <a:solidFill>
+                  <a:srgbClr val="595959"/>
+                </a:solidFill>
+                <a:latin typeface="HSE Sans"/>
+              </a:rPr>
+              <a:t>Защита курсовой, 2026</a:t>
+            </a:r>
+          </a:p>
+        </p:txBody>
+      </p:sp>
+      <p:sp>
+        <p:nvSpPr>
+          <p:cNvPr id="6" name="TextBox 5"/>
+          <p:cNvSpPr txBox="1"/>
+          <p:nvPr/>
+        </p:nvSpPr>
+        <p:spPr>
+          <a:xfrm>
+            <a:off x="11018520" y="146304"/>
+            <a:ext cx="777240" cy="676656"/>
+          </a:xfrm>
+          <a:prstGeom prst="rect">
+            <a:avLst/>
+          </a:prstGeom>
+          <a:noFill/>
+        </p:spPr>
+        <p:txBody>
+          <a:bodyPr wrap="square" anchor="ctr">
+            <a:spAutoFit/>
+          </a:bodyPr>
+          <a:lstStyle/>
+          <a:p>
+            <a:pPr algn="r"/>
+            <a:r>
+              <a:rPr sz="950" b="1">
+                <a:solidFill>
+                  <a:srgbClr val="0F2C68"/>
+                </a:solidFill>
+                <a:latin typeface="HSE Sans"/>
+              </a:rPr>
+              <a:t>11 / 20</a:t>
+            </a:r>
+          </a:p>
+        </p:txBody>
+      </p:sp>
+      <p:sp>
+        <p:nvSpPr>
+          <p:cNvPr id="7" name="TextBox 6"/>
+          <p:cNvSpPr txBox="1"/>
+          <p:nvPr/>
+        </p:nvSpPr>
+        <p:spPr>
+          <a:xfrm>
+            <a:off x="502920" y="914400"/>
+            <a:ext cx="11247120" cy="777240"/>
+          </a:xfrm>
+          <a:prstGeom prst="rect">
+            <a:avLst/>
+          </a:prstGeom>
+          <a:noFill/>
+        </p:spPr>
+        <p:txBody>
+          <a:bodyPr wrap="square" anchor="ctr">
+            <a:spAutoFit/>
+          </a:bodyPr>
+          <a:lstStyle/>
+          <a:p>
+            <a:r>
+              <a:rPr sz="3000" b="1">
+                <a:solidFill>
+                  <a:srgbClr val="0F2C68"/>
+                </a:solidFill>
+                <a:latin typeface="HSE Sans"/>
+              </a:rPr>
+              <a:t>Архитектура: Telegram-бот</a:t>
+            </a:r>
+          </a:p>
+        </p:txBody>
+      </p:sp>
+      <p:pic>
+        <p:nvPicPr>
+          <p:cNvPr id="8" name="Picture 7" descr="03_c4_containers.png"/>
+          <p:cNvPicPr>
+            <a:picLocks noChangeAspect="1"/>
+          </p:cNvPicPr>
+          <p:nvPr/>
+        </p:nvPicPr>
+        <p:blipFill>
+          <a:blip r:embed="rId5"/>
+          <a:stretch>
+            <a:fillRect/>
+          </a:stretch>
+        </p:blipFill>
+        <p:spPr>
+          <a:xfrm>
             <a:off x="957045" y="1554480"/>
             <a:ext cx="4120948" cy="4846320"/>
           </a:xfrm>
@@ -3955,7 +7197,7 @@
           <p:nvPr/>
         </p:nvPicPr>
         <p:blipFill>
-          <a:blip r:embed="rId5"/>
+          <a:blip r:embed="rId6"/>
           <a:stretch>
             <a:fillRect/>
           </a:stretch>
@@ -4039,30 +7281,6 @@
           <p:nvPr/>
         </p:nvPicPr>
         <p:blipFill>
-          <a:blip r:embed="rId2"/>
-          <a:stretch>
-            <a:fillRect/>
-          </a:stretch>
-        </p:blipFill>
-        <p:spPr>
-          <a:xfrm>
-            <a:off x="0" y="0"/>
-            <a:ext cx="12191695" cy="6858000"/>
-          </a:xfrm>
-          <a:prstGeom prst="rect">
-            <a:avLst/>
-          </a:prstGeom>
-        </p:spPr>
-      </p:pic>
-      <p:pic>
-        <p:nvPicPr>
-          <p:cNvPr id="3" name="Picture 2" descr="logo_mono.png"/>
-          <p:cNvPicPr>
-            <a:picLocks noChangeAspect="1"/>
-          </p:cNvPicPr>
-          <p:nvPr/>
-        </p:nvPicPr>
-        <p:blipFill>
           <a:blip r:embed="rId3"/>
           <a:stretch>
             <a:fillRect/>
@@ -4070,155 +7288,17 @@
         </p:blipFill>
         <p:spPr>
           <a:xfrm>
-            <a:off x="475488" y="182880"/>
-            <a:ext cx="475488" cy="475488"/>
+            <a:off x="0" y="0"/>
+            <a:ext cx="12191695" cy="6858000"/>
           </a:xfrm>
           <a:prstGeom prst="rect">
             <a:avLst/>
           </a:prstGeom>
         </p:spPr>
       </p:pic>
-      <p:sp>
-        <p:nvSpPr>
-          <p:cNvPr id="4" name="TextBox 3"/>
-          <p:cNvSpPr txBox="1"/>
-          <p:nvPr/>
-        </p:nvSpPr>
-        <p:spPr>
-          <a:xfrm>
-            <a:off x="1097280" y="146304"/>
-            <a:ext cx="7680960" cy="676656"/>
-          </a:xfrm>
-          <a:prstGeom prst="rect">
-            <a:avLst/>
-          </a:prstGeom>
-          <a:noFill/>
-        </p:spPr>
-        <p:txBody>
-          <a:bodyPr wrap="square" anchor="ctr">
-            <a:spAutoFit/>
-          </a:bodyPr>
-          <a:lstStyle/>
-          <a:p>
-            <a:r>
-              <a:rPr sz="800" b="1">
-                <a:solidFill>
-                  <a:srgbClr val="0F2C68"/>
-                </a:solidFill>
-                <a:latin typeface="HSE Sans"/>
-              </a:rPr>
-              <a:t>Разработка приложения для агрегации информации об IT-событиях и выдачи персональных рекомендаций на основе модели пользователя</a:t>
-            </a:r>
-          </a:p>
-        </p:txBody>
-      </p:sp>
-      <p:sp>
-        <p:nvSpPr>
-          <p:cNvPr id="5" name="TextBox 4"/>
-          <p:cNvSpPr txBox="1"/>
-          <p:nvPr/>
-        </p:nvSpPr>
-        <p:spPr>
-          <a:xfrm>
-            <a:off x="8915400" y="146304"/>
-            <a:ext cx="2057400" cy="676656"/>
-          </a:xfrm>
-          <a:prstGeom prst="rect">
-            <a:avLst/>
-          </a:prstGeom>
-          <a:noFill/>
-        </p:spPr>
-        <p:txBody>
-          <a:bodyPr wrap="square" anchor="ctr">
-            <a:spAutoFit/>
-          </a:bodyPr>
-          <a:lstStyle/>
-          <a:p>
-            <a:pPr algn="r"/>
-            <a:r>
-              <a:rPr sz="800">
-                <a:solidFill>
-                  <a:srgbClr val="595959"/>
-                </a:solidFill>
-                <a:latin typeface="HSE Sans"/>
-              </a:rPr>
-              <a:t>Защита курсовой, 2026</a:t>
-            </a:r>
-          </a:p>
-        </p:txBody>
-      </p:sp>
-      <p:sp>
-        <p:nvSpPr>
-          <p:cNvPr id="6" name="TextBox 5"/>
-          <p:cNvSpPr txBox="1"/>
-          <p:nvPr/>
-        </p:nvSpPr>
-        <p:spPr>
-          <a:xfrm>
-            <a:off x="11018520" y="146304"/>
-            <a:ext cx="777240" cy="676656"/>
-          </a:xfrm>
-          <a:prstGeom prst="rect">
-            <a:avLst/>
-          </a:prstGeom>
-          <a:noFill/>
-        </p:spPr>
-        <p:txBody>
-          <a:bodyPr wrap="square" anchor="ctr">
-            <a:spAutoFit/>
-          </a:bodyPr>
-          <a:lstStyle/>
-          <a:p>
-            <a:pPr algn="r"/>
-            <a:r>
-              <a:rPr sz="950" b="1">
-                <a:solidFill>
-                  <a:srgbClr val="0F2C68"/>
-                </a:solidFill>
-                <a:latin typeface="HSE Sans"/>
-              </a:rPr>
-              <a:t>12 / 20</a:t>
-            </a:r>
-          </a:p>
-        </p:txBody>
-      </p:sp>
-      <p:sp>
-        <p:nvSpPr>
-          <p:cNvPr id="7" name="TextBox 6"/>
-          <p:cNvSpPr txBox="1"/>
-          <p:nvPr/>
-        </p:nvSpPr>
-        <p:spPr>
-          <a:xfrm>
-            <a:off x="502920" y="914400"/>
-            <a:ext cx="11247120" cy="777240"/>
-          </a:xfrm>
-          <a:prstGeom prst="rect">
-            <a:avLst/>
-          </a:prstGeom>
-          <a:noFill/>
-        </p:spPr>
-        <p:txBody>
-          <a:bodyPr wrap="square" anchor="ctr">
-            <a:spAutoFit/>
-          </a:bodyPr>
-          <a:lstStyle/>
-          <a:p>
-            <a:r>
-              <a:rPr sz="3000" b="1">
-                <a:solidFill>
-                  <a:srgbClr val="0F2C68"/>
-                </a:solidFill>
-                <a:latin typeface="HSE Sans"/>
-              </a:rPr>
-              <a:t>Архитектура: планировщик</a:t>
-            </a:r>
-          </a:p>
-        </p:txBody>
-      </p:sp>
       <p:pic>
         <p:nvPicPr>
-          <p:cNvPr id="8" name="Picture 7" descr="03_c4_containers.png"/>
+          <p:cNvPr id="3" name="Picture 2" descr="logo_mono.png"/>
           <p:cNvPicPr>
             <a:picLocks noChangeAspect="1"/>
           </p:cNvPicPr>
@@ -4232,6 +7312,168 @@
         </p:blipFill>
         <p:spPr>
           <a:xfrm>
+            <a:off x="475488" y="182880"/>
+            <a:ext cx="475488" cy="475488"/>
+          </a:xfrm>
+          <a:prstGeom prst="rect">
+            <a:avLst/>
+          </a:prstGeom>
+        </p:spPr>
+      </p:pic>
+      <p:sp>
+        <p:nvSpPr>
+          <p:cNvPr id="4" name="TextBox 3"/>
+          <p:cNvSpPr txBox="1"/>
+          <p:nvPr/>
+        </p:nvSpPr>
+        <p:spPr>
+          <a:xfrm>
+            <a:off x="1097280" y="146304"/>
+            <a:ext cx="7680960" cy="676656"/>
+          </a:xfrm>
+          <a:prstGeom prst="rect">
+            <a:avLst/>
+          </a:prstGeom>
+          <a:noFill/>
+        </p:spPr>
+        <p:txBody>
+          <a:bodyPr wrap="square" anchor="ctr">
+            <a:spAutoFit/>
+          </a:bodyPr>
+          <a:lstStyle/>
+          <a:p>
+            <a:r>
+              <a:rPr sz="800" b="1">
+                <a:solidFill>
+                  <a:srgbClr val="0F2C68"/>
+                </a:solidFill>
+                <a:latin typeface="HSE Sans"/>
+              </a:rPr>
+              <a:t>Разработка приложения для агрегации информации об IT-событиях и выдачи персональных рекомендаций на основе модели пользователя</a:t>
+            </a:r>
+          </a:p>
+        </p:txBody>
+      </p:sp>
+      <p:sp>
+        <p:nvSpPr>
+          <p:cNvPr id="5" name="TextBox 4"/>
+          <p:cNvSpPr txBox="1"/>
+          <p:nvPr/>
+        </p:nvSpPr>
+        <p:spPr>
+          <a:xfrm>
+            <a:off x="8915400" y="146304"/>
+            <a:ext cx="2057400" cy="676656"/>
+          </a:xfrm>
+          <a:prstGeom prst="rect">
+            <a:avLst/>
+          </a:prstGeom>
+          <a:noFill/>
+        </p:spPr>
+        <p:txBody>
+          <a:bodyPr wrap="square" anchor="ctr">
+            <a:spAutoFit/>
+          </a:bodyPr>
+          <a:lstStyle/>
+          <a:p>
+            <a:pPr algn="r"/>
+            <a:r>
+              <a:rPr sz="800">
+                <a:solidFill>
+                  <a:srgbClr val="595959"/>
+                </a:solidFill>
+                <a:latin typeface="HSE Sans"/>
+              </a:rPr>
+              <a:t>Защита курсовой, 2026</a:t>
+            </a:r>
+          </a:p>
+        </p:txBody>
+      </p:sp>
+      <p:sp>
+        <p:nvSpPr>
+          <p:cNvPr id="6" name="TextBox 5"/>
+          <p:cNvSpPr txBox="1"/>
+          <p:nvPr/>
+        </p:nvSpPr>
+        <p:spPr>
+          <a:xfrm>
+            <a:off x="11018520" y="146304"/>
+            <a:ext cx="777240" cy="676656"/>
+          </a:xfrm>
+          <a:prstGeom prst="rect">
+            <a:avLst/>
+          </a:prstGeom>
+          <a:noFill/>
+        </p:spPr>
+        <p:txBody>
+          <a:bodyPr wrap="square" anchor="ctr">
+            <a:spAutoFit/>
+          </a:bodyPr>
+          <a:lstStyle/>
+          <a:p>
+            <a:pPr algn="r"/>
+            <a:r>
+              <a:rPr sz="950" b="1">
+                <a:solidFill>
+                  <a:srgbClr val="0F2C68"/>
+                </a:solidFill>
+                <a:latin typeface="HSE Sans"/>
+              </a:rPr>
+              <a:t>12 / 20</a:t>
+            </a:r>
+          </a:p>
+        </p:txBody>
+      </p:sp>
+      <p:sp>
+        <p:nvSpPr>
+          <p:cNvPr id="7" name="TextBox 6"/>
+          <p:cNvSpPr txBox="1"/>
+          <p:nvPr/>
+        </p:nvSpPr>
+        <p:spPr>
+          <a:xfrm>
+            <a:off x="502920" y="914400"/>
+            <a:ext cx="11247120" cy="777240"/>
+          </a:xfrm>
+          <a:prstGeom prst="rect">
+            <a:avLst/>
+          </a:prstGeom>
+          <a:noFill/>
+        </p:spPr>
+        <p:txBody>
+          <a:bodyPr wrap="square" anchor="ctr">
+            <a:spAutoFit/>
+          </a:bodyPr>
+          <a:lstStyle/>
+          <a:p>
+            <a:r>
+              <a:rPr sz="3000" b="1">
+                <a:solidFill>
+                  <a:srgbClr val="0F2C68"/>
+                </a:solidFill>
+                <a:latin typeface="HSE Sans"/>
+              </a:rPr>
+              <a:t>Архитектура: планировщик</a:t>
+            </a:r>
+          </a:p>
+        </p:txBody>
+      </p:sp>
+      <p:pic>
+        <p:nvPicPr>
+          <p:cNvPr id="8" name="Picture 7" descr="03_c4_containers.png"/>
+          <p:cNvPicPr>
+            <a:picLocks noChangeAspect="1"/>
+          </p:cNvPicPr>
+          <p:nvPr/>
+        </p:nvPicPr>
+        <p:blipFill>
+          <a:blip r:embed="rId5"/>
+          <a:stretch>
+            <a:fillRect/>
+          </a:stretch>
+        </p:blipFill>
+        <p:spPr>
+          <a:xfrm>
             <a:off x="957045" y="1554480"/>
             <a:ext cx="4120948" cy="4846320"/>
           </a:xfrm>
@@ -4249,7 +7491,7 @@
           <p:nvPr/>
         </p:nvPicPr>
         <p:blipFill>
-          <a:blip r:embed="rId5"/>
+          <a:blip r:embed="rId6"/>
           <a:stretch>
             <a:fillRect/>
           </a:stretch>
@@ -4333,7 +7575,7 @@
           <p:nvPr/>
         </p:nvPicPr>
         <p:blipFill>
-          <a:blip r:embed="rId2"/>
+          <a:blip r:embed="rId3"/>
           <a:stretch>
             <a:fillRect/>
           </a:stretch>
@@ -4357,7 +7599,7 @@
           <p:nvPr/>
         </p:nvPicPr>
         <p:blipFill>
-          <a:blip r:embed="rId3"/>
+          <a:blip r:embed="rId4"/>
           <a:stretch>
             <a:fillRect/>
           </a:stretch>
@@ -4543,7 +7785,7 @@
           <p:nvPr/>
         </p:nvPicPr>
         <p:blipFill>
-          <a:blip r:embed="rId4"/>
+          <a:blip r:embed="rId5"/>
           <a:stretch>
             <a:fillRect/>
           </a:stretch>
@@ -4627,7 +7869,7 @@
           <p:nvPr/>
         </p:nvPicPr>
         <p:blipFill>
-          <a:blip r:embed="rId2"/>
+          <a:blip r:embed="rId3"/>
           <a:stretch>
             <a:fillRect/>
           </a:stretch>
@@ -4651,7 +7893,7 @@
           <p:nvPr/>
         </p:nvPicPr>
         <p:blipFill>
-          <a:blip r:embed="rId3"/>
+          <a:blip r:embed="rId4"/>
           <a:stretch>
             <a:fillRect/>
           </a:stretch>
@@ -5716,7 +8958,7 @@
           <p:nvPr/>
         </p:nvPicPr>
         <p:blipFill>
-          <a:blip r:embed="rId2"/>
+          <a:blip r:embed="rId3"/>
           <a:stretch>
             <a:fillRect/>
           </a:stretch>
@@ -5740,7 +8982,7 @@
           <p:nvPr/>
         </p:nvPicPr>
         <p:blipFill>
-          <a:blip r:embed="rId3"/>
+          <a:blip r:embed="rId4"/>
           <a:stretch>
             <a:fillRect/>
           </a:stretch>
@@ -5944,7 +9186,7 @@
           <p:nvPr/>
         </p:nvPicPr>
         <p:blipFill>
-          <a:blip r:embed="rId4"/>
+          <a:blip r:embed="rId5"/>
           <a:stretch>
             <a:fillRect/>
           </a:stretch>
@@ -6028,7 +9270,7 @@
           <p:nvPr/>
         </p:nvPicPr>
         <p:blipFill>
-          <a:blip r:embed="rId2"/>
+          <a:blip r:embed="rId3"/>
           <a:stretch>
             <a:fillRect/>
           </a:stretch>
@@ -6052,7 +9294,7 @@
           <p:nvPr/>
         </p:nvPicPr>
         <p:blipFill>
-          <a:blip r:embed="rId3"/>
+          <a:blip r:embed="rId4"/>
           <a:stretch>
             <a:fillRect/>
           </a:stretch>
@@ -6214,7 +9456,7 @@
           <p:nvPr/>
         </p:nvPicPr>
         <p:blipFill>
-          <a:blip r:embed="rId4"/>
+          <a:blip r:embed="rId5"/>
           <a:stretch>
             <a:fillRect/>
           </a:stretch>
@@ -6405,7 +9647,7 @@
           <p:nvPr/>
         </p:nvPicPr>
         <p:blipFill>
-          <a:blip r:embed="rId2"/>
+          <a:blip r:embed="rId3"/>
           <a:stretch>
             <a:fillRect/>
           </a:stretch>
@@ -6429,7 +9671,7 @@
           <p:nvPr/>
         </p:nvPicPr>
         <p:blipFill>
-          <a:blip r:embed="rId3"/>
+          <a:blip r:embed="rId4"/>
           <a:stretch>
             <a:fillRect/>
           </a:stretch>
@@ -6883,7 +10125,7 @@
           <p:nvPr/>
         </p:nvPicPr>
         <p:blipFill>
-          <a:blip r:embed="rId2"/>
+          <a:blip r:embed="rId3"/>
           <a:stretch>
             <a:fillRect/>
           </a:stretch>
@@ -6907,7 +10149,7 @@
           <p:nvPr/>
         </p:nvPicPr>
         <p:blipFill>
-          <a:blip r:embed="rId3"/>
+          <a:blip r:embed="rId4"/>
           <a:stretch>
             <a:fillRect/>
           </a:stretch>
@@ -8081,7 +11323,7 @@
           <p:nvPr/>
         </p:nvPicPr>
         <p:blipFill>
-          <a:blip r:embed="rId2"/>
+          <a:blip r:embed="rId3"/>
           <a:stretch>
             <a:fillRect/>
           </a:stretch>
@@ -8105,7 +11347,7 @@
           <p:nvPr/>
         </p:nvPicPr>
         <p:blipFill>
-          <a:blip r:embed="rId3"/>
+          <a:blip r:embed="rId4"/>
           <a:stretch>
             <a:fillRect/>
           </a:stretch>
@@ -8898,7 +12140,7 @@
           <p:nvPr/>
         </p:nvPicPr>
         <p:blipFill>
-          <a:blip r:embed="rId2"/>
+          <a:blip r:embed="rId3"/>
           <a:stretch>
             <a:fillRect/>
           </a:stretch>
@@ -8922,7 +12164,7 @@
           <p:nvPr/>
         </p:nvPicPr>
         <p:blipFill>
-          <a:blip r:embed="rId3"/>
+          <a:blip r:embed="rId4"/>
           <a:stretch>
             <a:fillRect/>
           </a:stretch>
@@ -9354,7 +12596,7 @@
           <p:nvPr/>
         </p:nvPicPr>
         <p:blipFill>
-          <a:blip r:embed="rId2"/>
+          <a:blip r:embed="rId3"/>
           <a:stretch>
             <a:fillRect/>
           </a:stretch>
@@ -9378,7 +12620,7 @@
           <p:nvPr/>
         </p:nvPicPr>
         <p:blipFill>
-          <a:blip r:embed="rId3"/>
+          <a:blip r:embed="rId4"/>
           <a:stretch>
             <a:fillRect/>
           </a:stretch>
@@ -9643,7 +12885,7 @@
           <p:nvPr/>
         </p:nvPicPr>
         <p:blipFill>
-          <a:blip r:embed="rId2"/>
+          <a:blip r:embed="rId3"/>
           <a:stretch>
             <a:fillRect/>
           </a:stretch>
@@ -9667,7 +12909,7 @@
           <p:nvPr/>
         </p:nvPicPr>
         <p:blipFill>
-          <a:blip r:embed="rId3"/>
+          <a:blip r:embed="rId4"/>
           <a:stretch>
             <a:fillRect/>
           </a:stretch>
@@ -10512,7 +13754,7 @@
           <p:nvPr/>
         </p:nvPicPr>
         <p:blipFill>
-          <a:blip r:embed="rId2"/>
+          <a:blip r:embed="rId3"/>
           <a:stretch>
             <a:fillRect/>
           </a:stretch>
@@ -10536,7 +13778,7 @@
           <p:nvPr/>
         </p:nvPicPr>
         <p:blipFill>
-          <a:blip r:embed="rId3"/>
+          <a:blip r:embed="rId4"/>
           <a:stretch>
             <a:fillRect/>
           </a:stretch>
@@ -12043,7 +15285,7 @@
           <p:nvPr/>
         </p:nvPicPr>
         <p:blipFill>
-          <a:blip r:embed="rId2"/>
+          <a:blip r:embed="rId3"/>
           <a:stretch>
             <a:fillRect/>
           </a:stretch>
@@ -12067,7 +15309,7 @@
           <p:nvPr/>
         </p:nvPicPr>
         <p:blipFill>
-          <a:blip r:embed="rId3"/>
+          <a:blip r:embed="rId4"/>
           <a:stretch>
             <a:fillRect/>
           </a:stretch>
@@ -12228,7 +15470,7 @@
         </p:nvSpPr>
         <p:spPr>
           <a:xfrm>
-            <a:off x="4041648" y="3246120"/>
+            <a:off x="4038447" y="3154680"/>
             <a:ext cx="4114800" cy="1371600"/>
           </a:xfrm>
           <a:prstGeom prst="ellipse">
@@ -12264,7 +15506,7 @@
           <a:p>
             <a:pPr algn="ctr"/>
             <a:r>
-              <a:rPr sz="2700" b="1">
+              <a:rPr sz="2700" b="1" dirty="0" err="1">
                 <a:solidFill>
                   <a:srgbClr val="FFFFFF"/>
                 </a:solidFill>
@@ -12272,6 +15514,12 @@
               </a:rPr>
               <a:t>Проблемы</a:t>
             </a:r>
+            <a:endParaRPr sz="2700" b="1" dirty="0">
+              <a:solidFill>
+                <a:srgbClr val="FFFFFF"/>
+              </a:solidFill>
+              <a:latin typeface="HSE Sans"/>
+            </a:endParaRPr>
           </a:p>
         </p:txBody>
       </p:sp>
@@ -12283,7 +15531,7 @@
         </p:nvSpPr>
         <p:spPr>
           <a:xfrm>
-            <a:off x="457200" y="1828800"/>
+            <a:off x="950976" y="1800726"/>
             <a:ext cx="3291840" cy="1325880"/>
           </a:xfrm>
           <a:prstGeom prst="ellipse">
@@ -12319,14 +15567,56 @@
           <a:p>
             <a:pPr algn="ctr"/>
             <a:r>
-              <a:rPr sz="1400" b="0">
+              <a:rPr sz="1600" b="0" dirty="0" err="1">
                 <a:solidFill>
                   <a:srgbClr val="FFFFFF"/>
                 </a:solidFill>
                 <a:latin typeface="HSE Sans"/>
               </a:rPr>
-              <a:t>Разрозненность источников событий</a:t>
-            </a:r>
+              <a:t>Разрозненность</a:t>
+            </a:r>
+            <a:r>
+              <a:rPr sz="1600" b="0" dirty="0">
+                <a:solidFill>
+                  <a:srgbClr val="FFFFFF"/>
+                </a:solidFill>
+                <a:latin typeface="HSE Sans"/>
+              </a:rPr>
+              <a:t> </a:t>
+            </a:r>
+            <a:r>
+              <a:rPr sz="1600" b="0" dirty="0" err="1">
+                <a:solidFill>
+                  <a:srgbClr val="FFFFFF"/>
+                </a:solidFill>
+                <a:latin typeface="HSE Sans"/>
+              </a:rPr>
+              <a:t>источников</a:t>
+            </a:r>
+            <a:r>
+              <a:rPr sz="1600" b="0" dirty="0">
+                <a:solidFill>
+                  <a:srgbClr val="FFFFFF"/>
+                </a:solidFill>
+                <a:latin typeface="HSE Sans"/>
+              </a:rPr>
+              <a:t> </a:t>
+            </a:r>
+            <a:r>
+              <a:rPr sz="1600" b="0" dirty="0" err="1">
+                <a:solidFill>
+                  <a:srgbClr val="FFFFFF"/>
+                </a:solidFill>
+                <a:latin typeface="HSE Sans"/>
+              </a:rPr>
+              <a:t>событий</a:t>
+            </a:r>
+            <a:endParaRPr sz="1600" b="0" dirty="0">
+              <a:solidFill>
+                <a:srgbClr val="FFFFFF"/>
+              </a:solidFill>
+              <a:latin typeface="HSE Sans"/>
+            </a:endParaRPr>
           </a:p>
         </p:txBody>
       </p:sp>
@@ -12338,7 +15628,7 @@
         </p:nvSpPr>
         <p:spPr>
           <a:xfrm>
-            <a:off x="594360" y="4754880"/>
+            <a:off x="594360" y="4329363"/>
             <a:ext cx="3291840" cy="1325880"/>
           </a:xfrm>
           <a:prstGeom prst="ellipse">
@@ -12374,14 +15664,92 @@
           <a:p>
             <a:pPr algn="ctr"/>
             <a:r>
-              <a:rPr sz="1400" b="0">
+              <a:rPr sz="1600" b="0" dirty="0" err="1">
                 <a:solidFill>
                   <a:srgbClr val="FFFFFF"/>
                 </a:solidFill>
                 <a:latin typeface="HSE Sans"/>
               </a:rPr>
-              <a:t>Информационный шум и дубли анонсов</a:t>
-            </a:r>
+              <a:t>Информационный</a:t>
+            </a:r>
+            <a:r>
+              <a:rPr sz="1600" b="0" dirty="0">
+                <a:solidFill>
+                  <a:srgbClr val="FFFFFF"/>
+                </a:solidFill>
+                <a:latin typeface="HSE Sans"/>
+              </a:rPr>
+              <a:t> </a:t>
+            </a:r>
+            <a:r>
+              <a:rPr sz="1600" b="0" dirty="0" err="1">
+                <a:solidFill>
+                  <a:srgbClr val="FFFFFF"/>
+                </a:solidFill>
+                <a:latin typeface="HSE Sans"/>
+              </a:rPr>
+              <a:t>шум</a:t>
+            </a:r>
+            <a:r>
+              <a:rPr sz="1600" b="0" dirty="0">
+                <a:solidFill>
+                  <a:srgbClr val="FFFFFF"/>
+                </a:solidFill>
+                <a:latin typeface="HSE Sans"/>
+              </a:rPr>
+              <a:t> </a:t>
+            </a:r>
+            <a:r>
+              <a:rPr sz="1600" b="0" dirty="0" err="1">
+                <a:solidFill>
+                  <a:srgbClr val="FFFFFF"/>
+                </a:solidFill>
+                <a:latin typeface="HSE Sans"/>
+              </a:rPr>
+              <a:t>и</a:t>
+            </a:r>
+            <a:r>
+              <a:rPr sz="1600" b="0" dirty="0">
+                <a:solidFill>
+                  <a:srgbClr val="FFFFFF"/>
+                </a:solidFill>
+                <a:latin typeface="HSE Sans"/>
+              </a:rPr>
+              <a:t> </a:t>
+            </a:r>
+            <a:r>
+              <a:rPr sz="1600" b="0" dirty="0" err="1">
+                <a:solidFill>
+                  <a:srgbClr val="FFFFFF"/>
+                </a:solidFill>
+                <a:latin typeface="HSE Sans"/>
+              </a:rPr>
+              <a:t>дубли</a:t>
+            </a:r>
+            <a:r>
+              <a:rPr sz="1600" b="0" dirty="0">
+                <a:solidFill>
+                  <a:srgbClr val="FFFFFF"/>
+                </a:solidFill>
+                <a:latin typeface="HSE Sans"/>
+              </a:rPr>
+              <a:t> </a:t>
+            </a:r>
+            <a:r>
+              <a:rPr sz="1600" b="0" dirty="0" err="1">
+                <a:solidFill>
+                  <a:srgbClr val="FFFFFF"/>
+                </a:solidFill>
+                <a:latin typeface="HSE Sans"/>
+              </a:rPr>
+              <a:t>анонсов</a:t>
+            </a:r>
+            <a:endParaRPr sz="1600" b="0" dirty="0">
+              <a:solidFill>
+                <a:srgbClr val="FFFFFF"/>
+              </a:solidFill>
+              <a:latin typeface="HSE Sans"/>
+            </a:endParaRPr>
           </a:p>
         </p:txBody>
       </p:sp>
@@ -12393,7 +15761,7 @@
         </p:nvSpPr>
         <p:spPr>
           <a:xfrm>
-            <a:off x="4480560" y="5440680"/>
+            <a:off x="4457700" y="5167964"/>
             <a:ext cx="3246120" cy="1280160"/>
           </a:xfrm>
           <a:prstGeom prst="ellipse">
@@ -12429,14 +15797,110 @@
           <a:p>
             <a:pPr algn="ctr"/>
             <a:r>
-              <a:rPr sz="1400" b="0">
+              <a:rPr sz="1600" b="0" dirty="0" err="1">
                 <a:solidFill>
                   <a:srgbClr val="FFFFFF"/>
                 </a:solidFill>
                 <a:latin typeface="HSE Sans"/>
               </a:rPr>
-              <a:t>Нет учёта уровня и карьерной цели</a:t>
-            </a:r>
+              <a:t>Нет</a:t>
+            </a:r>
+            <a:r>
+              <a:rPr sz="1600" b="0" dirty="0">
+                <a:solidFill>
+                  <a:srgbClr val="FFFFFF"/>
+                </a:solidFill>
+                <a:latin typeface="HSE Sans"/>
+              </a:rPr>
+              <a:t> </a:t>
+            </a:r>
+            <a:r>
+              <a:rPr sz="1600" b="0" dirty="0" err="1">
+                <a:solidFill>
+                  <a:srgbClr val="FFFFFF"/>
+                </a:solidFill>
+                <a:latin typeface="HSE Sans"/>
+              </a:rPr>
+              <a:t>учёта</a:t>
+            </a:r>
+            <a:r>
+              <a:rPr sz="1600" b="0" dirty="0">
+                <a:solidFill>
+                  <a:srgbClr val="FFFFFF"/>
+                </a:solidFill>
+                <a:latin typeface="HSE Sans"/>
+              </a:rPr>
+              <a:t> </a:t>
+            </a:r>
+            <a:r>
+              <a:rPr sz="1600" b="0" dirty="0" err="1">
+                <a:solidFill>
+                  <a:srgbClr val="FFFFFF"/>
+                </a:solidFill>
+                <a:latin typeface="HSE Sans"/>
+              </a:rPr>
+              <a:t>уровня</a:t>
+            </a:r>
+            <a:r>
+              <a:rPr sz="1600" b="0" dirty="0">
+                <a:solidFill>
+                  <a:srgbClr val="FFFFFF"/>
+                </a:solidFill>
+                <a:latin typeface="HSE Sans"/>
+              </a:rPr>
+              <a:t> </a:t>
+            </a:r>
+            <a:r>
+              <a:rPr sz="1600" b="0" dirty="0" err="1">
+                <a:solidFill>
+                  <a:srgbClr val="FFFFFF"/>
+                </a:solidFill>
+                <a:latin typeface="HSE Sans"/>
+              </a:rPr>
+              <a:t>и</a:t>
+            </a:r>
+            <a:r>
+              <a:rPr sz="1600" b="0" dirty="0">
+                <a:solidFill>
+                  <a:srgbClr val="FFFFFF"/>
+                </a:solidFill>
+                <a:latin typeface="HSE Sans"/>
+              </a:rPr>
+              <a:t> </a:t>
+            </a:r>
+            <a:r>
+              <a:rPr sz="1600" b="0" dirty="0" err="1">
+                <a:solidFill>
+                  <a:srgbClr val="FFFFFF"/>
+                </a:solidFill>
+                <a:latin typeface="HSE Sans"/>
+              </a:rPr>
+              <a:t>карьерной</a:t>
+            </a:r>
+            <a:r>
+              <a:rPr sz="1600" b="0" dirty="0">
+                <a:solidFill>
+                  <a:srgbClr val="FFFFFF"/>
+                </a:solidFill>
+                <a:latin typeface="HSE Sans"/>
+              </a:rPr>
+              <a:t> </a:t>
+            </a:r>
+            <a:r>
+              <a:rPr sz="1600" b="0" dirty="0" err="1">
+                <a:solidFill>
+                  <a:srgbClr val="FFFFFF"/>
+                </a:solidFill>
+                <a:latin typeface="HSE Sans"/>
+              </a:rPr>
+              <a:t>цели</a:t>
+            </a:r>
+            <a:endParaRPr sz="1600" b="0" dirty="0">
+              <a:solidFill>
+                <a:srgbClr val="FFFFFF"/>
+              </a:solidFill>
+              <a:latin typeface="HSE Sans"/>
+            </a:endParaRPr>
           </a:p>
         </p:txBody>
       </p:sp>
@@ -12448,7 +15912,7 @@
         </p:nvSpPr>
         <p:spPr>
           <a:xfrm>
-            <a:off x="8412480" y="1828800"/>
+            <a:off x="7726680" y="1737360"/>
             <a:ext cx="3291840" cy="1325880"/>
           </a:xfrm>
           <a:prstGeom prst="ellipse">
@@ -12484,14 +15948,74 @@
           <a:p>
             <a:pPr algn="ctr"/>
             <a:r>
-              <a:rPr sz="1400" b="0">
+              <a:rPr sz="1600" b="0" dirty="0" err="1">
                 <a:solidFill>
                   <a:srgbClr val="FFFFFF"/>
                 </a:solidFill>
                 <a:latin typeface="HSE Sans"/>
               </a:rPr>
-              <a:t>Рекомендации без объяснения выбора</a:t>
-            </a:r>
+              <a:t>Рекомендации</a:t>
+            </a:r>
+            <a:r>
+              <a:rPr sz="1600" b="0" dirty="0">
+                <a:solidFill>
+                  <a:srgbClr val="FFFFFF"/>
+                </a:solidFill>
+                <a:latin typeface="HSE Sans"/>
+              </a:rPr>
+              <a:t> </a:t>
+            </a:r>
+            <a:r>
+              <a:rPr sz="1600" b="0" dirty="0" err="1">
+                <a:solidFill>
+                  <a:srgbClr val="FFFFFF"/>
+                </a:solidFill>
+                <a:latin typeface="HSE Sans"/>
+              </a:rPr>
+              <a:t>без</a:t>
+            </a:r>
+            <a:r>
+              <a:rPr sz="1600" b="0" dirty="0">
+                <a:solidFill>
+                  <a:srgbClr val="FFFFFF"/>
+                </a:solidFill>
+                <a:latin typeface="HSE Sans"/>
+              </a:rPr>
+              <a:t> </a:t>
+            </a:r>
+            <a:r>
+              <a:rPr sz="1600" b="0" dirty="0" err="1">
+                <a:solidFill>
+                  <a:srgbClr val="FFFFFF"/>
+                </a:solidFill>
+                <a:latin typeface="HSE Sans"/>
+              </a:rPr>
+              <a:t>объяснения</a:t>
+            </a:r>
+            <a:r>
+              <a:rPr sz="1600" b="0" dirty="0">
+                <a:solidFill>
+                  <a:srgbClr val="FFFFFF"/>
+                </a:solidFill>
+                <a:latin typeface="HSE Sans"/>
+              </a:rPr>
+              <a:t> </a:t>
+            </a:r>
+            <a:r>
+              <a:rPr sz="1600" b="0" dirty="0" err="1">
+                <a:solidFill>
+                  <a:srgbClr val="FFFFFF"/>
+                </a:solidFill>
+                <a:latin typeface="HSE Sans"/>
+              </a:rPr>
+              <a:t>выбора</a:t>
+            </a:r>
+            <a:endParaRPr sz="1600" b="0" dirty="0">
+              <a:solidFill>
+                <a:srgbClr val="FFFFFF"/>
+              </a:solidFill>
+              <a:latin typeface="HSE Sans"/>
+            </a:endParaRPr>
           </a:p>
         </p:txBody>
       </p:sp>
@@ -12503,7 +16027,7 @@
         </p:nvSpPr>
         <p:spPr>
           <a:xfrm>
-            <a:off x="8275320" y="4754880"/>
+            <a:off x="8153247" y="4329363"/>
             <a:ext cx="3291840" cy="1325880"/>
           </a:xfrm>
           <a:prstGeom prst="ellipse">
@@ -12539,14 +16063,74 @@
           <a:p>
             <a:pPr algn="ctr"/>
             <a:r>
-              <a:rPr sz="1400" b="0">
+              <a:rPr sz="1600" b="0" dirty="0" err="1">
                 <a:solidFill>
                   <a:srgbClr val="FFFFFF"/>
                 </a:solidFill>
                 <a:latin typeface="HSE Sans"/>
               </a:rPr>
-              <a:t>Ручная фильтрация отнимает время</a:t>
-            </a:r>
+              <a:t>Ручная</a:t>
+            </a:r>
+            <a:r>
+              <a:rPr sz="1600" b="0" dirty="0">
+                <a:solidFill>
+                  <a:srgbClr val="FFFFFF"/>
+                </a:solidFill>
+                <a:latin typeface="HSE Sans"/>
+              </a:rPr>
+              <a:t> </a:t>
+            </a:r>
+            <a:r>
+              <a:rPr sz="1600" b="0" dirty="0" err="1">
+                <a:solidFill>
+                  <a:srgbClr val="FFFFFF"/>
+                </a:solidFill>
+                <a:latin typeface="HSE Sans"/>
+              </a:rPr>
+              <a:t>фильтрация</a:t>
+            </a:r>
+            <a:r>
+              <a:rPr sz="1600" b="0" dirty="0">
+                <a:solidFill>
+                  <a:srgbClr val="FFFFFF"/>
+                </a:solidFill>
+                <a:latin typeface="HSE Sans"/>
+              </a:rPr>
+              <a:t> </a:t>
+            </a:r>
+            <a:r>
+              <a:rPr sz="1600" b="0" dirty="0" err="1">
+                <a:solidFill>
+                  <a:srgbClr val="FFFFFF"/>
+                </a:solidFill>
+                <a:latin typeface="HSE Sans"/>
+              </a:rPr>
+              <a:t>отнимает</a:t>
+            </a:r>
+            <a:r>
+              <a:rPr sz="1600" b="0" dirty="0">
+                <a:solidFill>
+                  <a:srgbClr val="FFFFFF"/>
+                </a:solidFill>
+                <a:latin typeface="HSE Sans"/>
+              </a:rPr>
+              <a:t> </a:t>
+            </a:r>
+            <a:r>
+              <a:rPr sz="1600" b="0" dirty="0" err="1">
+                <a:solidFill>
+                  <a:srgbClr val="FFFFFF"/>
+                </a:solidFill>
+                <a:latin typeface="HSE Sans"/>
+              </a:rPr>
+              <a:t>время</a:t>
+            </a:r>
+            <a:endParaRPr sz="1600" b="0" dirty="0">
+              <a:solidFill>
+                <a:srgbClr val="FFFFFF"/>
+              </a:solidFill>
+              <a:latin typeface="HSE Sans"/>
+            </a:endParaRPr>
           </a:p>
         </p:txBody>
       </p:sp>
@@ -12584,7 +16168,7 @@
           <p:nvPr/>
         </p:nvPicPr>
         <p:blipFill>
-          <a:blip r:embed="rId2"/>
+          <a:blip r:embed="rId3"/>
           <a:stretch>
             <a:fillRect/>
           </a:stretch>
@@ -12608,7 +16192,7 @@
           <p:nvPr/>
         </p:nvPicPr>
         <p:blipFill>
-          <a:blip r:embed="rId3"/>
+          <a:blip r:embed="rId4"/>
           <a:stretch>
             <a:fillRect/>
           </a:stretch>
@@ -13357,7 +16941,7 @@
           <p:nvPr/>
         </p:nvPicPr>
         <p:blipFill>
-          <a:blip r:embed="rId2"/>
+          <a:blip r:embed="rId3"/>
           <a:stretch>
             <a:fillRect/>
           </a:stretch>
@@ -13381,7 +16965,7 @@
           <p:nvPr/>
         </p:nvPicPr>
         <p:blipFill>
-          <a:blip r:embed="rId3"/>
+          <a:blip r:embed="rId4"/>
           <a:stretch>
             <a:fillRect/>
           </a:stretch>
@@ -14351,7 +17935,7 @@
           <p:nvPr/>
         </p:nvPicPr>
         <p:blipFill>
-          <a:blip r:embed="rId2"/>
+          <a:blip r:embed="rId3"/>
           <a:stretch>
             <a:fillRect/>
           </a:stretch>
@@ -14375,7 +17959,7 @@
           <p:nvPr/>
         </p:nvPicPr>
         <p:blipFill>
-          <a:blip r:embed="rId3"/>
+          <a:blip r:embed="rId4"/>
           <a:stretch>
             <a:fillRect/>
           </a:stretch>
@@ -14537,7 +18121,7 @@
           <p:nvPr/>
         </p:nvPicPr>
         <p:blipFill>
-          <a:blip r:embed="rId4"/>
+          <a:blip r:embed="rId5"/>
           <a:stretch>
             <a:fillRect/>
           </a:stretch>
@@ -14728,7 +18312,7 @@
           <p:nvPr/>
         </p:nvPicPr>
         <p:blipFill>
-          <a:blip r:embed="rId2"/>
+          <a:blip r:embed="rId3"/>
           <a:stretch>
             <a:fillRect/>
           </a:stretch>
@@ -14752,7 +18336,7 @@
           <p:nvPr/>
         </p:nvPicPr>
         <p:blipFill>
-          <a:blip r:embed="rId3"/>
+          <a:blip r:embed="rId4"/>
           <a:stretch>
             <a:fillRect/>
           </a:stretch>
@@ -14914,7 +18498,7 @@
           <p:nvPr/>
         </p:nvPicPr>
         <p:blipFill>
-          <a:blip r:embed="rId4"/>
+          <a:blip r:embed="rId5"/>
           <a:stretch>
             <a:fillRect/>
           </a:stretch>
@@ -15290,4 +18874,299 @@
   </a:objectDefaults>
   <a:extraClrSchemeLst/>
 </a:theme>
+</file>
+
+<file path=ppt/theme/theme2.xml><?xml version="1.0" encoding="utf-8"?>
+<a:theme xmlns:a="http://schemas.openxmlformats.org/drawingml/2006/main" name="Тема Office">
+  <a:themeElements>
+    <a:clrScheme name="Стандартная">
+      <a:dk1>
+        <a:sysClr val="windowText" lastClr="000000"/>
+      </a:dk1>
+      <a:lt1>
+        <a:sysClr val="window" lastClr="FFFFFF"/>
+      </a:lt1>
+      <a:dk2>
+        <a:srgbClr val="44546A"/>
+      </a:dk2>
+      <a:lt2>
+        <a:srgbClr val="E7E6E6"/>
+      </a:lt2>
+      <a:accent1>
+        <a:srgbClr val="4472C4"/>
+      </a:accent1>
+      <a:accent2>
+        <a:srgbClr val="ED7D31"/>
+      </a:accent2>
+      <a:accent3>
+        <a:srgbClr val="A5A5A5"/>
+      </a:accent3>
+      <a:accent4>
+        <a:srgbClr val="FFC000"/>
+      </a:accent4>
+      <a:accent5>
+        <a:srgbClr val="5B9BD5"/>
+      </a:accent5>
+      <a:accent6>
+        <a:srgbClr val="70AD47"/>
+      </a:accent6>
+      <a:hlink>
+        <a:srgbClr val="0563C1"/>
+      </a:hlink>
+      <a:folHlink>
+        <a:srgbClr val="954F72"/>
+      </a:folHlink>
+    </a:clrScheme>
+    <a:fontScheme name="Стандартная">
+      <a:majorFont>
+        <a:latin typeface="Calibri Light" panose="020F0302020204030204"/>
+        <a:ea typeface=""/>
+        <a:cs typeface=""/>
+        <a:font script="Jpan" typeface="游ゴシック Light"/>
+        <a:font script="Hang" typeface="맑은 고딕"/>
+        <a:font script="Hans" typeface="等线 Light"/>
+        <a:font script="Hant" typeface="新細明體"/>
+        <a:font script="Arab" typeface="Times New Roman"/>
+        <a:font script="Hebr" typeface="Times New Roman"/>
+        <a:font script="Thai" typeface="Angsana New"/>
+        <a:font script="Ethi" typeface="Nyala"/>
+        <a:font script="Beng" typeface="Vrinda"/>
+        <a:font script="Gujr" typeface="Shruti"/>
+        <a:font script="Khmr" typeface="MoolBoran"/>
+        <a:font script="Knda" typeface="Tunga"/>
+        <a:font script="Guru" typeface="Raavi"/>
+        <a:font script="Cans" typeface="Euphemia"/>
+        <a:font script="Cher" typeface="Plantagenet Cherokee"/>
+        <a:font script="Yiii" typeface="Microsoft Yi Baiti"/>
+        <a:font script="Tibt" typeface="Microsoft Himalaya"/>
+        <a:font script="Thaa" typeface="MV Boli"/>
+        <a:font script="Deva" typeface="Mangal"/>
+        <a:font script="Telu" typeface="Gautami"/>
+        <a:font script="Taml" typeface="Latha"/>
+        <a:font script="Syrc" typeface="Estrangelo Edessa"/>
+        <a:font script="Orya" typeface="Kalinga"/>
+        <a:font script="Mlym" typeface="Kartika"/>
+        <a:font script="Laoo" typeface="DokChampa"/>
+        <a:font script="Sinh" typeface="Iskoola Pota"/>
+        <a:font script="Mong" typeface="Mongolian Baiti"/>
+        <a:font script="Viet" typeface="Times New Roman"/>
+        <a:font script="Uigh" typeface="Microsoft Uighur"/>
+        <a:font script="Geor" typeface="Sylfaen"/>
+        <a:font script="Armn" typeface="Arial"/>
+        <a:font script="Bugi" typeface="Leelawadee UI"/>
+        <a:font script="Bopo" typeface="Microsoft JhengHei"/>
+        <a:font script="Java" typeface="Javanese Text"/>
+        <a:font script="Lisu" typeface="Segoe UI"/>
+        <a:font script="Mymr" typeface="Myanmar Text"/>
+        <a:font script="Nkoo" typeface="Ebrima"/>
+        <a:font script="Olck" typeface="Nirmala UI"/>
+        <a:font script="Osma" typeface="Ebrima"/>
+        <a:font script="Phag" typeface="Phagspa"/>
+        <a:font script="Syrn" typeface="Estrangelo Edessa"/>
+        <a:font script="Syrj" typeface="Estrangelo Edessa"/>
+        <a:font script="Syre" typeface="Estrangelo Edessa"/>
+        <a:font script="Sora" typeface="Nirmala UI"/>
+        <a:font script="Tale" typeface="Microsoft Tai Le"/>
+        <a:font script="Talu" typeface="Microsoft New Tai Lue"/>
+        <a:font script="Tfng" typeface="Ebrima"/>
+      </a:majorFont>
+      <a:minorFont>
+        <a:latin typeface="Calibri" panose="020F0502020204030204"/>
+        <a:ea typeface=""/>
+        <a:cs typeface=""/>
+        <a:font script="Jpan" typeface="游ゴシック"/>
+        <a:font script="Hang" typeface="맑은 고딕"/>
+        <a:font script="Hans" typeface="等线"/>
+        <a:font script="Hant" typeface="新細明體"/>
+        <a:font script="Arab" typeface="Arial"/>
+        <a:font script="Hebr" typeface="Arial"/>
+        <a:font script="Thai" typeface="Cordia New"/>
+        <a:font script="Ethi" typeface="Nyala"/>
+        <a:font script="Beng" typeface="Vrinda"/>
+        <a:font script="Gujr" typeface="Shruti"/>
+        <a:font script="Khmr" typeface="DaunPenh"/>
+        <a:font script="Knda" typeface="Tunga"/>
+        <a:font script="Guru" typeface="Raavi"/>
+        <a:font script="Cans" typeface="Euphemia"/>
+        <a:font script="Cher" typeface="Plantagenet Cherokee"/>
+        <a:font script="Yiii" typeface="Microsoft Yi Baiti"/>
+        <a:font script="Tibt" typeface="Microsoft Himalaya"/>
+        <a:font script="Thaa" typeface="MV Boli"/>
+        <a:font script="Deva" typeface="Mangal"/>
+        <a:font script="Telu" typeface="Gautami"/>
+        <a:font script="Taml" typeface="Latha"/>
+        <a:font script="Syrc" typeface="Estrangelo Edessa"/>
+        <a:font script="Orya" typeface="Kalinga"/>
+        <a:font script="Mlym" typeface="Kartika"/>
+        <a:font script="Laoo" typeface="DokChampa"/>
+        <a:font script="Sinh" typeface="Iskoola Pota"/>
+        <a:font script="Mong" typeface="Mongolian Baiti"/>
+        <a:font script="Viet" typeface="Arial"/>
+        <a:font script="Uigh" typeface="Microsoft Uighur"/>
+        <a:font script="Geor" typeface="Sylfaen"/>
+        <a:font script="Armn" typeface="Arial"/>
+        <a:font script="Bugi" typeface="Leelawadee UI"/>
+        <a:font script="Bopo" typeface="Microsoft JhengHei"/>
+        <a:font script="Java" typeface="Javanese Text"/>
+        <a:font script="Lisu" typeface="Segoe UI"/>
+        <a:font script="Mymr" typeface="Myanmar Text"/>
+        <a:font script="Nkoo" typeface="Ebrima"/>
+        <a:font script="Olck" typeface="Nirmala UI"/>
+        <a:font script="Osma" typeface="Ebrima"/>
+        <a:font script="Phag" typeface="Phagspa"/>
+        <a:font script="Syrn" typeface="Estrangelo Edessa"/>
+        <a:font script="Syrj" typeface="Estrangelo Edessa"/>
+        <a:font script="Syre" typeface="Estrangelo Edessa"/>
+        <a:font script="Sora" typeface="Nirmala UI"/>
+        <a:font script="Tale" typeface="Microsoft Tai Le"/>
+        <a:font script="Talu" typeface="Microsoft New Tai Lue"/>
+        <a:font script="Tfng" typeface="Ebrima"/>
+      </a:minorFont>
+    </a:fontScheme>
+    <a:fmtScheme name="Стандартная">
+      <a:fillStyleLst>
+        <a:solidFill>
+          <a:schemeClr val="phClr"/>
+        </a:solidFill>
+        <a:gradFill rotWithShape="1">
+          <a:gsLst>
+            <a:gs pos="0">
+              <a:schemeClr val="phClr">
+                <a:lumMod val="110000"/>
+                <a:satMod val="105000"/>
+                <a:tint val="67000"/>
+              </a:schemeClr>
+            </a:gs>
+            <a:gs pos="50000">
+              <a:schemeClr val="phClr">
+                <a:lumMod val="105000"/>
+                <a:satMod val="103000"/>
+                <a:tint val="73000"/>
+              </a:schemeClr>
+            </a:gs>
+            <a:gs pos="100000">
+              <a:schemeClr val="phClr">
+                <a:lumMod val="105000"/>
+                <a:satMod val="109000"/>
+                <a:tint val="81000"/>
+              </a:schemeClr>
+            </a:gs>
+          </a:gsLst>
+          <a:lin ang="5400000" scaled="0"/>
+        </a:gradFill>
+        <a:gradFill rotWithShape="1">
+          <a:gsLst>
+            <a:gs pos="0">
+              <a:schemeClr val="phClr">
+                <a:satMod val="103000"/>
+                <a:lumMod val="102000"/>
+                <a:tint val="94000"/>
+              </a:schemeClr>
+            </a:gs>
+            <a:gs pos="50000">
+              <a:schemeClr val="phClr">
+                <a:satMod val="110000"/>
+                <a:lumMod val="100000"/>
+                <a:shade val="100000"/>
+              </a:schemeClr>
+            </a:gs>
+            <a:gs pos="100000">
+              <a:schemeClr val="phClr">
+                <a:lumMod val="99000"/>
+                <a:satMod val="120000"/>
+                <a:shade val="78000"/>
+              </a:schemeClr>
+            </a:gs>
+          </a:gsLst>
+          <a:lin ang="5400000" scaled="0"/>
+        </a:gradFill>
+      </a:fillStyleLst>
+      <a:lnStyleLst>
+        <a:ln w="6350" cap="flat" cmpd="sng" algn="ctr">
+          <a:solidFill>
+            <a:schemeClr val="phClr"/>
+          </a:solidFill>
+          <a:prstDash val="solid"/>
+          <a:miter lim="800000"/>
+        </a:ln>
+        <a:ln w="12700" cap="flat" cmpd="sng" algn="ctr">
+          <a:solidFill>
+            <a:schemeClr val="phClr"/>
+          </a:solidFill>
+          <a:prstDash val="solid"/>
+          <a:miter lim="800000"/>
+        </a:ln>
+        <a:ln w="19050" cap="flat" cmpd="sng" algn="ctr">
+          <a:solidFill>
+            <a:schemeClr val="phClr"/>
+          </a:solidFill>
+          <a:prstDash val="solid"/>
+          <a:miter lim="800000"/>
+        </a:ln>
+      </a:lnStyleLst>
+      <a:effectStyleLst>
+        <a:effectStyle>
+          <a:effectLst/>
+        </a:effectStyle>
+        <a:effectStyle>
+          <a:effectLst/>
+        </a:effectStyle>
+        <a:effectStyle>
+          <a:effectLst>
+            <a:outerShdw blurRad="57150" dist="19050" dir="5400000" algn="ctr" rotWithShape="0">
+              <a:srgbClr val="000000">
+                <a:alpha val="63000"/>
+              </a:srgbClr>
+            </a:outerShdw>
+          </a:effectLst>
+        </a:effectStyle>
+      </a:effectStyleLst>
+      <a:bgFillStyleLst>
+        <a:solidFill>
+          <a:schemeClr val="phClr"/>
+        </a:solidFill>
+        <a:solidFill>
+          <a:schemeClr val="phClr">
+            <a:tint val="95000"/>
+            <a:satMod val="170000"/>
+          </a:schemeClr>
+        </a:solidFill>
+        <a:gradFill rotWithShape="1">
+          <a:gsLst>
+            <a:gs pos="0">
+              <a:schemeClr val="phClr">
+                <a:tint val="93000"/>
+                <a:satMod val="150000"/>
+                <a:shade val="98000"/>
+                <a:lumMod val="102000"/>
+              </a:schemeClr>
+            </a:gs>
+            <a:gs pos="50000">
+              <a:schemeClr val="phClr">
+                <a:tint val="98000"/>
+                <a:satMod val="130000"/>
+                <a:shade val="90000"/>
+                <a:lumMod val="103000"/>
+              </a:schemeClr>
+            </a:gs>
+            <a:gs pos="100000">
+              <a:schemeClr val="phClr">
+                <a:shade val="63000"/>
+                <a:satMod val="120000"/>
+              </a:schemeClr>
+            </a:gs>
+          </a:gsLst>
+          <a:lin ang="5400000" scaled="0"/>
+        </a:gradFill>
+      </a:bgFillStyleLst>
+    </a:fmtScheme>
+  </a:themeElements>
+  <a:objectDefaults/>
+  <a:extraClrSchemeLst/>
+  <a:extLst>
+    <a:ext uri="{05A4C25C-085E-4340-85A3-A5531E510DB2}">
+      <thm15:themeFamily xmlns:thm15="http://schemas.microsoft.com/office/thememl/2012/main" name="Office Theme" id="{62F939B6-93AF-4DB8-9C6B-D6C7DFDC589F}" vid="{4A3C46E8-61CC-4603-A589-7422A47A8E4A}"/>
+    </a:ext>
+  </a:extLst>
+</a:theme>
 </file>